--- a/Training/Github Training.pptx
+++ b/Training/Github Training.pptx
@@ -5,7 +5,7 @@
     <p:sldMasterId id="2147483648" r:id="rId4"/>
   </p:sldMasterIdLst>
   <p:notesMasterIdLst>
-    <p:notesMasterId r:id="rId39"/>
+    <p:notesMasterId r:id="rId40"/>
   </p:notesMasterIdLst>
   <p:sldIdLst>
     <p:sldId id="275" r:id="rId5"/>
@@ -14,34 +14,35 @@
     <p:sldId id="276" r:id="rId8"/>
     <p:sldId id="277" r:id="rId9"/>
     <p:sldId id="278" r:id="rId10"/>
-    <p:sldId id="279" r:id="rId11"/>
-    <p:sldId id="291" r:id="rId12"/>
-    <p:sldId id="280" r:id="rId13"/>
-    <p:sldId id="282" r:id="rId14"/>
-    <p:sldId id="283" r:id="rId15"/>
-    <p:sldId id="284" r:id="rId16"/>
-    <p:sldId id="285" r:id="rId17"/>
-    <p:sldId id="286" r:id="rId18"/>
-    <p:sldId id="289" r:id="rId19"/>
-    <p:sldId id="287" r:id="rId20"/>
-    <p:sldId id="302" r:id="rId21"/>
-    <p:sldId id="304" r:id="rId22"/>
-    <p:sldId id="305" r:id="rId23"/>
-    <p:sldId id="306" r:id="rId24"/>
-    <p:sldId id="290" r:id="rId25"/>
-    <p:sldId id="292" r:id="rId26"/>
-    <p:sldId id="293" r:id="rId27"/>
-    <p:sldId id="296" r:id="rId28"/>
-    <p:sldId id="295" r:id="rId29"/>
-    <p:sldId id="297" r:id="rId30"/>
-    <p:sldId id="298" r:id="rId31"/>
-    <p:sldId id="299" r:id="rId32"/>
-    <p:sldId id="303" r:id="rId33"/>
-    <p:sldId id="300" r:id="rId34"/>
-    <p:sldId id="301" r:id="rId35"/>
-    <p:sldId id="309" r:id="rId36"/>
-    <p:sldId id="307" r:id="rId37"/>
-    <p:sldId id="308" r:id="rId38"/>
+    <p:sldId id="310" r:id="rId11"/>
+    <p:sldId id="279" r:id="rId12"/>
+    <p:sldId id="291" r:id="rId13"/>
+    <p:sldId id="280" r:id="rId14"/>
+    <p:sldId id="282" r:id="rId15"/>
+    <p:sldId id="283" r:id="rId16"/>
+    <p:sldId id="284" r:id="rId17"/>
+    <p:sldId id="285" r:id="rId18"/>
+    <p:sldId id="286" r:id="rId19"/>
+    <p:sldId id="289" r:id="rId20"/>
+    <p:sldId id="287" r:id="rId21"/>
+    <p:sldId id="302" r:id="rId22"/>
+    <p:sldId id="304" r:id="rId23"/>
+    <p:sldId id="305" r:id="rId24"/>
+    <p:sldId id="306" r:id="rId25"/>
+    <p:sldId id="290" r:id="rId26"/>
+    <p:sldId id="292" r:id="rId27"/>
+    <p:sldId id="293" r:id="rId28"/>
+    <p:sldId id="296" r:id="rId29"/>
+    <p:sldId id="295" r:id="rId30"/>
+    <p:sldId id="297" r:id="rId31"/>
+    <p:sldId id="298" r:id="rId32"/>
+    <p:sldId id="299" r:id="rId33"/>
+    <p:sldId id="303" r:id="rId34"/>
+    <p:sldId id="300" r:id="rId35"/>
+    <p:sldId id="301" r:id="rId36"/>
+    <p:sldId id="309" r:id="rId37"/>
+    <p:sldId id="307" r:id="rId38"/>
+    <p:sldId id="308" r:id="rId39"/>
   </p:sldIdLst>
   <p:sldSz cx="12192000" cy="6858000"/>
   <p:notesSz cx="6858000" cy="9144000"/>
@@ -11414,10 +11415,10 @@
       </p:grpSpPr>
       <p:sp>
         <p:nvSpPr>
-          <p:cNvPr id="2" name="Title 1">
-            <a:extLst>
-              <a:ext uri="{FF2B5EF4-FFF2-40B4-BE49-F238E27FC236}">
-                <a16:creationId xmlns:a16="http://schemas.microsoft.com/office/drawing/2014/main" id="{174918DD-3FB4-ECF1-7474-46B34CAE7FD5}"/>
+          <p:cNvPr id="5" name="Slide Number Placeholder 4">
+            <a:extLst>
+              <a:ext uri="{FF2B5EF4-FFF2-40B4-BE49-F238E27FC236}">
+                <a16:creationId xmlns:a16="http://schemas.microsoft.com/office/drawing/2014/main" id="{A6521F9B-D9FC-06E8-07A8-52FCF507297F}"/>
               </a:ext>
             </a:extLst>
           </p:cNvPr>
@@ -11425,30 +11426,286 @@
             <a:spLocks noGrp="1"/>
           </p:cNvSpPr>
           <p:nvPr>
-            <p:ph type="ctrTitle"/>
+            <p:ph type="sldNum" sz="quarter" idx="12"/>
           </p:nvPr>
         </p:nvSpPr>
-        <p:spPr>
-          <a:xfrm>
-            <a:off x="758704" y="2427434"/>
-            <a:ext cx="6439776" cy="830997"/>
-          </a:xfrm>
-        </p:spPr>
+        <p:spPr/>
         <p:txBody>
           <a:bodyPr/>
           <a:lstStyle/>
           <a:p>
-            <a:r>
+            <a:fld id="{CC057153-B650-4DEB-B370-79DDCFDCE934}" type="slidenum">
+              <a:rPr lang="en-US" dirty="0"/>
+              <a:pPr/>
+              <a:t>10</a:t>
+            </a:fld>
+            <a:endParaRPr lang="en-GB"/>
+          </a:p>
+        </p:txBody>
+      </p:sp>
+      <p:sp>
+        <p:nvSpPr>
+          <p:cNvPr id="2" name="Title 1">
+            <a:extLst>
+              <a:ext uri="{FF2B5EF4-FFF2-40B4-BE49-F238E27FC236}">
+                <a16:creationId xmlns:a16="http://schemas.microsoft.com/office/drawing/2014/main" id="{10F11F58-1B02-2B5E-16AB-F41892BB3093}"/>
+              </a:ext>
+            </a:extLst>
+          </p:cNvPr>
+          <p:cNvSpPr>
+            <a:spLocks noGrp="1"/>
+          </p:cNvSpPr>
+          <p:nvPr>
+            <p:ph type="title"/>
+          </p:nvPr>
+        </p:nvSpPr>
+        <p:spPr>
+          <a:xfrm>
+            <a:off x="685800" y="516588"/>
+            <a:ext cx="3436838" cy="498598"/>
+          </a:xfrm>
+        </p:spPr>
+        <p:txBody>
+          <a:bodyPr>
+            <a:normAutofit/>
+          </a:bodyPr>
+          <a:lstStyle/>
+          <a:p>
+            <a:r>
+              <a:rPr lang="en-GB" sz="3200" b="1" u="sng" dirty="0"/>
+              <a:t>Exercise Checkpoint 1 </a:t>
+            </a:r>
+          </a:p>
+        </p:txBody>
+      </p:sp>
+      <p:sp>
+        <p:nvSpPr>
+          <p:cNvPr id="3" name="Subtitle 2">
+            <a:extLst>
+              <a:ext uri="{FF2B5EF4-FFF2-40B4-BE49-F238E27FC236}">
+                <a16:creationId xmlns:a16="http://schemas.microsoft.com/office/drawing/2014/main" id="{A19A6EDB-FD47-0120-E2F7-AE5FAB5706B3}"/>
+              </a:ext>
+            </a:extLst>
+          </p:cNvPr>
+          <p:cNvSpPr>
+            <a:spLocks noGrp="1"/>
+          </p:cNvSpPr>
+          <p:nvPr>
+            <p:ph type="body" sz="quarter" idx="14"/>
+          </p:nvPr>
+        </p:nvSpPr>
+        <p:spPr/>
+        <p:txBody>
+          <a:bodyPr vert="horz" lIns="91440" tIns="45720" rIns="91440" bIns="45720" rtlCol="0" anchor="t">
+            <a:normAutofit fontScale="32500" lnSpcReduction="20000"/>
+          </a:bodyPr>
+          <a:lstStyle/>
+          <a:p>
+            <a:pPr lvl="1"/>
+            <a:br>
               <a:rPr lang="en-GB" dirty="0"/>
-              <a:t>Key Git Concepts</a:t>
-            </a:r>
+            </a:br>
+            <a:endParaRPr lang="en-GB" dirty="0"/>
+          </a:p>
+          <a:p>
+            <a:pPr marL="285750" indent="-285750">
+              <a:buChar char="•"/>
+            </a:pPr>
+            <a:endParaRPr lang="en-GB" dirty="0"/>
+          </a:p>
+          <a:p>
+            <a:pPr marL="514350" lvl="1" indent="-285750">
+              <a:buFont typeface="Courier New" panose="020B0604020202020204" pitchFamily="34" charset="0"/>
+              <a:buChar char="o"/>
+            </a:pPr>
+            <a:endParaRPr lang="en-GB" dirty="0"/>
+          </a:p>
+          <a:p>
+            <a:pPr marL="285750" indent="-285750">
+              <a:buFont typeface="Arial" panose="020B0604020202020204" pitchFamily="34" charset="0"/>
+              <a:buChar char="•"/>
+            </a:pPr>
+            <a:endParaRPr lang="en-GB" dirty="0"/>
+          </a:p>
+        </p:txBody>
+      </p:sp>
+      <p:sp>
+        <p:nvSpPr>
+          <p:cNvPr id="8" name="TextBox 7">
+            <a:extLst>
+              <a:ext uri="{FF2B5EF4-FFF2-40B4-BE49-F238E27FC236}">
+                <a16:creationId xmlns:a16="http://schemas.microsoft.com/office/drawing/2014/main" id="{6D1779D3-41A0-4920-B5C8-8AA53282B9B8}"/>
+              </a:ext>
+            </a:extLst>
+          </p:cNvPr>
+          <p:cNvSpPr txBox="1"/>
+          <p:nvPr/>
+        </p:nvSpPr>
+        <p:spPr>
+          <a:xfrm>
+            <a:off x="609600" y="1611755"/>
+            <a:ext cx="5689600" cy="3139321"/>
+          </a:xfrm>
+          <a:prstGeom prst="rect">
+            <a:avLst/>
+          </a:prstGeom>
+          <a:noFill/>
+        </p:spPr>
+        <p:txBody>
+          <a:bodyPr wrap="square" rtlCol="0">
+            <a:spAutoFit/>
+          </a:bodyPr>
+          <a:lstStyle/>
+          <a:p>
+            <a:pPr marL="285750" indent="-285750">
+              <a:buFont typeface="Arial" panose="020B0604020202020204" pitchFamily="34" charset="0"/>
+              <a:buChar char="•"/>
+            </a:pPr>
+            <a:r>
+              <a:rPr lang="en-GB" b="1" dirty="0">
+                <a:solidFill>
+                  <a:schemeClr val="bg1"/>
+                </a:solidFill>
+              </a:rPr>
+              <a:t>Navigate through </a:t>
+            </a:r>
+            <a:r>
+              <a:rPr lang="en-GB" b="1" dirty="0" err="1">
+                <a:solidFill>
+                  <a:schemeClr val="bg1"/>
+                </a:solidFill>
+              </a:rPr>
+              <a:t>Github</a:t>
+            </a:r>
+            <a:r>
+              <a:rPr lang="en-GB" b="1" dirty="0">
+                <a:solidFill>
+                  <a:schemeClr val="bg1"/>
+                </a:solidFill>
+              </a:rPr>
+              <a:t> to find the training repo and your dedicated workspace. </a:t>
+            </a:r>
+          </a:p>
+          <a:p>
+            <a:endParaRPr lang="en-GB" b="1" dirty="0">
+              <a:solidFill>
+                <a:schemeClr val="bg1"/>
+              </a:solidFill>
+            </a:endParaRPr>
+          </a:p>
+          <a:p>
+            <a:pPr marL="800100" lvl="1" indent="-342900">
+              <a:buFont typeface="+mj-lt"/>
+              <a:buAutoNum type="arabicPeriod"/>
+            </a:pPr>
+            <a:r>
+              <a:rPr lang="en-GB" dirty="0">
+                <a:solidFill>
+                  <a:schemeClr val="bg1"/>
+                </a:solidFill>
+              </a:rPr>
+              <a:t>Sign into </a:t>
+            </a:r>
+            <a:r>
+              <a:rPr lang="en-GB" dirty="0" err="1">
+                <a:solidFill>
+                  <a:schemeClr val="bg1"/>
+                </a:solidFill>
+              </a:rPr>
+              <a:t>Github</a:t>
+            </a:r>
+            <a:r>
+              <a:rPr lang="en-GB" dirty="0">
+                <a:solidFill>
+                  <a:schemeClr val="bg1"/>
+                </a:solidFill>
+              </a:rPr>
+              <a:t> with your account (you may be asked to authenticate via Microsoft Authenticator). </a:t>
+            </a:r>
+          </a:p>
+          <a:p>
+            <a:pPr marL="800100" lvl="1" indent="-342900">
+              <a:buFont typeface="+mj-lt"/>
+              <a:buAutoNum type="arabicPeriod"/>
+            </a:pPr>
+            <a:r>
+              <a:rPr lang="en-GB" dirty="0">
+                <a:solidFill>
+                  <a:schemeClr val="bg1"/>
+                </a:solidFill>
+              </a:rPr>
+              <a:t>Search for the following repository in ABUHB’s main page: </a:t>
+            </a:r>
+            <a:r>
+              <a:rPr lang="en-GB" b="1" i="0" u="none" strike="noStrike" dirty="0" err="1">
+                <a:solidFill>
+                  <a:srgbClr val="1F2328"/>
+                </a:solidFill>
+                <a:effectLst/>
+                <a:latin typeface="Mona Sans VF"/>
+                <a:hlinkClick r:id="rId2"/>
+              </a:rPr>
+              <a:t>biu_GitHub_Training</a:t>
+            </a:r>
+            <a:endParaRPr lang="en-GB" b="1" i="0" u="none" strike="noStrike" dirty="0">
+              <a:solidFill>
+                <a:schemeClr val="bg1"/>
+              </a:solidFill>
+              <a:effectLst/>
+              <a:latin typeface="Mona Sans VF"/>
+            </a:endParaRPr>
+          </a:p>
+          <a:p>
+            <a:pPr marL="800100" lvl="1" indent="-342900">
+              <a:buFont typeface="+mj-lt"/>
+              <a:buAutoNum type="arabicPeriod"/>
+            </a:pPr>
+            <a:r>
+              <a:rPr lang="en-GB" dirty="0">
+                <a:solidFill>
+                  <a:schemeClr val="bg1"/>
+                </a:solidFill>
+                <a:latin typeface="Mona Sans VF"/>
+              </a:rPr>
+              <a:t>Open the participants folder and find your folder named </a:t>
+            </a:r>
+            <a:r>
+              <a:rPr lang="en-GB" dirty="0" err="1">
+                <a:solidFill>
+                  <a:schemeClr val="bg1"/>
+                </a:solidFill>
+                <a:latin typeface="Mona Sans VF"/>
+              </a:rPr>
+              <a:t>firstname-lastname</a:t>
+            </a:r>
+            <a:r>
+              <a:rPr lang="en-GB" dirty="0">
+                <a:solidFill>
+                  <a:schemeClr val="bg1"/>
+                </a:solidFill>
+                <a:latin typeface="Mona Sans VF"/>
+              </a:rPr>
+              <a:t>. </a:t>
+            </a:r>
+          </a:p>
+          <a:p>
+            <a:pPr marL="800100" lvl="1" indent="-342900">
+              <a:buFont typeface="+mj-lt"/>
+              <a:buAutoNum type="arabicPeriod"/>
+            </a:pPr>
+            <a:endParaRPr lang="en-GB" dirty="0">
+              <a:solidFill>
+                <a:schemeClr val="bg1"/>
+              </a:solidFill>
+              <a:latin typeface="Mona Sans VF"/>
+            </a:endParaRPr>
           </a:p>
         </p:txBody>
       </p:sp>
     </p:spTree>
     <p:extLst>
       <p:ext uri="{BB962C8B-B14F-4D97-AF65-F5344CB8AC3E}">
-        <p14:creationId xmlns:p14="http://schemas.microsoft.com/office/powerpoint/2010/main" val="321014690"/>
+        <p14:creationId xmlns:p14="http://schemas.microsoft.com/office/powerpoint/2010/main" val="3802757967"/>
       </p:ext>
     </p:extLst>
   </p:cSld>
@@ -11480,6 +11737,69 @@
           <p:cNvPr id="2" name="Title 1">
             <a:extLst>
               <a:ext uri="{FF2B5EF4-FFF2-40B4-BE49-F238E27FC236}">
+                <a16:creationId xmlns:a16="http://schemas.microsoft.com/office/drawing/2014/main" id="{174918DD-3FB4-ECF1-7474-46B34CAE7FD5}"/>
+              </a:ext>
+            </a:extLst>
+          </p:cNvPr>
+          <p:cNvSpPr>
+            <a:spLocks noGrp="1"/>
+          </p:cNvSpPr>
+          <p:nvPr>
+            <p:ph type="ctrTitle"/>
+          </p:nvPr>
+        </p:nvSpPr>
+        <p:spPr>
+          <a:xfrm>
+            <a:off x="758704" y="2427434"/>
+            <a:ext cx="6439776" cy="830997"/>
+          </a:xfrm>
+        </p:spPr>
+        <p:txBody>
+          <a:bodyPr/>
+          <a:lstStyle/>
+          <a:p>
+            <a:r>
+              <a:rPr lang="en-GB" dirty="0"/>
+              <a:t>Key Git Concepts</a:t>
+            </a:r>
+          </a:p>
+        </p:txBody>
+      </p:sp>
+    </p:spTree>
+    <p:extLst>
+      <p:ext uri="{BB962C8B-B14F-4D97-AF65-F5344CB8AC3E}">
+        <p14:creationId xmlns:p14="http://schemas.microsoft.com/office/powerpoint/2010/main" val="321014690"/>
+      </p:ext>
+    </p:extLst>
+  </p:cSld>
+  <p:clrMapOvr>
+    <a:masterClrMapping/>
+  </p:clrMapOvr>
+</p:sld>
+</file>
+
+<file path=ppt/slides/slide12.xml><?xml version="1.0" encoding="utf-8"?>
+<p:sld xmlns:a="http://schemas.openxmlformats.org/drawingml/2006/main" xmlns:r="http://schemas.openxmlformats.org/officeDocument/2006/relationships" xmlns:p="http://schemas.openxmlformats.org/presentationml/2006/main">
+  <p:cSld>
+    <p:spTree>
+      <p:nvGrpSpPr>
+        <p:cNvPr id="1" name=""/>
+        <p:cNvGrpSpPr/>
+        <p:nvPr/>
+      </p:nvGrpSpPr>
+      <p:grpSpPr>
+        <a:xfrm>
+          <a:off x="0" y="0"/>
+          <a:ext cx="0" cy="0"/>
+          <a:chOff x="0" y="0"/>
+          <a:chExt cx="0" cy="0"/>
+        </a:xfrm>
+      </p:grpSpPr>
+      <p:sp>
+        <p:nvSpPr>
+          <p:cNvPr id="2" name="Title 1">
+            <a:extLst>
+              <a:ext uri="{FF2B5EF4-FFF2-40B4-BE49-F238E27FC236}">
                 <a16:creationId xmlns:a16="http://schemas.microsoft.com/office/drawing/2014/main" id="{10F11F58-1B02-2B5E-16AB-F41892BB3093}"/>
               </a:ext>
             </a:extLst>
@@ -11590,7 +11910,7 @@
             <a:fld id="{CC057153-B650-4DEB-B370-79DDCFDCE934}" type="slidenum">
               <a:rPr lang="en-US" dirty="0"/>
               <a:pPr/>
-              <a:t>11</a:t>
+              <a:t>12</a:t>
             </a:fld>
             <a:endParaRPr lang="en-GB"/>
           </a:p>
@@ -11869,7 +12189,7 @@
 </p:sld>
 </file>
 
-<file path=ppt/slides/slide12.xml><?xml version="1.0" encoding="utf-8"?>
+<file path=ppt/slides/slide13.xml><?xml version="1.0" encoding="utf-8"?>
 <p:sld xmlns:a="http://schemas.openxmlformats.org/drawingml/2006/main" xmlns:r="http://schemas.openxmlformats.org/officeDocument/2006/relationships" xmlns:p="http://schemas.openxmlformats.org/presentationml/2006/main">
   <p:cSld>
     <p:spTree>
@@ -12001,7 +12321,7 @@
             <a:fld id="{CC057153-B650-4DEB-B370-79DDCFDCE934}" type="slidenum">
               <a:rPr lang="en-US" dirty="0"/>
               <a:pPr/>
-              <a:t>12</a:t>
+              <a:t>13</a:t>
             </a:fld>
             <a:endParaRPr lang="en-GB"/>
           </a:p>
@@ -12252,7 +12572,7 @@
 </p:sld>
 </file>
 
-<file path=ppt/slides/slide13.xml><?xml version="1.0" encoding="utf-8"?>
+<file path=ppt/slides/slide14.xml><?xml version="1.0" encoding="utf-8"?>
 <p:sld xmlns:a="http://schemas.openxmlformats.org/drawingml/2006/main" xmlns:r="http://schemas.openxmlformats.org/officeDocument/2006/relationships" xmlns:p="http://schemas.openxmlformats.org/presentationml/2006/main">
   <p:cSld>
     <p:spTree>
@@ -12328,7 +12648,7 @@
             <a:fld id="{CC057153-B650-4DEB-B370-79DDCFDCE934}" type="slidenum">
               <a:rPr lang="en-US" dirty="0"/>
               <a:pPr/>
-              <a:t>13</a:t>
+              <a:t>14</a:t>
             </a:fld>
             <a:endParaRPr lang="en-GB"/>
           </a:p>
@@ -14286,148 +14606,6 @@
 </p:sld>
 </file>
 
-<file path=ppt/slides/slide14.xml><?xml version="1.0" encoding="utf-8"?>
-<p:sld xmlns:a="http://schemas.openxmlformats.org/drawingml/2006/main" xmlns:r="http://schemas.openxmlformats.org/officeDocument/2006/relationships" xmlns:p="http://schemas.openxmlformats.org/presentationml/2006/main">
-  <p:cSld>
-    <p:spTree>
-      <p:nvGrpSpPr>
-        <p:cNvPr id="1" name=""/>
-        <p:cNvGrpSpPr/>
-        <p:nvPr/>
-      </p:nvGrpSpPr>
-      <p:grpSpPr>
-        <a:xfrm>
-          <a:off x="0" y="0"/>
-          <a:ext cx="0" cy="0"/>
-          <a:chOff x="0" y="0"/>
-          <a:chExt cx="0" cy="0"/>
-        </a:xfrm>
-      </p:grpSpPr>
-      <p:sp>
-        <p:nvSpPr>
-          <p:cNvPr id="2" name="Title 1">
-            <a:extLst>
-              <a:ext uri="{FF2B5EF4-FFF2-40B4-BE49-F238E27FC236}">
-                <a16:creationId xmlns:a16="http://schemas.microsoft.com/office/drawing/2014/main" id="{10F11F58-1B02-2B5E-16AB-F41892BB3093}"/>
-              </a:ext>
-            </a:extLst>
-          </p:cNvPr>
-          <p:cNvSpPr>
-            <a:spLocks noGrp="1"/>
-          </p:cNvSpPr>
-          <p:nvPr>
-            <p:ph type="title"/>
-          </p:nvPr>
-        </p:nvSpPr>
-        <p:spPr>
-          <a:xfrm>
-            <a:off x="309146" y="332495"/>
-            <a:ext cx="8343789" cy="636062"/>
-          </a:xfrm>
-        </p:spPr>
-        <p:txBody>
-          <a:bodyPr>
-            <a:normAutofit/>
-          </a:bodyPr>
-          <a:lstStyle/>
-          <a:p>
-            <a:r>
-              <a:rPr lang="en-GB" sz="3200" b="1" u="sng" dirty="0"/>
-              <a:t>How Git Stores Your Work</a:t>
-            </a:r>
-          </a:p>
-        </p:txBody>
-      </p:sp>
-      <p:sp>
-        <p:nvSpPr>
-          <p:cNvPr id="5" name="Slide Number Placeholder 4">
-            <a:extLst>
-              <a:ext uri="{FF2B5EF4-FFF2-40B4-BE49-F238E27FC236}">
-                <a16:creationId xmlns:a16="http://schemas.microsoft.com/office/drawing/2014/main" id="{A6521F9B-D9FC-06E8-07A8-52FCF507297F}"/>
-              </a:ext>
-            </a:extLst>
-          </p:cNvPr>
-          <p:cNvSpPr>
-            <a:spLocks noGrp="1"/>
-          </p:cNvSpPr>
-          <p:nvPr>
-            <p:ph type="sldNum" sz="quarter" idx="12"/>
-          </p:nvPr>
-        </p:nvSpPr>
-        <p:spPr/>
-        <p:txBody>
-          <a:bodyPr/>
-          <a:lstStyle/>
-          <a:p>
-            <a:fld id="{CC057153-B650-4DEB-B370-79DDCFDCE934}" type="slidenum">
-              <a:rPr lang="en-US" dirty="0"/>
-              <a:pPr/>
-              <a:t>14</a:t>
-            </a:fld>
-            <a:endParaRPr lang="en-GB"/>
-          </a:p>
-        </p:txBody>
-      </p:sp>
-      <p:pic>
-        <p:nvPicPr>
-          <p:cNvPr id="3076" name="Picture 4" descr="Git Branches System Flowchart | Flowchart Template">
-            <a:extLst>
-              <a:ext uri="{FF2B5EF4-FFF2-40B4-BE49-F238E27FC236}">
-                <a16:creationId xmlns:a16="http://schemas.microsoft.com/office/drawing/2014/main" id="{DC5F6D7C-7DDF-47FF-BFA6-099412BBF6C2}"/>
-              </a:ext>
-            </a:extLst>
-          </p:cNvPr>
-          <p:cNvPicPr>
-            <a:picLocks noChangeAspect="1" noChangeArrowheads="1"/>
-          </p:cNvPicPr>
-          <p:nvPr/>
-        </p:nvPicPr>
-        <p:blipFill>
-          <a:blip r:embed="rId2">
-            <a:extLst>
-              <a:ext uri="{28A0092B-C50C-407E-A947-70E740481C1C}">
-                <a14:useLocalDpi xmlns:a14="http://schemas.microsoft.com/office/drawing/2010/main" val="0"/>
-              </a:ext>
-            </a:extLst>
-          </a:blip>
-          <a:srcRect/>
-          <a:stretch>
-            <a:fillRect/>
-          </a:stretch>
-        </p:blipFill>
-        <p:spPr bwMode="auto">
-          <a:xfrm>
-            <a:off x="2760663" y="1305401"/>
-            <a:ext cx="5765269" cy="4465836"/>
-          </a:xfrm>
-          <a:prstGeom prst="rect">
-            <a:avLst/>
-          </a:prstGeom>
-          <a:noFill/>
-          <a:extLst>
-            <a:ext uri="{909E8E84-426E-40DD-AFC4-6F175D3DCCD1}">
-              <a14:hiddenFill xmlns:a14="http://schemas.microsoft.com/office/drawing/2010/main">
-                <a:solidFill>
-                  <a:srgbClr val="FFFFFF"/>
-                </a:solidFill>
-              </a14:hiddenFill>
-            </a:ext>
-          </a:extLst>
-        </p:spPr>
-      </p:pic>
-    </p:spTree>
-    <p:extLst>
-      <p:ext uri="{BB962C8B-B14F-4D97-AF65-F5344CB8AC3E}">
-        <p14:creationId xmlns:p14="http://schemas.microsoft.com/office/powerpoint/2010/main" val="221959756"/>
-      </p:ext>
-    </p:extLst>
-  </p:cSld>
-  <p:clrMapOvr>
-    <a:masterClrMapping/>
-  </p:clrMapOvr>
-</p:sld>
-</file>
-
 <file path=ppt/slides/slide15.xml><?xml version="1.0" encoding="utf-8"?>
 <p:sld xmlns:a="http://schemas.openxmlformats.org/drawingml/2006/main" xmlns:r="http://schemas.openxmlformats.org/officeDocument/2006/relationships" xmlns:p="http://schemas.openxmlformats.org/presentationml/2006/main">
   <p:cSld>
@@ -14463,7 +14641,7 @@
         </p:nvSpPr>
         <p:spPr>
           <a:xfrm>
-            <a:off x="520911" y="427020"/>
+            <a:off x="309146" y="332495"/>
             <a:ext cx="8343789" cy="636062"/>
           </a:xfrm>
         </p:spPr>
@@ -14475,17 +14653,8 @@
           <a:p>
             <a:r>
               <a:rPr lang="en-GB" sz="3200" b="1" u="sng" dirty="0"/>
-              <a:t>Standard </a:t>
-            </a:r>
-            <a:r>
-              <a:rPr lang="en-GB" sz="3200" b="1" u="sng" dirty="0" err="1"/>
-              <a:t>Github</a:t>
-            </a:r>
-            <a:r>
-              <a:rPr lang="en-GB" sz="3200" u="sng" dirty="0"/>
-              <a:t> Files</a:t>
-            </a:r>
-            <a:endParaRPr lang="en-GB" sz="3200" b="1" u="sng" dirty="0"/>
+              <a:t>How Git Stores Your Work</a:t>
+            </a:r>
           </a:p>
         </p:txBody>
       </p:sp>
@@ -14514,6 +14683,157 @@
               <a:rPr lang="en-US" dirty="0"/>
               <a:pPr/>
               <a:t>15</a:t>
+            </a:fld>
+            <a:endParaRPr lang="en-GB"/>
+          </a:p>
+        </p:txBody>
+      </p:sp>
+      <p:pic>
+        <p:nvPicPr>
+          <p:cNvPr id="3076" name="Picture 4" descr="Git Branches System Flowchart | Flowchart Template">
+            <a:extLst>
+              <a:ext uri="{FF2B5EF4-FFF2-40B4-BE49-F238E27FC236}">
+                <a16:creationId xmlns:a16="http://schemas.microsoft.com/office/drawing/2014/main" id="{DC5F6D7C-7DDF-47FF-BFA6-099412BBF6C2}"/>
+              </a:ext>
+            </a:extLst>
+          </p:cNvPr>
+          <p:cNvPicPr>
+            <a:picLocks noChangeAspect="1" noChangeArrowheads="1"/>
+          </p:cNvPicPr>
+          <p:nvPr/>
+        </p:nvPicPr>
+        <p:blipFill>
+          <a:blip r:embed="rId2">
+            <a:extLst>
+              <a:ext uri="{28A0092B-C50C-407E-A947-70E740481C1C}">
+                <a14:useLocalDpi xmlns:a14="http://schemas.microsoft.com/office/drawing/2010/main" val="0"/>
+              </a:ext>
+            </a:extLst>
+          </a:blip>
+          <a:srcRect/>
+          <a:stretch>
+            <a:fillRect/>
+          </a:stretch>
+        </p:blipFill>
+        <p:spPr bwMode="auto">
+          <a:xfrm>
+            <a:off x="2760663" y="1305401"/>
+            <a:ext cx="5765269" cy="4465836"/>
+          </a:xfrm>
+          <a:prstGeom prst="rect">
+            <a:avLst/>
+          </a:prstGeom>
+          <a:noFill/>
+          <a:extLst>
+            <a:ext uri="{909E8E84-426E-40DD-AFC4-6F175D3DCCD1}">
+              <a14:hiddenFill xmlns:a14="http://schemas.microsoft.com/office/drawing/2010/main">
+                <a:solidFill>
+                  <a:srgbClr val="FFFFFF"/>
+                </a:solidFill>
+              </a14:hiddenFill>
+            </a:ext>
+          </a:extLst>
+        </p:spPr>
+      </p:pic>
+    </p:spTree>
+    <p:extLst>
+      <p:ext uri="{BB962C8B-B14F-4D97-AF65-F5344CB8AC3E}">
+        <p14:creationId xmlns:p14="http://schemas.microsoft.com/office/powerpoint/2010/main" val="221959756"/>
+      </p:ext>
+    </p:extLst>
+  </p:cSld>
+  <p:clrMapOvr>
+    <a:masterClrMapping/>
+  </p:clrMapOvr>
+</p:sld>
+</file>
+
+<file path=ppt/slides/slide16.xml><?xml version="1.0" encoding="utf-8"?>
+<p:sld xmlns:a="http://schemas.openxmlformats.org/drawingml/2006/main" xmlns:r="http://schemas.openxmlformats.org/officeDocument/2006/relationships" xmlns:p="http://schemas.openxmlformats.org/presentationml/2006/main">
+  <p:cSld>
+    <p:spTree>
+      <p:nvGrpSpPr>
+        <p:cNvPr id="1" name=""/>
+        <p:cNvGrpSpPr/>
+        <p:nvPr/>
+      </p:nvGrpSpPr>
+      <p:grpSpPr>
+        <a:xfrm>
+          <a:off x="0" y="0"/>
+          <a:ext cx="0" cy="0"/>
+          <a:chOff x="0" y="0"/>
+          <a:chExt cx="0" cy="0"/>
+        </a:xfrm>
+      </p:grpSpPr>
+      <p:sp>
+        <p:nvSpPr>
+          <p:cNvPr id="2" name="Title 1">
+            <a:extLst>
+              <a:ext uri="{FF2B5EF4-FFF2-40B4-BE49-F238E27FC236}">
+                <a16:creationId xmlns:a16="http://schemas.microsoft.com/office/drawing/2014/main" id="{10F11F58-1B02-2B5E-16AB-F41892BB3093}"/>
+              </a:ext>
+            </a:extLst>
+          </p:cNvPr>
+          <p:cNvSpPr>
+            <a:spLocks noGrp="1"/>
+          </p:cNvSpPr>
+          <p:nvPr>
+            <p:ph type="title"/>
+          </p:nvPr>
+        </p:nvSpPr>
+        <p:spPr>
+          <a:xfrm>
+            <a:off x="520911" y="427020"/>
+            <a:ext cx="8343789" cy="636062"/>
+          </a:xfrm>
+        </p:spPr>
+        <p:txBody>
+          <a:bodyPr>
+            <a:normAutofit/>
+          </a:bodyPr>
+          <a:lstStyle/>
+          <a:p>
+            <a:r>
+              <a:rPr lang="en-GB" sz="3200" b="1" u="sng" dirty="0"/>
+              <a:t>Standard </a:t>
+            </a:r>
+            <a:r>
+              <a:rPr lang="en-GB" sz="3200" b="1" u="sng" dirty="0" err="1"/>
+              <a:t>Github</a:t>
+            </a:r>
+            <a:r>
+              <a:rPr lang="en-GB" sz="3200" u="sng" dirty="0"/>
+              <a:t> Files</a:t>
+            </a:r>
+            <a:endParaRPr lang="en-GB" sz="3200" b="1" u="sng" dirty="0"/>
+          </a:p>
+        </p:txBody>
+      </p:sp>
+      <p:sp>
+        <p:nvSpPr>
+          <p:cNvPr id="5" name="Slide Number Placeholder 4">
+            <a:extLst>
+              <a:ext uri="{FF2B5EF4-FFF2-40B4-BE49-F238E27FC236}">
+                <a16:creationId xmlns:a16="http://schemas.microsoft.com/office/drawing/2014/main" id="{A6521F9B-D9FC-06E8-07A8-52FCF507297F}"/>
+              </a:ext>
+            </a:extLst>
+          </p:cNvPr>
+          <p:cNvSpPr>
+            <a:spLocks noGrp="1"/>
+          </p:cNvSpPr>
+          <p:nvPr>
+            <p:ph type="sldNum" sz="quarter" idx="12"/>
+          </p:nvPr>
+        </p:nvSpPr>
+        <p:spPr/>
+        <p:txBody>
+          <a:bodyPr/>
+          <a:lstStyle/>
+          <a:p>
+            <a:fld id="{CC057153-B650-4DEB-B370-79DDCFDCE934}" type="slidenum">
+              <a:rPr lang="en-US" dirty="0"/>
+              <a:pPr/>
+              <a:t>16</a:t>
             </a:fld>
             <a:endParaRPr lang="en-GB"/>
           </a:p>
@@ -15031,295 +15351,6 @@
 </p:sld>
 </file>
 
-<file path=ppt/slides/slide16.xml><?xml version="1.0" encoding="utf-8"?>
-<p:sld xmlns:a="http://schemas.openxmlformats.org/drawingml/2006/main" xmlns:r="http://schemas.openxmlformats.org/officeDocument/2006/relationships" xmlns:p="http://schemas.openxmlformats.org/presentationml/2006/main">
-  <p:cSld>
-    <p:spTree>
-      <p:nvGrpSpPr>
-        <p:cNvPr id="1" name=""/>
-        <p:cNvGrpSpPr/>
-        <p:nvPr/>
-      </p:nvGrpSpPr>
-      <p:grpSpPr>
-        <a:xfrm>
-          <a:off x="0" y="0"/>
-          <a:ext cx="0" cy="0"/>
-          <a:chOff x="0" y="0"/>
-          <a:chExt cx="0" cy="0"/>
-        </a:xfrm>
-      </p:grpSpPr>
-      <p:sp>
-        <p:nvSpPr>
-          <p:cNvPr id="5" name="Slide Number Placeholder 4">
-            <a:extLst>
-              <a:ext uri="{FF2B5EF4-FFF2-40B4-BE49-F238E27FC236}">
-                <a16:creationId xmlns:a16="http://schemas.microsoft.com/office/drawing/2014/main" id="{A6521F9B-D9FC-06E8-07A8-52FCF507297F}"/>
-              </a:ext>
-            </a:extLst>
-          </p:cNvPr>
-          <p:cNvSpPr>
-            <a:spLocks noGrp="1"/>
-          </p:cNvSpPr>
-          <p:nvPr>
-            <p:ph type="sldNum" sz="quarter" idx="12"/>
-          </p:nvPr>
-        </p:nvSpPr>
-        <p:spPr/>
-        <p:txBody>
-          <a:bodyPr/>
-          <a:lstStyle/>
-          <a:p>
-            <a:fld id="{CC057153-B650-4DEB-B370-79DDCFDCE934}" type="slidenum">
-              <a:rPr lang="en-US" dirty="0"/>
-              <a:pPr/>
-              <a:t>16</a:t>
-            </a:fld>
-            <a:endParaRPr lang="en-GB"/>
-          </a:p>
-        </p:txBody>
-      </p:sp>
-      <p:sp>
-        <p:nvSpPr>
-          <p:cNvPr id="2" name="Title 1">
-            <a:extLst>
-              <a:ext uri="{FF2B5EF4-FFF2-40B4-BE49-F238E27FC236}">
-                <a16:creationId xmlns:a16="http://schemas.microsoft.com/office/drawing/2014/main" id="{10F11F58-1B02-2B5E-16AB-F41892BB3093}"/>
-              </a:ext>
-            </a:extLst>
-          </p:cNvPr>
-          <p:cNvSpPr>
-            <a:spLocks noGrp="1"/>
-          </p:cNvSpPr>
-          <p:nvPr>
-            <p:ph type="title"/>
-          </p:nvPr>
-        </p:nvSpPr>
-        <p:spPr>
-          <a:xfrm>
-            <a:off x="685800" y="516588"/>
-            <a:ext cx="3436838" cy="498598"/>
-          </a:xfrm>
-        </p:spPr>
-        <p:txBody>
-          <a:bodyPr>
-            <a:normAutofit/>
-          </a:bodyPr>
-          <a:lstStyle/>
-          <a:p>
-            <a:r>
-              <a:rPr lang="en-GB" sz="3200" b="1" u="sng" dirty="0"/>
-              <a:t>Exercise Checkpoint 2 </a:t>
-            </a:r>
-          </a:p>
-        </p:txBody>
-      </p:sp>
-      <p:sp>
-        <p:nvSpPr>
-          <p:cNvPr id="3" name="Subtitle 2">
-            <a:extLst>
-              <a:ext uri="{FF2B5EF4-FFF2-40B4-BE49-F238E27FC236}">
-                <a16:creationId xmlns:a16="http://schemas.microsoft.com/office/drawing/2014/main" id="{A19A6EDB-FD47-0120-E2F7-AE5FAB5706B3}"/>
-              </a:ext>
-            </a:extLst>
-          </p:cNvPr>
-          <p:cNvSpPr>
-            <a:spLocks noGrp="1"/>
-          </p:cNvSpPr>
-          <p:nvPr>
-            <p:ph type="body" sz="quarter" idx="14"/>
-          </p:nvPr>
-        </p:nvSpPr>
-        <p:spPr/>
-        <p:txBody>
-          <a:bodyPr vert="horz" lIns="91440" tIns="45720" rIns="91440" bIns="45720" rtlCol="0" anchor="t">
-            <a:normAutofit fontScale="32500" lnSpcReduction="20000"/>
-          </a:bodyPr>
-          <a:lstStyle/>
-          <a:p>
-            <a:pPr lvl="1"/>
-            <a:br>
-              <a:rPr lang="en-GB" dirty="0"/>
-            </a:br>
-            <a:endParaRPr lang="en-GB" dirty="0"/>
-          </a:p>
-          <a:p>
-            <a:pPr marL="285750" indent="-285750">
-              <a:buChar char="•"/>
-            </a:pPr>
-            <a:endParaRPr lang="en-GB" dirty="0"/>
-          </a:p>
-          <a:p>
-            <a:pPr marL="514350" lvl="1" indent="-285750">
-              <a:buFont typeface="Courier New" panose="020B0604020202020204" pitchFamily="34" charset="0"/>
-              <a:buChar char="o"/>
-            </a:pPr>
-            <a:endParaRPr lang="en-GB" dirty="0"/>
-          </a:p>
-          <a:p>
-            <a:pPr marL="285750" indent="-285750">
-              <a:buFont typeface="Arial" panose="020B0604020202020204" pitchFamily="34" charset="0"/>
-              <a:buChar char="•"/>
-            </a:pPr>
-            <a:endParaRPr lang="en-GB" dirty="0"/>
-          </a:p>
-        </p:txBody>
-      </p:sp>
-      <p:sp>
-        <p:nvSpPr>
-          <p:cNvPr id="8" name="TextBox 7">
-            <a:extLst>
-              <a:ext uri="{FF2B5EF4-FFF2-40B4-BE49-F238E27FC236}">
-                <a16:creationId xmlns:a16="http://schemas.microsoft.com/office/drawing/2014/main" id="{6D1779D3-41A0-4920-B5C8-8AA53282B9B8}"/>
-              </a:ext>
-            </a:extLst>
-          </p:cNvPr>
-          <p:cNvSpPr txBox="1"/>
-          <p:nvPr/>
-        </p:nvSpPr>
-        <p:spPr>
-          <a:xfrm>
-            <a:off x="609600" y="1611755"/>
-            <a:ext cx="5689600" cy="2862322"/>
-          </a:xfrm>
-          <a:prstGeom prst="rect">
-            <a:avLst/>
-          </a:prstGeom>
-          <a:noFill/>
-        </p:spPr>
-        <p:txBody>
-          <a:bodyPr wrap="square" rtlCol="0">
-            <a:spAutoFit/>
-          </a:bodyPr>
-          <a:lstStyle/>
-          <a:p>
-            <a:pPr marL="285750" indent="-285750">
-              <a:buFont typeface="Arial" panose="020B0604020202020204" pitchFamily="34" charset="0"/>
-              <a:buChar char="•"/>
-            </a:pPr>
-            <a:r>
-              <a:rPr lang="en-GB" b="1" dirty="0">
-                <a:solidFill>
-                  <a:schemeClr val="bg1"/>
-                </a:solidFill>
-              </a:rPr>
-              <a:t>Create your feature branch and fill in your README.</a:t>
-            </a:r>
-          </a:p>
-          <a:p>
-            <a:endParaRPr lang="en-GB" b="1" dirty="0">
-              <a:solidFill>
-                <a:schemeClr val="bg1"/>
-              </a:solidFill>
-            </a:endParaRPr>
-          </a:p>
-          <a:p>
-            <a:pPr marL="800100" lvl="1" indent="-342900">
-              <a:buFont typeface="+mj-lt"/>
-              <a:buAutoNum type="arabicPeriod"/>
-            </a:pPr>
-            <a:r>
-              <a:rPr lang="en-GB" dirty="0">
-                <a:solidFill>
-                  <a:schemeClr val="bg1"/>
-                </a:solidFill>
-              </a:rPr>
-              <a:t>In </a:t>
-            </a:r>
-            <a:r>
-              <a:rPr lang="en-GB" dirty="0" err="1">
-                <a:solidFill>
-                  <a:schemeClr val="bg1"/>
-                </a:solidFill>
-              </a:rPr>
-              <a:t>Github</a:t>
-            </a:r>
-            <a:r>
-              <a:rPr lang="en-GB" dirty="0">
-                <a:solidFill>
-                  <a:schemeClr val="bg1"/>
-                </a:solidFill>
-              </a:rPr>
-              <a:t>, create your own feature branch. </a:t>
-            </a:r>
-          </a:p>
-          <a:p>
-            <a:pPr marL="800100" lvl="1" indent="-342900">
-              <a:buFont typeface="+mj-lt"/>
-              <a:buAutoNum type="arabicPeriod"/>
-            </a:pPr>
-            <a:r>
-              <a:rPr lang="en-GB" dirty="0">
-                <a:solidFill>
-                  <a:schemeClr val="bg1"/>
-                </a:solidFill>
-                <a:latin typeface="Mona Sans VF"/>
-              </a:rPr>
-              <a:t>Open your README in your participant folder and fill this in. </a:t>
-            </a:r>
-          </a:p>
-          <a:p>
-            <a:pPr marL="800100" lvl="1" indent="-342900">
-              <a:buFont typeface="+mj-lt"/>
-              <a:buAutoNum type="arabicPeriod"/>
-            </a:pPr>
-            <a:r>
-              <a:rPr lang="en-GB" dirty="0">
-                <a:solidFill>
-                  <a:schemeClr val="bg1"/>
-                </a:solidFill>
-                <a:latin typeface="Mona Sans VF"/>
-              </a:rPr>
-              <a:t>Stage and commit this with the message: Fill in my area README.</a:t>
-            </a:r>
-          </a:p>
-          <a:p>
-            <a:pPr marL="800100" lvl="1" indent="-342900">
-              <a:buFont typeface="+mj-lt"/>
-              <a:buAutoNum type="arabicPeriod"/>
-            </a:pPr>
-            <a:endParaRPr lang="en-GB" dirty="0">
-              <a:solidFill>
-                <a:schemeClr val="bg1"/>
-              </a:solidFill>
-              <a:latin typeface="Mona Sans VF"/>
-            </a:endParaRPr>
-          </a:p>
-          <a:p>
-            <a:pPr marL="800100" lvl="1" indent="-342900">
-              <a:buFont typeface="+mj-lt"/>
-              <a:buAutoNum type="arabicPeriod"/>
-            </a:pPr>
-            <a:endParaRPr lang="en-GB" dirty="0">
-              <a:solidFill>
-                <a:schemeClr val="bg1"/>
-              </a:solidFill>
-              <a:latin typeface="Mona Sans VF"/>
-            </a:endParaRPr>
-          </a:p>
-          <a:p>
-            <a:pPr lvl="1"/>
-            <a:endParaRPr lang="en-GB" dirty="0">
-              <a:solidFill>
-                <a:schemeClr val="bg1"/>
-              </a:solidFill>
-              <a:latin typeface="Mona Sans VF"/>
-            </a:endParaRPr>
-          </a:p>
-        </p:txBody>
-      </p:sp>
-    </p:spTree>
-    <p:extLst>
-      <p:ext uri="{BB962C8B-B14F-4D97-AF65-F5344CB8AC3E}">
-        <p14:creationId xmlns:p14="http://schemas.microsoft.com/office/powerpoint/2010/main" val="768163449"/>
-      </p:ext>
-    </p:extLst>
-  </p:cSld>
-  <p:clrMapOvr>
-    <a:masterClrMapping/>
-  </p:clrMapOvr>
-</p:sld>
-</file>
-
 <file path=ppt/slides/slide17.xml><?xml version="1.0" encoding="utf-8"?>
 <p:sld xmlns:a="http://schemas.openxmlformats.org/drawingml/2006/main" xmlns:r="http://schemas.openxmlformats.org/officeDocument/2006/relationships" xmlns:p="http://schemas.openxmlformats.org/presentationml/2006/main">
   <p:cSld>
@@ -15339,10 +15370,10 @@
       </p:grpSpPr>
       <p:sp>
         <p:nvSpPr>
-          <p:cNvPr id="2" name="Title 1">
-            <a:extLst>
-              <a:ext uri="{FF2B5EF4-FFF2-40B4-BE49-F238E27FC236}">
-                <a16:creationId xmlns:a16="http://schemas.microsoft.com/office/drawing/2014/main" id="{174918DD-3FB4-ECF1-7474-46B34CAE7FD5}"/>
+          <p:cNvPr id="5" name="Slide Number Placeholder 4">
+            <a:extLst>
+              <a:ext uri="{FF2B5EF4-FFF2-40B4-BE49-F238E27FC236}">
+                <a16:creationId xmlns:a16="http://schemas.microsoft.com/office/drawing/2014/main" id="{A6521F9B-D9FC-06E8-07A8-52FCF507297F}"/>
               </a:ext>
             </a:extLst>
           </p:cNvPr>
@@ -15350,30 +15381,256 @@
             <a:spLocks noGrp="1"/>
           </p:cNvSpPr>
           <p:nvPr>
-            <p:ph type="ctrTitle"/>
+            <p:ph type="sldNum" sz="quarter" idx="12"/>
           </p:nvPr>
         </p:nvSpPr>
-        <p:spPr>
-          <a:xfrm>
-            <a:off x="758703" y="2427434"/>
-            <a:ext cx="10007063" cy="830997"/>
-          </a:xfrm>
-        </p:spPr>
+        <p:spPr/>
         <p:txBody>
           <a:bodyPr/>
           <a:lstStyle/>
           <a:p>
-            <a:r>
+            <a:fld id="{CC057153-B650-4DEB-B370-79DDCFDCE934}" type="slidenum">
+              <a:rPr lang="en-US" dirty="0"/>
+              <a:pPr/>
+              <a:t>17</a:t>
+            </a:fld>
+            <a:endParaRPr lang="en-GB"/>
+          </a:p>
+        </p:txBody>
+      </p:sp>
+      <p:sp>
+        <p:nvSpPr>
+          <p:cNvPr id="2" name="Title 1">
+            <a:extLst>
+              <a:ext uri="{FF2B5EF4-FFF2-40B4-BE49-F238E27FC236}">
+                <a16:creationId xmlns:a16="http://schemas.microsoft.com/office/drawing/2014/main" id="{10F11F58-1B02-2B5E-16AB-F41892BB3093}"/>
+              </a:ext>
+            </a:extLst>
+          </p:cNvPr>
+          <p:cNvSpPr>
+            <a:spLocks noGrp="1"/>
+          </p:cNvSpPr>
+          <p:nvPr>
+            <p:ph type="title"/>
+          </p:nvPr>
+        </p:nvSpPr>
+        <p:spPr>
+          <a:xfrm>
+            <a:off x="685800" y="516588"/>
+            <a:ext cx="3436838" cy="498598"/>
+          </a:xfrm>
+        </p:spPr>
+        <p:txBody>
+          <a:bodyPr>
+            <a:normAutofit/>
+          </a:bodyPr>
+          <a:lstStyle/>
+          <a:p>
+            <a:r>
+              <a:rPr lang="en-GB" sz="3200" b="1" u="sng" dirty="0"/>
+              <a:t>Exercise Checkpoint 2 </a:t>
+            </a:r>
+          </a:p>
+        </p:txBody>
+      </p:sp>
+      <p:sp>
+        <p:nvSpPr>
+          <p:cNvPr id="3" name="Subtitle 2">
+            <a:extLst>
+              <a:ext uri="{FF2B5EF4-FFF2-40B4-BE49-F238E27FC236}">
+                <a16:creationId xmlns:a16="http://schemas.microsoft.com/office/drawing/2014/main" id="{A19A6EDB-FD47-0120-E2F7-AE5FAB5706B3}"/>
+              </a:ext>
+            </a:extLst>
+          </p:cNvPr>
+          <p:cNvSpPr>
+            <a:spLocks noGrp="1"/>
+          </p:cNvSpPr>
+          <p:nvPr>
+            <p:ph type="body" sz="quarter" idx="14"/>
+          </p:nvPr>
+        </p:nvSpPr>
+        <p:spPr/>
+        <p:txBody>
+          <a:bodyPr vert="horz" lIns="91440" tIns="45720" rIns="91440" bIns="45720" rtlCol="0" anchor="t">
+            <a:normAutofit fontScale="32500" lnSpcReduction="20000"/>
+          </a:bodyPr>
+          <a:lstStyle/>
+          <a:p>
+            <a:pPr lvl="1"/>
+            <a:br>
               <a:rPr lang="en-GB" dirty="0"/>
-              <a:t>Other GitHub Features</a:t>
-            </a:r>
+            </a:br>
+            <a:endParaRPr lang="en-GB" dirty="0"/>
+          </a:p>
+          <a:p>
+            <a:pPr marL="285750" indent="-285750">
+              <a:buChar char="•"/>
+            </a:pPr>
+            <a:endParaRPr lang="en-GB" dirty="0"/>
+          </a:p>
+          <a:p>
+            <a:pPr marL="514350" lvl="1" indent="-285750">
+              <a:buFont typeface="Courier New" panose="020B0604020202020204" pitchFamily="34" charset="0"/>
+              <a:buChar char="o"/>
+            </a:pPr>
+            <a:endParaRPr lang="en-GB" dirty="0"/>
+          </a:p>
+          <a:p>
+            <a:pPr marL="285750" indent="-285750">
+              <a:buFont typeface="Arial" panose="020B0604020202020204" pitchFamily="34" charset="0"/>
+              <a:buChar char="•"/>
+            </a:pPr>
+            <a:endParaRPr lang="en-GB" dirty="0"/>
+          </a:p>
+        </p:txBody>
+      </p:sp>
+      <p:sp>
+        <p:nvSpPr>
+          <p:cNvPr id="8" name="TextBox 7">
+            <a:extLst>
+              <a:ext uri="{FF2B5EF4-FFF2-40B4-BE49-F238E27FC236}">
+                <a16:creationId xmlns:a16="http://schemas.microsoft.com/office/drawing/2014/main" id="{6D1779D3-41A0-4920-B5C8-8AA53282B9B8}"/>
+              </a:ext>
+            </a:extLst>
+          </p:cNvPr>
+          <p:cNvSpPr txBox="1"/>
+          <p:nvPr/>
+        </p:nvSpPr>
+        <p:spPr>
+          <a:xfrm>
+            <a:off x="609600" y="1611755"/>
+            <a:ext cx="5689600" cy="2862322"/>
+          </a:xfrm>
+          <a:prstGeom prst="rect">
+            <a:avLst/>
+          </a:prstGeom>
+          <a:noFill/>
+        </p:spPr>
+        <p:txBody>
+          <a:bodyPr wrap="square" rtlCol="0">
+            <a:spAutoFit/>
+          </a:bodyPr>
+          <a:lstStyle/>
+          <a:p>
+            <a:pPr marL="285750" indent="-285750">
+              <a:buFont typeface="Arial" panose="020B0604020202020204" pitchFamily="34" charset="0"/>
+              <a:buChar char="•"/>
+            </a:pPr>
+            <a:r>
+              <a:rPr lang="en-GB" b="1" dirty="0">
+                <a:solidFill>
+                  <a:schemeClr val="bg1"/>
+                </a:solidFill>
+              </a:rPr>
+              <a:t>Create your feature branch and fill in your README.</a:t>
+            </a:r>
+          </a:p>
+          <a:p>
+            <a:endParaRPr lang="en-GB" b="1" dirty="0">
+              <a:solidFill>
+                <a:schemeClr val="bg1"/>
+              </a:solidFill>
+            </a:endParaRPr>
+          </a:p>
+          <a:p>
+            <a:pPr marL="800100" lvl="1" indent="-342900">
+              <a:buFont typeface="+mj-lt"/>
+              <a:buAutoNum type="arabicPeriod"/>
+            </a:pPr>
+            <a:r>
+              <a:rPr lang="en-GB" dirty="0">
+                <a:solidFill>
+                  <a:schemeClr val="bg1"/>
+                </a:solidFill>
+              </a:rPr>
+              <a:t>In </a:t>
+            </a:r>
+            <a:r>
+              <a:rPr lang="en-GB" dirty="0" err="1">
+                <a:solidFill>
+                  <a:schemeClr val="bg1"/>
+                </a:solidFill>
+              </a:rPr>
+              <a:t>Github</a:t>
+            </a:r>
+            <a:r>
+              <a:rPr lang="en-GB" dirty="0">
+                <a:solidFill>
+                  <a:schemeClr val="bg1"/>
+                </a:solidFill>
+              </a:rPr>
+              <a:t>, create your own feature branch. </a:t>
+            </a:r>
+          </a:p>
+          <a:p>
+            <a:pPr marL="800100" lvl="1" indent="-342900">
+              <a:buFont typeface="+mj-lt"/>
+              <a:buAutoNum type="arabicPeriod"/>
+            </a:pPr>
+            <a:r>
+              <a:rPr lang="en-GB" dirty="0">
+                <a:solidFill>
+                  <a:schemeClr val="bg1"/>
+                </a:solidFill>
+                <a:latin typeface="Mona Sans VF"/>
+              </a:rPr>
+              <a:t>Open your README in your participant folder and fill this in. </a:t>
+            </a:r>
+          </a:p>
+          <a:p>
+            <a:pPr marL="800100" lvl="1" indent="-342900">
+              <a:buFont typeface="+mj-lt"/>
+              <a:buAutoNum type="arabicPeriod"/>
+            </a:pPr>
+            <a:r>
+              <a:rPr lang="en-GB" dirty="0">
+                <a:solidFill>
+                  <a:schemeClr val="bg1"/>
+                </a:solidFill>
+                <a:latin typeface="Mona Sans VF"/>
+              </a:rPr>
+              <a:t>Stage and commit this with the message: Fill in my area README.</a:t>
+            </a:r>
+          </a:p>
+          <a:p>
+            <a:pPr marL="800100" lvl="1" indent="-342900">
+              <a:buFont typeface="+mj-lt"/>
+              <a:buAutoNum type="arabicPeriod"/>
+            </a:pPr>
+            <a:endParaRPr lang="en-GB" dirty="0">
+              <a:solidFill>
+                <a:schemeClr val="bg1"/>
+              </a:solidFill>
+              <a:latin typeface="Mona Sans VF"/>
+            </a:endParaRPr>
+          </a:p>
+          <a:p>
+            <a:pPr marL="800100" lvl="1" indent="-342900">
+              <a:buFont typeface="+mj-lt"/>
+              <a:buAutoNum type="arabicPeriod"/>
+            </a:pPr>
+            <a:endParaRPr lang="en-GB" dirty="0">
+              <a:solidFill>
+                <a:schemeClr val="bg1"/>
+              </a:solidFill>
+              <a:latin typeface="Mona Sans VF"/>
+            </a:endParaRPr>
+          </a:p>
+          <a:p>
+            <a:pPr lvl="1"/>
+            <a:endParaRPr lang="en-GB" dirty="0">
+              <a:solidFill>
+                <a:schemeClr val="bg1"/>
+              </a:solidFill>
+              <a:latin typeface="Mona Sans VF"/>
+            </a:endParaRPr>
           </a:p>
         </p:txBody>
       </p:sp>
     </p:spTree>
     <p:extLst>
       <p:ext uri="{BB962C8B-B14F-4D97-AF65-F5344CB8AC3E}">
-        <p14:creationId xmlns:p14="http://schemas.microsoft.com/office/powerpoint/2010/main" val="1763569927"/>
+        <p14:creationId xmlns:p14="http://schemas.microsoft.com/office/powerpoint/2010/main" val="768163449"/>
       </p:ext>
     </p:extLst>
   </p:cSld>
@@ -15405,7 +15662,7 @@
           <p:cNvPr id="2" name="Title 1">
             <a:extLst>
               <a:ext uri="{FF2B5EF4-FFF2-40B4-BE49-F238E27FC236}">
-                <a16:creationId xmlns:a16="http://schemas.microsoft.com/office/drawing/2014/main" id="{10F11F58-1B02-2B5E-16AB-F41892BB3093}"/>
+                <a16:creationId xmlns:a16="http://schemas.microsoft.com/office/drawing/2014/main" id="{174918DD-3FB4-ECF1-7474-46B34CAE7FD5}"/>
               </a:ext>
             </a:extLst>
           </p:cNvPr>
@@ -15413,278 +15670,36 @@
             <a:spLocks noGrp="1"/>
           </p:cNvSpPr>
           <p:nvPr>
-            <p:ph type="title"/>
+            <p:ph type="ctrTitle"/>
           </p:nvPr>
         </p:nvSpPr>
         <p:spPr>
           <a:xfrm>
-            <a:off x="520911" y="427020"/>
-            <a:ext cx="8343789" cy="636062"/>
-          </a:xfrm>
-        </p:spPr>
-        <p:txBody>
-          <a:bodyPr>
-            <a:normAutofit/>
-          </a:bodyPr>
-          <a:lstStyle/>
-          <a:p>
-            <a:r>
-              <a:rPr lang="en-GB" sz="3200" b="1" u="sng" dirty="0"/>
-              <a:t>Issues</a:t>
-            </a:r>
-          </a:p>
-        </p:txBody>
-      </p:sp>
-      <p:sp>
-        <p:nvSpPr>
-          <p:cNvPr id="5" name="Slide Number Placeholder 4">
-            <a:extLst>
-              <a:ext uri="{FF2B5EF4-FFF2-40B4-BE49-F238E27FC236}">
-                <a16:creationId xmlns:a16="http://schemas.microsoft.com/office/drawing/2014/main" id="{A6521F9B-D9FC-06E8-07A8-52FCF507297F}"/>
-              </a:ext>
-            </a:extLst>
-          </p:cNvPr>
-          <p:cNvSpPr>
-            <a:spLocks noGrp="1"/>
-          </p:cNvSpPr>
-          <p:nvPr>
-            <p:ph type="sldNum" sz="quarter" idx="12"/>
-          </p:nvPr>
-        </p:nvSpPr>
-        <p:spPr/>
+            <a:off x="758703" y="2427434"/>
+            <a:ext cx="10007063" cy="830997"/>
+          </a:xfrm>
+        </p:spPr>
         <p:txBody>
           <a:bodyPr/>
           <a:lstStyle/>
           <a:p>
-            <a:fld id="{CC057153-B650-4DEB-B370-79DDCFDCE934}" type="slidenum">
-              <a:rPr lang="en-US" dirty="0"/>
-              <a:pPr/>
-              <a:t>18</a:t>
-            </a:fld>
-            <a:endParaRPr lang="en-GB"/>
-          </a:p>
-        </p:txBody>
-      </p:sp>
-      <p:sp>
-        <p:nvSpPr>
-          <p:cNvPr id="7" name="TextBox 6">
-            <a:extLst>
-              <a:ext uri="{FF2B5EF4-FFF2-40B4-BE49-F238E27FC236}">
-                <a16:creationId xmlns:a16="http://schemas.microsoft.com/office/drawing/2014/main" id="{1825C012-3404-4C60-A760-764C43E567DF}"/>
-              </a:ext>
-            </a:extLst>
-          </p:cNvPr>
-          <p:cNvSpPr txBox="1"/>
-          <p:nvPr/>
-        </p:nvSpPr>
-        <p:spPr>
-          <a:xfrm>
-            <a:off x="444711" y="1314134"/>
-            <a:ext cx="4804622" cy="4524315"/>
-          </a:xfrm>
-          <a:prstGeom prst="rect">
-            <a:avLst/>
-          </a:prstGeom>
-          <a:noFill/>
-        </p:spPr>
-        <p:txBody>
-          <a:bodyPr wrap="square" rtlCol="0">
-            <a:spAutoFit/>
-          </a:bodyPr>
-          <a:lstStyle/>
-          <a:p>
-            <a:pPr marL="285750" indent="-285750">
-              <a:buFont typeface="Arial" panose="020B0604020202020204" pitchFamily="34" charset="0"/>
-              <a:buChar char="•"/>
-            </a:pPr>
-            <a:r>
-              <a:rPr lang="en-GB" dirty="0" err="1"/>
-              <a:t>Github</a:t>
-            </a:r>
             <a:r>
               <a:rPr lang="en-GB" dirty="0"/>
-              <a:t> Issues are digital task cards used to track work, bugs and request improvements/suggestions within a software project. </a:t>
-            </a:r>
-          </a:p>
-          <a:p>
-            <a:pPr marL="285750" indent="-285750">
-              <a:buFont typeface="Arial" panose="020B0604020202020204" pitchFamily="34" charset="0"/>
-              <a:buChar char="•"/>
-            </a:pPr>
-            <a:endParaRPr lang="en-GB" dirty="0"/>
-          </a:p>
-          <a:p>
-            <a:pPr marL="285750" indent="-285750">
-              <a:buFont typeface="Arial" panose="020B0604020202020204" pitchFamily="34" charset="0"/>
-              <a:buChar char="•"/>
-            </a:pPr>
-            <a:r>
-              <a:rPr lang="en-GB" dirty="0"/>
-              <a:t>Issues can be linked to agentic working – once an issue has been raised, an agent can then complete the work and open up a pull request for a human to review. </a:t>
-            </a:r>
-          </a:p>
-          <a:p>
-            <a:pPr marL="285750" indent="-285750">
-              <a:buFont typeface="Arial" panose="020B0604020202020204" pitchFamily="34" charset="0"/>
-              <a:buChar char="•"/>
-            </a:pPr>
-            <a:endParaRPr lang="en-GB" dirty="0"/>
-          </a:p>
-          <a:p>
-            <a:pPr marL="285750" indent="-285750">
-              <a:buFont typeface="Arial" panose="020B0604020202020204" pitchFamily="34" charset="0"/>
-              <a:buChar char="•"/>
-            </a:pPr>
-            <a:r>
-              <a:rPr lang="en-GB" dirty="0"/>
-              <a:t>Encourages collaboration and better organisation – provides history of decisions and assignment of work to team members.</a:t>
-            </a:r>
-          </a:p>
-          <a:p>
-            <a:pPr marL="285750" indent="-285750">
-              <a:buFont typeface="Arial" panose="020B0604020202020204" pitchFamily="34" charset="0"/>
-              <a:buChar char="•"/>
-            </a:pPr>
-            <a:endParaRPr lang="en-GB" dirty="0"/>
-          </a:p>
-          <a:p>
-            <a:pPr marL="285750" indent="-285750">
-              <a:buFont typeface="Arial" panose="020B0604020202020204" pitchFamily="34" charset="0"/>
-              <a:buChar char="•"/>
-            </a:pPr>
-            <a:r>
-              <a:rPr lang="en-GB" dirty="0"/>
-              <a:t>Templates can be set up to standardise requests/bug issue forms.  </a:t>
-            </a:r>
-          </a:p>
-        </p:txBody>
-      </p:sp>
-      <p:pic>
-        <p:nvPicPr>
-          <p:cNvPr id="4" name="Picture 3">
-            <a:extLst>
-              <a:ext uri="{FF2B5EF4-FFF2-40B4-BE49-F238E27FC236}">
-                <a16:creationId xmlns:a16="http://schemas.microsoft.com/office/drawing/2014/main" id="{9392CF61-AF29-4E2D-845B-672428F07684}"/>
-              </a:ext>
-            </a:extLst>
-          </p:cNvPr>
-          <p:cNvPicPr>
-            <a:picLocks noChangeAspect="1"/>
-          </p:cNvPicPr>
-          <p:nvPr/>
-        </p:nvPicPr>
-        <p:blipFill>
-          <a:blip r:embed="rId2"/>
-          <a:stretch>
-            <a:fillRect/>
-          </a:stretch>
-        </p:blipFill>
-        <p:spPr>
-          <a:xfrm>
-            <a:off x="5407272" y="1536700"/>
-            <a:ext cx="5716687" cy="3784600"/>
-          </a:xfrm>
-          <a:prstGeom prst="rect">
-            <a:avLst/>
-          </a:prstGeom>
-        </p:spPr>
-      </p:pic>
+              <a:t>Other GitHub Features</a:t>
+            </a:r>
+          </a:p>
+        </p:txBody>
+      </p:sp>
     </p:spTree>
     <p:extLst>
       <p:ext uri="{BB962C8B-B14F-4D97-AF65-F5344CB8AC3E}">
-        <p14:creationId xmlns:p14="http://schemas.microsoft.com/office/powerpoint/2010/main" val="1356657425"/>
+        <p14:creationId xmlns:p14="http://schemas.microsoft.com/office/powerpoint/2010/main" val="1763569927"/>
       </p:ext>
     </p:extLst>
   </p:cSld>
   <p:clrMapOvr>
     <a:masterClrMapping/>
   </p:clrMapOvr>
-  <p:timing>
-    <p:tnLst>
-      <p:par>
-        <p:cTn id="1" dur="indefinite" restart="never" nodeType="tmRoot">
-          <p:childTnLst>
-            <p:seq concurrent="1" nextAc="seek">
-              <p:cTn id="2" dur="indefinite" nodeType="mainSeq">
-                <p:childTnLst>
-                  <p:par>
-                    <p:cTn id="3" fill="hold">
-                      <p:stCondLst>
-                        <p:cond delay="indefinite"/>
-                      </p:stCondLst>
-                      <p:childTnLst>
-                        <p:par>
-                          <p:cTn id="4" fill="hold">
-                            <p:stCondLst>
-                              <p:cond delay="0"/>
-                            </p:stCondLst>
-                            <p:childTnLst>
-                              <p:par>
-                                <p:cTn id="5" presetID="10" presetClass="entr" presetSubtype="0" fill="hold" grpId="0" nodeType="clickEffect">
-                                  <p:stCondLst>
-                                    <p:cond delay="0"/>
-                                  </p:stCondLst>
-                                  <p:childTnLst>
-                                    <p:set>
-                                      <p:cBhvr>
-                                        <p:cTn id="6" dur="1" fill="hold">
-                                          <p:stCondLst>
-                                            <p:cond delay="0"/>
-                                          </p:stCondLst>
-                                        </p:cTn>
-                                        <p:tgtEl>
-                                          <p:spTgt spid="7"/>
-                                        </p:tgtEl>
-                                        <p:attrNameLst>
-                                          <p:attrName>style.visibility</p:attrName>
-                                        </p:attrNameLst>
-                                      </p:cBhvr>
-                                      <p:to>
-                                        <p:strVal val="visible"/>
-                                      </p:to>
-                                    </p:set>
-                                    <p:animEffect transition="in" filter="fade">
-                                      <p:cBhvr>
-                                        <p:cTn id="7" dur="500"/>
-                                        <p:tgtEl>
-                                          <p:spTgt spid="7"/>
-                                        </p:tgtEl>
-                                      </p:cBhvr>
-                                    </p:animEffect>
-                                  </p:childTnLst>
-                                </p:cTn>
-                              </p:par>
-                            </p:childTnLst>
-                          </p:cTn>
-                        </p:par>
-                      </p:childTnLst>
-                    </p:cTn>
-                  </p:par>
-                </p:childTnLst>
-              </p:cTn>
-              <p:prevCondLst>
-                <p:cond evt="onPrev" delay="0">
-                  <p:tgtEl>
-                    <p:sldTgt/>
-                  </p:tgtEl>
-                </p:cond>
-              </p:prevCondLst>
-              <p:nextCondLst>
-                <p:cond evt="onNext" delay="0">
-                  <p:tgtEl>
-                    <p:sldTgt/>
-                  </p:tgtEl>
-                </p:cond>
-              </p:nextCondLst>
-            </p:seq>
-          </p:childTnLst>
-        </p:cTn>
-      </p:par>
-    </p:tnLst>
-    <p:bldLst>
-      <p:bldP spid="7" grpId="0"/>
-    </p:bldLst>
-  </p:timing>
 </p:sld>
 </file>
 
@@ -15735,7 +15750,7 @@
           <a:p>
             <a:r>
               <a:rPr lang="en-GB" sz="3200" b="1" u="sng" dirty="0"/>
-              <a:t>Projects</a:t>
+              <a:t>Issues</a:t>
             </a:r>
           </a:p>
         </p:txBody>
@@ -15785,7 +15800,7 @@
         <p:spPr>
           <a:xfrm>
             <a:off x="444711" y="1314134"/>
-            <a:ext cx="9503622" cy="2308324"/>
+            <a:ext cx="4804622" cy="4524315"/>
           </a:xfrm>
           <a:prstGeom prst="rect">
             <a:avLst/>
@@ -15803,16 +15818,12 @@
               <a:buChar char="•"/>
             </a:pPr>
             <a:r>
+              <a:rPr lang="en-GB" dirty="0" err="1"/>
+              <a:t>Github</a:t>
+            </a:r>
+            <a:r>
               <a:rPr lang="en-GB" dirty="0"/>
-              <a:t>Resembles a Kanban/</a:t>
-            </a:r>
-            <a:r>
-              <a:rPr lang="en-GB" dirty="0" err="1"/>
-              <a:t>devops</a:t>
-            </a:r>
-            <a:r>
-              <a:rPr lang="en-GB" dirty="0"/>
-              <a:t> board that managers can link issues/tasks to key milestones and task phases. </a:t>
+              <a:t> Issues are digital task cards used to track work, bugs and request improvements/suggestions within a software project. </a:t>
             </a:r>
           </a:p>
           <a:p>
@@ -15829,15 +15840,7 @@
             </a:pPr>
             <a:r>
               <a:rPr lang="en-GB" dirty="0"/>
-              <a:t>Automatically move and assign tasks to users using agents/</a:t>
-            </a:r>
-            <a:r>
-              <a:rPr lang="en-GB" dirty="0" err="1"/>
-              <a:t>Github</a:t>
-            </a:r>
-            <a:r>
-              <a:rPr lang="en-GB" dirty="0"/>
-              <a:t> actions. </a:t>
+              <a:t>Issues can be linked to agentic working – once an issue has been raised, an agent can then complete the work and open up a pull request for a human to review. </a:t>
             </a:r>
           </a:p>
           <a:p>
@@ -15854,7 +15857,7 @@
             </a:pPr>
             <a:r>
               <a:rPr lang="en-GB" dirty="0"/>
-              <a:t>Allows for work and delivery in one place with real-time progress tracking. </a:t>
+              <a:t>Encourages collaboration and better organisation – provides history of decisions and assignment of work to team members.</a:t>
             </a:r>
           </a:p>
           <a:p>
@@ -15871,7 +15874,7 @@
             </a:pPr>
             <a:r>
               <a:rPr lang="en-GB" dirty="0"/>
-              <a:t>Supports agile way of working with prioritisation and sprint tracking. </a:t>
+              <a:t>Templates can be set up to standardise requests/bug issue forms.  </a:t>
             </a:r>
           </a:p>
         </p:txBody>
@@ -15881,7 +15884,7 @@
           <p:cNvPr id="4" name="Picture 3">
             <a:extLst>
               <a:ext uri="{FF2B5EF4-FFF2-40B4-BE49-F238E27FC236}">
-                <a16:creationId xmlns:a16="http://schemas.microsoft.com/office/drawing/2014/main" id="{58E36F9E-12B6-40F9-8232-D059D17355E6}"/>
+                <a16:creationId xmlns:a16="http://schemas.microsoft.com/office/drawing/2014/main" id="{9392CF61-AF29-4E2D-845B-672428F07684}"/>
               </a:ext>
             </a:extLst>
           </p:cNvPr>
@@ -15898,8 +15901,8 @@
         </p:blipFill>
         <p:spPr>
           <a:xfrm>
-            <a:off x="793117" y="4259815"/>
-            <a:ext cx="10545445" cy="1284051"/>
+            <a:off x="5407272" y="1536700"/>
+            <a:ext cx="5716687" cy="3784600"/>
           </a:xfrm>
           <a:prstGeom prst="rect">
             <a:avLst/>
@@ -15909,7 +15912,7 @@
     </p:spTree>
     <p:extLst>
       <p:ext uri="{BB962C8B-B14F-4D97-AF65-F5344CB8AC3E}">
-        <p14:creationId xmlns:p14="http://schemas.microsoft.com/office/powerpoint/2010/main" val="286988950"/>
+        <p14:creationId xmlns:p14="http://schemas.microsoft.com/office/powerpoint/2010/main" val="1356657425"/>
       </p:ext>
     </p:extLst>
   </p:cSld>
@@ -16740,7 +16743,7 @@
           <a:p>
             <a:r>
               <a:rPr lang="en-GB" sz="3200" b="1" u="sng" dirty="0"/>
-              <a:t>Agents and Actions</a:t>
+              <a:t>Projects</a:t>
             </a:r>
           </a:p>
         </p:txBody>
@@ -16789,7 +16792,7 @@
         </p:nvSpPr>
         <p:spPr>
           <a:xfrm>
-            <a:off x="681778" y="1458067"/>
+            <a:off x="444711" y="1314134"/>
             <a:ext cx="9503622" cy="2308324"/>
           </a:xfrm>
           <a:prstGeom prst="rect">
@@ -16809,7 +16812,15 @@
             </a:pPr>
             <a:r>
               <a:rPr lang="en-GB" dirty="0"/>
-              <a:t>Actions – automated tasks that follow pre-defined instructions by users, e.g.; running data quality checks, sending an email, etc. </a:t>
+              <a:t>Resembles a Kanban/</a:t>
+            </a:r>
+            <a:r>
+              <a:rPr lang="en-GB" dirty="0" err="1"/>
+              <a:t>devops</a:t>
+            </a:r>
+            <a:r>
+              <a:rPr lang="en-GB" dirty="0"/>
+              <a:t> board that managers can link issues/tasks to key milestones and task phases. </a:t>
             </a:r>
           </a:p>
           <a:p>
@@ -16826,7 +16837,15 @@
             </a:pPr>
             <a:r>
               <a:rPr lang="en-GB" dirty="0"/>
-              <a:t>Agents – custom built AI workers that can automate recurring business activities and free up staff to work on more strategic work. </a:t>
+              <a:t>Automatically move and assign tasks to users using agents/</a:t>
+            </a:r>
+            <a:r>
+              <a:rPr lang="en-GB" dirty="0" err="1"/>
+              <a:t>Github</a:t>
+            </a:r>
+            <a:r>
+              <a:rPr lang="en-GB" dirty="0"/>
+              <a:t> actions. </a:t>
             </a:r>
           </a:p>
           <a:p>
@@ -16841,23 +16860,36 @@
               <a:buFont typeface="Arial" panose="020B0604020202020204" pitchFamily="34" charset="0"/>
               <a:buChar char="•"/>
             </a:pPr>
+            <a:r>
+              <a:rPr lang="en-GB" dirty="0"/>
+              <a:t>Allows for work and delivery in one place with real-time progress tracking. </a:t>
+            </a:r>
+          </a:p>
+          <a:p>
+            <a:pPr marL="285750" indent="-285750">
+              <a:buFont typeface="Arial" panose="020B0604020202020204" pitchFamily="34" charset="0"/>
+              <a:buChar char="•"/>
+            </a:pPr>
             <a:endParaRPr lang="en-GB" dirty="0"/>
           </a:p>
           <a:p>
-            <a:pPr algn="ctr"/>
-            <a:r>
-              <a:rPr lang="en-GB" b="1" dirty="0"/>
-              <a:t>An action automates a task. An agent automates a responsibility.</a:t>
+            <a:pPr marL="285750" indent="-285750">
+              <a:buFont typeface="Arial" panose="020B0604020202020204" pitchFamily="34" charset="0"/>
+              <a:buChar char="•"/>
+            </a:pPr>
+            <a:r>
+              <a:rPr lang="en-GB" dirty="0"/>
+              <a:t>Supports agile way of working with prioritisation and sprint tracking. </a:t>
             </a:r>
           </a:p>
         </p:txBody>
       </p:sp>
       <p:pic>
         <p:nvPicPr>
-          <p:cNvPr id="9" name="Picture 8">
-            <a:extLst>
-              <a:ext uri="{FF2B5EF4-FFF2-40B4-BE49-F238E27FC236}">
-                <a16:creationId xmlns:a16="http://schemas.microsoft.com/office/drawing/2014/main" id="{D4DA29B7-D69A-44B8-8319-269529E26186}"/>
+          <p:cNvPr id="4" name="Picture 3">
+            <a:extLst>
+              <a:ext uri="{FF2B5EF4-FFF2-40B4-BE49-F238E27FC236}">
+                <a16:creationId xmlns:a16="http://schemas.microsoft.com/office/drawing/2014/main" id="{58E36F9E-12B6-40F9-8232-D059D17355E6}"/>
               </a:ext>
             </a:extLst>
           </p:cNvPr>
@@ -16874,38 +16906,8 @@
         </p:blipFill>
         <p:spPr>
           <a:xfrm>
-            <a:off x="1967196" y="4305310"/>
-            <a:ext cx="2376203" cy="1494312"/>
-          </a:xfrm>
-          <a:prstGeom prst="rect">
-            <a:avLst/>
-          </a:prstGeom>
-        </p:spPr>
-      </p:pic>
-      <p:pic>
-        <p:nvPicPr>
-          <p:cNvPr id="11" name="Picture 10">
-            <a:extLst>
-              <a:ext uri="{FF2B5EF4-FFF2-40B4-BE49-F238E27FC236}">
-                <a16:creationId xmlns:a16="http://schemas.microsoft.com/office/drawing/2014/main" id="{4A8AD209-FE1C-42D6-B339-10D6BB177EBB}"/>
-              </a:ext>
-            </a:extLst>
-          </p:cNvPr>
-          <p:cNvPicPr>
-            <a:picLocks noChangeAspect="1"/>
-          </p:cNvPicPr>
-          <p:nvPr/>
-        </p:nvPicPr>
-        <p:blipFill>
-          <a:blip r:embed="rId3"/>
-          <a:stretch>
-            <a:fillRect/>
-          </a:stretch>
-        </p:blipFill>
-        <p:spPr>
-          <a:xfrm>
-            <a:off x="6784725" y="4368801"/>
-            <a:ext cx="2859271" cy="1430822"/>
+            <a:off x="793117" y="4259815"/>
+            <a:ext cx="10545445" cy="1284051"/>
           </a:xfrm>
           <a:prstGeom prst="rect">
             <a:avLst/>
@@ -16915,7 +16917,7 @@
     </p:spTree>
     <p:extLst>
       <p:ext uri="{BB962C8B-B14F-4D97-AF65-F5344CB8AC3E}">
-        <p14:creationId xmlns:p14="http://schemas.microsoft.com/office/powerpoint/2010/main" val="3166807334"/>
+        <p14:creationId xmlns:p14="http://schemas.microsoft.com/office/powerpoint/2010/main" val="286988950"/>
       </p:ext>
     </p:extLst>
   </p:cSld>
@@ -17033,7 +17035,7 @@
           <p:cNvPr id="2" name="Title 1">
             <a:extLst>
               <a:ext uri="{FF2B5EF4-FFF2-40B4-BE49-F238E27FC236}">
-                <a16:creationId xmlns:a16="http://schemas.microsoft.com/office/drawing/2014/main" id="{174918DD-3FB4-ECF1-7474-46B34CAE7FD5}"/>
+                <a16:creationId xmlns:a16="http://schemas.microsoft.com/office/drawing/2014/main" id="{10F11F58-1B02-2B5E-16AB-F41892BB3093}"/>
               </a:ext>
             </a:extLst>
           </p:cNvPr>
@@ -17041,44 +17043,291 @@
             <a:spLocks noGrp="1"/>
           </p:cNvSpPr>
           <p:nvPr>
-            <p:ph type="ctrTitle"/>
+            <p:ph type="title"/>
           </p:nvPr>
         </p:nvSpPr>
         <p:spPr>
           <a:xfrm>
-            <a:off x="758703" y="2427434"/>
-            <a:ext cx="7401885" cy="1661993"/>
-          </a:xfrm>
-        </p:spPr>
+            <a:off x="520911" y="427020"/>
+            <a:ext cx="8343789" cy="636062"/>
+          </a:xfrm>
+        </p:spPr>
+        <p:txBody>
+          <a:bodyPr>
+            <a:normAutofit/>
+          </a:bodyPr>
+          <a:lstStyle/>
+          <a:p>
+            <a:r>
+              <a:rPr lang="en-GB" sz="3200" b="1" u="sng" dirty="0"/>
+              <a:t>Agents and Actions</a:t>
+            </a:r>
+          </a:p>
+        </p:txBody>
+      </p:sp>
+      <p:sp>
+        <p:nvSpPr>
+          <p:cNvPr id="5" name="Slide Number Placeholder 4">
+            <a:extLst>
+              <a:ext uri="{FF2B5EF4-FFF2-40B4-BE49-F238E27FC236}">
+                <a16:creationId xmlns:a16="http://schemas.microsoft.com/office/drawing/2014/main" id="{A6521F9B-D9FC-06E8-07A8-52FCF507297F}"/>
+              </a:ext>
+            </a:extLst>
+          </p:cNvPr>
+          <p:cNvSpPr>
+            <a:spLocks noGrp="1"/>
+          </p:cNvSpPr>
+          <p:nvPr>
+            <p:ph type="sldNum" sz="quarter" idx="12"/>
+          </p:nvPr>
+        </p:nvSpPr>
+        <p:spPr/>
         <p:txBody>
           <a:bodyPr/>
           <a:lstStyle/>
           <a:p>
+            <a:fld id="{CC057153-B650-4DEB-B370-79DDCFDCE934}" type="slidenum">
+              <a:rPr lang="en-US" dirty="0"/>
+              <a:pPr/>
+              <a:t>21</a:t>
+            </a:fld>
+            <a:endParaRPr lang="en-GB"/>
+          </a:p>
+        </p:txBody>
+      </p:sp>
+      <p:sp>
+        <p:nvSpPr>
+          <p:cNvPr id="7" name="TextBox 6">
+            <a:extLst>
+              <a:ext uri="{FF2B5EF4-FFF2-40B4-BE49-F238E27FC236}">
+                <a16:creationId xmlns:a16="http://schemas.microsoft.com/office/drawing/2014/main" id="{1825C012-3404-4C60-A760-764C43E567DF}"/>
+              </a:ext>
+            </a:extLst>
+          </p:cNvPr>
+          <p:cNvSpPr txBox="1"/>
+          <p:nvPr/>
+        </p:nvSpPr>
+        <p:spPr>
+          <a:xfrm>
+            <a:off x="681778" y="1458067"/>
+            <a:ext cx="9503622" cy="2308324"/>
+          </a:xfrm>
+          <a:prstGeom prst="rect">
+            <a:avLst/>
+          </a:prstGeom>
+          <a:noFill/>
+        </p:spPr>
+        <p:txBody>
+          <a:bodyPr wrap="square" rtlCol="0">
+            <a:spAutoFit/>
+          </a:bodyPr>
+          <a:lstStyle/>
+          <a:p>
+            <a:pPr marL="285750" indent="-285750">
+              <a:buFont typeface="Arial" panose="020B0604020202020204" pitchFamily="34" charset="0"/>
+              <a:buChar char="•"/>
+            </a:pPr>
             <a:r>
               <a:rPr lang="en-GB" dirty="0"/>
-              <a:t>Using </a:t>
-            </a:r>
-            <a:r>
-              <a:rPr lang="en-GB" dirty="0" err="1"/>
-              <a:t>CoPilot</a:t>
-            </a:r>
+              <a:t>Actions – automated tasks that follow pre-defined instructions by users, e.g.; running data quality checks, sending an email, etc. </a:t>
+            </a:r>
+          </a:p>
+          <a:p>
+            <a:pPr marL="285750" indent="-285750">
+              <a:buFont typeface="Arial" panose="020B0604020202020204" pitchFamily="34" charset="0"/>
+              <a:buChar char="•"/>
+            </a:pPr>
+            <a:endParaRPr lang="en-GB" dirty="0"/>
+          </a:p>
+          <a:p>
+            <a:pPr marL="285750" indent="-285750">
+              <a:buFont typeface="Arial" panose="020B0604020202020204" pitchFamily="34" charset="0"/>
+              <a:buChar char="•"/>
+            </a:pPr>
             <a:r>
               <a:rPr lang="en-GB" dirty="0"/>
-              <a:t> Effectively</a:t>
-            </a:r>
-          </a:p>
-        </p:txBody>
-      </p:sp>
+              <a:t>Agents – custom built AI workers that can automate recurring business activities and free up staff to work on more strategic work. </a:t>
+            </a:r>
+          </a:p>
+          <a:p>
+            <a:pPr marL="285750" indent="-285750">
+              <a:buFont typeface="Arial" panose="020B0604020202020204" pitchFamily="34" charset="0"/>
+              <a:buChar char="•"/>
+            </a:pPr>
+            <a:endParaRPr lang="en-GB" dirty="0"/>
+          </a:p>
+          <a:p>
+            <a:pPr marL="285750" indent="-285750">
+              <a:buFont typeface="Arial" panose="020B0604020202020204" pitchFamily="34" charset="0"/>
+              <a:buChar char="•"/>
+            </a:pPr>
+            <a:endParaRPr lang="en-GB" dirty="0"/>
+          </a:p>
+          <a:p>
+            <a:pPr algn="ctr"/>
+            <a:r>
+              <a:rPr lang="en-GB" b="1" dirty="0"/>
+              <a:t>An action automates a task. An agent automates a responsibility.</a:t>
+            </a:r>
+          </a:p>
+        </p:txBody>
+      </p:sp>
+      <p:pic>
+        <p:nvPicPr>
+          <p:cNvPr id="9" name="Picture 8">
+            <a:extLst>
+              <a:ext uri="{FF2B5EF4-FFF2-40B4-BE49-F238E27FC236}">
+                <a16:creationId xmlns:a16="http://schemas.microsoft.com/office/drawing/2014/main" id="{D4DA29B7-D69A-44B8-8319-269529E26186}"/>
+              </a:ext>
+            </a:extLst>
+          </p:cNvPr>
+          <p:cNvPicPr>
+            <a:picLocks noChangeAspect="1"/>
+          </p:cNvPicPr>
+          <p:nvPr/>
+        </p:nvPicPr>
+        <p:blipFill>
+          <a:blip r:embed="rId2"/>
+          <a:stretch>
+            <a:fillRect/>
+          </a:stretch>
+        </p:blipFill>
+        <p:spPr>
+          <a:xfrm>
+            <a:off x="1967196" y="4305310"/>
+            <a:ext cx="2376203" cy="1494312"/>
+          </a:xfrm>
+          <a:prstGeom prst="rect">
+            <a:avLst/>
+          </a:prstGeom>
+        </p:spPr>
+      </p:pic>
+      <p:pic>
+        <p:nvPicPr>
+          <p:cNvPr id="11" name="Picture 10">
+            <a:extLst>
+              <a:ext uri="{FF2B5EF4-FFF2-40B4-BE49-F238E27FC236}">
+                <a16:creationId xmlns:a16="http://schemas.microsoft.com/office/drawing/2014/main" id="{4A8AD209-FE1C-42D6-B339-10D6BB177EBB}"/>
+              </a:ext>
+            </a:extLst>
+          </p:cNvPr>
+          <p:cNvPicPr>
+            <a:picLocks noChangeAspect="1"/>
+          </p:cNvPicPr>
+          <p:nvPr/>
+        </p:nvPicPr>
+        <p:blipFill>
+          <a:blip r:embed="rId3"/>
+          <a:stretch>
+            <a:fillRect/>
+          </a:stretch>
+        </p:blipFill>
+        <p:spPr>
+          <a:xfrm>
+            <a:off x="6784725" y="4368801"/>
+            <a:ext cx="2859271" cy="1430822"/>
+          </a:xfrm>
+          <a:prstGeom prst="rect">
+            <a:avLst/>
+          </a:prstGeom>
+        </p:spPr>
+      </p:pic>
     </p:spTree>
     <p:extLst>
       <p:ext uri="{BB962C8B-B14F-4D97-AF65-F5344CB8AC3E}">
-        <p14:creationId xmlns:p14="http://schemas.microsoft.com/office/powerpoint/2010/main" val="816599170"/>
+        <p14:creationId xmlns:p14="http://schemas.microsoft.com/office/powerpoint/2010/main" val="3166807334"/>
       </p:ext>
     </p:extLst>
   </p:cSld>
   <p:clrMapOvr>
     <a:masterClrMapping/>
   </p:clrMapOvr>
+  <p:timing>
+    <p:tnLst>
+      <p:par>
+        <p:cTn id="1" dur="indefinite" restart="never" nodeType="tmRoot">
+          <p:childTnLst>
+            <p:seq concurrent="1" nextAc="seek">
+              <p:cTn id="2" dur="indefinite" nodeType="mainSeq">
+                <p:childTnLst>
+                  <p:par>
+                    <p:cTn id="3" fill="hold">
+                      <p:stCondLst>
+                        <p:cond delay="indefinite"/>
+                      </p:stCondLst>
+                      <p:childTnLst>
+                        <p:par>
+                          <p:cTn id="4" fill="hold">
+                            <p:stCondLst>
+                              <p:cond delay="0"/>
+                            </p:stCondLst>
+                            <p:childTnLst>
+                              <p:par>
+                                <p:cTn id="5" presetID="10" presetClass="entr" presetSubtype="0" fill="hold" grpId="0" nodeType="clickEffect">
+                                  <p:stCondLst>
+                                    <p:cond delay="0"/>
+                                  </p:stCondLst>
+                                  <p:childTnLst>
+                                    <p:set>
+                                      <p:cBhvr>
+                                        <p:cTn id="6" dur="1" fill="hold">
+                                          <p:stCondLst>
+                                            <p:cond delay="0"/>
+                                          </p:stCondLst>
+                                        </p:cTn>
+                                        <p:tgtEl>
+                                          <p:spTgt spid="7"/>
+                                        </p:tgtEl>
+                                        <p:attrNameLst>
+                                          <p:attrName>style.visibility</p:attrName>
+                                        </p:attrNameLst>
+                                      </p:cBhvr>
+                                      <p:to>
+                                        <p:strVal val="visible"/>
+                                      </p:to>
+                                    </p:set>
+                                    <p:animEffect transition="in" filter="fade">
+                                      <p:cBhvr>
+                                        <p:cTn id="7" dur="500"/>
+                                        <p:tgtEl>
+                                          <p:spTgt spid="7"/>
+                                        </p:tgtEl>
+                                      </p:cBhvr>
+                                    </p:animEffect>
+                                  </p:childTnLst>
+                                </p:cTn>
+                              </p:par>
+                            </p:childTnLst>
+                          </p:cTn>
+                        </p:par>
+                      </p:childTnLst>
+                    </p:cTn>
+                  </p:par>
+                </p:childTnLst>
+              </p:cTn>
+              <p:prevCondLst>
+                <p:cond evt="onPrev" delay="0">
+                  <p:tgtEl>
+                    <p:sldTgt/>
+                  </p:tgtEl>
+                </p:cond>
+              </p:prevCondLst>
+              <p:nextCondLst>
+                <p:cond evt="onNext" delay="0">
+                  <p:tgtEl>
+                    <p:sldTgt/>
+                  </p:tgtEl>
+                </p:cond>
+              </p:nextCondLst>
+            </p:seq>
+          </p:childTnLst>
+        </p:cTn>
+      </p:par>
+    </p:tnLst>
+    <p:bldLst>
+      <p:bldP spid="7" grpId="0"/>
+    </p:bldLst>
+  </p:timing>
 </p:sld>
 </file>
 
@@ -17104,6 +17353,77 @@
           <p:cNvPr id="2" name="Title 1">
             <a:extLst>
               <a:ext uri="{FF2B5EF4-FFF2-40B4-BE49-F238E27FC236}">
+                <a16:creationId xmlns:a16="http://schemas.microsoft.com/office/drawing/2014/main" id="{174918DD-3FB4-ECF1-7474-46B34CAE7FD5}"/>
+              </a:ext>
+            </a:extLst>
+          </p:cNvPr>
+          <p:cNvSpPr>
+            <a:spLocks noGrp="1"/>
+          </p:cNvSpPr>
+          <p:nvPr>
+            <p:ph type="ctrTitle"/>
+          </p:nvPr>
+        </p:nvSpPr>
+        <p:spPr>
+          <a:xfrm>
+            <a:off x="758703" y="2427434"/>
+            <a:ext cx="7401885" cy="1661993"/>
+          </a:xfrm>
+        </p:spPr>
+        <p:txBody>
+          <a:bodyPr/>
+          <a:lstStyle/>
+          <a:p>
+            <a:r>
+              <a:rPr lang="en-GB" dirty="0"/>
+              <a:t>Using </a:t>
+            </a:r>
+            <a:r>
+              <a:rPr lang="en-GB" dirty="0" err="1"/>
+              <a:t>CoPilot</a:t>
+            </a:r>
+            <a:r>
+              <a:rPr lang="en-GB" dirty="0"/>
+              <a:t> Effectively</a:t>
+            </a:r>
+          </a:p>
+        </p:txBody>
+      </p:sp>
+    </p:spTree>
+    <p:extLst>
+      <p:ext uri="{BB962C8B-B14F-4D97-AF65-F5344CB8AC3E}">
+        <p14:creationId xmlns:p14="http://schemas.microsoft.com/office/powerpoint/2010/main" val="816599170"/>
+      </p:ext>
+    </p:extLst>
+  </p:cSld>
+  <p:clrMapOvr>
+    <a:masterClrMapping/>
+  </p:clrMapOvr>
+</p:sld>
+</file>
+
+<file path=ppt/slides/slide23.xml><?xml version="1.0" encoding="utf-8"?>
+<p:sld xmlns:a="http://schemas.openxmlformats.org/drawingml/2006/main" xmlns:r="http://schemas.openxmlformats.org/officeDocument/2006/relationships" xmlns:p="http://schemas.openxmlformats.org/presentationml/2006/main">
+  <p:cSld>
+    <p:spTree>
+      <p:nvGrpSpPr>
+        <p:cNvPr id="1" name=""/>
+        <p:cNvGrpSpPr/>
+        <p:nvPr/>
+      </p:nvGrpSpPr>
+      <p:grpSpPr>
+        <a:xfrm>
+          <a:off x="0" y="0"/>
+          <a:ext cx="0" cy="0"/>
+          <a:chOff x="0" y="0"/>
+          <a:chExt cx="0" cy="0"/>
+        </a:xfrm>
+      </p:grpSpPr>
+      <p:sp>
+        <p:nvSpPr>
+          <p:cNvPr id="2" name="Title 1">
+            <a:extLst>
+              <a:ext uri="{FF2B5EF4-FFF2-40B4-BE49-F238E27FC236}">
                 <a16:creationId xmlns:a16="http://schemas.microsoft.com/office/drawing/2014/main" id="{10F11F58-1B02-2B5E-16AB-F41892BB3093}"/>
               </a:ext>
             </a:extLst>
@@ -17166,7 +17486,7 @@
             <a:fld id="{CC057153-B650-4DEB-B370-79DDCFDCE934}" type="slidenum">
               <a:rPr lang="en-US" dirty="0"/>
               <a:pPr/>
-              <a:t>22</a:t>
+              <a:t>23</a:t>
             </a:fld>
             <a:endParaRPr lang="en-GB"/>
           </a:p>
@@ -17439,7 +17759,7 @@
 </p:sld>
 </file>
 
-<file path=ppt/slides/slide23.xml><?xml version="1.0" encoding="utf-8"?>
+<file path=ppt/slides/slide24.xml><?xml version="1.0" encoding="utf-8"?>
 <p:sld xmlns:a="http://schemas.openxmlformats.org/drawingml/2006/main" xmlns:r="http://schemas.openxmlformats.org/officeDocument/2006/relationships" xmlns:p="http://schemas.openxmlformats.org/presentationml/2006/main">
   <p:cSld>
     <p:spTree>
@@ -17480,7 +17800,7 @@
             <a:fld id="{CC057153-B650-4DEB-B370-79DDCFDCE934}" type="slidenum">
               <a:rPr lang="en-US" smtClean="0"/>
               <a:pPr/>
-              <a:t>23</a:t>
+              <a:t>24</a:t>
             </a:fld>
             <a:endParaRPr lang="en-US" dirty="0"/>
           </a:p>
@@ -18009,7 +18329,7 @@
 </p:sld>
 </file>
 
-<file path=ppt/slides/slide24.xml><?xml version="1.0" encoding="utf-8"?>
+<file path=ppt/slides/slide25.xml><?xml version="1.0" encoding="utf-8"?>
 <p:sld xmlns:a="http://schemas.openxmlformats.org/drawingml/2006/main" xmlns:r="http://schemas.openxmlformats.org/officeDocument/2006/relationships" xmlns:p="http://schemas.openxmlformats.org/presentationml/2006/main">
   <p:cSld>
     <p:spTree>
@@ -18050,7 +18370,7 @@
             <a:fld id="{CC057153-B650-4DEB-B370-79DDCFDCE934}" type="slidenum">
               <a:rPr lang="en-US" smtClean="0"/>
               <a:pPr/>
-              <a:t>24</a:t>
+              <a:t>25</a:t>
             </a:fld>
             <a:endParaRPr lang="en-US" dirty="0"/>
           </a:p>
@@ -18646,424 +18966,6 @@
 </p:sld>
 </file>
 
-<file path=ppt/slides/slide25.xml><?xml version="1.0" encoding="utf-8"?>
-<p:sld xmlns:a="http://schemas.openxmlformats.org/drawingml/2006/main" xmlns:r="http://schemas.openxmlformats.org/officeDocument/2006/relationships" xmlns:p="http://schemas.openxmlformats.org/presentationml/2006/main">
-  <p:cSld>
-    <p:spTree>
-      <p:nvGrpSpPr>
-        <p:cNvPr id="1" name=""/>
-        <p:cNvGrpSpPr/>
-        <p:nvPr/>
-      </p:nvGrpSpPr>
-      <p:grpSpPr>
-        <a:xfrm>
-          <a:off x="0" y="0"/>
-          <a:ext cx="0" cy="0"/>
-          <a:chOff x="0" y="0"/>
-          <a:chExt cx="0" cy="0"/>
-        </a:xfrm>
-      </p:grpSpPr>
-      <p:sp>
-        <p:nvSpPr>
-          <p:cNvPr id="5" name="Slide Number Placeholder 4">
-            <a:extLst>
-              <a:ext uri="{FF2B5EF4-FFF2-40B4-BE49-F238E27FC236}">
-                <a16:creationId xmlns:a16="http://schemas.microsoft.com/office/drawing/2014/main" id="{A6521F9B-D9FC-06E8-07A8-52FCF507297F}"/>
-              </a:ext>
-            </a:extLst>
-          </p:cNvPr>
-          <p:cNvSpPr>
-            <a:spLocks noGrp="1"/>
-          </p:cNvSpPr>
-          <p:nvPr>
-            <p:ph type="sldNum" sz="quarter" idx="12"/>
-          </p:nvPr>
-        </p:nvSpPr>
-        <p:spPr/>
-        <p:txBody>
-          <a:bodyPr/>
-          <a:lstStyle/>
-          <a:p>
-            <a:fld id="{CC057153-B650-4DEB-B370-79DDCFDCE934}" type="slidenum">
-              <a:rPr lang="en-US" dirty="0"/>
-              <a:pPr/>
-              <a:t>25</a:t>
-            </a:fld>
-            <a:endParaRPr lang="en-GB"/>
-          </a:p>
-        </p:txBody>
-      </p:sp>
-      <p:sp>
-        <p:nvSpPr>
-          <p:cNvPr id="2" name="Title 1">
-            <a:extLst>
-              <a:ext uri="{FF2B5EF4-FFF2-40B4-BE49-F238E27FC236}">
-                <a16:creationId xmlns:a16="http://schemas.microsoft.com/office/drawing/2014/main" id="{10F11F58-1B02-2B5E-16AB-F41892BB3093}"/>
-              </a:ext>
-            </a:extLst>
-          </p:cNvPr>
-          <p:cNvSpPr>
-            <a:spLocks noGrp="1"/>
-          </p:cNvSpPr>
-          <p:nvPr>
-            <p:ph type="title"/>
-          </p:nvPr>
-        </p:nvSpPr>
-        <p:spPr>
-          <a:xfrm>
-            <a:off x="685800" y="516588"/>
-            <a:ext cx="3436838" cy="498598"/>
-          </a:xfrm>
-        </p:spPr>
-        <p:txBody>
-          <a:bodyPr>
-            <a:normAutofit/>
-          </a:bodyPr>
-          <a:lstStyle/>
-          <a:p>
-            <a:r>
-              <a:rPr lang="en-GB" sz="3200" b="1" u="sng" dirty="0"/>
-              <a:t>Exercise Checkpoint 3 </a:t>
-            </a:r>
-          </a:p>
-        </p:txBody>
-      </p:sp>
-      <p:sp>
-        <p:nvSpPr>
-          <p:cNvPr id="3" name="Subtitle 2">
-            <a:extLst>
-              <a:ext uri="{FF2B5EF4-FFF2-40B4-BE49-F238E27FC236}">
-                <a16:creationId xmlns:a16="http://schemas.microsoft.com/office/drawing/2014/main" id="{A19A6EDB-FD47-0120-E2F7-AE5FAB5706B3}"/>
-              </a:ext>
-            </a:extLst>
-          </p:cNvPr>
-          <p:cNvSpPr>
-            <a:spLocks noGrp="1"/>
-          </p:cNvSpPr>
-          <p:nvPr>
-            <p:ph type="body" sz="quarter" idx="14"/>
-          </p:nvPr>
-        </p:nvSpPr>
-        <p:spPr/>
-        <p:txBody>
-          <a:bodyPr vert="horz" lIns="91440" tIns="45720" rIns="91440" bIns="45720" rtlCol="0" anchor="t">
-            <a:normAutofit fontScale="32500" lnSpcReduction="20000"/>
-          </a:bodyPr>
-          <a:lstStyle/>
-          <a:p>
-            <a:pPr lvl="1"/>
-            <a:br>
-              <a:rPr lang="en-GB" dirty="0"/>
-            </a:br>
-            <a:endParaRPr lang="en-GB" dirty="0"/>
-          </a:p>
-          <a:p>
-            <a:pPr marL="285750" indent="-285750">
-              <a:buChar char="•"/>
-            </a:pPr>
-            <a:endParaRPr lang="en-GB" dirty="0"/>
-          </a:p>
-          <a:p>
-            <a:pPr marL="514350" lvl="1" indent="-285750">
-              <a:buFont typeface="Courier New" panose="020B0604020202020204" pitchFamily="34" charset="0"/>
-              <a:buChar char="o"/>
-            </a:pPr>
-            <a:endParaRPr lang="en-GB" dirty="0"/>
-          </a:p>
-          <a:p>
-            <a:pPr marL="285750" indent="-285750">
-              <a:buFont typeface="Arial" panose="020B0604020202020204" pitchFamily="34" charset="0"/>
-              <a:buChar char="•"/>
-            </a:pPr>
-            <a:endParaRPr lang="en-GB" dirty="0"/>
-          </a:p>
-        </p:txBody>
-      </p:sp>
-      <p:sp>
-        <p:nvSpPr>
-          <p:cNvPr id="8" name="TextBox 7">
-            <a:extLst>
-              <a:ext uri="{FF2B5EF4-FFF2-40B4-BE49-F238E27FC236}">
-                <a16:creationId xmlns:a16="http://schemas.microsoft.com/office/drawing/2014/main" id="{6D1779D3-41A0-4920-B5C8-8AA53282B9B8}"/>
-              </a:ext>
-            </a:extLst>
-          </p:cNvPr>
-          <p:cNvSpPr txBox="1"/>
-          <p:nvPr/>
-        </p:nvSpPr>
-        <p:spPr>
-          <a:xfrm>
-            <a:off x="609600" y="1611755"/>
-            <a:ext cx="5689600" cy="5355312"/>
-          </a:xfrm>
-          <a:prstGeom prst="rect">
-            <a:avLst/>
-          </a:prstGeom>
-          <a:noFill/>
-        </p:spPr>
-        <p:txBody>
-          <a:bodyPr wrap="square" rtlCol="0">
-            <a:spAutoFit/>
-          </a:bodyPr>
-          <a:lstStyle/>
-          <a:p>
-            <a:pPr marL="285750" indent="-285750">
-              <a:buFont typeface="Arial" panose="020B0604020202020204" pitchFamily="34" charset="0"/>
-              <a:buChar char="•"/>
-            </a:pPr>
-            <a:r>
-              <a:rPr lang="en-GB" b="1" dirty="0">
-                <a:solidFill>
-                  <a:schemeClr val="bg1"/>
-                </a:solidFill>
-              </a:rPr>
-              <a:t>In your participant folder in your feature branch, there is a .</a:t>
-            </a:r>
-            <a:r>
-              <a:rPr lang="en-GB" b="1" dirty="0" err="1">
-                <a:solidFill>
-                  <a:schemeClr val="bg1"/>
-                </a:solidFill>
-              </a:rPr>
-              <a:t>py</a:t>
-            </a:r>
-            <a:r>
-              <a:rPr lang="en-GB" b="1" dirty="0">
-                <a:solidFill>
-                  <a:schemeClr val="bg1"/>
-                </a:solidFill>
-              </a:rPr>
-              <a:t> script. Open this and work with </a:t>
-            </a:r>
-            <a:r>
-              <a:rPr lang="en-GB" b="1" dirty="0" err="1">
-                <a:solidFill>
-                  <a:schemeClr val="bg1"/>
-                </a:solidFill>
-              </a:rPr>
-              <a:t>CoPilot</a:t>
-            </a:r>
-            <a:r>
-              <a:rPr lang="en-GB" b="1" dirty="0">
-                <a:solidFill>
-                  <a:schemeClr val="bg1"/>
-                </a:solidFill>
-              </a:rPr>
-              <a:t> to understand and optimise the script.</a:t>
-            </a:r>
-          </a:p>
-          <a:p>
-            <a:pPr lvl="1"/>
-            <a:endParaRPr lang="en-GB" b="1" dirty="0">
-              <a:solidFill>
-                <a:schemeClr val="bg1"/>
-              </a:solidFill>
-            </a:endParaRPr>
-          </a:p>
-          <a:p>
-            <a:pPr marL="800100" lvl="1" indent="-342900">
-              <a:buFont typeface="+mj-lt"/>
-              <a:buAutoNum type="arabicPeriod"/>
-            </a:pPr>
-            <a:endParaRPr lang="en-GB" b="1" dirty="0">
-              <a:solidFill>
-                <a:schemeClr val="bg1"/>
-              </a:solidFill>
-            </a:endParaRPr>
-          </a:p>
-          <a:p>
-            <a:pPr marL="800100" lvl="1" indent="-342900">
-              <a:buFont typeface="+mj-lt"/>
-              <a:buAutoNum type="arabicPeriod"/>
-            </a:pPr>
-            <a:r>
-              <a:rPr lang="en-GB" dirty="0">
-                <a:solidFill>
-                  <a:schemeClr val="bg1"/>
-                </a:solidFill>
-              </a:rPr>
-              <a:t>Open the PY file in your feature branch in </a:t>
-            </a:r>
-            <a:r>
-              <a:rPr lang="en-GB" dirty="0" err="1">
-                <a:solidFill>
-                  <a:schemeClr val="bg1"/>
-                </a:solidFill>
-              </a:rPr>
-              <a:t>Github</a:t>
-            </a:r>
-            <a:r>
-              <a:rPr lang="en-GB" dirty="0">
-                <a:solidFill>
-                  <a:schemeClr val="bg1"/>
-                </a:solidFill>
-              </a:rPr>
-              <a:t>. </a:t>
-            </a:r>
-          </a:p>
-          <a:p>
-            <a:pPr marL="800100" lvl="1" indent="-342900">
-              <a:buFont typeface="+mj-lt"/>
-              <a:buAutoNum type="arabicPeriod"/>
-            </a:pPr>
-            <a:r>
-              <a:rPr lang="en-GB" dirty="0">
-                <a:solidFill>
-                  <a:schemeClr val="bg1"/>
-                </a:solidFill>
-              </a:rPr>
-              <a:t>Use the following prompt within </a:t>
-            </a:r>
-            <a:r>
-              <a:rPr lang="en-GB" dirty="0" err="1">
-                <a:solidFill>
-                  <a:schemeClr val="bg1"/>
-                </a:solidFill>
-              </a:rPr>
-              <a:t>CoPilot</a:t>
-            </a:r>
-            <a:r>
-              <a:rPr lang="en-GB" dirty="0">
-                <a:solidFill>
-                  <a:schemeClr val="bg1"/>
-                </a:solidFill>
-              </a:rPr>
-              <a:t>: </a:t>
-            </a:r>
-            <a:r>
-              <a:rPr lang="en-GB" i="1" dirty="0">
-                <a:solidFill>
-                  <a:srgbClr val="2DAF75"/>
-                </a:solidFill>
-              </a:rPr>
-              <a:t>please explain what this file is doing. </a:t>
-            </a:r>
-            <a:endParaRPr lang="en-GB" dirty="0">
-              <a:solidFill>
-                <a:schemeClr val="bg1"/>
-              </a:solidFill>
-            </a:endParaRPr>
-          </a:p>
-          <a:p>
-            <a:pPr marL="800100" lvl="1" indent="-342900">
-              <a:buFont typeface="+mj-lt"/>
-              <a:buAutoNum type="arabicPeriod"/>
-            </a:pPr>
-            <a:r>
-              <a:rPr lang="en-GB" dirty="0">
-                <a:solidFill>
-                  <a:schemeClr val="bg1"/>
-                </a:solidFill>
-                <a:latin typeface="Mona Sans VF"/>
-              </a:rPr>
-              <a:t>Ask </a:t>
-            </a:r>
-            <a:r>
-              <a:rPr lang="en-GB" dirty="0" err="1">
-                <a:solidFill>
-                  <a:schemeClr val="bg1"/>
-                </a:solidFill>
-                <a:latin typeface="Mona Sans VF"/>
-              </a:rPr>
-              <a:t>CoPilot</a:t>
-            </a:r>
-            <a:r>
-              <a:rPr lang="en-GB" dirty="0">
-                <a:solidFill>
-                  <a:schemeClr val="bg1"/>
-                </a:solidFill>
-                <a:latin typeface="Mona Sans VF"/>
-              </a:rPr>
-              <a:t> to make suggestions on how to improve the file. </a:t>
-            </a:r>
-          </a:p>
-          <a:p>
-            <a:pPr marL="800100" lvl="1" indent="-342900">
-              <a:buFont typeface="+mj-lt"/>
-              <a:buAutoNum type="arabicPeriod"/>
-            </a:pPr>
-            <a:r>
-              <a:rPr lang="en-GB" dirty="0">
-                <a:solidFill>
-                  <a:schemeClr val="bg1"/>
-                </a:solidFill>
-                <a:latin typeface="Mona Sans VF"/>
-              </a:rPr>
-              <a:t>Use the following prompt in Agent Mode to generate a technical document: </a:t>
-            </a:r>
-            <a:r>
-              <a:rPr lang="en-GB" i="1" dirty="0">
-                <a:solidFill>
-                  <a:srgbClr val="2DAF75"/>
-                </a:solidFill>
-                <a:latin typeface="Mona Sans VF"/>
-              </a:rPr>
-              <a:t>create a technical document to explain this file. </a:t>
-            </a:r>
-          </a:p>
-          <a:p>
-            <a:pPr marL="800100" lvl="1" indent="-342900">
-              <a:buFont typeface="+mj-lt"/>
-              <a:buAutoNum type="arabicPeriod"/>
-            </a:pPr>
-            <a:r>
-              <a:rPr lang="en-GB" dirty="0">
-                <a:solidFill>
-                  <a:schemeClr val="bg1"/>
-                </a:solidFill>
-                <a:latin typeface="Mona Sans VF"/>
-              </a:rPr>
-              <a:t>The agent will potentially produce this within its new feature branch. Open a pull request to pull these changes into your feature branch.</a:t>
-            </a:r>
-          </a:p>
-          <a:p>
-            <a:pPr marL="800100" lvl="1" indent="-342900">
-              <a:buFont typeface="+mj-lt"/>
-              <a:buAutoNum type="arabicPeriod"/>
-            </a:pPr>
-            <a:endParaRPr lang="en-GB" dirty="0">
-              <a:solidFill>
-                <a:schemeClr val="bg1"/>
-              </a:solidFill>
-              <a:latin typeface="Mona Sans VF"/>
-            </a:endParaRPr>
-          </a:p>
-          <a:p>
-            <a:pPr marL="800100" lvl="1" indent="-342900">
-              <a:buFont typeface="+mj-lt"/>
-              <a:buAutoNum type="arabicPeriod"/>
-            </a:pPr>
-            <a:endParaRPr lang="en-GB" dirty="0">
-              <a:solidFill>
-                <a:schemeClr val="bg1"/>
-              </a:solidFill>
-              <a:latin typeface="Mona Sans VF"/>
-            </a:endParaRPr>
-          </a:p>
-          <a:p>
-            <a:pPr lvl="1"/>
-            <a:endParaRPr lang="en-GB" dirty="0">
-              <a:solidFill>
-                <a:schemeClr val="bg1"/>
-              </a:solidFill>
-              <a:latin typeface="Mona Sans VF"/>
-            </a:endParaRPr>
-          </a:p>
-        </p:txBody>
-      </p:sp>
-    </p:spTree>
-    <p:extLst>
-      <p:ext uri="{BB962C8B-B14F-4D97-AF65-F5344CB8AC3E}">
-        <p14:creationId xmlns:p14="http://schemas.microsoft.com/office/powerpoint/2010/main" val="3870304185"/>
-      </p:ext>
-    </p:extLst>
-  </p:cSld>
-  <p:clrMapOvr>
-    <a:masterClrMapping/>
-  </p:clrMapOvr>
-</p:sld>
-</file>
-
 <file path=ppt/slides/slide26.xml><?xml version="1.0" encoding="utf-8"?>
 <p:sld xmlns:a="http://schemas.openxmlformats.org/drawingml/2006/main" xmlns:r="http://schemas.openxmlformats.org/officeDocument/2006/relationships" xmlns:p="http://schemas.openxmlformats.org/presentationml/2006/main">
   <p:cSld>
@@ -19083,10 +18985,10 @@
       </p:grpSpPr>
       <p:sp>
         <p:nvSpPr>
-          <p:cNvPr id="2" name="Title 1">
-            <a:extLst>
-              <a:ext uri="{FF2B5EF4-FFF2-40B4-BE49-F238E27FC236}">
-                <a16:creationId xmlns:a16="http://schemas.microsoft.com/office/drawing/2014/main" id="{174918DD-3FB4-ECF1-7474-46B34CAE7FD5}"/>
+          <p:cNvPr id="5" name="Slide Number Placeholder 4">
+            <a:extLst>
+              <a:ext uri="{FF2B5EF4-FFF2-40B4-BE49-F238E27FC236}">
+                <a16:creationId xmlns:a16="http://schemas.microsoft.com/office/drawing/2014/main" id="{A6521F9B-D9FC-06E8-07A8-52FCF507297F}"/>
               </a:ext>
             </a:extLst>
           </p:cNvPr>
@@ -19094,31 +18996,385 @@
             <a:spLocks noGrp="1"/>
           </p:cNvSpPr>
           <p:nvPr>
-            <p:ph type="ctrTitle"/>
+            <p:ph type="sldNum" sz="quarter" idx="12"/>
           </p:nvPr>
         </p:nvSpPr>
-        <p:spPr>
-          <a:xfrm>
-            <a:off x="758703" y="2427434"/>
-            <a:ext cx="7401885" cy="830997"/>
-          </a:xfrm>
-        </p:spPr>
+        <p:spPr/>
         <p:txBody>
           <a:bodyPr/>
           <a:lstStyle/>
           <a:p>
-            <a:r>
-              <a:rPr lang="en-GB" dirty="0" err="1"/>
-              <a:t>Codespaces</a:t>
-            </a:r>
+            <a:fld id="{CC057153-B650-4DEB-B370-79DDCFDCE934}" type="slidenum">
+              <a:rPr lang="en-US" dirty="0"/>
+              <a:pPr/>
+              <a:t>26</a:t>
+            </a:fld>
+            <a:endParaRPr lang="en-GB"/>
+          </a:p>
+        </p:txBody>
+      </p:sp>
+      <p:sp>
+        <p:nvSpPr>
+          <p:cNvPr id="2" name="Title 1">
+            <a:extLst>
+              <a:ext uri="{FF2B5EF4-FFF2-40B4-BE49-F238E27FC236}">
+                <a16:creationId xmlns:a16="http://schemas.microsoft.com/office/drawing/2014/main" id="{10F11F58-1B02-2B5E-16AB-F41892BB3093}"/>
+              </a:ext>
+            </a:extLst>
+          </p:cNvPr>
+          <p:cNvSpPr>
+            <a:spLocks noGrp="1"/>
+          </p:cNvSpPr>
+          <p:nvPr>
+            <p:ph type="title"/>
+          </p:nvPr>
+        </p:nvSpPr>
+        <p:spPr>
+          <a:xfrm>
+            <a:off x="685800" y="516588"/>
+            <a:ext cx="3436838" cy="498598"/>
+          </a:xfrm>
+        </p:spPr>
+        <p:txBody>
+          <a:bodyPr>
+            <a:normAutofit/>
+          </a:bodyPr>
+          <a:lstStyle/>
+          <a:p>
+            <a:r>
+              <a:rPr lang="en-GB" sz="3200" b="1" u="sng" dirty="0"/>
+              <a:t>Exercise Checkpoint 3 </a:t>
+            </a:r>
+          </a:p>
+        </p:txBody>
+      </p:sp>
+      <p:sp>
+        <p:nvSpPr>
+          <p:cNvPr id="3" name="Subtitle 2">
+            <a:extLst>
+              <a:ext uri="{FF2B5EF4-FFF2-40B4-BE49-F238E27FC236}">
+                <a16:creationId xmlns:a16="http://schemas.microsoft.com/office/drawing/2014/main" id="{A19A6EDB-FD47-0120-E2F7-AE5FAB5706B3}"/>
+              </a:ext>
+            </a:extLst>
+          </p:cNvPr>
+          <p:cNvSpPr>
+            <a:spLocks noGrp="1"/>
+          </p:cNvSpPr>
+          <p:nvPr>
+            <p:ph type="body" sz="quarter" idx="14"/>
+          </p:nvPr>
+        </p:nvSpPr>
+        <p:spPr/>
+        <p:txBody>
+          <a:bodyPr vert="horz" lIns="91440" tIns="45720" rIns="91440" bIns="45720" rtlCol="0" anchor="t">
+            <a:normAutofit fontScale="32500" lnSpcReduction="20000"/>
+          </a:bodyPr>
+          <a:lstStyle/>
+          <a:p>
+            <a:pPr lvl="1"/>
+            <a:br>
+              <a:rPr lang="en-GB" dirty="0"/>
+            </a:br>
             <a:endParaRPr lang="en-GB" dirty="0"/>
+          </a:p>
+          <a:p>
+            <a:pPr marL="285750" indent="-285750">
+              <a:buChar char="•"/>
+            </a:pPr>
+            <a:endParaRPr lang="en-GB" dirty="0"/>
+          </a:p>
+          <a:p>
+            <a:pPr marL="514350" lvl="1" indent="-285750">
+              <a:buFont typeface="Courier New" panose="020B0604020202020204" pitchFamily="34" charset="0"/>
+              <a:buChar char="o"/>
+            </a:pPr>
+            <a:endParaRPr lang="en-GB" dirty="0"/>
+          </a:p>
+          <a:p>
+            <a:pPr marL="285750" indent="-285750">
+              <a:buFont typeface="Arial" panose="020B0604020202020204" pitchFamily="34" charset="0"/>
+              <a:buChar char="•"/>
+            </a:pPr>
+            <a:endParaRPr lang="en-GB" dirty="0"/>
+          </a:p>
+        </p:txBody>
+      </p:sp>
+      <p:sp>
+        <p:nvSpPr>
+          <p:cNvPr id="8" name="TextBox 7">
+            <a:extLst>
+              <a:ext uri="{FF2B5EF4-FFF2-40B4-BE49-F238E27FC236}">
+                <a16:creationId xmlns:a16="http://schemas.microsoft.com/office/drawing/2014/main" id="{6D1779D3-41A0-4920-B5C8-8AA53282B9B8}"/>
+              </a:ext>
+            </a:extLst>
+          </p:cNvPr>
+          <p:cNvSpPr txBox="1"/>
+          <p:nvPr/>
+        </p:nvSpPr>
+        <p:spPr>
+          <a:xfrm>
+            <a:off x="609600" y="1611755"/>
+            <a:ext cx="5689600" cy="5355312"/>
+          </a:xfrm>
+          <a:prstGeom prst="rect">
+            <a:avLst/>
+          </a:prstGeom>
+          <a:noFill/>
+        </p:spPr>
+        <p:txBody>
+          <a:bodyPr wrap="square" rtlCol="0">
+            <a:spAutoFit/>
+          </a:bodyPr>
+          <a:lstStyle/>
+          <a:p>
+            <a:pPr marL="285750" indent="-285750">
+              <a:buFont typeface="Arial" panose="020B0604020202020204" pitchFamily="34" charset="0"/>
+              <a:buChar char="•"/>
+            </a:pPr>
+            <a:r>
+              <a:rPr lang="en-GB" b="1" dirty="0">
+                <a:solidFill>
+                  <a:schemeClr val="bg1"/>
+                </a:solidFill>
+              </a:rPr>
+              <a:t>In your participant folder in your feature branch, there is a .</a:t>
+            </a:r>
+            <a:r>
+              <a:rPr lang="en-GB" b="1" dirty="0" err="1">
+                <a:solidFill>
+                  <a:schemeClr val="bg1"/>
+                </a:solidFill>
+              </a:rPr>
+              <a:t>py</a:t>
+            </a:r>
+            <a:r>
+              <a:rPr lang="en-GB" b="1" dirty="0">
+                <a:solidFill>
+                  <a:schemeClr val="bg1"/>
+                </a:solidFill>
+              </a:rPr>
+              <a:t> script. Open this and work with </a:t>
+            </a:r>
+            <a:r>
+              <a:rPr lang="en-GB" b="1" dirty="0" err="1">
+                <a:solidFill>
+                  <a:schemeClr val="bg1"/>
+                </a:solidFill>
+              </a:rPr>
+              <a:t>CoPilot</a:t>
+            </a:r>
+            <a:r>
+              <a:rPr lang="en-GB" b="1" dirty="0">
+                <a:solidFill>
+                  <a:schemeClr val="bg1"/>
+                </a:solidFill>
+              </a:rPr>
+              <a:t> to understand and optimise the script.</a:t>
+            </a:r>
+          </a:p>
+          <a:p>
+            <a:pPr lvl="1"/>
+            <a:endParaRPr lang="en-GB" b="1" dirty="0">
+              <a:solidFill>
+                <a:schemeClr val="bg1"/>
+              </a:solidFill>
+            </a:endParaRPr>
+          </a:p>
+          <a:p>
+            <a:pPr marL="800100" lvl="1" indent="-342900">
+              <a:buFont typeface="+mj-lt"/>
+              <a:buAutoNum type="arabicPeriod"/>
+            </a:pPr>
+            <a:endParaRPr lang="en-GB" b="1" dirty="0">
+              <a:solidFill>
+                <a:schemeClr val="bg1"/>
+              </a:solidFill>
+            </a:endParaRPr>
+          </a:p>
+          <a:p>
+            <a:pPr marL="800100" lvl="1" indent="-342900">
+              <a:buFont typeface="+mj-lt"/>
+              <a:buAutoNum type="arabicPeriod"/>
+            </a:pPr>
+            <a:r>
+              <a:rPr lang="en-GB" dirty="0">
+                <a:solidFill>
+                  <a:schemeClr val="bg1"/>
+                </a:solidFill>
+              </a:rPr>
+              <a:t>Open the PY file in your feature branch in </a:t>
+            </a:r>
+            <a:r>
+              <a:rPr lang="en-GB" dirty="0" err="1">
+                <a:solidFill>
+                  <a:schemeClr val="bg1"/>
+                </a:solidFill>
+              </a:rPr>
+              <a:t>Github</a:t>
+            </a:r>
+            <a:r>
+              <a:rPr lang="en-GB" dirty="0">
+                <a:solidFill>
+                  <a:schemeClr val="bg1"/>
+                </a:solidFill>
+              </a:rPr>
+              <a:t>. </a:t>
+            </a:r>
+          </a:p>
+          <a:p>
+            <a:pPr marL="800100" lvl="1" indent="-342900">
+              <a:buFont typeface="+mj-lt"/>
+              <a:buAutoNum type="arabicPeriod"/>
+            </a:pPr>
+            <a:r>
+              <a:rPr lang="en-GB" dirty="0">
+                <a:solidFill>
+                  <a:schemeClr val="bg1"/>
+                </a:solidFill>
+              </a:rPr>
+              <a:t>Use the following prompt within </a:t>
+            </a:r>
+            <a:r>
+              <a:rPr lang="en-GB" dirty="0" err="1">
+                <a:solidFill>
+                  <a:schemeClr val="bg1"/>
+                </a:solidFill>
+              </a:rPr>
+              <a:t>CoPilot</a:t>
+            </a:r>
+            <a:r>
+              <a:rPr lang="en-GB" dirty="0">
+                <a:solidFill>
+                  <a:schemeClr val="bg1"/>
+                </a:solidFill>
+              </a:rPr>
+              <a:t>: </a:t>
+            </a:r>
+            <a:r>
+              <a:rPr lang="en-GB" i="1" dirty="0">
+                <a:solidFill>
+                  <a:srgbClr val="2DAF75"/>
+                </a:solidFill>
+              </a:rPr>
+              <a:t>please explain what this file is doing. </a:t>
+            </a:r>
+            <a:endParaRPr lang="en-GB" dirty="0">
+              <a:solidFill>
+                <a:schemeClr val="bg1"/>
+              </a:solidFill>
+            </a:endParaRPr>
+          </a:p>
+          <a:p>
+            <a:pPr marL="800100" lvl="1" indent="-342900">
+              <a:buFont typeface="+mj-lt"/>
+              <a:buAutoNum type="arabicPeriod"/>
+            </a:pPr>
+            <a:r>
+              <a:rPr lang="en-GB" dirty="0">
+                <a:solidFill>
+                  <a:schemeClr val="bg1"/>
+                </a:solidFill>
+                <a:latin typeface="Mona Sans VF"/>
+              </a:rPr>
+              <a:t>Ask </a:t>
+            </a:r>
+            <a:r>
+              <a:rPr lang="en-GB" dirty="0" err="1">
+                <a:solidFill>
+                  <a:schemeClr val="bg1"/>
+                </a:solidFill>
+                <a:latin typeface="Mona Sans VF"/>
+              </a:rPr>
+              <a:t>CoPilot</a:t>
+            </a:r>
+            <a:r>
+              <a:rPr lang="en-GB" dirty="0">
+                <a:solidFill>
+                  <a:schemeClr val="bg1"/>
+                </a:solidFill>
+                <a:latin typeface="Mona Sans VF"/>
+              </a:rPr>
+              <a:t> to make suggestions on how to improve the file. </a:t>
+            </a:r>
+          </a:p>
+          <a:p>
+            <a:pPr marL="800100" lvl="1" indent="-342900">
+              <a:buFont typeface="+mj-lt"/>
+              <a:buAutoNum type="arabicPeriod"/>
+            </a:pPr>
+            <a:r>
+              <a:rPr lang="en-GB" dirty="0">
+                <a:solidFill>
+                  <a:schemeClr val="bg1"/>
+                </a:solidFill>
+                <a:latin typeface="Mona Sans VF"/>
+              </a:rPr>
+              <a:t>Use the following prompt in Agent Mode to generate a technical document: </a:t>
+            </a:r>
+            <a:r>
+              <a:rPr lang="en-GB" i="1" dirty="0">
+                <a:solidFill>
+                  <a:srgbClr val="2DAF75"/>
+                </a:solidFill>
+                <a:latin typeface="Mona Sans VF"/>
+              </a:rPr>
+              <a:t>create a technical document to explain this file. </a:t>
+            </a:r>
+          </a:p>
+          <a:p>
+            <a:pPr marL="800100" lvl="1" indent="-342900">
+              <a:buFont typeface="+mj-lt"/>
+              <a:buAutoNum type="arabicPeriod"/>
+            </a:pPr>
+            <a:r>
+              <a:rPr lang="en-GB" dirty="0">
+                <a:solidFill>
+                  <a:schemeClr val="bg1"/>
+                </a:solidFill>
+                <a:latin typeface="Mona Sans VF"/>
+              </a:rPr>
+              <a:t>The agent will potentially produce this within its new feature branch. Open a pull request to pull these changes into your feature branch.</a:t>
+            </a:r>
+          </a:p>
+          <a:p>
+            <a:pPr marL="800100" lvl="1" indent="-342900">
+              <a:buFont typeface="+mj-lt"/>
+              <a:buAutoNum type="arabicPeriod"/>
+            </a:pPr>
+            <a:endParaRPr lang="en-GB" dirty="0">
+              <a:solidFill>
+                <a:schemeClr val="bg1"/>
+              </a:solidFill>
+              <a:latin typeface="Mona Sans VF"/>
+            </a:endParaRPr>
+          </a:p>
+          <a:p>
+            <a:pPr marL="800100" lvl="1" indent="-342900">
+              <a:buFont typeface="+mj-lt"/>
+              <a:buAutoNum type="arabicPeriod"/>
+            </a:pPr>
+            <a:endParaRPr lang="en-GB" dirty="0">
+              <a:solidFill>
+                <a:schemeClr val="bg1"/>
+              </a:solidFill>
+              <a:latin typeface="Mona Sans VF"/>
+            </a:endParaRPr>
+          </a:p>
+          <a:p>
+            <a:pPr lvl="1"/>
+            <a:endParaRPr lang="en-GB" dirty="0">
+              <a:solidFill>
+                <a:schemeClr val="bg1"/>
+              </a:solidFill>
+              <a:latin typeface="Mona Sans VF"/>
+            </a:endParaRPr>
           </a:p>
         </p:txBody>
       </p:sp>
     </p:spTree>
     <p:extLst>
       <p:ext uri="{BB962C8B-B14F-4D97-AF65-F5344CB8AC3E}">
-        <p14:creationId xmlns:p14="http://schemas.microsoft.com/office/powerpoint/2010/main" val="4053802336"/>
+        <p14:creationId xmlns:p14="http://schemas.microsoft.com/office/powerpoint/2010/main" val="3870304185"/>
       </p:ext>
     </p:extLst>
   </p:cSld>
@@ -19150,6 +19406,70 @@
           <p:cNvPr id="2" name="Title 1">
             <a:extLst>
               <a:ext uri="{FF2B5EF4-FFF2-40B4-BE49-F238E27FC236}">
+                <a16:creationId xmlns:a16="http://schemas.microsoft.com/office/drawing/2014/main" id="{174918DD-3FB4-ECF1-7474-46B34CAE7FD5}"/>
+              </a:ext>
+            </a:extLst>
+          </p:cNvPr>
+          <p:cNvSpPr>
+            <a:spLocks noGrp="1"/>
+          </p:cNvSpPr>
+          <p:nvPr>
+            <p:ph type="ctrTitle"/>
+          </p:nvPr>
+        </p:nvSpPr>
+        <p:spPr>
+          <a:xfrm>
+            <a:off x="758703" y="2427434"/>
+            <a:ext cx="7401885" cy="830997"/>
+          </a:xfrm>
+        </p:spPr>
+        <p:txBody>
+          <a:bodyPr/>
+          <a:lstStyle/>
+          <a:p>
+            <a:r>
+              <a:rPr lang="en-GB" dirty="0" err="1"/>
+              <a:t>Codespaces</a:t>
+            </a:r>
+            <a:endParaRPr lang="en-GB" dirty="0"/>
+          </a:p>
+        </p:txBody>
+      </p:sp>
+    </p:spTree>
+    <p:extLst>
+      <p:ext uri="{BB962C8B-B14F-4D97-AF65-F5344CB8AC3E}">
+        <p14:creationId xmlns:p14="http://schemas.microsoft.com/office/powerpoint/2010/main" val="4053802336"/>
+      </p:ext>
+    </p:extLst>
+  </p:cSld>
+  <p:clrMapOvr>
+    <a:masterClrMapping/>
+  </p:clrMapOvr>
+</p:sld>
+</file>
+
+<file path=ppt/slides/slide28.xml><?xml version="1.0" encoding="utf-8"?>
+<p:sld xmlns:a="http://schemas.openxmlformats.org/drawingml/2006/main" xmlns:r="http://schemas.openxmlformats.org/officeDocument/2006/relationships" xmlns:p="http://schemas.openxmlformats.org/presentationml/2006/main">
+  <p:cSld>
+    <p:spTree>
+      <p:nvGrpSpPr>
+        <p:cNvPr id="1" name=""/>
+        <p:cNvGrpSpPr/>
+        <p:nvPr/>
+      </p:nvGrpSpPr>
+      <p:grpSpPr>
+        <a:xfrm>
+          <a:off x="0" y="0"/>
+          <a:ext cx="0" cy="0"/>
+          <a:chOff x="0" y="0"/>
+          <a:chExt cx="0" cy="0"/>
+        </a:xfrm>
+      </p:grpSpPr>
+      <p:sp>
+        <p:nvSpPr>
+          <p:cNvPr id="2" name="Title 1">
+            <a:extLst>
+              <a:ext uri="{FF2B5EF4-FFF2-40B4-BE49-F238E27FC236}">
                 <a16:creationId xmlns:a16="http://schemas.microsoft.com/office/drawing/2014/main" id="{10F11F58-1B02-2B5E-16AB-F41892BB3093}"/>
               </a:ext>
             </a:extLst>
@@ -19205,7 +19525,7 @@
             <a:fld id="{CC057153-B650-4DEB-B370-79DDCFDCE934}" type="slidenum">
               <a:rPr lang="en-US" dirty="0"/>
               <a:pPr/>
-              <a:t>27</a:t>
+              <a:t>28</a:t>
             </a:fld>
             <a:endParaRPr lang="en-GB"/>
           </a:p>
@@ -19485,7 +19805,7 @@
 </p:sld>
 </file>
 
-<file path=ppt/slides/slide28.xml><?xml version="1.0" encoding="utf-8"?>
+<file path=ppt/slides/slide29.xml><?xml version="1.0" encoding="utf-8"?>
 <p:sld xmlns:a="http://schemas.openxmlformats.org/drawingml/2006/main" xmlns:r="http://schemas.openxmlformats.org/officeDocument/2006/relationships" xmlns:p="http://schemas.openxmlformats.org/presentationml/2006/main">
   <p:cSld>
     <p:spTree>
@@ -19562,7 +19882,7 @@
             <a:fld id="{CC057153-B650-4DEB-B370-79DDCFDCE934}" type="slidenum">
               <a:rPr lang="en-US" dirty="0"/>
               <a:pPr/>
-              <a:t>28</a:t>
+              <a:t>29</a:t>
             </a:fld>
             <a:endParaRPr lang="en-GB"/>
           </a:p>
@@ -19780,132 +20100,6 @@
     <p:extLst>
       <p:ext uri="{BB962C8B-B14F-4D97-AF65-F5344CB8AC3E}">
         <p14:creationId xmlns:p14="http://schemas.microsoft.com/office/powerpoint/2010/main" val="959260511"/>
-      </p:ext>
-    </p:extLst>
-  </p:cSld>
-  <p:clrMapOvr>
-    <a:masterClrMapping/>
-  </p:clrMapOvr>
-</p:sld>
-</file>
-
-<file path=ppt/slides/slide29.xml><?xml version="1.0" encoding="utf-8"?>
-<p:sld xmlns:a="http://schemas.openxmlformats.org/drawingml/2006/main" xmlns:r="http://schemas.openxmlformats.org/officeDocument/2006/relationships" xmlns:p="http://schemas.openxmlformats.org/presentationml/2006/main">
-  <p:cSld>
-    <p:spTree>
-      <p:nvGrpSpPr>
-        <p:cNvPr id="1" name=""/>
-        <p:cNvGrpSpPr/>
-        <p:nvPr/>
-      </p:nvGrpSpPr>
-      <p:grpSpPr>
-        <a:xfrm>
-          <a:off x="0" y="0"/>
-          <a:ext cx="0" cy="0"/>
-          <a:chOff x="0" y="0"/>
-          <a:chExt cx="0" cy="0"/>
-        </a:xfrm>
-      </p:grpSpPr>
-      <p:sp>
-        <p:nvSpPr>
-          <p:cNvPr id="2" name="Title 1">
-            <a:extLst>
-              <a:ext uri="{FF2B5EF4-FFF2-40B4-BE49-F238E27FC236}">
-                <a16:creationId xmlns:a16="http://schemas.microsoft.com/office/drawing/2014/main" id="{10F11F58-1B02-2B5E-16AB-F41892BB3093}"/>
-              </a:ext>
-            </a:extLst>
-          </p:cNvPr>
-          <p:cNvSpPr>
-            <a:spLocks noGrp="1"/>
-          </p:cNvSpPr>
-          <p:nvPr>
-            <p:ph type="title"/>
-          </p:nvPr>
-        </p:nvSpPr>
-        <p:spPr>
-          <a:xfrm>
-            <a:off x="520911" y="427020"/>
-            <a:ext cx="8343789" cy="636062"/>
-          </a:xfrm>
-        </p:spPr>
-        <p:txBody>
-          <a:bodyPr>
-            <a:normAutofit/>
-          </a:bodyPr>
-          <a:lstStyle/>
-          <a:p>
-            <a:r>
-              <a:rPr lang="en-GB" sz="3200" b="1" u="sng" dirty="0" err="1"/>
-              <a:t>Codespaces</a:t>
-            </a:r>
-            <a:endParaRPr lang="en-GB" sz="3200" b="1" u="sng" dirty="0"/>
-          </a:p>
-        </p:txBody>
-      </p:sp>
-      <p:sp>
-        <p:nvSpPr>
-          <p:cNvPr id="5" name="Slide Number Placeholder 4">
-            <a:extLst>
-              <a:ext uri="{FF2B5EF4-FFF2-40B4-BE49-F238E27FC236}">
-                <a16:creationId xmlns:a16="http://schemas.microsoft.com/office/drawing/2014/main" id="{A6521F9B-D9FC-06E8-07A8-52FCF507297F}"/>
-              </a:ext>
-            </a:extLst>
-          </p:cNvPr>
-          <p:cNvSpPr>
-            <a:spLocks noGrp="1"/>
-          </p:cNvSpPr>
-          <p:nvPr>
-            <p:ph type="sldNum" sz="quarter" idx="12"/>
-          </p:nvPr>
-        </p:nvSpPr>
-        <p:spPr/>
-        <p:txBody>
-          <a:bodyPr/>
-          <a:lstStyle/>
-          <a:p>
-            <a:fld id="{CC057153-B650-4DEB-B370-79DDCFDCE934}" type="slidenum">
-              <a:rPr lang="en-US" dirty="0"/>
-              <a:pPr/>
-              <a:t>29</a:t>
-            </a:fld>
-            <a:endParaRPr lang="en-GB"/>
-          </a:p>
-        </p:txBody>
-      </p:sp>
-      <p:pic>
-        <p:nvPicPr>
-          <p:cNvPr id="11" name="sde_fit.png" descr="Diagram: code moves from GitHub to the Secure Data Environment; real data never leaves it">
-            <a:extLst>
-              <a:ext uri="{FF2B5EF4-FFF2-40B4-BE49-F238E27FC236}">
-                <a16:creationId xmlns:a16="http://schemas.microsoft.com/office/drawing/2014/main" id="{7CC9D1C3-7383-4B34-B40C-23D046CA4B56}"/>
-              </a:ext>
-            </a:extLst>
-          </p:cNvPr>
-          <p:cNvPicPr>
-            <a:picLocks noChangeAspect="1"/>
-          </p:cNvPicPr>
-          <p:nvPr/>
-        </p:nvPicPr>
-        <p:blipFill>
-          <a:blip r:embed="rId2"/>
-          <a:stretch>
-            <a:fillRect/>
-          </a:stretch>
-        </p:blipFill>
-        <p:spPr>
-          <a:xfrm>
-            <a:off x="2855978" y="1653560"/>
-            <a:ext cx="5583291" cy="4187468"/>
-          </a:xfrm>
-          <a:prstGeom prst="rect">
-            <a:avLst/>
-          </a:prstGeom>
-        </p:spPr>
-      </p:pic>
-    </p:spTree>
-    <p:extLst>
-      <p:ext uri="{BB962C8B-B14F-4D97-AF65-F5344CB8AC3E}">
-        <p14:creationId xmlns:p14="http://schemas.microsoft.com/office/powerpoint/2010/main" val="4222023107"/>
       </p:ext>
     </p:extLst>
   </p:cSld>
@@ -20000,7 +20194,7 @@
           <p:cNvPr id="2" name="Title 1">
             <a:extLst>
               <a:ext uri="{FF2B5EF4-FFF2-40B4-BE49-F238E27FC236}">
-                <a16:creationId xmlns:a16="http://schemas.microsoft.com/office/drawing/2014/main" id="{174918DD-3FB4-ECF1-7474-46B34CAE7FD5}"/>
+                <a16:creationId xmlns:a16="http://schemas.microsoft.com/office/drawing/2014/main" id="{10F11F58-1B02-2B5E-16AB-F41892BB3093}"/>
               </a:ext>
             </a:extLst>
           </p:cNvPr>
@@ -20008,34 +20202,93 @@
             <a:spLocks noGrp="1"/>
           </p:cNvSpPr>
           <p:nvPr>
-            <p:ph type="ctrTitle"/>
+            <p:ph type="title"/>
           </p:nvPr>
         </p:nvSpPr>
         <p:spPr>
           <a:xfrm>
-            <a:off x="758703" y="2427434"/>
-            <a:ext cx="10007063" cy="1661993"/>
-          </a:xfrm>
-        </p:spPr>
+            <a:off x="520911" y="427020"/>
+            <a:ext cx="8343789" cy="636062"/>
+          </a:xfrm>
+        </p:spPr>
+        <p:txBody>
+          <a:bodyPr>
+            <a:normAutofit/>
+          </a:bodyPr>
+          <a:lstStyle/>
+          <a:p>
+            <a:r>
+              <a:rPr lang="en-GB" sz="3200" b="1" u="sng" dirty="0" err="1"/>
+              <a:t>Codespaces</a:t>
+            </a:r>
+            <a:endParaRPr lang="en-GB" sz="3200" b="1" u="sng" dirty="0"/>
+          </a:p>
+        </p:txBody>
+      </p:sp>
+      <p:sp>
+        <p:nvSpPr>
+          <p:cNvPr id="5" name="Slide Number Placeholder 4">
+            <a:extLst>
+              <a:ext uri="{FF2B5EF4-FFF2-40B4-BE49-F238E27FC236}">
+                <a16:creationId xmlns:a16="http://schemas.microsoft.com/office/drawing/2014/main" id="{A6521F9B-D9FC-06E8-07A8-52FCF507297F}"/>
+              </a:ext>
+            </a:extLst>
+          </p:cNvPr>
+          <p:cNvSpPr>
+            <a:spLocks noGrp="1"/>
+          </p:cNvSpPr>
+          <p:nvPr>
+            <p:ph type="sldNum" sz="quarter" idx="12"/>
+          </p:nvPr>
+        </p:nvSpPr>
+        <p:spPr/>
         <p:txBody>
           <a:bodyPr/>
           <a:lstStyle/>
           <a:p>
-            <a:r>
-              <a:rPr lang="en-GB" dirty="0" err="1"/>
-              <a:t>Codespace</a:t>
-            </a:r>
-            <a:r>
-              <a:rPr lang="en-GB" dirty="0"/>
-              <a:t> Walkthrough</a:t>
-            </a:r>
-          </a:p>
-        </p:txBody>
-      </p:sp>
+            <a:fld id="{CC057153-B650-4DEB-B370-79DDCFDCE934}" type="slidenum">
+              <a:rPr lang="en-US" dirty="0"/>
+              <a:pPr/>
+              <a:t>30</a:t>
+            </a:fld>
+            <a:endParaRPr lang="en-GB"/>
+          </a:p>
+        </p:txBody>
+      </p:sp>
+      <p:pic>
+        <p:nvPicPr>
+          <p:cNvPr id="11" name="sde_fit.png" descr="Diagram: code moves from GitHub to the Secure Data Environment; real data never leaves it">
+            <a:extLst>
+              <a:ext uri="{FF2B5EF4-FFF2-40B4-BE49-F238E27FC236}">
+                <a16:creationId xmlns:a16="http://schemas.microsoft.com/office/drawing/2014/main" id="{7CC9D1C3-7383-4B34-B40C-23D046CA4B56}"/>
+              </a:ext>
+            </a:extLst>
+          </p:cNvPr>
+          <p:cNvPicPr>
+            <a:picLocks noChangeAspect="1"/>
+          </p:cNvPicPr>
+          <p:nvPr/>
+        </p:nvPicPr>
+        <p:blipFill>
+          <a:blip r:embed="rId2"/>
+          <a:stretch>
+            <a:fillRect/>
+          </a:stretch>
+        </p:blipFill>
+        <p:spPr>
+          <a:xfrm>
+            <a:off x="2855978" y="1653560"/>
+            <a:ext cx="5583291" cy="4187468"/>
+          </a:xfrm>
+          <a:prstGeom prst="rect">
+            <a:avLst/>
+          </a:prstGeom>
+        </p:spPr>
+      </p:pic>
     </p:spTree>
     <p:extLst>
       <p:ext uri="{BB962C8B-B14F-4D97-AF65-F5344CB8AC3E}">
-        <p14:creationId xmlns:p14="http://schemas.microsoft.com/office/powerpoint/2010/main" val="1236093073"/>
+        <p14:creationId xmlns:p14="http://schemas.microsoft.com/office/powerpoint/2010/main" val="4222023107"/>
       </p:ext>
     </p:extLst>
   </p:cSld>
@@ -20064,10 +20317,10 @@
       </p:grpSpPr>
       <p:sp>
         <p:nvSpPr>
-          <p:cNvPr id="5" name="Slide Number Placeholder 4">
-            <a:extLst>
-              <a:ext uri="{FF2B5EF4-FFF2-40B4-BE49-F238E27FC236}">
-                <a16:creationId xmlns:a16="http://schemas.microsoft.com/office/drawing/2014/main" id="{A6521F9B-D9FC-06E8-07A8-52FCF507297F}"/>
+          <p:cNvPr id="2" name="Title 1">
+            <a:extLst>
+              <a:ext uri="{FF2B5EF4-FFF2-40B4-BE49-F238E27FC236}">
+                <a16:creationId xmlns:a16="http://schemas.microsoft.com/office/drawing/2014/main" id="{174918DD-3FB4-ECF1-7474-46B34CAE7FD5}"/>
               </a:ext>
             </a:extLst>
           </p:cNvPr>
@@ -20075,436 +20328,34 @@
             <a:spLocks noGrp="1"/>
           </p:cNvSpPr>
           <p:nvPr>
-            <p:ph type="sldNum" sz="quarter" idx="12"/>
+            <p:ph type="ctrTitle"/>
           </p:nvPr>
         </p:nvSpPr>
-        <p:spPr/>
+        <p:spPr>
+          <a:xfrm>
+            <a:off x="758703" y="2427434"/>
+            <a:ext cx="10007063" cy="1661993"/>
+          </a:xfrm>
+        </p:spPr>
         <p:txBody>
           <a:bodyPr/>
           <a:lstStyle/>
           <a:p>
-            <a:fld id="{CC057153-B650-4DEB-B370-79DDCFDCE934}" type="slidenum">
-              <a:rPr lang="en-US" dirty="0"/>
-              <a:pPr/>
-              <a:t>31</a:t>
-            </a:fld>
-            <a:endParaRPr lang="en-GB"/>
-          </a:p>
-        </p:txBody>
-      </p:sp>
-      <p:sp>
-        <p:nvSpPr>
-          <p:cNvPr id="2" name="Title 1">
-            <a:extLst>
-              <a:ext uri="{FF2B5EF4-FFF2-40B4-BE49-F238E27FC236}">
-                <a16:creationId xmlns:a16="http://schemas.microsoft.com/office/drawing/2014/main" id="{10F11F58-1B02-2B5E-16AB-F41892BB3093}"/>
-              </a:ext>
-            </a:extLst>
-          </p:cNvPr>
-          <p:cNvSpPr>
-            <a:spLocks noGrp="1"/>
-          </p:cNvSpPr>
-          <p:nvPr>
-            <p:ph type="title"/>
-          </p:nvPr>
-        </p:nvSpPr>
-        <p:spPr>
-          <a:xfrm>
-            <a:off x="685800" y="516588"/>
-            <a:ext cx="3436838" cy="498598"/>
-          </a:xfrm>
-        </p:spPr>
-        <p:txBody>
-          <a:bodyPr>
-            <a:normAutofit/>
-          </a:bodyPr>
-          <a:lstStyle/>
-          <a:p>
-            <a:r>
-              <a:rPr lang="en-GB" sz="3200" b="1" u="sng" dirty="0"/>
-              <a:t>Exercise Checkpoint 4 </a:t>
-            </a:r>
-          </a:p>
-        </p:txBody>
-      </p:sp>
-      <p:sp>
-        <p:nvSpPr>
-          <p:cNvPr id="3" name="Subtitle 2">
-            <a:extLst>
-              <a:ext uri="{FF2B5EF4-FFF2-40B4-BE49-F238E27FC236}">
-                <a16:creationId xmlns:a16="http://schemas.microsoft.com/office/drawing/2014/main" id="{A19A6EDB-FD47-0120-E2F7-AE5FAB5706B3}"/>
-              </a:ext>
-            </a:extLst>
-          </p:cNvPr>
-          <p:cNvSpPr>
-            <a:spLocks noGrp="1"/>
-          </p:cNvSpPr>
-          <p:nvPr>
-            <p:ph type="body" sz="quarter" idx="14"/>
-          </p:nvPr>
-        </p:nvSpPr>
-        <p:spPr/>
-        <p:txBody>
-          <a:bodyPr vert="horz" lIns="91440" tIns="45720" rIns="91440" bIns="45720" rtlCol="0" anchor="t">
-            <a:normAutofit fontScale="32500" lnSpcReduction="20000"/>
-          </a:bodyPr>
-          <a:lstStyle/>
-          <a:p>
-            <a:pPr lvl="1"/>
-            <a:br>
+            <a:r>
+              <a:rPr lang="en-GB" dirty="0" err="1"/>
+              <a:t>Codespace</a:t>
+            </a:r>
+            <a:r>
               <a:rPr lang="en-GB" dirty="0"/>
-            </a:br>
-            <a:endParaRPr lang="en-GB" dirty="0"/>
-          </a:p>
-          <a:p>
-            <a:pPr marL="285750" indent="-285750">
-              <a:buChar char="•"/>
-            </a:pPr>
-            <a:endParaRPr lang="en-GB" dirty="0"/>
-          </a:p>
-          <a:p>
-            <a:pPr marL="514350" lvl="1" indent="-285750">
-              <a:buFont typeface="Courier New" panose="020B0604020202020204" pitchFamily="34" charset="0"/>
-              <a:buChar char="o"/>
-            </a:pPr>
-            <a:endParaRPr lang="en-GB" dirty="0"/>
-          </a:p>
-          <a:p>
-            <a:pPr marL="285750" indent="-285750">
-              <a:buFont typeface="Arial" panose="020B0604020202020204" pitchFamily="34" charset="0"/>
-              <a:buChar char="•"/>
-            </a:pPr>
-            <a:endParaRPr lang="en-GB" dirty="0"/>
-          </a:p>
-        </p:txBody>
-      </p:sp>
-      <p:sp>
-        <p:nvSpPr>
-          <p:cNvPr id="8" name="TextBox 7">
-            <a:extLst>
-              <a:ext uri="{FF2B5EF4-FFF2-40B4-BE49-F238E27FC236}">
-                <a16:creationId xmlns:a16="http://schemas.microsoft.com/office/drawing/2014/main" id="{6D1779D3-41A0-4920-B5C8-8AA53282B9B8}"/>
-              </a:ext>
-            </a:extLst>
-          </p:cNvPr>
-          <p:cNvSpPr txBox="1"/>
-          <p:nvPr/>
-        </p:nvSpPr>
-        <p:spPr>
-          <a:xfrm>
-            <a:off x="609600" y="1611755"/>
-            <a:ext cx="5689600" cy="5909310"/>
-          </a:xfrm>
-          <a:prstGeom prst="rect">
-            <a:avLst/>
-          </a:prstGeom>
-          <a:noFill/>
-        </p:spPr>
-        <p:txBody>
-          <a:bodyPr wrap="square" rtlCol="0">
-            <a:spAutoFit/>
-          </a:bodyPr>
-          <a:lstStyle/>
-          <a:p>
-            <a:pPr marL="285750" indent="-285750">
-              <a:buFont typeface="Arial" panose="020B0604020202020204" pitchFamily="34" charset="0"/>
-              <a:buChar char="•"/>
-            </a:pPr>
-            <a:r>
-              <a:rPr lang="en-GB" b="1" dirty="0">
-                <a:solidFill>
-                  <a:schemeClr val="bg1"/>
-                </a:solidFill>
-              </a:rPr>
-              <a:t>Open up a </a:t>
-            </a:r>
-            <a:r>
-              <a:rPr lang="en-GB" b="1" dirty="0" err="1">
-                <a:solidFill>
-                  <a:schemeClr val="bg1"/>
-                </a:solidFill>
-              </a:rPr>
-              <a:t>codespace</a:t>
-            </a:r>
-            <a:r>
-              <a:rPr lang="en-GB" b="1" dirty="0">
-                <a:solidFill>
-                  <a:schemeClr val="bg1"/>
-                </a:solidFill>
-              </a:rPr>
-              <a:t> in your feature branch and use </a:t>
-            </a:r>
-            <a:r>
-              <a:rPr lang="en-GB" b="1" dirty="0" err="1">
-                <a:solidFill>
-                  <a:schemeClr val="bg1"/>
-                </a:solidFill>
-              </a:rPr>
-              <a:t>CoPilot</a:t>
-            </a:r>
-            <a:r>
-              <a:rPr lang="en-GB" b="1" dirty="0">
-                <a:solidFill>
-                  <a:schemeClr val="bg1"/>
-                </a:solidFill>
-              </a:rPr>
-              <a:t> as an agent to help troubleshoot a badly written SQL script. </a:t>
-            </a:r>
-          </a:p>
-          <a:p>
-            <a:pPr marL="285750" indent="-285750">
-              <a:buFont typeface="Arial" panose="020B0604020202020204" pitchFamily="34" charset="0"/>
-              <a:buChar char="•"/>
-            </a:pPr>
-            <a:endParaRPr lang="en-GB" b="1" dirty="0">
-              <a:solidFill>
-                <a:schemeClr val="bg1"/>
-              </a:solidFill>
-            </a:endParaRPr>
-          </a:p>
-          <a:p>
-            <a:pPr marL="800100" lvl="1" indent="-342900">
-              <a:buFont typeface="+mj-lt"/>
-              <a:buAutoNum type="arabicPeriod"/>
-            </a:pPr>
-            <a:r>
-              <a:rPr lang="en-GB" dirty="0">
-                <a:solidFill>
-                  <a:schemeClr val="bg1"/>
-                </a:solidFill>
-              </a:rPr>
-              <a:t>Create a new </a:t>
-            </a:r>
-            <a:r>
-              <a:rPr lang="en-GB" dirty="0" err="1">
-                <a:solidFill>
-                  <a:schemeClr val="bg1"/>
-                </a:solidFill>
-              </a:rPr>
-              <a:t>codespace</a:t>
-            </a:r>
-            <a:r>
-              <a:rPr lang="en-GB" dirty="0">
-                <a:solidFill>
-                  <a:schemeClr val="bg1"/>
-                </a:solidFill>
-              </a:rPr>
-              <a:t> in your feature branch in GitHub. Your </a:t>
-            </a:r>
-            <a:r>
-              <a:rPr lang="en-GB" dirty="0" err="1">
-                <a:solidFill>
-                  <a:schemeClr val="bg1"/>
-                </a:solidFill>
-              </a:rPr>
-              <a:t>codespace</a:t>
-            </a:r>
-            <a:r>
-              <a:rPr lang="en-GB" dirty="0">
-                <a:solidFill>
-                  <a:schemeClr val="bg1"/>
-                </a:solidFill>
-              </a:rPr>
-              <a:t> URL is randomly generated so will not be the same as your neighbour!</a:t>
-            </a:r>
-          </a:p>
-          <a:p>
-            <a:pPr marL="800100" lvl="1" indent="-342900">
-              <a:buFont typeface="+mj-lt"/>
-              <a:buAutoNum type="arabicPeriod"/>
-            </a:pPr>
-            <a:r>
-              <a:rPr lang="en-GB" dirty="0">
-                <a:solidFill>
-                  <a:schemeClr val="bg1"/>
-                </a:solidFill>
-              </a:rPr>
-              <a:t>In your participant folder, there is a .</a:t>
-            </a:r>
-            <a:r>
-              <a:rPr lang="en-GB" dirty="0" err="1">
-                <a:solidFill>
-                  <a:schemeClr val="bg1"/>
-                </a:solidFill>
-              </a:rPr>
-              <a:t>sql</a:t>
-            </a:r>
-            <a:r>
-              <a:rPr lang="en-GB" dirty="0">
-                <a:solidFill>
-                  <a:schemeClr val="bg1"/>
-                </a:solidFill>
-              </a:rPr>
-              <a:t> file. Use </a:t>
-            </a:r>
-            <a:r>
-              <a:rPr lang="en-GB" dirty="0" err="1">
-                <a:solidFill>
-                  <a:schemeClr val="bg1"/>
-                </a:solidFill>
-              </a:rPr>
-              <a:t>CoPilot</a:t>
-            </a:r>
-            <a:r>
-              <a:rPr lang="en-GB" dirty="0">
-                <a:solidFill>
-                  <a:schemeClr val="bg1"/>
-                </a:solidFill>
-              </a:rPr>
-              <a:t> in Ask mode to review the file.</a:t>
-            </a:r>
-          </a:p>
-          <a:p>
-            <a:pPr marL="800100" lvl="1" indent="-342900">
-              <a:buFont typeface="+mj-lt"/>
-              <a:buAutoNum type="arabicPeriod"/>
-            </a:pPr>
-            <a:r>
-              <a:rPr lang="en-GB" dirty="0">
-                <a:solidFill>
-                  <a:schemeClr val="bg1"/>
-                </a:solidFill>
-              </a:rPr>
-              <a:t>Revert </a:t>
-            </a:r>
-            <a:r>
-              <a:rPr lang="en-GB" dirty="0" err="1">
-                <a:solidFill>
-                  <a:schemeClr val="bg1"/>
-                </a:solidFill>
-              </a:rPr>
-              <a:t>CoPilot</a:t>
-            </a:r>
-            <a:r>
-              <a:rPr lang="en-GB" dirty="0">
-                <a:solidFill>
-                  <a:schemeClr val="bg1"/>
-                </a:solidFill>
-              </a:rPr>
-              <a:t> into Agent mode and prompt it to fix the errors in your file. </a:t>
-            </a:r>
-          </a:p>
-          <a:p>
-            <a:pPr marL="800100" lvl="1" indent="-342900">
-              <a:buFont typeface="+mj-lt"/>
-              <a:buAutoNum type="arabicPeriod"/>
-            </a:pPr>
-            <a:r>
-              <a:rPr lang="en-GB" dirty="0">
-                <a:solidFill>
-                  <a:schemeClr val="bg1"/>
-                </a:solidFill>
-              </a:rPr>
-              <a:t>Ask </a:t>
-            </a:r>
-            <a:r>
-              <a:rPr lang="en-GB" dirty="0" err="1">
-                <a:solidFill>
-                  <a:schemeClr val="bg1"/>
-                </a:solidFill>
-              </a:rPr>
-              <a:t>CoPilot</a:t>
-            </a:r>
-            <a:r>
-              <a:rPr lang="en-GB" dirty="0">
-                <a:solidFill>
-                  <a:schemeClr val="bg1"/>
-                </a:solidFill>
-              </a:rPr>
-              <a:t> to generate a document to explain the SQL code. </a:t>
-            </a:r>
-          </a:p>
-          <a:p>
-            <a:pPr marL="800100" lvl="1" indent="-342900">
-              <a:buFont typeface="+mj-lt"/>
-              <a:buAutoNum type="arabicPeriod"/>
-            </a:pPr>
-            <a:r>
-              <a:rPr lang="en-GB" dirty="0">
-                <a:solidFill>
-                  <a:schemeClr val="bg1"/>
-                </a:solidFill>
-              </a:rPr>
-              <a:t>Commit and push your changes out of the </a:t>
-            </a:r>
-            <a:r>
-              <a:rPr lang="en-GB" dirty="0" err="1">
-                <a:solidFill>
-                  <a:schemeClr val="bg1"/>
-                </a:solidFill>
-              </a:rPr>
-              <a:t>codespace</a:t>
-            </a:r>
-            <a:r>
-              <a:rPr lang="en-GB" dirty="0">
-                <a:solidFill>
-                  <a:schemeClr val="bg1"/>
-                </a:solidFill>
-              </a:rPr>
-              <a:t> into GitHub. </a:t>
-            </a:r>
-          </a:p>
-          <a:p>
-            <a:pPr marL="800100" lvl="1" indent="-342900">
-              <a:buFont typeface="+mj-lt"/>
-              <a:buAutoNum type="arabicPeriod"/>
-            </a:pPr>
-            <a:endParaRPr lang="en-GB" dirty="0">
-              <a:solidFill>
-                <a:schemeClr val="bg1"/>
-              </a:solidFill>
-            </a:endParaRPr>
-          </a:p>
-          <a:p>
-            <a:pPr marL="800100" lvl="1" indent="-342900">
-              <a:buFont typeface="+mj-lt"/>
-              <a:buAutoNum type="arabicPeriod"/>
-            </a:pPr>
-            <a:endParaRPr lang="en-GB" b="1" dirty="0">
-              <a:solidFill>
-                <a:schemeClr val="bg1"/>
-              </a:solidFill>
-            </a:endParaRPr>
-          </a:p>
-          <a:p>
-            <a:pPr marL="800100" lvl="1" indent="-342900">
-              <a:buFont typeface="+mj-lt"/>
-              <a:buAutoNum type="arabicPeriod"/>
-            </a:pPr>
-            <a:endParaRPr lang="en-GB" dirty="0">
-              <a:solidFill>
-                <a:schemeClr val="bg1"/>
-              </a:solidFill>
-              <a:latin typeface="Mona Sans VF"/>
-            </a:endParaRPr>
-          </a:p>
-          <a:p>
-            <a:pPr marL="800100" lvl="1" indent="-342900">
-              <a:buFont typeface="+mj-lt"/>
-              <a:buAutoNum type="arabicPeriod"/>
-            </a:pPr>
-            <a:endParaRPr lang="en-GB" dirty="0">
-              <a:solidFill>
-                <a:schemeClr val="bg1"/>
-              </a:solidFill>
-              <a:latin typeface="Mona Sans VF"/>
-            </a:endParaRPr>
-          </a:p>
-          <a:p>
-            <a:pPr lvl="1"/>
-            <a:endParaRPr lang="en-GB" dirty="0">
-              <a:solidFill>
-                <a:schemeClr val="bg1"/>
-              </a:solidFill>
-              <a:latin typeface="Mona Sans VF"/>
-            </a:endParaRPr>
+              <a:t> Walkthrough</a:t>
+            </a:r>
           </a:p>
         </p:txBody>
       </p:sp>
     </p:spTree>
     <p:extLst>
       <p:ext uri="{BB962C8B-B14F-4D97-AF65-F5344CB8AC3E}">
-        <p14:creationId xmlns:p14="http://schemas.microsoft.com/office/powerpoint/2010/main" val="234507054"/>
+        <p14:creationId xmlns:p14="http://schemas.microsoft.com/office/powerpoint/2010/main" val="1236093073"/>
       </p:ext>
     </p:extLst>
   </p:cSld>
@@ -20533,10 +20384,10 @@
       </p:grpSpPr>
       <p:sp>
         <p:nvSpPr>
-          <p:cNvPr id="2" name="Title 1">
-            <a:extLst>
-              <a:ext uri="{FF2B5EF4-FFF2-40B4-BE49-F238E27FC236}">
-                <a16:creationId xmlns:a16="http://schemas.microsoft.com/office/drawing/2014/main" id="{174918DD-3FB4-ECF1-7474-46B34CAE7FD5}"/>
+          <p:cNvPr id="5" name="Slide Number Placeholder 4">
+            <a:extLst>
+              <a:ext uri="{FF2B5EF4-FFF2-40B4-BE49-F238E27FC236}">
+                <a16:creationId xmlns:a16="http://schemas.microsoft.com/office/drawing/2014/main" id="{A6521F9B-D9FC-06E8-07A8-52FCF507297F}"/>
               </a:ext>
             </a:extLst>
           </p:cNvPr>
@@ -20544,30 +20395,436 @@
             <a:spLocks noGrp="1"/>
           </p:cNvSpPr>
           <p:nvPr>
-            <p:ph type="ctrTitle"/>
+            <p:ph type="sldNum" sz="quarter" idx="12"/>
           </p:nvPr>
         </p:nvSpPr>
-        <p:spPr>
-          <a:xfrm>
-            <a:off x="758703" y="2427434"/>
-            <a:ext cx="10007063" cy="830997"/>
-          </a:xfrm>
-        </p:spPr>
+        <p:spPr/>
         <p:txBody>
           <a:bodyPr/>
           <a:lstStyle/>
           <a:p>
-            <a:r>
+            <a:fld id="{CC057153-B650-4DEB-B370-79DDCFDCE934}" type="slidenum">
+              <a:rPr lang="en-US" dirty="0"/>
+              <a:pPr/>
+              <a:t>32</a:t>
+            </a:fld>
+            <a:endParaRPr lang="en-GB"/>
+          </a:p>
+        </p:txBody>
+      </p:sp>
+      <p:sp>
+        <p:nvSpPr>
+          <p:cNvPr id="2" name="Title 1">
+            <a:extLst>
+              <a:ext uri="{FF2B5EF4-FFF2-40B4-BE49-F238E27FC236}">
+                <a16:creationId xmlns:a16="http://schemas.microsoft.com/office/drawing/2014/main" id="{10F11F58-1B02-2B5E-16AB-F41892BB3093}"/>
+              </a:ext>
+            </a:extLst>
+          </p:cNvPr>
+          <p:cNvSpPr>
+            <a:spLocks noGrp="1"/>
+          </p:cNvSpPr>
+          <p:nvPr>
+            <p:ph type="title"/>
+          </p:nvPr>
+        </p:nvSpPr>
+        <p:spPr>
+          <a:xfrm>
+            <a:off x="685800" y="516588"/>
+            <a:ext cx="3436838" cy="498598"/>
+          </a:xfrm>
+        </p:spPr>
+        <p:txBody>
+          <a:bodyPr>
+            <a:normAutofit/>
+          </a:bodyPr>
+          <a:lstStyle/>
+          <a:p>
+            <a:r>
+              <a:rPr lang="en-GB" sz="3200" b="1" u="sng" dirty="0"/>
+              <a:t>Exercise Checkpoint 4 </a:t>
+            </a:r>
+          </a:p>
+        </p:txBody>
+      </p:sp>
+      <p:sp>
+        <p:nvSpPr>
+          <p:cNvPr id="3" name="Subtitle 2">
+            <a:extLst>
+              <a:ext uri="{FF2B5EF4-FFF2-40B4-BE49-F238E27FC236}">
+                <a16:creationId xmlns:a16="http://schemas.microsoft.com/office/drawing/2014/main" id="{A19A6EDB-FD47-0120-E2F7-AE5FAB5706B3}"/>
+              </a:ext>
+            </a:extLst>
+          </p:cNvPr>
+          <p:cNvSpPr>
+            <a:spLocks noGrp="1"/>
+          </p:cNvSpPr>
+          <p:nvPr>
+            <p:ph type="body" sz="quarter" idx="14"/>
+          </p:nvPr>
+        </p:nvSpPr>
+        <p:spPr/>
+        <p:txBody>
+          <a:bodyPr vert="horz" lIns="91440" tIns="45720" rIns="91440" bIns="45720" rtlCol="0" anchor="t">
+            <a:normAutofit fontScale="32500" lnSpcReduction="20000"/>
+          </a:bodyPr>
+          <a:lstStyle/>
+          <a:p>
+            <a:pPr lvl="1"/>
+            <a:br>
               <a:rPr lang="en-GB" dirty="0"/>
-              <a:t>Other GitHub products</a:t>
-            </a:r>
+            </a:br>
+            <a:endParaRPr lang="en-GB" dirty="0"/>
+          </a:p>
+          <a:p>
+            <a:pPr marL="285750" indent="-285750">
+              <a:buChar char="•"/>
+            </a:pPr>
+            <a:endParaRPr lang="en-GB" dirty="0"/>
+          </a:p>
+          <a:p>
+            <a:pPr marL="514350" lvl="1" indent="-285750">
+              <a:buFont typeface="Courier New" panose="020B0604020202020204" pitchFamily="34" charset="0"/>
+              <a:buChar char="o"/>
+            </a:pPr>
+            <a:endParaRPr lang="en-GB" dirty="0"/>
+          </a:p>
+          <a:p>
+            <a:pPr marL="285750" indent="-285750">
+              <a:buFont typeface="Arial" panose="020B0604020202020204" pitchFamily="34" charset="0"/>
+              <a:buChar char="•"/>
+            </a:pPr>
+            <a:endParaRPr lang="en-GB" dirty="0"/>
+          </a:p>
+        </p:txBody>
+      </p:sp>
+      <p:sp>
+        <p:nvSpPr>
+          <p:cNvPr id="8" name="TextBox 7">
+            <a:extLst>
+              <a:ext uri="{FF2B5EF4-FFF2-40B4-BE49-F238E27FC236}">
+                <a16:creationId xmlns:a16="http://schemas.microsoft.com/office/drawing/2014/main" id="{6D1779D3-41A0-4920-B5C8-8AA53282B9B8}"/>
+              </a:ext>
+            </a:extLst>
+          </p:cNvPr>
+          <p:cNvSpPr txBox="1"/>
+          <p:nvPr/>
+        </p:nvSpPr>
+        <p:spPr>
+          <a:xfrm>
+            <a:off x="609600" y="1611755"/>
+            <a:ext cx="5689600" cy="5909310"/>
+          </a:xfrm>
+          <a:prstGeom prst="rect">
+            <a:avLst/>
+          </a:prstGeom>
+          <a:noFill/>
+        </p:spPr>
+        <p:txBody>
+          <a:bodyPr wrap="square" rtlCol="0">
+            <a:spAutoFit/>
+          </a:bodyPr>
+          <a:lstStyle/>
+          <a:p>
+            <a:pPr marL="285750" indent="-285750">
+              <a:buFont typeface="Arial" panose="020B0604020202020204" pitchFamily="34" charset="0"/>
+              <a:buChar char="•"/>
+            </a:pPr>
+            <a:r>
+              <a:rPr lang="en-GB" b="1" dirty="0">
+                <a:solidFill>
+                  <a:schemeClr val="bg1"/>
+                </a:solidFill>
+              </a:rPr>
+              <a:t>Open up a </a:t>
+            </a:r>
+            <a:r>
+              <a:rPr lang="en-GB" b="1" dirty="0" err="1">
+                <a:solidFill>
+                  <a:schemeClr val="bg1"/>
+                </a:solidFill>
+              </a:rPr>
+              <a:t>codespace</a:t>
+            </a:r>
+            <a:r>
+              <a:rPr lang="en-GB" b="1" dirty="0">
+                <a:solidFill>
+                  <a:schemeClr val="bg1"/>
+                </a:solidFill>
+              </a:rPr>
+              <a:t> in your feature branch and use </a:t>
+            </a:r>
+            <a:r>
+              <a:rPr lang="en-GB" b="1" dirty="0" err="1">
+                <a:solidFill>
+                  <a:schemeClr val="bg1"/>
+                </a:solidFill>
+              </a:rPr>
+              <a:t>CoPilot</a:t>
+            </a:r>
+            <a:r>
+              <a:rPr lang="en-GB" b="1" dirty="0">
+                <a:solidFill>
+                  <a:schemeClr val="bg1"/>
+                </a:solidFill>
+              </a:rPr>
+              <a:t> as an agent to help troubleshoot a badly written SQL script. </a:t>
+            </a:r>
+          </a:p>
+          <a:p>
+            <a:pPr marL="285750" indent="-285750">
+              <a:buFont typeface="Arial" panose="020B0604020202020204" pitchFamily="34" charset="0"/>
+              <a:buChar char="•"/>
+            </a:pPr>
+            <a:endParaRPr lang="en-GB" b="1" dirty="0">
+              <a:solidFill>
+                <a:schemeClr val="bg1"/>
+              </a:solidFill>
+            </a:endParaRPr>
+          </a:p>
+          <a:p>
+            <a:pPr marL="800100" lvl="1" indent="-342900">
+              <a:buFont typeface="+mj-lt"/>
+              <a:buAutoNum type="arabicPeriod"/>
+            </a:pPr>
+            <a:r>
+              <a:rPr lang="en-GB" dirty="0">
+                <a:solidFill>
+                  <a:schemeClr val="bg1"/>
+                </a:solidFill>
+              </a:rPr>
+              <a:t>Create a new </a:t>
+            </a:r>
+            <a:r>
+              <a:rPr lang="en-GB" dirty="0" err="1">
+                <a:solidFill>
+                  <a:schemeClr val="bg1"/>
+                </a:solidFill>
+              </a:rPr>
+              <a:t>codespace</a:t>
+            </a:r>
+            <a:r>
+              <a:rPr lang="en-GB" dirty="0">
+                <a:solidFill>
+                  <a:schemeClr val="bg1"/>
+                </a:solidFill>
+              </a:rPr>
+              <a:t> in your feature branch in GitHub. Your </a:t>
+            </a:r>
+            <a:r>
+              <a:rPr lang="en-GB" dirty="0" err="1">
+                <a:solidFill>
+                  <a:schemeClr val="bg1"/>
+                </a:solidFill>
+              </a:rPr>
+              <a:t>codespace</a:t>
+            </a:r>
+            <a:r>
+              <a:rPr lang="en-GB" dirty="0">
+                <a:solidFill>
+                  <a:schemeClr val="bg1"/>
+                </a:solidFill>
+              </a:rPr>
+              <a:t> URL is randomly generated so will not be the same as your neighbour!</a:t>
+            </a:r>
+          </a:p>
+          <a:p>
+            <a:pPr marL="800100" lvl="1" indent="-342900">
+              <a:buFont typeface="+mj-lt"/>
+              <a:buAutoNum type="arabicPeriod"/>
+            </a:pPr>
+            <a:r>
+              <a:rPr lang="en-GB" dirty="0">
+                <a:solidFill>
+                  <a:schemeClr val="bg1"/>
+                </a:solidFill>
+              </a:rPr>
+              <a:t>In your participant folder, there is a .</a:t>
+            </a:r>
+            <a:r>
+              <a:rPr lang="en-GB" dirty="0" err="1">
+                <a:solidFill>
+                  <a:schemeClr val="bg1"/>
+                </a:solidFill>
+              </a:rPr>
+              <a:t>sql</a:t>
+            </a:r>
+            <a:r>
+              <a:rPr lang="en-GB" dirty="0">
+                <a:solidFill>
+                  <a:schemeClr val="bg1"/>
+                </a:solidFill>
+              </a:rPr>
+              <a:t> file. Use </a:t>
+            </a:r>
+            <a:r>
+              <a:rPr lang="en-GB" dirty="0" err="1">
+                <a:solidFill>
+                  <a:schemeClr val="bg1"/>
+                </a:solidFill>
+              </a:rPr>
+              <a:t>CoPilot</a:t>
+            </a:r>
+            <a:r>
+              <a:rPr lang="en-GB" dirty="0">
+                <a:solidFill>
+                  <a:schemeClr val="bg1"/>
+                </a:solidFill>
+              </a:rPr>
+              <a:t> in Ask mode to review the file.</a:t>
+            </a:r>
+          </a:p>
+          <a:p>
+            <a:pPr marL="800100" lvl="1" indent="-342900">
+              <a:buFont typeface="+mj-lt"/>
+              <a:buAutoNum type="arabicPeriod"/>
+            </a:pPr>
+            <a:r>
+              <a:rPr lang="en-GB" dirty="0">
+                <a:solidFill>
+                  <a:schemeClr val="bg1"/>
+                </a:solidFill>
+              </a:rPr>
+              <a:t>Revert </a:t>
+            </a:r>
+            <a:r>
+              <a:rPr lang="en-GB" dirty="0" err="1">
+                <a:solidFill>
+                  <a:schemeClr val="bg1"/>
+                </a:solidFill>
+              </a:rPr>
+              <a:t>CoPilot</a:t>
+            </a:r>
+            <a:r>
+              <a:rPr lang="en-GB" dirty="0">
+                <a:solidFill>
+                  <a:schemeClr val="bg1"/>
+                </a:solidFill>
+              </a:rPr>
+              <a:t> into Agent mode and prompt it to fix the errors in your file. </a:t>
+            </a:r>
+          </a:p>
+          <a:p>
+            <a:pPr marL="800100" lvl="1" indent="-342900">
+              <a:buFont typeface="+mj-lt"/>
+              <a:buAutoNum type="arabicPeriod"/>
+            </a:pPr>
+            <a:r>
+              <a:rPr lang="en-GB" dirty="0">
+                <a:solidFill>
+                  <a:schemeClr val="bg1"/>
+                </a:solidFill>
+              </a:rPr>
+              <a:t>Ask </a:t>
+            </a:r>
+            <a:r>
+              <a:rPr lang="en-GB" dirty="0" err="1">
+                <a:solidFill>
+                  <a:schemeClr val="bg1"/>
+                </a:solidFill>
+              </a:rPr>
+              <a:t>CoPilot</a:t>
+            </a:r>
+            <a:r>
+              <a:rPr lang="en-GB" dirty="0">
+                <a:solidFill>
+                  <a:schemeClr val="bg1"/>
+                </a:solidFill>
+              </a:rPr>
+              <a:t> to generate a document to explain the SQL code. </a:t>
+            </a:r>
+          </a:p>
+          <a:p>
+            <a:pPr marL="800100" lvl="1" indent="-342900">
+              <a:buFont typeface="+mj-lt"/>
+              <a:buAutoNum type="arabicPeriod"/>
+            </a:pPr>
+            <a:r>
+              <a:rPr lang="en-GB" dirty="0">
+                <a:solidFill>
+                  <a:schemeClr val="bg1"/>
+                </a:solidFill>
+              </a:rPr>
+              <a:t>Commit and push your changes out of the </a:t>
+            </a:r>
+            <a:r>
+              <a:rPr lang="en-GB" dirty="0" err="1">
+                <a:solidFill>
+                  <a:schemeClr val="bg1"/>
+                </a:solidFill>
+              </a:rPr>
+              <a:t>codespace</a:t>
+            </a:r>
+            <a:r>
+              <a:rPr lang="en-GB" dirty="0">
+                <a:solidFill>
+                  <a:schemeClr val="bg1"/>
+                </a:solidFill>
+              </a:rPr>
+              <a:t> into GitHub. </a:t>
+            </a:r>
+          </a:p>
+          <a:p>
+            <a:pPr marL="800100" lvl="1" indent="-342900">
+              <a:buFont typeface="+mj-lt"/>
+              <a:buAutoNum type="arabicPeriod"/>
+            </a:pPr>
+            <a:endParaRPr lang="en-GB" dirty="0">
+              <a:solidFill>
+                <a:schemeClr val="bg1"/>
+              </a:solidFill>
+            </a:endParaRPr>
+          </a:p>
+          <a:p>
+            <a:pPr marL="800100" lvl="1" indent="-342900">
+              <a:buFont typeface="+mj-lt"/>
+              <a:buAutoNum type="arabicPeriod"/>
+            </a:pPr>
+            <a:endParaRPr lang="en-GB" b="1" dirty="0">
+              <a:solidFill>
+                <a:schemeClr val="bg1"/>
+              </a:solidFill>
+            </a:endParaRPr>
+          </a:p>
+          <a:p>
+            <a:pPr marL="800100" lvl="1" indent="-342900">
+              <a:buFont typeface="+mj-lt"/>
+              <a:buAutoNum type="arabicPeriod"/>
+            </a:pPr>
+            <a:endParaRPr lang="en-GB" dirty="0">
+              <a:solidFill>
+                <a:schemeClr val="bg1"/>
+              </a:solidFill>
+              <a:latin typeface="Mona Sans VF"/>
+            </a:endParaRPr>
+          </a:p>
+          <a:p>
+            <a:pPr marL="800100" lvl="1" indent="-342900">
+              <a:buFont typeface="+mj-lt"/>
+              <a:buAutoNum type="arabicPeriod"/>
+            </a:pPr>
+            <a:endParaRPr lang="en-GB" dirty="0">
+              <a:solidFill>
+                <a:schemeClr val="bg1"/>
+              </a:solidFill>
+              <a:latin typeface="Mona Sans VF"/>
+            </a:endParaRPr>
+          </a:p>
+          <a:p>
+            <a:pPr lvl="1"/>
+            <a:endParaRPr lang="en-GB" dirty="0">
+              <a:solidFill>
+                <a:schemeClr val="bg1"/>
+              </a:solidFill>
+              <a:latin typeface="Mona Sans VF"/>
+            </a:endParaRPr>
           </a:p>
         </p:txBody>
       </p:sp>
     </p:spTree>
     <p:extLst>
       <p:ext uri="{BB962C8B-B14F-4D97-AF65-F5344CB8AC3E}">
-        <p14:creationId xmlns:p14="http://schemas.microsoft.com/office/powerpoint/2010/main" val="1327175260"/>
+        <p14:creationId xmlns:p14="http://schemas.microsoft.com/office/powerpoint/2010/main" val="234507054"/>
       </p:ext>
     </p:extLst>
   </p:cSld>
@@ -20599,6 +20856,69 @@
           <p:cNvPr id="2" name="Title 1">
             <a:extLst>
               <a:ext uri="{FF2B5EF4-FFF2-40B4-BE49-F238E27FC236}">
+                <a16:creationId xmlns:a16="http://schemas.microsoft.com/office/drawing/2014/main" id="{174918DD-3FB4-ECF1-7474-46B34CAE7FD5}"/>
+              </a:ext>
+            </a:extLst>
+          </p:cNvPr>
+          <p:cNvSpPr>
+            <a:spLocks noGrp="1"/>
+          </p:cNvSpPr>
+          <p:nvPr>
+            <p:ph type="ctrTitle"/>
+          </p:nvPr>
+        </p:nvSpPr>
+        <p:spPr>
+          <a:xfrm>
+            <a:off x="758703" y="2427434"/>
+            <a:ext cx="10007063" cy="830997"/>
+          </a:xfrm>
+        </p:spPr>
+        <p:txBody>
+          <a:bodyPr/>
+          <a:lstStyle/>
+          <a:p>
+            <a:r>
+              <a:rPr lang="en-GB" dirty="0"/>
+              <a:t>Other GitHub products</a:t>
+            </a:r>
+          </a:p>
+        </p:txBody>
+      </p:sp>
+    </p:spTree>
+    <p:extLst>
+      <p:ext uri="{BB962C8B-B14F-4D97-AF65-F5344CB8AC3E}">
+        <p14:creationId xmlns:p14="http://schemas.microsoft.com/office/powerpoint/2010/main" val="1327175260"/>
+      </p:ext>
+    </p:extLst>
+  </p:cSld>
+  <p:clrMapOvr>
+    <a:masterClrMapping/>
+  </p:clrMapOvr>
+</p:sld>
+</file>
+
+<file path=ppt/slides/slide34.xml><?xml version="1.0" encoding="utf-8"?>
+<p:sld xmlns:a="http://schemas.openxmlformats.org/drawingml/2006/main" xmlns:r="http://schemas.openxmlformats.org/officeDocument/2006/relationships" xmlns:p="http://schemas.openxmlformats.org/presentationml/2006/main">
+  <p:cSld>
+    <p:spTree>
+      <p:nvGrpSpPr>
+        <p:cNvPr id="1" name=""/>
+        <p:cNvGrpSpPr/>
+        <p:nvPr/>
+      </p:nvGrpSpPr>
+      <p:grpSpPr>
+        <a:xfrm>
+          <a:off x="0" y="0"/>
+          <a:ext cx="0" cy="0"/>
+          <a:chOff x="0" y="0"/>
+          <a:chExt cx="0" cy="0"/>
+        </a:xfrm>
+      </p:grpSpPr>
+      <p:sp>
+        <p:nvSpPr>
+          <p:cNvPr id="2" name="Title 1">
+            <a:extLst>
+              <a:ext uri="{FF2B5EF4-FFF2-40B4-BE49-F238E27FC236}">
                 <a16:creationId xmlns:a16="http://schemas.microsoft.com/office/drawing/2014/main" id="{10F11F58-1B02-2B5E-16AB-F41892BB3093}"/>
               </a:ext>
             </a:extLst>
@@ -20653,7 +20973,7 @@
             <a:fld id="{CC057153-B650-4DEB-B370-79DDCFDCE934}" type="slidenum">
               <a:rPr lang="en-US" dirty="0"/>
               <a:pPr/>
-              <a:t>33</a:t>
+              <a:t>34</a:t>
             </a:fld>
             <a:endParaRPr lang="en-GB"/>
           </a:p>
@@ -20971,7 +21291,7 @@
 </p:sld>
 </file>
 
-<file path=ppt/slides/slide34.xml><?xml version="1.0" encoding="utf-8"?>
+<file path=ppt/slides/slide35.xml><?xml version="1.0" encoding="utf-8"?>
 <p:sld xmlns:a="http://schemas.openxmlformats.org/drawingml/2006/main" xmlns:r="http://schemas.openxmlformats.org/officeDocument/2006/relationships" xmlns:p="http://schemas.openxmlformats.org/presentationml/2006/main">
   <p:cSld>
     <p:spTree>
@@ -23160,6 +23480,749 @@
           <a:lstStyle/>
           <a:p>
             <a:r>
+              <a:rPr lang="en-GB" sz="3200" b="1" u="sng" dirty="0"/>
+              <a:t>Why </a:t>
+            </a:r>
+            <a:r>
+              <a:rPr lang="en-GB" sz="3200" b="1" u="sng" dirty="0" err="1"/>
+              <a:t>Github</a:t>
+            </a:r>
+            <a:r>
+              <a:rPr lang="en-GB" sz="3200" b="1" u="sng" dirty="0"/>
+              <a:t> fo</a:t>
+            </a:r>
+            <a:r>
+              <a:rPr lang="en-GB" sz="3200" u="sng" dirty="0"/>
+              <a:t>r analytics?</a:t>
+            </a:r>
+            <a:endParaRPr lang="en-GB" sz="3200" b="1" u="sng" dirty="0"/>
+          </a:p>
+        </p:txBody>
+      </p:sp>
+      <p:sp>
+        <p:nvSpPr>
+          <p:cNvPr id="5" name="Slide Number Placeholder 4">
+            <a:extLst>
+              <a:ext uri="{FF2B5EF4-FFF2-40B4-BE49-F238E27FC236}">
+                <a16:creationId xmlns:a16="http://schemas.microsoft.com/office/drawing/2014/main" id="{A6521F9B-D9FC-06E8-07A8-52FCF507297F}"/>
+              </a:ext>
+            </a:extLst>
+          </p:cNvPr>
+          <p:cNvSpPr>
+            <a:spLocks noGrp="1"/>
+          </p:cNvSpPr>
+          <p:nvPr>
+            <p:ph type="sldNum" sz="quarter" idx="12"/>
+          </p:nvPr>
+        </p:nvSpPr>
+        <p:spPr/>
+        <p:txBody>
+          <a:bodyPr/>
+          <a:lstStyle/>
+          <a:p>
+            <a:fld id="{CC057153-B650-4DEB-B370-79DDCFDCE934}" type="slidenum">
+              <a:rPr lang="en-US" dirty="0"/>
+              <a:pPr/>
+              <a:t>7</a:t>
+            </a:fld>
+            <a:endParaRPr lang="en-GB"/>
+          </a:p>
+        </p:txBody>
+      </p:sp>
+      <p:pic>
+        <p:nvPicPr>
+          <p:cNvPr id="7170" name="Picture 2" descr="Google Cloud Platform Tutorial: From Zero to Hero with GCP">
+            <a:extLst>
+              <a:ext uri="{FF2B5EF4-FFF2-40B4-BE49-F238E27FC236}">
+                <a16:creationId xmlns:a16="http://schemas.microsoft.com/office/drawing/2014/main" id="{A19C2F9B-C1CD-4FDA-93C6-00BA40CFE1E7}"/>
+              </a:ext>
+            </a:extLst>
+          </p:cNvPr>
+          <p:cNvPicPr>
+            <a:picLocks noChangeAspect="1" noChangeArrowheads="1"/>
+          </p:cNvPicPr>
+          <p:nvPr/>
+        </p:nvPicPr>
+        <p:blipFill>
+          <a:blip r:embed="rId2">
+            <a:extLst>
+              <a:ext uri="{28A0092B-C50C-407E-A947-70E740481C1C}">
+                <a14:useLocalDpi xmlns:a14="http://schemas.microsoft.com/office/drawing/2010/main" val="0"/>
+              </a:ext>
+            </a:extLst>
+          </a:blip>
+          <a:srcRect/>
+          <a:stretch>
+            <a:fillRect/>
+          </a:stretch>
+        </p:blipFill>
+        <p:spPr bwMode="auto">
+          <a:xfrm>
+            <a:off x="-3932" y="1406046"/>
+            <a:ext cx="3103938" cy="1741741"/>
+          </a:xfrm>
+          <a:prstGeom prst="rect">
+            <a:avLst/>
+          </a:prstGeom>
+          <a:noFill/>
+          <a:extLst>
+            <a:ext uri="{909E8E84-426E-40DD-AFC4-6F175D3DCCD1}">
+              <a14:hiddenFill xmlns:a14="http://schemas.microsoft.com/office/drawing/2010/main">
+                <a:solidFill>
+                  <a:srgbClr val="FFFFFF"/>
+                </a:solidFill>
+              </a14:hiddenFill>
+            </a:ext>
+          </a:extLst>
+        </p:spPr>
+      </p:pic>
+      <p:pic>
+        <p:nvPicPr>
+          <p:cNvPr id="7172" name="Picture 4" descr="Amazon Web Services - Wikipedia">
+            <a:extLst>
+              <a:ext uri="{FF2B5EF4-FFF2-40B4-BE49-F238E27FC236}">
+                <a16:creationId xmlns:a16="http://schemas.microsoft.com/office/drawing/2014/main" id="{1DEF9D55-3132-41EF-8890-467D28C0D083}"/>
+              </a:ext>
+            </a:extLst>
+          </p:cNvPr>
+          <p:cNvPicPr>
+            <a:picLocks noChangeAspect="1" noChangeArrowheads="1"/>
+          </p:cNvPicPr>
+          <p:nvPr/>
+        </p:nvPicPr>
+        <p:blipFill>
+          <a:blip r:embed="rId3">
+            <a:extLst>
+              <a:ext uri="{28A0092B-C50C-407E-A947-70E740481C1C}">
+                <a14:useLocalDpi xmlns:a14="http://schemas.microsoft.com/office/drawing/2010/main" val="0"/>
+              </a:ext>
+            </a:extLst>
+          </a:blip>
+          <a:srcRect/>
+          <a:stretch>
+            <a:fillRect/>
+          </a:stretch>
+        </p:blipFill>
+        <p:spPr bwMode="auto">
+          <a:xfrm>
+            <a:off x="555990" y="3710214"/>
+            <a:ext cx="2161413" cy="1293856"/>
+          </a:xfrm>
+          <a:prstGeom prst="rect">
+            <a:avLst/>
+          </a:prstGeom>
+          <a:noFill/>
+          <a:extLst>
+            <a:ext uri="{909E8E84-426E-40DD-AFC4-6F175D3DCCD1}">
+              <a14:hiddenFill xmlns:a14="http://schemas.microsoft.com/office/drawing/2010/main">
+                <a:solidFill>
+                  <a:srgbClr val="FFFFFF"/>
+                </a:solidFill>
+              </a14:hiddenFill>
+            </a:ext>
+          </a:extLst>
+        </p:spPr>
+      </p:pic>
+      <p:pic>
+        <p:nvPicPr>
+          <p:cNvPr id="7174" name="Picture 6" descr="Terraform - Visual Studio Marketplace">
+            <a:extLst>
+              <a:ext uri="{FF2B5EF4-FFF2-40B4-BE49-F238E27FC236}">
+                <a16:creationId xmlns:a16="http://schemas.microsoft.com/office/drawing/2014/main" id="{02D2E044-D139-471B-8C85-41FB1F944C2D}"/>
+              </a:ext>
+            </a:extLst>
+          </p:cNvPr>
+          <p:cNvPicPr>
+            <a:picLocks noChangeAspect="1" noChangeArrowheads="1"/>
+          </p:cNvPicPr>
+          <p:nvPr/>
+        </p:nvPicPr>
+        <p:blipFill>
+          <a:blip r:embed="rId4">
+            <a:extLst>
+              <a:ext uri="{28A0092B-C50C-407E-A947-70E740481C1C}">
+                <a14:useLocalDpi xmlns:a14="http://schemas.microsoft.com/office/drawing/2010/main" val="0"/>
+              </a:ext>
+            </a:extLst>
+          </a:blip>
+          <a:srcRect/>
+          <a:stretch>
+            <a:fillRect/>
+          </a:stretch>
+        </p:blipFill>
+        <p:spPr bwMode="auto">
+          <a:xfrm>
+            <a:off x="3319490" y="1188637"/>
+            <a:ext cx="2161413" cy="2161413"/>
+          </a:xfrm>
+          <a:prstGeom prst="rect">
+            <a:avLst/>
+          </a:prstGeom>
+          <a:noFill/>
+          <a:extLst>
+            <a:ext uri="{909E8E84-426E-40DD-AFC4-6F175D3DCCD1}">
+              <a14:hiddenFill xmlns:a14="http://schemas.microsoft.com/office/drawing/2010/main">
+                <a:solidFill>
+                  <a:srgbClr val="FFFFFF"/>
+                </a:solidFill>
+              </a14:hiddenFill>
+            </a:ext>
+          </a:extLst>
+        </p:spPr>
+      </p:pic>
+      <p:pic>
+        <p:nvPicPr>
+          <p:cNvPr id="7176" name="Picture 8" descr="Docker - Visual Studio Marketplace">
+            <a:extLst>
+              <a:ext uri="{FF2B5EF4-FFF2-40B4-BE49-F238E27FC236}">
+                <a16:creationId xmlns:a16="http://schemas.microsoft.com/office/drawing/2014/main" id="{09F59136-F823-4162-812F-92B56C6327E5}"/>
+              </a:ext>
+            </a:extLst>
+          </p:cNvPr>
+          <p:cNvPicPr>
+            <a:picLocks noChangeAspect="1" noChangeArrowheads="1"/>
+          </p:cNvPicPr>
+          <p:nvPr/>
+        </p:nvPicPr>
+        <p:blipFill>
+          <a:blip r:embed="rId5">
+            <a:extLst>
+              <a:ext uri="{28A0092B-C50C-407E-A947-70E740481C1C}">
+                <a14:useLocalDpi xmlns:a14="http://schemas.microsoft.com/office/drawing/2010/main" val="0"/>
+              </a:ext>
+            </a:extLst>
+          </a:blip>
+          <a:srcRect/>
+          <a:stretch>
+            <a:fillRect/>
+          </a:stretch>
+        </p:blipFill>
+        <p:spPr bwMode="auto">
+          <a:xfrm>
+            <a:off x="3741874" y="3395830"/>
+            <a:ext cx="1901861" cy="1622869"/>
+          </a:xfrm>
+          <a:prstGeom prst="rect">
+            <a:avLst/>
+          </a:prstGeom>
+          <a:noFill/>
+          <a:extLst>
+            <a:ext uri="{909E8E84-426E-40DD-AFC4-6F175D3DCCD1}">
+              <a14:hiddenFill xmlns:a14="http://schemas.microsoft.com/office/drawing/2010/main">
+                <a:solidFill>
+                  <a:srgbClr val="FFFFFF"/>
+                </a:solidFill>
+              </a14:hiddenFill>
+            </a:ext>
+          </a:extLst>
+        </p:spPr>
+      </p:pic>
+      <p:pic>
+        <p:nvPicPr>
+          <p:cNvPr id="7180" name="Picture 12" descr="Microsoft Teams - Wikipedia">
+            <a:extLst>
+              <a:ext uri="{FF2B5EF4-FFF2-40B4-BE49-F238E27FC236}">
+                <a16:creationId xmlns:a16="http://schemas.microsoft.com/office/drawing/2014/main" id="{7A0271DC-D65E-42AD-B331-E2A137AD66F1}"/>
+              </a:ext>
+            </a:extLst>
+          </p:cNvPr>
+          <p:cNvPicPr>
+            <a:picLocks noChangeAspect="1" noChangeArrowheads="1"/>
+          </p:cNvPicPr>
+          <p:nvPr/>
+        </p:nvPicPr>
+        <p:blipFill>
+          <a:blip r:embed="rId6">
+            <a:extLst>
+              <a:ext uri="{28A0092B-C50C-407E-A947-70E740481C1C}">
+                <a14:useLocalDpi xmlns:a14="http://schemas.microsoft.com/office/drawing/2010/main" val="0"/>
+              </a:ext>
+            </a:extLst>
+          </a:blip>
+          <a:srcRect/>
+          <a:stretch>
+            <a:fillRect/>
+          </a:stretch>
+        </p:blipFill>
+        <p:spPr bwMode="auto">
+          <a:xfrm>
+            <a:off x="6959086" y="1572970"/>
+            <a:ext cx="1320396" cy="1392746"/>
+          </a:xfrm>
+          <a:prstGeom prst="rect">
+            <a:avLst/>
+          </a:prstGeom>
+          <a:noFill/>
+          <a:extLst>
+            <a:ext uri="{909E8E84-426E-40DD-AFC4-6F175D3DCCD1}">
+              <a14:hiddenFill xmlns:a14="http://schemas.microsoft.com/office/drawing/2010/main">
+                <a:solidFill>
+                  <a:srgbClr val="FFFFFF"/>
+                </a:solidFill>
+              </a14:hiddenFill>
+            </a:ext>
+          </a:extLst>
+        </p:spPr>
+      </p:pic>
+      <p:pic>
+        <p:nvPicPr>
+          <p:cNvPr id="7182" name="Picture 14" descr="Distribute your Flutter Application with Azure DevOps and App Center | by Luke Moody | Level Up Coding">
+            <a:extLst>
+              <a:ext uri="{FF2B5EF4-FFF2-40B4-BE49-F238E27FC236}">
+                <a16:creationId xmlns:a16="http://schemas.microsoft.com/office/drawing/2014/main" id="{1CF001B1-D964-42F8-B333-1D76BE43C060}"/>
+              </a:ext>
+            </a:extLst>
+          </p:cNvPr>
+          <p:cNvPicPr>
+            <a:picLocks noChangeAspect="1" noChangeArrowheads="1"/>
+          </p:cNvPicPr>
+          <p:nvPr/>
+        </p:nvPicPr>
+        <p:blipFill>
+          <a:blip r:embed="rId7">
+            <a:extLst>
+              <a:ext uri="{28A0092B-C50C-407E-A947-70E740481C1C}">
+                <a14:useLocalDpi xmlns:a14="http://schemas.microsoft.com/office/drawing/2010/main" val="0"/>
+              </a:ext>
+            </a:extLst>
+          </a:blip>
+          <a:srcRect/>
+          <a:stretch>
+            <a:fillRect/>
+          </a:stretch>
+        </p:blipFill>
+        <p:spPr bwMode="auto">
+          <a:xfrm>
+            <a:off x="6392418" y="3429000"/>
+            <a:ext cx="2641854" cy="1653046"/>
+          </a:xfrm>
+          <a:prstGeom prst="rect">
+            <a:avLst/>
+          </a:prstGeom>
+          <a:noFill/>
+          <a:extLst>
+            <a:ext uri="{909E8E84-426E-40DD-AFC4-6F175D3DCCD1}">
+              <a14:hiddenFill xmlns:a14="http://schemas.microsoft.com/office/drawing/2010/main">
+                <a:solidFill>
+                  <a:srgbClr val="FFFFFF"/>
+                </a:solidFill>
+              </a14:hiddenFill>
+            </a:ext>
+          </a:extLst>
+        </p:spPr>
+      </p:pic>
+      <p:pic>
+        <p:nvPicPr>
+          <p:cNvPr id="7184" name="Picture 16" descr="Dependabot · GitHub">
+            <a:extLst>
+              <a:ext uri="{FF2B5EF4-FFF2-40B4-BE49-F238E27FC236}">
+                <a16:creationId xmlns:a16="http://schemas.microsoft.com/office/drawing/2014/main" id="{3C567452-0870-4E00-9738-F7DABCAF6DF7}"/>
+              </a:ext>
+            </a:extLst>
+          </p:cNvPr>
+          <p:cNvPicPr>
+            <a:picLocks noChangeAspect="1" noChangeArrowheads="1"/>
+          </p:cNvPicPr>
+          <p:nvPr/>
+        </p:nvPicPr>
+        <p:blipFill>
+          <a:blip r:embed="rId8">
+            <a:extLst>
+              <a:ext uri="{28A0092B-C50C-407E-A947-70E740481C1C}">
+                <a14:useLocalDpi xmlns:a14="http://schemas.microsoft.com/office/drawing/2010/main" val="0"/>
+              </a:ext>
+            </a:extLst>
+          </a:blip>
+          <a:srcRect/>
+          <a:stretch>
+            <a:fillRect/>
+          </a:stretch>
+        </p:blipFill>
+        <p:spPr bwMode="auto">
+          <a:xfrm>
+            <a:off x="9084184" y="1101415"/>
+            <a:ext cx="2046372" cy="2046372"/>
+          </a:xfrm>
+          <a:prstGeom prst="rect">
+            <a:avLst/>
+          </a:prstGeom>
+          <a:noFill/>
+          <a:extLst>
+            <a:ext uri="{909E8E84-426E-40DD-AFC4-6F175D3DCCD1}">
+              <a14:hiddenFill xmlns:a14="http://schemas.microsoft.com/office/drawing/2010/main">
+                <a:solidFill>
+                  <a:srgbClr val="FFFFFF"/>
+                </a:solidFill>
+              </a14:hiddenFill>
+            </a:ext>
+          </a:extLst>
+        </p:spPr>
+      </p:pic>
+      <p:pic>
+        <p:nvPicPr>
+          <p:cNvPr id="7186" name="Picture 18" descr="Microsoft Power Automate - Wikipedia">
+            <a:extLst>
+              <a:ext uri="{FF2B5EF4-FFF2-40B4-BE49-F238E27FC236}">
+                <a16:creationId xmlns:a16="http://schemas.microsoft.com/office/drawing/2014/main" id="{1A841108-E423-492D-975F-A53C01549FD0}"/>
+              </a:ext>
+            </a:extLst>
+          </p:cNvPr>
+          <p:cNvPicPr>
+            <a:picLocks noChangeAspect="1" noChangeArrowheads="1"/>
+          </p:cNvPicPr>
+          <p:nvPr/>
+        </p:nvPicPr>
+        <p:blipFill>
+          <a:blip r:embed="rId9">
+            <a:extLst>
+              <a:ext uri="{28A0092B-C50C-407E-A947-70E740481C1C}">
+                <a14:useLocalDpi xmlns:a14="http://schemas.microsoft.com/office/drawing/2010/main" val="0"/>
+              </a:ext>
+            </a:extLst>
+          </a:blip>
+          <a:srcRect/>
+          <a:stretch>
+            <a:fillRect/>
+          </a:stretch>
+        </p:blipFill>
+        <p:spPr bwMode="auto">
+          <a:xfrm>
+            <a:off x="9351181" y="3279028"/>
+            <a:ext cx="1928424" cy="1952990"/>
+          </a:xfrm>
+          <a:prstGeom prst="rect">
+            <a:avLst/>
+          </a:prstGeom>
+          <a:noFill/>
+          <a:extLst>
+            <a:ext uri="{909E8E84-426E-40DD-AFC4-6F175D3DCCD1}">
+              <a14:hiddenFill xmlns:a14="http://schemas.microsoft.com/office/drawing/2010/main">
+                <a:solidFill>
+                  <a:srgbClr val="FFFFFF"/>
+                </a:solidFill>
+              </a14:hiddenFill>
+            </a:ext>
+          </a:extLst>
+        </p:spPr>
+      </p:pic>
+    </p:spTree>
+    <p:extLst>
+      <p:ext uri="{BB962C8B-B14F-4D97-AF65-F5344CB8AC3E}">
+        <p14:creationId xmlns:p14="http://schemas.microsoft.com/office/powerpoint/2010/main" val="2778490826"/>
+      </p:ext>
+    </p:extLst>
+  </p:cSld>
+  <p:clrMapOvr>
+    <a:masterClrMapping/>
+  </p:clrMapOvr>
+  <p:timing>
+    <p:tnLst>
+      <p:par>
+        <p:cTn id="1" dur="indefinite" restart="never" nodeType="tmRoot">
+          <p:childTnLst>
+            <p:seq concurrent="1" nextAc="seek">
+              <p:cTn id="2" dur="indefinite" nodeType="mainSeq">
+                <p:childTnLst>
+                  <p:par>
+                    <p:cTn id="3" fill="hold">
+                      <p:stCondLst>
+                        <p:cond delay="indefinite"/>
+                        <p:cond evt="onBegin" delay="0">
+                          <p:tn val="2"/>
+                        </p:cond>
+                      </p:stCondLst>
+                      <p:childTnLst>
+                        <p:par>
+                          <p:cTn id="4" fill="hold">
+                            <p:stCondLst>
+                              <p:cond delay="0"/>
+                            </p:stCondLst>
+                            <p:childTnLst>
+                              <p:par>
+                                <p:cTn id="5" presetID="26" presetClass="emph" presetSubtype="0" fill="hold" nodeType="withEffect">
+                                  <p:stCondLst>
+                                    <p:cond delay="0"/>
+                                  </p:stCondLst>
+                                  <p:childTnLst>
+                                    <p:animEffect transition="out" filter="fade">
+                                      <p:cBhvr>
+                                        <p:cTn id="6" dur="500" tmFilter="0, 0; .2, .5; .8, .5; 1, 0"/>
+                                        <p:tgtEl>
+                                          <p:spTgt spid="7170"/>
+                                        </p:tgtEl>
+                                      </p:cBhvr>
+                                    </p:animEffect>
+                                    <p:animScale>
+                                      <p:cBhvr>
+                                        <p:cTn id="7" dur="250" autoRev="1" fill="hold"/>
+                                        <p:tgtEl>
+                                          <p:spTgt spid="7170"/>
+                                        </p:tgtEl>
+                                      </p:cBhvr>
+                                      <p:by x="105000" y="105000"/>
+                                    </p:animScale>
+                                  </p:childTnLst>
+                                </p:cTn>
+                              </p:par>
+                              <p:par>
+                                <p:cTn id="8" presetID="26" presetClass="emph" presetSubtype="0" fill="hold" nodeType="withEffect">
+                                  <p:stCondLst>
+                                    <p:cond delay="0"/>
+                                  </p:stCondLst>
+                                  <p:childTnLst>
+                                    <p:animEffect transition="out" filter="fade">
+                                      <p:cBhvr>
+                                        <p:cTn id="9" dur="500" tmFilter="0, 0; .2, .5; .8, .5; 1, 0"/>
+                                        <p:tgtEl>
+                                          <p:spTgt spid="7172"/>
+                                        </p:tgtEl>
+                                      </p:cBhvr>
+                                    </p:animEffect>
+                                    <p:animScale>
+                                      <p:cBhvr>
+                                        <p:cTn id="10" dur="250" autoRev="1" fill="hold"/>
+                                        <p:tgtEl>
+                                          <p:spTgt spid="7172"/>
+                                        </p:tgtEl>
+                                      </p:cBhvr>
+                                      <p:by x="105000" y="105000"/>
+                                    </p:animScale>
+                                  </p:childTnLst>
+                                </p:cTn>
+                              </p:par>
+                              <p:par>
+                                <p:cTn id="11" presetID="26" presetClass="emph" presetSubtype="0" fill="hold" nodeType="withEffect">
+                                  <p:stCondLst>
+                                    <p:cond delay="0"/>
+                                  </p:stCondLst>
+                                  <p:childTnLst>
+                                    <p:animEffect transition="out" filter="fade">
+                                      <p:cBhvr>
+                                        <p:cTn id="12" dur="500" tmFilter="0, 0; .2, .5; .8, .5; 1, 0"/>
+                                        <p:tgtEl>
+                                          <p:spTgt spid="7174"/>
+                                        </p:tgtEl>
+                                      </p:cBhvr>
+                                    </p:animEffect>
+                                    <p:animScale>
+                                      <p:cBhvr>
+                                        <p:cTn id="13" dur="250" autoRev="1" fill="hold"/>
+                                        <p:tgtEl>
+                                          <p:spTgt spid="7174"/>
+                                        </p:tgtEl>
+                                      </p:cBhvr>
+                                      <p:by x="105000" y="105000"/>
+                                    </p:animScale>
+                                  </p:childTnLst>
+                                </p:cTn>
+                              </p:par>
+                              <p:par>
+                                <p:cTn id="14" presetID="26" presetClass="emph" presetSubtype="0" fill="hold" nodeType="withEffect">
+                                  <p:stCondLst>
+                                    <p:cond delay="0"/>
+                                  </p:stCondLst>
+                                  <p:childTnLst>
+                                    <p:animEffect transition="out" filter="fade">
+                                      <p:cBhvr>
+                                        <p:cTn id="15" dur="500" tmFilter="0, 0; .2, .5; .8, .5; 1, 0"/>
+                                        <p:tgtEl>
+                                          <p:spTgt spid="7176"/>
+                                        </p:tgtEl>
+                                      </p:cBhvr>
+                                    </p:animEffect>
+                                    <p:animScale>
+                                      <p:cBhvr>
+                                        <p:cTn id="16" dur="250" autoRev="1" fill="hold"/>
+                                        <p:tgtEl>
+                                          <p:spTgt spid="7176"/>
+                                        </p:tgtEl>
+                                      </p:cBhvr>
+                                      <p:by x="105000" y="105000"/>
+                                    </p:animScale>
+                                  </p:childTnLst>
+                                </p:cTn>
+                              </p:par>
+                              <p:par>
+                                <p:cTn id="17" presetID="26" presetClass="emph" presetSubtype="0" fill="hold" nodeType="withEffect">
+                                  <p:stCondLst>
+                                    <p:cond delay="0"/>
+                                  </p:stCondLst>
+                                  <p:childTnLst>
+                                    <p:animEffect transition="out" filter="fade">
+                                      <p:cBhvr>
+                                        <p:cTn id="18" dur="500" tmFilter="0, 0; .2, .5; .8, .5; 1, 0"/>
+                                        <p:tgtEl>
+                                          <p:spTgt spid="7180"/>
+                                        </p:tgtEl>
+                                      </p:cBhvr>
+                                    </p:animEffect>
+                                    <p:animScale>
+                                      <p:cBhvr>
+                                        <p:cTn id="19" dur="250" autoRev="1" fill="hold"/>
+                                        <p:tgtEl>
+                                          <p:spTgt spid="7180"/>
+                                        </p:tgtEl>
+                                      </p:cBhvr>
+                                      <p:by x="105000" y="105000"/>
+                                    </p:animScale>
+                                  </p:childTnLst>
+                                </p:cTn>
+                              </p:par>
+                              <p:par>
+                                <p:cTn id="20" presetID="26" presetClass="emph" presetSubtype="0" fill="hold" nodeType="withEffect">
+                                  <p:stCondLst>
+                                    <p:cond delay="0"/>
+                                  </p:stCondLst>
+                                  <p:childTnLst>
+                                    <p:animEffect transition="out" filter="fade">
+                                      <p:cBhvr>
+                                        <p:cTn id="21" dur="500" tmFilter="0, 0; .2, .5; .8, .5; 1, 0"/>
+                                        <p:tgtEl>
+                                          <p:spTgt spid="7182"/>
+                                        </p:tgtEl>
+                                      </p:cBhvr>
+                                    </p:animEffect>
+                                    <p:animScale>
+                                      <p:cBhvr>
+                                        <p:cTn id="22" dur="250" autoRev="1" fill="hold"/>
+                                        <p:tgtEl>
+                                          <p:spTgt spid="7182"/>
+                                        </p:tgtEl>
+                                      </p:cBhvr>
+                                      <p:by x="105000" y="105000"/>
+                                    </p:animScale>
+                                  </p:childTnLst>
+                                </p:cTn>
+                              </p:par>
+                              <p:par>
+                                <p:cTn id="23" presetID="26" presetClass="emph" presetSubtype="0" fill="hold" nodeType="withEffect">
+                                  <p:stCondLst>
+                                    <p:cond delay="0"/>
+                                  </p:stCondLst>
+                                  <p:childTnLst>
+                                    <p:animEffect transition="out" filter="fade">
+                                      <p:cBhvr>
+                                        <p:cTn id="24" dur="500" tmFilter="0, 0; .2, .5; .8, .5; 1, 0"/>
+                                        <p:tgtEl>
+                                          <p:spTgt spid="7184"/>
+                                        </p:tgtEl>
+                                      </p:cBhvr>
+                                    </p:animEffect>
+                                    <p:animScale>
+                                      <p:cBhvr>
+                                        <p:cTn id="25" dur="250" autoRev="1" fill="hold"/>
+                                        <p:tgtEl>
+                                          <p:spTgt spid="7184"/>
+                                        </p:tgtEl>
+                                      </p:cBhvr>
+                                      <p:by x="105000" y="105000"/>
+                                    </p:animScale>
+                                  </p:childTnLst>
+                                </p:cTn>
+                              </p:par>
+                              <p:par>
+                                <p:cTn id="26" presetID="26" presetClass="emph" presetSubtype="0" fill="hold" nodeType="withEffect">
+                                  <p:stCondLst>
+                                    <p:cond delay="0"/>
+                                  </p:stCondLst>
+                                  <p:childTnLst>
+                                    <p:animEffect transition="out" filter="fade">
+                                      <p:cBhvr>
+                                        <p:cTn id="27" dur="500" tmFilter="0, 0; .2, .5; .8, .5; 1, 0"/>
+                                        <p:tgtEl>
+                                          <p:spTgt spid="7186"/>
+                                        </p:tgtEl>
+                                      </p:cBhvr>
+                                    </p:animEffect>
+                                    <p:animScale>
+                                      <p:cBhvr>
+                                        <p:cTn id="28" dur="250" autoRev="1" fill="hold"/>
+                                        <p:tgtEl>
+                                          <p:spTgt spid="7186"/>
+                                        </p:tgtEl>
+                                      </p:cBhvr>
+                                      <p:by x="105000" y="105000"/>
+                                    </p:animScale>
+                                  </p:childTnLst>
+                                </p:cTn>
+                              </p:par>
+                            </p:childTnLst>
+                          </p:cTn>
+                        </p:par>
+                      </p:childTnLst>
+                    </p:cTn>
+                  </p:par>
+                </p:childTnLst>
+              </p:cTn>
+              <p:prevCondLst>
+                <p:cond evt="onPrev" delay="0">
+                  <p:tgtEl>
+                    <p:sldTgt/>
+                  </p:tgtEl>
+                </p:cond>
+              </p:prevCondLst>
+              <p:nextCondLst>
+                <p:cond evt="onNext" delay="0">
+                  <p:tgtEl>
+                    <p:sldTgt/>
+                  </p:tgtEl>
+                </p:cond>
+              </p:nextCondLst>
+            </p:seq>
+          </p:childTnLst>
+        </p:cTn>
+      </p:par>
+    </p:tnLst>
+  </p:timing>
+</p:sld>
+</file>
+
+<file path=ppt/slides/slide8.xml><?xml version="1.0" encoding="utf-8"?>
+<p:sld xmlns:a="http://schemas.openxmlformats.org/drawingml/2006/main" xmlns:r="http://schemas.openxmlformats.org/officeDocument/2006/relationships" xmlns:p="http://schemas.openxmlformats.org/presentationml/2006/main">
+  <p:cSld>
+    <p:spTree>
+      <p:nvGrpSpPr>
+        <p:cNvPr id="1" name=""/>
+        <p:cNvGrpSpPr/>
+        <p:nvPr/>
+      </p:nvGrpSpPr>
+      <p:grpSpPr>
+        <a:xfrm>
+          <a:off x="0" y="0"/>
+          <a:ext cx="0" cy="0"/>
+          <a:chOff x="0" y="0"/>
+          <a:chExt cx="0" cy="0"/>
+        </a:xfrm>
+      </p:grpSpPr>
+      <p:sp>
+        <p:nvSpPr>
+          <p:cNvPr id="2" name="Title 1">
+            <a:extLst>
+              <a:ext uri="{FF2B5EF4-FFF2-40B4-BE49-F238E27FC236}">
+                <a16:creationId xmlns:a16="http://schemas.microsoft.com/office/drawing/2014/main" id="{10F11F58-1B02-2B5E-16AB-F41892BB3093}"/>
+              </a:ext>
+            </a:extLst>
+          </p:cNvPr>
+          <p:cNvSpPr>
+            <a:spLocks noGrp="1"/>
+          </p:cNvSpPr>
+          <p:nvPr>
+            <p:ph type="title"/>
+          </p:nvPr>
+        </p:nvSpPr>
+        <p:spPr>
+          <a:xfrm>
+            <a:off x="520911" y="427020"/>
+            <a:ext cx="8343789" cy="636062"/>
+          </a:xfrm>
+        </p:spPr>
+        <p:txBody>
+          <a:bodyPr>
+            <a:normAutofit/>
+          </a:bodyPr>
+          <a:lstStyle/>
+          <a:p>
+            <a:r>
               <a:rPr lang="en-GB" sz="3200" b="1" u="sng" dirty="0" err="1"/>
               <a:t>Github</a:t>
             </a:r>
@@ -23250,7 +24313,7 @@
             <a:fld id="{CC057153-B650-4DEB-B370-79DDCFDCE934}" type="slidenum">
               <a:rPr lang="en-US" dirty="0"/>
               <a:pPr/>
-              <a:t>7</a:t>
+              <a:t>8</a:t>
             </a:fld>
             <a:endParaRPr lang="en-GB"/>
           </a:p>
@@ -23861,7 +24924,7 @@
 </p:sld>
 </file>
 
-<file path=ppt/slides/slide8.xml><?xml version="1.0" encoding="utf-8"?>
+<file path=ppt/slides/slide9.xml><?xml version="1.0" encoding="utf-8"?>
 <p:sld xmlns:a="http://schemas.openxmlformats.org/drawingml/2006/main" xmlns:r="http://schemas.openxmlformats.org/officeDocument/2006/relationships" xmlns:p="http://schemas.openxmlformats.org/presentationml/2006/main">
   <p:cSld>
     <p:spTree>
@@ -23994,7 +25057,7 @@
             <a:fld id="{CC057153-B650-4DEB-B370-79DDCFDCE934}" type="slidenum">
               <a:rPr lang="en-US" dirty="0"/>
               <a:pPr/>
-              <a:t>8</a:t>
+              <a:t>9</a:t>
             </a:fld>
             <a:endParaRPr lang="en-GB"/>
           </a:p>
@@ -24255,325 +25318,6 @@
       <p:bldP spid="6" grpId="0"/>
     </p:bldLst>
   </p:timing>
-</p:sld>
-</file>
-
-<file path=ppt/slides/slide9.xml><?xml version="1.0" encoding="utf-8"?>
-<p:sld xmlns:a="http://schemas.openxmlformats.org/drawingml/2006/main" xmlns:r="http://schemas.openxmlformats.org/officeDocument/2006/relationships" xmlns:p="http://schemas.openxmlformats.org/presentationml/2006/main">
-  <p:cSld>
-    <p:spTree>
-      <p:nvGrpSpPr>
-        <p:cNvPr id="1" name=""/>
-        <p:cNvGrpSpPr/>
-        <p:nvPr/>
-      </p:nvGrpSpPr>
-      <p:grpSpPr>
-        <a:xfrm>
-          <a:off x="0" y="0"/>
-          <a:ext cx="0" cy="0"/>
-          <a:chOff x="0" y="0"/>
-          <a:chExt cx="0" cy="0"/>
-        </a:xfrm>
-      </p:grpSpPr>
-      <p:sp>
-        <p:nvSpPr>
-          <p:cNvPr id="5" name="Slide Number Placeholder 4">
-            <a:extLst>
-              <a:ext uri="{FF2B5EF4-FFF2-40B4-BE49-F238E27FC236}">
-                <a16:creationId xmlns:a16="http://schemas.microsoft.com/office/drawing/2014/main" id="{A6521F9B-D9FC-06E8-07A8-52FCF507297F}"/>
-              </a:ext>
-            </a:extLst>
-          </p:cNvPr>
-          <p:cNvSpPr>
-            <a:spLocks noGrp="1"/>
-          </p:cNvSpPr>
-          <p:nvPr>
-            <p:ph type="sldNum" sz="quarter" idx="12"/>
-          </p:nvPr>
-        </p:nvSpPr>
-        <p:spPr/>
-        <p:txBody>
-          <a:bodyPr/>
-          <a:lstStyle/>
-          <a:p>
-            <a:fld id="{CC057153-B650-4DEB-B370-79DDCFDCE934}" type="slidenum">
-              <a:rPr lang="en-US" dirty="0"/>
-              <a:pPr/>
-              <a:t>9</a:t>
-            </a:fld>
-            <a:endParaRPr lang="en-GB"/>
-          </a:p>
-        </p:txBody>
-      </p:sp>
-      <p:sp>
-        <p:nvSpPr>
-          <p:cNvPr id="2" name="Title 1">
-            <a:extLst>
-              <a:ext uri="{FF2B5EF4-FFF2-40B4-BE49-F238E27FC236}">
-                <a16:creationId xmlns:a16="http://schemas.microsoft.com/office/drawing/2014/main" id="{10F11F58-1B02-2B5E-16AB-F41892BB3093}"/>
-              </a:ext>
-            </a:extLst>
-          </p:cNvPr>
-          <p:cNvSpPr>
-            <a:spLocks noGrp="1"/>
-          </p:cNvSpPr>
-          <p:nvPr>
-            <p:ph type="title"/>
-          </p:nvPr>
-        </p:nvSpPr>
-        <p:spPr>
-          <a:xfrm>
-            <a:off x="685800" y="516588"/>
-            <a:ext cx="3436838" cy="498598"/>
-          </a:xfrm>
-        </p:spPr>
-        <p:txBody>
-          <a:bodyPr>
-            <a:normAutofit/>
-          </a:bodyPr>
-          <a:lstStyle/>
-          <a:p>
-            <a:r>
-              <a:rPr lang="en-GB" sz="3200" b="1" u="sng" dirty="0"/>
-              <a:t>Exercise Checkpoint 1 </a:t>
-            </a:r>
-          </a:p>
-        </p:txBody>
-      </p:sp>
-      <p:sp>
-        <p:nvSpPr>
-          <p:cNvPr id="3" name="Subtitle 2">
-            <a:extLst>
-              <a:ext uri="{FF2B5EF4-FFF2-40B4-BE49-F238E27FC236}">
-                <a16:creationId xmlns:a16="http://schemas.microsoft.com/office/drawing/2014/main" id="{A19A6EDB-FD47-0120-E2F7-AE5FAB5706B3}"/>
-              </a:ext>
-            </a:extLst>
-          </p:cNvPr>
-          <p:cNvSpPr>
-            <a:spLocks noGrp="1"/>
-          </p:cNvSpPr>
-          <p:nvPr>
-            <p:ph type="body" sz="quarter" idx="14"/>
-          </p:nvPr>
-        </p:nvSpPr>
-        <p:spPr/>
-        <p:txBody>
-          <a:bodyPr vert="horz" lIns="91440" tIns="45720" rIns="91440" bIns="45720" rtlCol="0" anchor="t">
-            <a:normAutofit fontScale="32500" lnSpcReduction="20000"/>
-          </a:bodyPr>
-          <a:lstStyle/>
-          <a:p>
-            <a:pPr lvl="1"/>
-            <a:br>
-              <a:rPr lang="en-GB" dirty="0"/>
-            </a:br>
-            <a:endParaRPr lang="en-GB" dirty="0"/>
-          </a:p>
-          <a:p>
-            <a:pPr marL="285750" indent="-285750">
-              <a:buChar char="•"/>
-            </a:pPr>
-            <a:endParaRPr lang="en-GB" dirty="0"/>
-          </a:p>
-          <a:p>
-            <a:pPr marL="514350" lvl="1" indent="-285750">
-              <a:buFont typeface="Courier New" panose="020B0604020202020204" pitchFamily="34" charset="0"/>
-              <a:buChar char="o"/>
-            </a:pPr>
-            <a:endParaRPr lang="en-GB" dirty="0"/>
-          </a:p>
-          <a:p>
-            <a:pPr marL="285750" indent="-285750">
-              <a:buFont typeface="Arial" panose="020B0604020202020204" pitchFamily="34" charset="0"/>
-              <a:buChar char="•"/>
-            </a:pPr>
-            <a:endParaRPr lang="en-GB" dirty="0"/>
-          </a:p>
-        </p:txBody>
-      </p:sp>
-      <p:sp>
-        <p:nvSpPr>
-          <p:cNvPr id="8" name="TextBox 7">
-            <a:extLst>
-              <a:ext uri="{FF2B5EF4-FFF2-40B4-BE49-F238E27FC236}">
-                <a16:creationId xmlns:a16="http://schemas.microsoft.com/office/drawing/2014/main" id="{6D1779D3-41A0-4920-B5C8-8AA53282B9B8}"/>
-              </a:ext>
-            </a:extLst>
-          </p:cNvPr>
-          <p:cNvSpPr txBox="1"/>
-          <p:nvPr/>
-        </p:nvSpPr>
-        <p:spPr>
-          <a:xfrm>
-            <a:off x="609600" y="1611755"/>
-            <a:ext cx="5689600" cy="3139321"/>
-          </a:xfrm>
-          <a:prstGeom prst="rect">
-            <a:avLst/>
-          </a:prstGeom>
-          <a:noFill/>
-        </p:spPr>
-        <p:txBody>
-          <a:bodyPr wrap="square" rtlCol="0">
-            <a:spAutoFit/>
-          </a:bodyPr>
-          <a:lstStyle/>
-          <a:p>
-            <a:pPr marL="285750" indent="-285750">
-              <a:buFont typeface="Arial" panose="020B0604020202020204" pitchFamily="34" charset="0"/>
-              <a:buChar char="•"/>
-            </a:pPr>
-            <a:r>
-              <a:rPr lang="en-GB" b="1" dirty="0">
-                <a:solidFill>
-                  <a:schemeClr val="bg1"/>
-                </a:solidFill>
-              </a:rPr>
-              <a:t>Navigate through </a:t>
-            </a:r>
-            <a:r>
-              <a:rPr lang="en-GB" b="1" dirty="0" err="1">
-                <a:solidFill>
-                  <a:schemeClr val="bg1"/>
-                </a:solidFill>
-              </a:rPr>
-              <a:t>Github</a:t>
-            </a:r>
-            <a:r>
-              <a:rPr lang="en-GB" b="1" dirty="0">
-                <a:solidFill>
-                  <a:schemeClr val="bg1"/>
-                </a:solidFill>
-              </a:rPr>
-              <a:t> to find the training repo and your dedicated workspace. </a:t>
-            </a:r>
-          </a:p>
-          <a:p>
-            <a:endParaRPr lang="en-GB" b="1" dirty="0">
-              <a:solidFill>
-                <a:schemeClr val="bg1"/>
-              </a:solidFill>
-            </a:endParaRPr>
-          </a:p>
-          <a:p>
-            <a:pPr marL="800100" lvl="1" indent="-342900">
-              <a:buFont typeface="+mj-lt"/>
-              <a:buAutoNum type="arabicPeriod"/>
-            </a:pPr>
-            <a:r>
-              <a:rPr lang="en-GB" dirty="0">
-                <a:solidFill>
-                  <a:schemeClr val="bg1"/>
-                </a:solidFill>
-              </a:rPr>
-              <a:t>Sign into </a:t>
-            </a:r>
-            <a:r>
-              <a:rPr lang="en-GB" dirty="0" err="1">
-                <a:solidFill>
-                  <a:schemeClr val="bg1"/>
-                </a:solidFill>
-              </a:rPr>
-              <a:t>Github</a:t>
-            </a:r>
-            <a:r>
-              <a:rPr lang="en-GB" dirty="0">
-                <a:solidFill>
-                  <a:schemeClr val="bg1"/>
-                </a:solidFill>
-              </a:rPr>
-              <a:t> with your account (you may be asked to authenticate via Microsoft Authenticator). </a:t>
-            </a:r>
-          </a:p>
-          <a:p>
-            <a:pPr marL="800100" lvl="1" indent="-342900">
-              <a:buFont typeface="+mj-lt"/>
-              <a:buAutoNum type="arabicPeriod"/>
-            </a:pPr>
-            <a:r>
-              <a:rPr lang="en-GB" dirty="0">
-                <a:solidFill>
-                  <a:schemeClr val="bg1"/>
-                </a:solidFill>
-              </a:rPr>
-              <a:t>Search for the following repository in ABUHB’s main page: </a:t>
-            </a:r>
-            <a:r>
-              <a:rPr lang="en-GB" b="1" i="0" u="none" strike="noStrike" dirty="0" err="1">
-                <a:solidFill>
-                  <a:srgbClr val="1F2328"/>
-                </a:solidFill>
-                <a:effectLst/>
-                <a:latin typeface="Mona Sans VF"/>
-                <a:hlinkClick r:id="rId2"/>
-              </a:rPr>
-              <a:t>biu_GitHub_Training</a:t>
-            </a:r>
-            <a:endParaRPr lang="en-GB" b="1" i="0" u="none" strike="noStrike" dirty="0">
-              <a:solidFill>
-                <a:schemeClr val="bg1"/>
-              </a:solidFill>
-              <a:effectLst/>
-              <a:latin typeface="Mona Sans VF"/>
-            </a:endParaRPr>
-          </a:p>
-          <a:p>
-            <a:pPr marL="800100" lvl="1" indent="-342900">
-              <a:buFont typeface="+mj-lt"/>
-              <a:buAutoNum type="arabicPeriod"/>
-            </a:pPr>
-            <a:r>
-              <a:rPr lang="en-GB" dirty="0">
-                <a:solidFill>
-                  <a:schemeClr val="bg1"/>
-                </a:solidFill>
-                <a:latin typeface="Mona Sans VF"/>
-              </a:rPr>
-              <a:t>Open the participants folder and find your folder named </a:t>
-            </a:r>
-            <a:r>
-              <a:rPr lang="en-GB" dirty="0" err="1">
-                <a:solidFill>
-                  <a:schemeClr val="bg1"/>
-                </a:solidFill>
-                <a:latin typeface="Mona Sans VF"/>
-              </a:rPr>
-              <a:t>firstname-lastname</a:t>
-            </a:r>
-            <a:r>
-              <a:rPr lang="en-GB" dirty="0">
-                <a:solidFill>
-                  <a:schemeClr val="bg1"/>
-                </a:solidFill>
-                <a:latin typeface="Mona Sans VF"/>
-              </a:rPr>
-              <a:t>. </a:t>
-            </a:r>
-          </a:p>
-          <a:p>
-            <a:pPr marL="800100" lvl="1" indent="-342900">
-              <a:buFont typeface="+mj-lt"/>
-              <a:buAutoNum type="arabicPeriod"/>
-            </a:pPr>
-            <a:endParaRPr lang="en-GB" dirty="0">
-              <a:solidFill>
-                <a:schemeClr val="bg1"/>
-              </a:solidFill>
-              <a:latin typeface="Mona Sans VF"/>
-            </a:endParaRPr>
-          </a:p>
-        </p:txBody>
-      </p:sp>
-    </p:spTree>
-    <p:extLst>
-      <p:ext uri="{BB962C8B-B14F-4D97-AF65-F5344CB8AC3E}">
-        <p14:creationId xmlns:p14="http://schemas.microsoft.com/office/powerpoint/2010/main" val="3802757967"/>
-      </p:ext>
-    </p:extLst>
-  </p:cSld>
-  <p:clrMapOvr>
-    <a:masterClrMapping/>
-  </p:clrMapOvr>
 </p:sld>
 </file>
 

--- a/Training/Github Training.pptx
+++ b/Training/Github Training.pptx
@@ -5,7 +5,7 @@
     <p:sldMasterId id="2147483648" r:id="rId4"/>
   </p:sldMasterIdLst>
   <p:notesMasterIdLst>
-    <p:notesMasterId r:id="rId40"/>
+    <p:notesMasterId r:id="rId41"/>
   </p:notesMasterIdLst>
   <p:sldIdLst>
     <p:sldId id="275" r:id="rId5"/>
@@ -29,20 +29,21 @@
     <p:sldId id="304" r:id="rId23"/>
     <p:sldId id="305" r:id="rId24"/>
     <p:sldId id="306" r:id="rId25"/>
-    <p:sldId id="290" r:id="rId26"/>
-    <p:sldId id="292" r:id="rId27"/>
-    <p:sldId id="293" r:id="rId28"/>
-    <p:sldId id="296" r:id="rId29"/>
-    <p:sldId id="295" r:id="rId30"/>
-    <p:sldId id="297" r:id="rId31"/>
-    <p:sldId id="298" r:id="rId32"/>
-    <p:sldId id="299" r:id="rId33"/>
-    <p:sldId id="303" r:id="rId34"/>
-    <p:sldId id="300" r:id="rId35"/>
-    <p:sldId id="301" r:id="rId36"/>
-    <p:sldId id="309" r:id="rId37"/>
-    <p:sldId id="307" r:id="rId38"/>
-    <p:sldId id="308" r:id="rId39"/>
+    <p:sldId id="311" r:id="rId26"/>
+    <p:sldId id="290" r:id="rId27"/>
+    <p:sldId id="292" r:id="rId28"/>
+    <p:sldId id="293" r:id="rId29"/>
+    <p:sldId id="296" r:id="rId30"/>
+    <p:sldId id="295" r:id="rId31"/>
+    <p:sldId id="297" r:id="rId32"/>
+    <p:sldId id="298" r:id="rId33"/>
+    <p:sldId id="299" r:id="rId34"/>
+    <p:sldId id="303" r:id="rId35"/>
+    <p:sldId id="300" r:id="rId36"/>
+    <p:sldId id="301" r:id="rId37"/>
+    <p:sldId id="309" r:id="rId38"/>
+    <p:sldId id="307" r:id="rId39"/>
+    <p:sldId id="308" r:id="rId40"/>
   </p:sldIdLst>
   <p:sldSz cx="12192000" cy="6858000"/>
   <p:notesSz cx="6858000" cy="9144000"/>
@@ -198,7 +199,7 @@
             </a:lvl1pPr>
           </a:lstStyle>
           <a:p>
-            <a:endParaRPr lang="en-US"/>
+            <a:endParaRPr lang="en-US" dirty="0"/>
           </a:p>
         </p:txBody>
       </p:sp>
@@ -231,9 +232,9 @@
           <a:p>
             <a:fld id="{B32262E1-CA21-AE4E-AE29-A941BAF2DC72}" type="datetimeFigureOut">
               <a:rPr lang="en-US" smtClean="0"/>
-              <a:t>10/23/2026</a:t>
+              <a:t>10/26/2026</a:t>
             </a:fld>
-            <a:endParaRPr lang="en-US"/>
+            <a:endParaRPr lang="en-US" dirty="0"/>
           </a:p>
         </p:txBody>
       </p:sp>
@@ -266,7 +267,7 @@
           <a:bodyPr vert="horz" lIns="91440" tIns="45720" rIns="91440" bIns="45720" rtlCol="0" anchor="ctr"/>
           <a:lstStyle/>
           <a:p>
-            <a:endParaRPr lang="en-US"/>
+            <a:endParaRPr lang="en-US" dirty="0"/>
           </a:p>
         </p:txBody>
       </p:sp>
@@ -357,7 +358,7 @@
             </a:lvl1pPr>
           </a:lstStyle>
           <a:p>
-            <a:endParaRPr lang="en-US"/>
+            <a:endParaRPr lang="en-US" dirty="0"/>
           </a:p>
         </p:txBody>
       </p:sp>
@@ -392,7 +393,7 @@
               <a:rPr lang="en-US" smtClean="0"/>
               <a:t>‹#›</a:t>
             </a:fld>
-            <a:endParaRPr lang="en-US"/>
+            <a:endParaRPr lang="en-US" dirty="0"/>
           </a:p>
         </p:txBody>
       </p:sp>
@@ -906,10 +907,9 @@
           </a:lstStyle>
           <a:p>
             <a:r>
-              <a:rPr lang="en-US"/>
+              <a:rPr lang="en-US" dirty="0"/>
               <a:t>Click icon to add picture</a:t>
             </a:r>
-            <a:endParaRPr lang="en-US" dirty="0"/>
           </a:p>
         </p:txBody>
       </p:sp>
@@ -1040,10 +1040,9 @@
           </a:lstStyle>
           <a:p>
             <a:r>
-              <a:rPr lang="en-US" dirty="0" err="1"/>
+              <a:rPr lang="en-US" dirty="0"/>
               <a:t>abuhb.nhs.wales</a:t>
             </a:r>
-            <a:endParaRPr lang="en-US" dirty="0"/>
           </a:p>
         </p:txBody>
       </p:sp>
@@ -1236,10 +1235,9 @@
           </a:lstStyle>
           <a:p>
             <a:r>
-              <a:rPr lang="en-US"/>
+              <a:rPr lang="en-US" dirty="0"/>
               <a:t>Click icon to add picture</a:t>
             </a:r>
-            <a:endParaRPr lang="en-US" dirty="0"/>
           </a:p>
         </p:txBody>
       </p:sp>
@@ -1370,10 +1368,9 @@
           </a:lstStyle>
           <a:p>
             <a:r>
-              <a:rPr lang="en-US" dirty="0" err="1"/>
+              <a:rPr lang="en-US" dirty="0"/>
               <a:t>abuhb.nhs.wales</a:t>
             </a:r>
-            <a:endParaRPr lang="en-US" dirty="0"/>
           </a:p>
         </p:txBody>
       </p:sp>
@@ -1566,10 +1563,9 @@
           </a:lstStyle>
           <a:p>
             <a:r>
-              <a:rPr lang="en-US"/>
+              <a:rPr lang="en-US" dirty="0"/>
               <a:t>Click icon to add picture</a:t>
             </a:r>
-            <a:endParaRPr lang="en-US" dirty="0"/>
           </a:p>
         </p:txBody>
       </p:sp>
@@ -1653,10 +1649,9 @@
           </a:lstStyle>
           <a:p>
             <a:r>
-              <a:rPr lang="en-US" dirty="0" err="1"/>
+              <a:rPr lang="en-US" dirty="0"/>
               <a:t>abuhb.nhs.wales</a:t>
             </a:r>
-            <a:endParaRPr lang="en-US" dirty="0"/>
           </a:p>
         </p:txBody>
       </p:sp>
@@ -1770,10 +1765,9 @@
           </a:lstStyle>
           <a:p>
             <a:r>
-              <a:rPr lang="en-US"/>
+              <a:rPr lang="en-US" dirty="0"/>
               <a:t>Click icon to add picture</a:t>
             </a:r>
-            <a:endParaRPr lang="en-US" dirty="0"/>
           </a:p>
         </p:txBody>
       </p:sp>
@@ -1841,10 +1835,9 @@
           </a:lstStyle>
           <a:p>
             <a:r>
-              <a:rPr lang="en-US"/>
+              <a:rPr lang="en-US" dirty="0"/>
               <a:t>Click icon to add picture</a:t>
             </a:r>
-            <a:endParaRPr lang="en-US" dirty="0"/>
           </a:p>
         </p:txBody>
       </p:sp>
@@ -2221,10 +2214,9 @@
           </a:lstStyle>
           <a:p>
             <a:r>
-              <a:rPr lang="en-US"/>
+              <a:rPr lang="en-US" dirty="0"/>
               <a:t>Click icon to add picture</a:t>
             </a:r>
-            <a:endParaRPr lang="en-US" dirty="0"/>
           </a:p>
         </p:txBody>
       </p:sp>
@@ -2308,10 +2300,9 @@
           </a:lstStyle>
           <a:p>
             <a:r>
-              <a:rPr lang="en-US" dirty="0" err="1"/>
+              <a:rPr lang="en-US" dirty="0"/>
               <a:t>abuhb.nhs.wales</a:t>
             </a:r>
-            <a:endParaRPr lang="en-US" dirty="0"/>
           </a:p>
         </p:txBody>
       </p:sp>
@@ -2379,10 +2370,9 @@
           </a:lstStyle>
           <a:p>
             <a:r>
-              <a:rPr lang="en-US"/>
+              <a:rPr lang="en-US" dirty="0"/>
               <a:t>Click icon to add picture</a:t>
             </a:r>
-            <a:endParaRPr lang="en-US" dirty="0"/>
           </a:p>
         </p:txBody>
       </p:sp>
@@ -2450,10 +2440,9 @@
           </a:lstStyle>
           <a:p>
             <a:r>
-              <a:rPr lang="en-US"/>
+              <a:rPr lang="en-US" dirty="0"/>
               <a:t>Click icon to add picture</a:t>
             </a:r>
-            <a:endParaRPr lang="en-US" dirty="0"/>
           </a:p>
         </p:txBody>
       </p:sp>
@@ -2521,10 +2510,9 @@
           </a:lstStyle>
           <a:p>
             <a:r>
-              <a:rPr lang="en-US"/>
+              <a:rPr lang="en-US" dirty="0"/>
               <a:t>Click icon to add picture</a:t>
             </a:r>
-            <a:endParaRPr lang="en-US" dirty="0"/>
           </a:p>
         </p:txBody>
       </p:sp>
@@ -2592,10 +2580,9 @@
           </a:lstStyle>
           <a:p>
             <a:r>
-              <a:rPr lang="en-US"/>
+              <a:rPr lang="en-US" dirty="0"/>
               <a:t>Click icon to add picture</a:t>
             </a:r>
-            <a:endParaRPr lang="en-US" dirty="0"/>
           </a:p>
         </p:txBody>
       </p:sp>
@@ -2663,10 +2650,9 @@
           </a:lstStyle>
           <a:p>
             <a:r>
-              <a:rPr lang="en-US"/>
+              <a:rPr lang="en-US" dirty="0"/>
               <a:t>Click icon to add picture</a:t>
             </a:r>
-            <a:endParaRPr lang="en-US" dirty="0"/>
           </a:p>
         </p:txBody>
       </p:sp>
@@ -3047,7 +3033,7 @@
               <a:rPr lang="en-US" smtClean="0"/>
               <a:t>‹#›</a:t>
             </a:fld>
-            <a:endParaRPr lang="en-US"/>
+            <a:endParaRPr lang="en-US" dirty="0"/>
           </a:p>
         </p:txBody>
       </p:sp>
@@ -3220,10 +3206,9 @@
           </a:lstStyle>
           <a:p>
             <a:r>
-              <a:rPr lang="en-US" dirty="0" err="1"/>
+              <a:rPr lang="en-US" dirty="0"/>
               <a:t>abuhb.nhs.wales</a:t>
             </a:r>
-            <a:endParaRPr lang="en-US" dirty="0"/>
           </a:p>
         </p:txBody>
       </p:sp>
@@ -3254,7 +3239,7 @@
           <a:lstStyle/>
           <a:p>
             <a:r>
-              <a:rPr lang="en-US"/>
+              <a:rPr lang="en-US" dirty="0"/>
               <a:t>Click icon to add chart</a:t>
             </a:r>
           </a:p>
@@ -3315,7 +3300,7 @@
               <a:rPr lang="en-US" smtClean="0"/>
               <a:t>‹#›</a:t>
             </a:fld>
-            <a:endParaRPr lang="en-US"/>
+            <a:endParaRPr lang="en-US" dirty="0"/>
           </a:p>
         </p:txBody>
       </p:sp>
@@ -3400,10 +3385,9 @@
           </a:lstStyle>
           <a:p>
             <a:r>
-              <a:rPr lang="en-US" dirty="0" err="1"/>
+              <a:rPr lang="en-US" dirty="0"/>
               <a:t>abuhb.nhs.wales</a:t>
             </a:r>
-            <a:endParaRPr lang="en-US" dirty="0"/>
           </a:p>
         </p:txBody>
       </p:sp>
@@ -3610,7 +3594,7 @@
           <a:lstStyle/>
           <a:p>
             <a:r>
-              <a:rPr lang="en-US"/>
+              <a:rPr lang="en-US" dirty="0"/>
               <a:t>Click icon to add chart</a:t>
             </a:r>
           </a:p>
@@ -3643,7 +3627,7 @@
           <a:lstStyle/>
           <a:p>
             <a:r>
-              <a:rPr lang="en-US"/>
+              <a:rPr lang="en-US" dirty="0"/>
               <a:t>Click icon to add chart</a:t>
             </a:r>
           </a:p>
@@ -3704,7 +3688,7 @@
               <a:rPr lang="en-US" smtClean="0"/>
               <a:t>‹#›</a:t>
             </a:fld>
-            <a:endParaRPr lang="en-US"/>
+            <a:endParaRPr lang="en-US" dirty="0"/>
           </a:p>
         </p:txBody>
       </p:sp>
@@ -3908,10 +3892,9 @@
           </a:lstStyle>
           <a:p>
             <a:r>
-              <a:rPr lang="en-US"/>
+              <a:rPr lang="en-US" dirty="0"/>
               <a:t>Click icon to add picture</a:t>
             </a:r>
-            <a:endParaRPr lang="en-US" dirty="0"/>
           </a:p>
         </p:txBody>
       </p:sp>
@@ -3957,10 +3940,9 @@
           </a:lstStyle>
           <a:p>
             <a:r>
-              <a:rPr lang="en-US" dirty="0" err="1"/>
+              <a:rPr lang="en-US" dirty="0"/>
               <a:t>abuhb.nhs.wales</a:t>
             </a:r>
-            <a:endParaRPr lang="en-US" dirty="0"/>
           </a:p>
         </p:txBody>
       </p:sp>
@@ -4066,10 +4048,9 @@
           </a:lstStyle>
           <a:p>
             <a:r>
-              <a:rPr lang="en-US"/>
+              <a:rPr lang="en-US" dirty="0"/>
               <a:t>Click icon to add picture</a:t>
             </a:r>
-            <a:endParaRPr lang="en-US" dirty="0"/>
           </a:p>
         </p:txBody>
       </p:sp>
@@ -4098,7 +4079,7 @@
               <a:rPr lang="en-US" smtClean="0"/>
               <a:t>‹#›</a:t>
             </a:fld>
-            <a:endParaRPr lang="en-US"/>
+            <a:endParaRPr lang="en-US" dirty="0"/>
           </a:p>
         </p:txBody>
       </p:sp>
@@ -4323,10 +4304,9 @@
           </a:lstStyle>
           <a:p>
             <a:r>
-              <a:rPr lang="en-US"/>
+              <a:rPr lang="en-US" dirty="0"/>
               <a:t>Click icon to add picture</a:t>
             </a:r>
-            <a:endParaRPr lang="en-US" dirty="0"/>
           </a:p>
         </p:txBody>
       </p:sp>
@@ -4355,7 +4335,7 @@
               <a:rPr lang="en-US" smtClean="0"/>
               <a:t>‹#›</a:t>
             </a:fld>
-            <a:endParaRPr lang="en-US"/>
+            <a:endParaRPr lang="en-US" dirty="0"/>
           </a:p>
         </p:txBody>
       </p:sp>
@@ -4580,10 +4560,9 @@
           </a:lstStyle>
           <a:p>
             <a:r>
-              <a:rPr lang="en-US"/>
+              <a:rPr lang="en-US" dirty="0"/>
               <a:t>Click icon to add picture</a:t>
             </a:r>
-            <a:endParaRPr lang="en-US" dirty="0"/>
           </a:p>
         </p:txBody>
       </p:sp>
@@ -4612,7 +4591,7 @@
               <a:rPr lang="en-US" smtClean="0"/>
               <a:t>‹#›</a:t>
             </a:fld>
-            <a:endParaRPr lang="en-US"/>
+            <a:endParaRPr lang="en-US" dirty="0"/>
           </a:p>
         </p:txBody>
       </p:sp>
@@ -4785,10 +4764,9 @@
           </a:lstStyle>
           <a:p>
             <a:r>
-              <a:rPr lang="en-US" dirty="0" err="1"/>
+              <a:rPr lang="en-US" dirty="0"/>
               <a:t>abuhb.nhs.wales</a:t>
             </a:r>
-            <a:endParaRPr lang="en-US" dirty="0"/>
           </a:p>
         </p:txBody>
       </p:sp>
@@ -5466,10 +5444,9 @@
           </a:lstStyle>
           <a:p>
             <a:r>
-              <a:rPr lang="en-US"/>
+              <a:rPr lang="en-US" dirty="0"/>
               <a:t>Click icon to add picture</a:t>
             </a:r>
-            <a:endParaRPr lang="en-US" dirty="0"/>
           </a:p>
         </p:txBody>
       </p:sp>
@@ -5832,10 +5809,9 @@
           </a:lstStyle>
           <a:p>
             <a:r>
-              <a:rPr lang="en-US"/>
+              <a:rPr lang="en-US" dirty="0"/>
               <a:t>Click icon to add picture</a:t>
             </a:r>
-            <a:endParaRPr lang="en-US" dirty="0"/>
           </a:p>
         </p:txBody>
       </p:sp>
@@ -5864,7 +5840,7 @@
               <a:rPr lang="en-US" smtClean="0"/>
               <a:t>‹#›</a:t>
             </a:fld>
-            <a:endParaRPr lang="en-US"/>
+            <a:endParaRPr lang="en-US" dirty="0"/>
           </a:p>
         </p:txBody>
       </p:sp>
@@ -6212,10 +6188,9 @@
           </a:lstStyle>
           <a:p>
             <a:r>
-              <a:rPr lang="en-US"/>
+              <a:rPr lang="en-US" dirty="0"/>
               <a:t>Click icon to add picture</a:t>
             </a:r>
-            <a:endParaRPr lang="en-US" dirty="0"/>
           </a:p>
         </p:txBody>
       </p:sp>
@@ -6244,7 +6219,7 @@
               <a:rPr lang="en-US" smtClean="0"/>
               <a:t>‹#›</a:t>
             </a:fld>
-            <a:endParaRPr lang="en-US"/>
+            <a:endParaRPr lang="en-US" dirty="0"/>
           </a:p>
         </p:txBody>
       </p:sp>
@@ -6857,10 +6832,9 @@
           </a:lstStyle>
           <a:p>
             <a:r>
-              <a:rPr lang="en-US" dirty="0" err="1"/>
+              <a:rPr lang="en-US" dirty="0"/>
               <a:t>abuhb.nhs.wales</a:t>
             </a:r>
-            <a:endParaRPr lang="en-US" dirty="0"/>
           </a:p>
         </p:txBody>
       </p:sp>
@@ -6958,10 +6932,9 @@
           </a:lstStyle>
           <a:p>
             <a:r>
-              <a:rPr lang="en-US"/>
+              <a:rPr lang="en-US" dirty="0"/>
               <a:t>Click icon to add picture</a:t>
             </a:r>
-            <a:endParaRPr lang="en-US" dirty="0"/>
           </a:p>
         </p:txBody>
       </p:sp>
@@ -6990,7 +6963,7 @@
               <a:rPr lang="en-US" smtClean="0"/>
               <a:t>‹#›</a:t>
             </a:fld>
-            <a:endParaRPr lang="en-US"/>
+            <a:endParaRPr lang="en-US" dirty="0"/>
           </a:p>
         </p:txBody>
       </p:sp>
@@ -7185,10 +7158,9 @@
           </a:lstStyle>
           <a:p>
             <a:r>
-              <a:rPr lang="en-US"/>
+              <a:rPr lang="en-US" dirty="0"/>
               <a:t>Click icon to add picture</a:t>
             </a:r>
-            <a:endParaRPr lang="en-US" dirty="0"/>
           </a:p>
         </p:txBody>
       </p:sp>
@@ -7344,10 +7316,9 @@
           </a:lstStyle>
           <a:p>
             <a:r>
-              <a:rPr lang="en-US"/>
+              <a:rPr lang="en-US" dirty="0"/>
               <a:t>Click icon to add picture</a:t>
             </a:r>
-            <a:endParaRPr lang="en-US" dirty="0"/>
           </a:p>
         </p:txBody>
       </p:sp>
@@ -7503,10 +7474,9 @@
           </a:lstStyle>
           <a:p>
             <a:r>
-              <a:rPr lang="en-US"/>
+              <a:rPr lang="en-US" dirty="0"/>
               <a:t>Click icon to add picture</a:t>
             </a:r>
-            <a:endParaRPr lang="en-US" dirty="0"/>
           </a:p>
         </p:txBody>
       </p:sp>
@@ -7662,10 +7632,9 @@
           </a:lstStyle>
           <a:p>
             <a:r>
-              <a:rPr lang="en-US"/>
+              <a:rPr lang="en-US" dirty="0"/>
               <a:t>Click icon to add picture</a:t>
             </a:r>
-            <a:endParaRPr lang="en-US" dirty="0"/>
           </a:p>
         </p:txBody>
       </p:sp>
@@ -7821,10 +7790,9 @@
           </a:lstStyle>
           <a:p>
             <a:r>
-              <a:rPr lang="en-US"/>
+              <a:rPr lang="en-US" dirty="0"/>
               <a:t>Click icon to add picture</a:t>
             </a:r>
-            <a:endParaRPr lang="en-US" dirty="0"/>
           </a:p>
         </p:txBody>
       </p:sp>
@@ -7980,10 +7948,9 @@
           </a:lstStyle>
           <a:p>
             <a:r>
-              <a:rPr lang="en-US"/>
+              <a:rPr lang="en-US" dirty="0"/>
               <a:t>Click icon to add picture</a:t>
             </a:r>
-            <a:endParaRPr lang="en-US" dirty="0"/>
           </a:p>
         </p:txBody>
       </p:sp>
@@ -8139,10 +8106,9 @@
           </a:lstStyle>
           <a:p>
             <a:r>
-              <a:rPr lang="en-US"/>
+              <a:rPr lang="en-US" dirty="0"/>
               <a:t>Click icon to add picture</a:t>
             </a:r>
-            <a:endParaRPr lang="en-US" dirty="0"/>
           </a:p>
         </p:txBody>
       </p:sp>
@@ -8276,10 +8242,9 @@
           </a:lstStyle>
           <a:p>
             <a:r>
-              <a:rPr lang="en-US" dirty="0" err="1"/>
+              <a:rPr lang="en-US" dirty="0"/>
               <a:t>abuhb.nhs.wales</a:t>
             </a:r>
-            <a:endParaRPr lang="en-US" dirty="0"/>
           </a:p>
         </p:txBody>
       </p:sp>
@@ -8377,10 +8342,9 @@
           </a:lstStyle>
           <a:p>
             <a:r>
-              <a:rPr lang="en-US"/>
+              <a:rPr lang="en-US" dirty="0"/>
               <a:t>Click icon to add picture</a:t>
             </a:r>
-            <a:endParaRPr lang="en-US" dirty="0"/>
           </a:p>
         </p:txBody>
       </p:sp>
@@ -8409,7 +8373,7 @@
               <a:rPr lang="en-US" smtClean="0"/>
               <a:t>‹#›</a:t>
             </a:fld>
-            <a:endParaRPr lang="en-US"/>
+            <a:endParaRPr lang="en-US" dirty="0"/>
           </a:p>
         </p:txBody>
       </p:sp>
@@ -8604,10 +8568,9 @@
           </a:lstStyle>
           <a:p>
             <a:r>
-              <a:rPr lang="en-US"/>
+              <a:rPr lang="en-US" dirty="0"/>
               <a:t>Click icon to add picture</a:t>
             </a:r>
-            <a:endParaRPr lang="en-US" dirty="0"/>
           </a:p>
         </p:txBody>
       </p:sp>
@@ -8763,10 +8726,9 @@
           </a:lstStyle>
           <a:p>
             <a:r>
-              <a:rPr lang="en-US"/>
+              <a:rPr lang="en-US" dirty="0"/>
               <a:t>Click icon to add picture</a:t>
             </a:r>
-            <a:endParaRPr lang="en-US" dirty="0"/>
           </a:p>
         </p:txBody>
       </p:sp>
@@ -8922,10 +8884,9 @@
           </a:lstStyle>
           <a:p>
             <a:r>
-              <a:rPr lang="en-US"/>
+              <a:rPr lang="en-US" dirty="0"/>
               <a:t>Click icon to add picture</a:t>
             </a:r>
-            <a:endParaRPr lang="en-US" dirty="0"/>
           </a:p>
         </p:txBody>
       </p:sp>
@@ -9081,10 +9042,9 @@
           </a:lstStyle>
           <a:p>
             <a:r>
-              <a:rPr lang="en-US"/>
+              <a:rPr lang="en-US" dirty="0"/>
               <a:t>Click icon to add picture</a:t>
             </a:r>
-            <a:endParaRPr lang="en-US" dirty="0"/>
           </a:p>
         </p:txBody>
       </p:sp>
@@ -9240,10 +9200,9 @@
           </a:lstStyle>
           <a:p>
             <a:r>
-              <a:rPr lang="en-US"/>
+              <a:rPr lang="en-US" dirty="0"/>
               <a:t>Click icon to add picture</a:t>
             </a:r>
-            <a:endParaRPr lang="en-US" dirty="0"/>
           </a:p>
         </p:txBody>
       </p:sp>
@@ -9377,10 +9336,9 @@
           </a:lstStyle>
           <a:p>
             <a:r>
-              <a:rPr lang="en-US" dirty="0" err="1"/>
+              <a:rPr lang="en-US" dirty="0"/>
               <a:t>abuhb.nhs.wales</a:t>
             </a:r>
-            <a:endParaRPr lang="en-US" dirty="0"/>
           </a:p>
         </p:txBody>
       </p:sp>
@@ -9439,7 +9397,7 @@
               <a:rPr lang="en-US" smtClean="0"/>
               <a:t>‹#›</a:t>
             </a:fld>
-            <a:endParaRPr lang="en-US"/>
+            <a:endParaRPr lang="en-US" dirty="0"/>
           </a:p>
         </p:txBody>
       </p:sp>
@@ -9722,10 +9680,9 @@
           </a:lstStyle>
           <a:p>
             <a:r>
-              <a:rPr lang="en-US"/>
+              <a:rPr lang="en-US" dirty="0"/>
               <a:t>Click icon to add picture</a:t>
             </a:r>
-            <a:endParaRPr lang="en-US" dirty="0"/>
           </a:p>
         </p:txBody>
       </p:sp>
@@ -9771,10 +9728,9 @@
           </a:lstStyle>
           <a:p>
             <a:r>
-              <a:rPr lang="en-US" dirty="0" err="1"/>
+              <a:rPr lang="en-US" dirty="0"/>
               <a:t>abuhb.nhs.wales</a:t>
             </a:r>
-            <a:endParaRPr lang="en-US" dirty="0"/>
           </a:p>
         </p:txBody>
       </p:sp>
@@ -9960,10 +9916,9 @@
           </a:lstStyle>
           <a:p>
             <a:r>
-              <a:rPr lang="en-US"/>
+              <a:rPr lang="en-US" dirty="0"/>
               <a:t>Click icon to add picture</a:t>
             </a:r>
-            <a:endParaRPr lang="en-US" dirty="0"/>
           </a:p>
         </p:txBody>
       </p:sp>
@@ -9992,7 +9947,7 @@
               <a:rPr lang="en-US" smtClean="0"/>
               <a:t>‹#›</a:t>
             </a:fld>
-            <a:endParaRPr lang="en-US"/>
+            <a:endParaRPr lang="en-US" dirty="0"/>
           </a:p>
         </p:txBody>
       </p:sp>
@@ -10165,10 +10120,9 @@
           </a:lstStyle>
           <a:p>
             <a:r>
-              <a:rPr lang="en-US" dirty="0" err="1"/>
+              <a:rPr lang="en-US" dirty="0"/>
               <a:t>abuhb.nhs.wales</a:t>
             </a:r>
-            <a:endParaRPr lang="en-US" dirty="0"/>
           </a:p>
         </p:txBody>
       </p:sp>
@@ -10435,7 +10389,7 @@
             <a:lstStyle/>
             <a:p>
               <a:pPr algn="ctr"/>
-              <a:endParaRPr lang="en-US"/>
+              <a:endParaRPr lang="en-US" dirty="0"/>
             </a:p>
           </p:txBody>
         </p:sp>
@@ -10484,7 +10438,7 @@
             <a:lstStyle/>
             <a:p>
               <a:pPr algn="ctr"/>
-              <a:endParaRPr lang="en-US"/>
+              <a:endParaRPr lang="en-US" dirty="0"/>
             </a:p>
           </p:txBody>
         </p:sp>
@@ -10536,7 +10490,7 @@
             <a:lstStyle/>
             <a:p>
               <a:pPr algn="ctr"/>
-              <a:endParaRPr lang="en-US"/>
+              <a:endParaRPr lang="en-US" dirty="0"/>
             </a:p>
           </p:txBody>
         </p:sp>
@@ -10588,7 +10542,7 @@
             <a:lstStyle/>
             <a:p>
               <a:pPr algn="ctr"/>
-              <a:endParaRPr lang="en-US"/>
+              <a:endParaRPr lang="en-US" dirty="0"/>
             </a:p>
           </p:txBody>
         </p:sp>
@@ -10640,7 +10594,7 @@
             <a:lstStyle/>
             <a:p>
               <a:pPr algn="ctr"/>
-              <a:endParaRPr lang="en-US"/>
+              <a:endParaRPr lang="en-US" dirty="0"/>
             </a:p>
           </p:txBody>
         </p:sp>
@@ -10692,7 +10646,7 @@
             <a:lstStyle/>
             <a:p>
               <a:pPr algn="ctr"/>
-              <a:endParaRPr lang="en-US"/>
+              <a:endParaRPr lang="en-US" dirty="0"/>
             </a:p>
           </p:txBody>
         </p:sp>
@@ -10744,7 +10698,7 @@
             <a:lstStyle/>
             <a:p>
               <a:pPr algn="ctr"/>
-              <a:endParaRPr lang="en-US"/>
+              <a:endParaRPr lang="en-US" dirty="0"/>
             </a:p>
           </p:txBody>
         </p:sp>
@@ -10796,7 +10750,7 @@
             <a:lstStyle/>
             <a:p>
               <a:pPr algn="ctr"/>
-              <a:endParaRPr lang="en-US"/>
+              <a:endParaRPr lang="en-US" dirty="0"/>
             </a:p>
           </p:txBody>
         </p:sp>
@@ -10848,7 +10802,7 @@
             <a:lstStyle/>
             <a:p>
               <a:pPr algn="ctr"/>
-              <a:endParaRPr lang="en-US"/>
+              <a:endParaRPr lang="en-US" dirty="0"/>
             </a:p>
           </p:txBody>
         </p:sp>
@@ -10900,7 +10854,7 @@
             <a:lstStyle/>
             <a:p>
               <a:pPr algn="ctr"/>
-              <a:endParaRPr lang="en-US"/>
+              <a:endParaRPr lang="en-US" dirty="0"/>
             </a:p>
           </p:txBody>
         </p:sp>
@@ -10983,10 +10937,9 @@
           </a:lstStyle>
           <a:p>
             <a:r>
-              <a:rPr lang="en-US" dirty="0" err="1"/>
+              <a:rPr lang="en-US" dirty="0"/>
               <a:t>abuhb.nhs.wales</a:t>
             </a:r>
-            <a:endParaRPr lang="en-US" dirty="0"/>
           </a:p>
         </p:txBody>
       </p:sp>
@@ -11348,12 +11301,8 @@
           <a:lstStyle/>
           <a:p>
             <a:r>
-              <a:rPr lang="en-GB" dirty="0" err="1"/>
-              <a:t>Github</a:t>
-            </a:r>
-            <a:r>
               <a:rPr lang="en-GB" dirty="0"/>
-              <a:t> Training</a:t>
+              <a:t>GitHub Training</a:t>
             </a:r>
           </a:p>
         </p:txBody>
@@ -11379,7 +11328,7 @@
           <a:bodyPr/>
           <a:lstStyle/>
           <a:p>
-            <a:endParaRPr lang="en-GB"/>
+            <a:endParaRPr lang="en-GB" dirty="0"/>
           </a:p>
         </p:txBody>
       </p:sp>
@@ -11439,7 +11388,7 @@
               <a:pPr/>
               <a:t>10</a:t>
             </a:fld>
-            <a:endParaRPr lang="en-GB"/>
+            <a:endParaRPr lang="en-GB" dirty="0"/>
           </a:p>
         </p:txBody>
       </p:sp>
@@ -11567,23 +11516,7 @@
                   <a:schemeClr val="bg1"/>
                 </a:solidFill>
               </a:rPr>
-              <a:t>Navigate through </a:t>
-            </a:r>
-            <a:r>
-              <a:rPr lang="en-GB" b="1" dirty="0" err="1">
-                <a:solidFill>
-                  <a:schemeClr val="bg1"/>
-                </a:solidFill>
-              </a:rPr>
-              <a:t>Github</a:t>
-            </a:r>
-            <a:r>
-              <a:rPr lang="en-GB" b="1" dirty="0">
-                <a:solidFill>
-                  <a:schemeClr val="bg1"/>
-                </a:solidFill>
-              </a:rPr>
-              <a:t> to find the training repo and your dedicated workspace. </a:t>
+              <a:t>Navigate through GitHub to find the training repo and your dedicated workspace. </a:t>
             </a:r>
           </a:p>
           <a:p>
@@ -11604,23 +11537,7 @@
                   <a:schemeClr val="bg1"/>
                 </a:solidFill>
               </a:rPr>
-              <a:t>Sign into </a:t>
-            </a:r>
-            <a:r>
-              <a:rPr lang="en-GB" dirty="0" err="1">
-                <a:solidFill>
-                  <a:schemeClr val="bg1"/>
-                </a:solidFill>
-              </a:rPr>
-              <a:t>Github</a:t>
-            </a:r>
-            <a:r>
-              <a:rPr lang="en-GB" dirty="0">
-                <a:solidFill>
-                  <a:schemeClr val="bg1"/>
-                </a:solidFill>
-              </a:rPr>
-              <a:t> with your account (you may be asked to authenticate via Microsoft Authenticator). </a:t>
+              <a:t>Sign into GitHub with your account (you may be asked to authenticate via Microsoft Authenticator). </a:t>
             </a:r>
           </a:p>
           <a:p>
@@ -11637,7 +11554,7 @@
               <a:t>Search for the following repository in ABUHB’s main page: </a:t>
             </a:r>
             <a:r>
-              <a:rPr lang="en-GB" b="1" i="0" u="none" strike="noStrike" dirty="0" err="1">
+              <a:rPr lang="en-GB" b="1" i="0" u="none" strike="noStrike" dirty="0">
                 <a:solidFill>
                   <a:srgbClr val="1F2328"/>
                 </a:solidFill>
@@ -11667,25 +11584,7 @@
                 </a:solidFill>
                 <a:latin typeface="Mona Sans VF"/>
               </a:rPr>
-              <a:t>Open the participants folder and find your folder named </a:t>
-            </a:r>
-            <a:r>
-              <a:rPr lang="en-GB" dirty="0" err="1">
-                <a:solidFill>
-                  <a:schemeClr val="bg1"/>
-                </a:solidFill>
-                <a:latin typeface="Mona Sans VF"/>
-              </a:rPr>
-              <a:t>firstname-lastname</a:t>
-            </a:r>
-            <a:r>
-              <a:rPr lang="en-GB" dirty="0">
-                <a:solidFill>
-                  <a:schemeClr val="bg1"/>
-                </a:solidFill>
-                <a:latin typeface="Mona Sans VF"/>
-              </a:rPr>
-              <a:t>. </a:t>
+              <a:t>Open the participants folder and find your folder named firstname-lastname. </a:t>
             </a:r>
           </a:p>
           <a:p>
@@ -11912,7 +11811,7 @@
               <a:pPr/>
               <a:t>12</a:t>
             </a:fld>
-            <a:endParaRPr lang="en-GB"/>
+            <a:endParaRPr lang="en-GB" dirty="0"/>
           </a:p>
         </p:txBody>
       </p:sp>
@@ -12323,7 +12222,7 @@
               <a:pPr/>
               <a:t>13</a:t>
             </a:fld>
-            <a:endParaRPr lang="en-GB"/>
+            <a:endParaRPr lang="en-GB" dirty="0"/>
           </a:p>
         </p:txBody>
       </p:sp>
@@ -12650,7 +12549,7 @@
               <a:pPr/>
               <a:t>14</a:t>
             </a:fld>
-            <a:endParaRPr lang="en-GB"/>
+            <a:endParaRPr lang="en-GB" dirty="0"/>
           </a:p>
         </p:txBody>
       </p:sp>
@@ -12811,7 +12710,7 @@
                 <a:lstStyle/>
                 <a:p>
                   <a:pPr algn="ctr"/>
-                  <a:endParaRPr lang="en-GB"/>
+                  <a:endParaRPr lang="en-GB" dirty="0"/>
                 </a:p>
               </p:txBody>
             </p:sp>
@@ -13113,7 +13012,7 @@
                 <a:lstStyle/>
                 <a:p>
                   <a:pPr algn="ctr"/>
-                  <a:endParaRPr lang="en-GB"/>
+                  <a:endParaRPr lang="en-GB" dirty="0"/>
                 </a:p>
               </p:txBody>
             </p:sp>
@@ -13368,7 +13267,7 @@
                 <a:lstStyle/>
                 <a:p>
                   <a:pPr algn="ctr"/>
-                  <a:endParaRPr lang="en-GB"/>
+                  <a:endParaRPr lang="en-GB" dirty="0"/>
                 </a:p>
               </p:txBody>
             </p:sp>
@@ -13572,7 +13471,7 @@
                 <a:lstStyle/>
                 <a:p>
                   <a:pPr algn="ctr"/>
-                  <a:endParaRPr lang="en-GB"/>
+                  <a:endParaRPr lang="en-GB" dirty="0"/>
                 </a:p>
               </p:txBody>
             </p:sp>
@@ -13661,7 +13560,7 @@
               <a:lstStyle/>
               <a:p>
                 <a:pPr algn="ctr"/>
-                <a:endParaRPr lang="en-GB"/>
+                <a:endParaRPr lang="en-GB" dirty="0"/>
               </a:p>
             </p:txBody>
           </p:sp>
@@ -13793,13 +13692,8 @@
                   <a:pPr algn="ctr"/>
                   <a:r>
                     <a:rPr lang="en-GB" sz="1200" b="1" dirty="0"/>
-                    <a:t>Push your changes into </a:t>
+                    <a:t>Push your changes into GitHub</a:t>
                   </a:r>
-                  <a:r>
-                    <a:rPr lang="en-GB" sz="1200" b="1" dirty="0" err="1"/>
-                    <a:t>Github</a:t>
-                  </a:r>
-                  <a:endParaRPr lang="en-GB" sz="1200" b="1" dirty="0"/>
                 </a:p>
               </p:txBody>
             </p:sp>
@@ -13881,10 +13775,9 @@
               <a:p>
                 <a:pPr algn="ctr"/>
                 <a:r>
-                  <a:rPr lang="en-GB" b="1" dirty="0" err="1"/>
-                  <a:t>Github</a:t>
+                  <a:rPr lang="en-GB" b="1" dirty="0"/>
+                  <a:t>GitHub</a:t>
                 </a:r>
-                <a:endParaRPr lang="en-GB" b="1" dirty="0"/>
               </a:p>
             </p:txBody>
           </p:sp>
@@ -13918,10 +13811,9 @@
               <a:p>
                 <a:pPr algn="ctr"/>
                 <a:r>
-                  <a:rPr lang="en-GB" b="1" dirty="0" err="1"/>
-                  <a:t>Github</a:t>
+                  <a:rPr lang="en-GB" b="1" dirty="0"/>
+                  <a:t>GitHub</a:t>
                 </a:r>
-                <a:endParaRPr lang="en-GB" b="1" dirty="0"/>
               </a:p>
             </p:txBody>
           </p:sp>
@@ -14043,7 +13935,7 @@
               <a:lstStyle/>
               <a:p>
                 <a:pPr algn="ctr"/>
-                <a:endParaRPr lang="en-GB"/>
+                <a:endParaRPr lang="en-GB" dirty="0"/>
               </a:p>
             </p:txBody>
           </p:sp>
@@ -14403,7 +14295,7 @@
               <a:lstStyle/>
               <a:p>
                 <a:pPr algn="ctr"/>
-                <a:endParaRPr lang="en-GB"/>
+                <a:endParaRPr lang="en-GB" dirty="0"/>
               </a:p>
             </p:txBody>
           </p:sp>
@@ -14684,7 +14576,7 @@
               <a:pPr/>
               <a:t>15</a:t>
             </a:fld>
-            <a:endParaRPr lang="en-GB"/>
+            <a:endParaRPr lang="en-GB" dirty="0"/>
           </a:p>
         </p:txBody>
       </p:sp>
@@ -14795,11 +14687,7 @@
           <a:p>
             <a:r>
               <a:rPr lang="en-GB" sz="3200" b="1" u="sng" dirty="0"/>
-              <a:t>Standard </a:t>
-            </a:r>
-            <a:r>
-              <a:rPr lang="en-GB" sz="3200" b="1" u="sng" dirty="0" err="1"/>
-              <a:t>Github</a:t>
+              <a:t>Standard GitHub</a:t>
             </a:r>
             <a:r>
               <a:rPr lang="en-GB" sz="3200" u="sng" dirty="0"/>
@@ -14835,7 +14723,7 @@
               <a:pPr/>
               <a:t>16</a:t>
             </a:fld>
-            <a:endParaRPr lang="en-GB"/>
+            <a:endParaRPr lang="en-GB" dirty="0"/>
           </a:p>
         </p:txBody>
       </p:sp>
@@ -14892,15 +14780,7 @@
             </a:pPr>
             <a:r>
               <a:rPr lang="en-GB" dirty="0"/>
-              <a:t>A .</a:t>
-            </a:r>
-            <a:r>
-              <a:rPr lang="en-GB" dirty="0" err="1"/>
-              <a:t>gitignore</a:t>
-            </a:r>
-            <a:r>
-              <a:rPr lang="en-GB" dirty="0"/>
-              <a:t> file. </a:t>
+              <a:t>A .gitignore file. </a:t>
             </a:r>
           </a:p>
           <a:p>
@@ -14910,15 +14790,7 @@
             </a:pPr>
             <a:r>
               <a:rPr lang="en-GB" dirty="0"/>
-              <a:t>A .</a:t>
-            </a:r>
-            <a:r>
-              <a:rPr lang="en-GB" dirty="0" err="1"/>
-              <a:t>gitkeep</a:t>
-            </a:r>
-            <a:r>
-              <a:rPr lang="en-GB" dirty="0"/>
-              <a:t> file to create an empty folder if required. </a:t>
+              <a:t>A .gitkeep file to create an empty folder if required. </a:t>
             </a:r>
           </a:p>
           <a:p>
@@ -14938,15 +14810,7 @@
           <a:p>
             <a:r>
               <a:rPr lang="en-GB" b="1" dirty="0"/>
-              <a:t>.</a:t>
-            </a:r>
-            <a:r>
-              <a:rPr lang="en-GB" b="1" dirty="0" err="1"/>
-              <a:t>gitignore</a:t>
-            </a:r>
-            <a:r>
-              <a:rPr lang="en-GB" b="1" dirty="0"/>
-              <a:t> tells Git which files and folders should not be stored in a repository. Examples include credentials, cached data, log files (which could expose sensitive information) and local developer settings. </a:t>
+              <a:t>.gitignore tells Git which files and folders should not be stored in a repository. Examples include credentials, cached data, log files (which could expose sensitive information) and local developer settings. </a:t>
             </a:r>
           </a:p>
           <a:p>
@@ -15045,7 +14909,7 @@
           <a:lstStyle/>
           <a:p>
             <a:pPr algn="ctr"/>
-            <a:endParaRPr lang="en-GB">
+            <a:endParaRPr lang="en-GB" dirty="0">
               <a:solidFill>
                 <a:schemeClr val="tx1"/>
               </a:solidFill>
@@ -15394,7 +15258,7 @@
               <a:pPr/>
               <a:t>17</a:t>
             </a:fld>
-            <a:endParaRPr lang="en-GB"/>
+            <a:endParaRPr lang="en-GB" dirty="0"/>
           </a:p>
         </p:txBody>
       </p:sp>
@@ -15543,23 +15407,7 @@
                   <a:schemeClr val="bg1"/>
                 </a:solidFill>
               </a:rPr>
-              <a:t>In </a:t>
-            </a:r>
-            <a:r>
-              <a:rPr lang="en-GB" dirty="0" err="1">
-                <a:solidFill>
-                  <a:schemeClr val="bg1"/>
-                </a:solidFill>
-              </a:rPr>
-              <a:t>Github</a:t>
-            </a:r>
-            <a:r>
-              <a:rPr lang="en-GB" dirty="0">
-                <a:solidFill>
-                  <a:schemeClr val="bg1"/>
-                </a:solidFill>
-              </a:rPr>
-              <a:t>, create your own feature branch. </a:t>
+              <a:t>In GitHub, create your own feature branch. </a:t>
             </a:r>
           </a:p>
           <a:p>
@@ -15781,7 +15629,7 @@
               <a:pPr/>
               <a:t>19</a:t>
             </a:fld>
-            <a:endParaRPr lang="en-GB"/>
+            <a:endParaRPr lang="en-GB" dirty="0"/>
           </a:p>
         </p:txBody>
       </p:sp>
@@ -15818,12 +15666,8 @@
               <a:buChar char="•"/>
             </a:pPr>
             <a:r>
-              <a:rPr lang="en-GB" dirty="0" err="1"/>
-              <a:t>Github</a:t>
-            </a:r>
-            <a:r>
               <a:rPr lang="en-GB" dirty="0"/>
-              <a:t> Issues are digital task cards used to track work, bugs and request improvements/suggestions within a software project. </a:t>
+              <a:t>GitHub Issues are digital task cards used to track work, bugs and request improvements/suggestions within a software project. </a:t>
             </a:r>
           </a:p>
           <a:p>
@@ -16137,15 +15981,7 @@
             </a:pPr>
             <a:r>
               <a:rPr lang="en-GB" sz="2200" dirty="0"/>
-              <a:t>Using </a:t>
-            </a:r>
-            <a:r>
-              <a:rPr lang="en-GB" sz="2200" dirty="0" err="1"/>
-              <a:t>CoPilot</a:t>
-            </a:r>
-            <a:r>
-              <a:rPr lang="en-GB" sz="2200" dirty="0"/>
-              <a:t> effectively</a:t>
+              <a:t>Using CoPilot effectively</a:t>
             </a:r>
           </a:p>
           <a:p>
@@ -16161,10 +15997,9 @@
               <a:buChar char="•"/>
             </a:pPr>
             <a:r>
-              <a:rPr lang="en-GB" sz="2200" b="0" dirty="0" err="1"/>
+              <a:rPr lang="en-GB" sz="2200" b="0" dirty="0"/>
               <a:t>Codespaces</a:t>
             </a:r>
-            <a:endParaRPr lang="en-GB" sz="2200" b="0" dirty="0"/>
           </a:p>
           <a:p>
             <a:pPr marL="285750" indent="-285750">
@@ -16180,15 +16015,7 @@
             </a:pPr>
             <a:r>
               <a:rPr lang="en-GB" sz="2200" b="0" dirty="0"/>
-              <a:t>Exploring other </a:t>
-            </a:r>
-            <a:r>
-              <a:rPr lang="en-GB" sz="2200" b="0" dirty="0" err="1"/>
-              <a:t>Github</a:t>
-            </a:r>
-            <a:r>
-              <a:rPr lang="en-GB" sz="2200" b="0" dirty="0"/>
-              <a:t> products</a:t>
+              <a:t>Exploring other GitHub products</a:t>
             </a:r>
           </a:p>
           <a:p>
@@ -16283,7 +16110,7 @@
               <a:pPr/>
               <a:t>2</a:t>
             </a:fld>
-            <a:endParaRPr lang="en-GB"/>
+            <a:endParaRPr lang="en-GB" dirty="0"/>
           </a:p>
         </p:txBody>
       </p:sp>
@@ -16774,7 +16601,7 @@
               <a:pPr/>
               <a:t>20</a:t>
             </a:fld>
-            <a:endParaRPr lang="en-GB"/>
+            <a:endParaRPr lang="en-GB" dirty="0"/>
           </a:p>
         </p:txBody>
       </p:sp>
@@ -16812,15 +16639,7 @@
             </a:pPr>
             <a:r>
               <a:rPr lang="en-GB" dirty="0"/>
-              <a:t>Resembles a Kanban/</a:t>
-            </a:r>
-            <a:r>
-              <a:rPr lang="en-GB" dirty="0" err="1"/>
-              <a:t>devops</a:t>
-            </a:r>
-            <a:r>
-              <a:rPr lang="en-GB" dirty="0"/>
-              <a:t> board that managers can link issues/tasks to key milestones and task phases. </a:t>
+              <a:t>Resembles a Kanban/devops board that managers can link issues/tasks to key milestones and task phases. </a:t>
             </a:r>
           </a:p>
           <a:p>
@@ -16837,15 +16656,7 @@
             </a:pPr>
             <a:r>
               <a:rPr lang="en-GB" dirty="0"/>
-              <a:t>Automatically move and assign tasks to users using agents/</a:t>
-            </a:r>
-            <a:r>
-              <a:rPr lang="en-GB" dirty="0" err="1"/>
-              <a:t>Github</a:t>
-            </a:r>
-            <a:r>
-              <a:rPr lang="en-GB" dirty="0"/>
-              <a:t> actions. </a:t>
+              <a:t>Automatically move and assign tasks to users using agents/GitHub actions. </a:t>
             </a:r>
           </a:p>
           <a:p>
@@ -17091,7 +16902,7 @@
               <a:pPr/>
               <a:t>21</a:t>
             </a:fld>
-            <a:endParaRPr lang="en-GB"/>
+            <a:endParaRPr lang="en-GB" dirty="0"/>
           </a:p>
         </p:txBody>
       </p:sp>
@@ -17353,7 +17164,7 @@
           <p:cNvPr id="2" name="Title 1">
             <a:extLst>
               <a:ext uri="{FF2B5EF4-FFF2-40B4-BE49-F238E27FC236}">
-                <a16:creationId xmlns:a16="http://schemas.microsoft.com/office/drawing/2014/main" id="{174918DD-3FB4-ECF1-7474-46B34CAE7FD5}"/>
+                <a16:creationId xmlns:a16="http://schemas.microsoft.com/office/drawing/2014/main" id="{10F11F58-1B02-2B5E-16AB-F41892BB3093}"/>
               </a:ext>
             </a:extLst>
           </p:cNvPr>
@@ -17361,44 +17172,289 @@
             <a:spLocks noGrp="1"/>
           </p:cNvSpPr>
           <p:nvPr>
-            <p:ph type="ctrTitle"/>
+            <p:ph type="title"/>
           </p:nvPr>
         </p:nvSpPr>
         <p:spPr>
           <a:xfrm>
-            <a:off x="758703" y="2427434"/>
-            <a:ext cx="7401885" cy="1661993"/>
-          </a:xfrm>
-        </p:spPr>
+            <a:off x="520911" y="427020"/>
+            <a:ext cx="8343789" cy="636062"/>
+          </a:xfrm>
+        </p:spPr>
+        <p:txBody>
+          <a:bodyPr>
+            <a:normAutofit/>
+          </a:bodyPr>
+          <a:lstStyle/>
+          <a:p>
+            <a:r>
+              <a:rPr lang="en-GB" sz="3200" b="1" u="sng" dirty="0"/>
+              <a:t>Security &amp; Quality</a:t>
+            </a:r>
+          </a:p>
+        </p:txBody>
+      </p:sp>
+      <p:sp>
+        <p:nvSpPr>
+          <p:cNvPr id="5" name="Slide Number Placeholder 4">
+            <a:extLst>
+              <a:ext uri="{FF2B5EF4-FFF2-40B4-BE49-F238E27FC236}">
+                <a16:creationId xmlns:a16="http://schemas.microsoft.com/office/drawing/2014/main" id="{A6521F9B-D9FC-06E8-07A8-52FCF507297F}"/>
+              </a:ext>
+            </a:extLst>
+          </p:cNvPr>
+          <p:cNvSpPr>
+            <a:spLocks noGrp="1"/>
+          </p:cNvSpPr>
+          <p:nvPr>
+            <p:ph type="sldNum" sz="quarter" idx="12"/>
+          </p:nvPr>
+        </p:nvSpPr>
+        <p:spPr/>
         <p:txBody>
           <a:bodyPr/>
           <a:lstStyle/>
           <a:p>
+            <a:fld id="{CC057153-B650-4DEB-B370-79DDCFDCE934}" type="slidenum">
+              <a:rPr lang="en-US" dirty="0"/>
+              <a:pPr/>
+              <a:t>22</a:t>
+            </a:fld>
+            <a:endParaRPr lang="en-GB" dirty="0"/>
+          </a:p>
+        </p:txBody>
+      </p:sp>
+      <p:sp>
+        <p:nvSpPr>
+          <p:cNvPr id="7" name="TextBox 6">
+            <a:extLst>
+              <a:ext uri="{FF2B5EF4-FFF2-40B4-BE49-F238E27FC236}">
+                <a16:creationId xmlns:a16="http://schemas.microsoft.com/office/drawing/2014/main" id="{1825C012-3404-4C60-A760-764C43E567DF}"/>
+              </a:ext>
+            </a:extLst>
+          </p:cNvPr>
+          <p:cNvSpPr txBox="1"/>
+          <p:nvPr/>
+        </p:nvSpPr>
+        <p:spPr>
+          <a:xfrm>
+            <a:off x="681778" y="1458067"/>
+            <a:ext cx="9503622" cy="3970318"/>
+          </a:xfrm>
+          <a:prstGeom prst="rect">
+            <a:avLst/>
+          </a:prstGeom>
+          <a:noFill/>
+        </p:spPr>
+        <p:txBody>
+          <a:bodyPr wrap="square" rtlCol="0">
+            <a:spAutoFit/>
+          </a:bodyPr>
+          <a:lstStyle/>
+          <a:p>
             <a:r>
               <a:rPr lang="en-GB" dirty="0"/>
-              <a:t>Using </a:t>
-            </a:r>
-            <a:r>
-              <a:rPr lang="en-GB" dirty="0" err="1"/>
-              <a:t>CoPilot</a:t>
-            </a:r>
+              <a:t>Allows users to build security and quality checks for their codebase directly into the development process. This allows teams to identify and address potential risks early.</a:t>
+            </a:r>
+          </a:p>
+          <a:p>
+            <a:pPr marL="285750" indent="-285750">
+              <a:buFont typeface="Arial" panose="020B0604020202020204" pitchFamily="34" charset="0"/>
+              <a:buChar char="•"/>
+            </a:pPr>
+            <a:endParaRPr lang="en-GB" dirty="0"/>
+          </a:p>
+          <a:p>
+            <a:r>
+              <a:rPr lang="en-GB" b="1" dirty="0"/>
+              <a:t>Security: </a:t>
+            </a:r>
+          </a:p>
+          <a:p>
+            <a:pPr marL="742950" lvl="1" indent="-285750">
+              <a:buFont typeface="Arial" panose="020B0604020202020204" pitchFamily="34" charset="0"/>
+              <a:buChar char="•"/>
+            </a:pPr>
             <a:r>
               <a:rPr lang="en-GB" dirty="0"/>
-              <a:t> Effectively</a:t>
-            </a:r>
+              <a:t> Create different level of access control so only authorised people can make changes</a:t>
+            </a:r>
+          </a:p>
+          <a:p>
+            <a:pPr marL="742950" lvl="1" indent="-285750">
+              <a:buFont typeface="Arial" panose="020B0604020202020204" pitchFamily="34" charset="0"/>
+              <a:buChar char="•"/>
+            </a:pPr>
+            <a:r>
+              <a:rPr lang="en-GB" dirty="0"/>
+              <a:t>Continuous security monitoring to identify weaknesses including alerting</a:t>
+            </a:r>
+          </a:p>
+          <a:p>
+            <a:pPr marL="742950" lvl="1" indent="-285750">
+              <a:buFont typeface="Arial" panose="020B0604020202020204" pitchFamily="34" charset="0"/>
+              <a:buChar char="•"/>
+            </a:pPr>
+            <a:r>
+              <a:rPr lang="en-GB" dirty="0"/>
+              <a:t>Detects when passwords or other credentials may have been exposed in code</a:t>
+            </a:r>
+          </a:p>
+          <a:p>
+            <a:pPr marL="742950" lvl="1" indent="-285750">
+              <a:buFont typeface="Arial" panose="020B0604020202020204" pitchFamily="34" charset="0"/>
+              <a:buChar char="•"/>
+            </a:pPr>
+            <a:endParaRPr lang="en-GB" dirty="0"/>
+          </a:p>
+          <a:p>
+            <a:r>
+              <a:rPr lang="en-GB" dirty="0"/>
+              <a:t>Quality: </a:t>
+            </a:r>
+          </a:p>
+          <a:p>
+            <a:pPr marL="742950" lvl="1" indent="-285750">
+              <a:buFont typeface="Arial" panose="020B0604020202020204" pitchFamily="34" charset="0"/>
+              <a:buChar char="•"/>
+            </a:pPr>
+            <a:r>
+              <a:rPr lang="en-GB" dirty="0"/>
+              <a:t>Invoke peer review every time a change is pulled into main</a:t>
+            </a:r>
+          </a:p>
+          <a:p>
+            <a:pPr marL="742950" lvl="1" indent="-285750">
+              <a:buFont typeface="Arial" panose="020B0604020202020204" pitchFamily="34" charset="0"/>
+              <a:buChar char="•"/>
+            </a:pPr>
+            <a:r>
+              <a:rPr lang="en-GB" dirty="0"/>
+              <a:t>Create automated testing to check new changes do not break existing functionality</a:t>
+            </a:r>
+          </a:p>
+          <a:p>
+            <a:pPr marL="742950" lvl="1" indent="-285750">
+              <a:buFont typeface="Arial" panose="020B0604020202020204" pitchFamily="34" charset="0"/>
+              <a:buChar char="•"/>
+            </a:pPr>
+            <a:r>
+              <a:rPr lang="en-GB" dirty="0"/>
+              <a:t>Encourages continuous improvements and teams to follow agreed development standards. </a:t>
+            </a:r>
+          </a:p>
+          <a:p>
+            <a:pPr marL="285750" indent="-285750">
+              <a:buFont typeface="Arial" panose="020B0604020202020204" pitchFamily="34" charset="0"/>
+              <a:buChar char="•"/>
+            </a:pPr>
+            <a:endParaRPr lang="en-GB" b="1" dirty="0"/>
+          </a:p>
+          <a:p>
+            <a:pPr marL="285750" indent="-285750">
+              <a:buFont typeface="Arial" panose="020B0604020202020204" pitchFamily="34" charset="0"/>
+              <a:buChar char="•"/>
+            </a:pPr>
+            <a:endParaRPr lang="en-GB" b="1" dirty="0"/>
           </a:p>
         </p:txBody>
       </p:sp>
     </p:spTree>
     <p:extLst>
       <p:ext uri="{BB962C8B-B14F-4D97-AF65-F5344CB8AC3E}">
-        <p14:creationId xmlns:p14="http://schemas.microsoft.com/office/powerpoint/2010/main" val="816599170"/>
+        <p14:creationId xmlns:p14="http://schemas.microsoft.com/office/powerpoint/2010/main" val="3976774572"/>
       </p:ext>
     </p:extLst>
   </p:cSld>
   <p:clrMapOvr>
     <a:masterClrMapping/>
   </p:clrMapOvr>
+  <p:timing>
+    <p:tnLst>
+      <p:par>
+        <p:cTn id="1" dur="indefinite" restart="never" nodeType="tmRoot">
+          <p:childTnLst>
+            <p:seq concurrent="1" nextAc="seek">
+              <p:cTn id="2" dur="indefinite" nodeType="mainSeq">
+                <p:childTnLst>
+                  <p:par>
+                    <p:cTn id="3" fill="hold">
+                      <p:stCondLst>
+                        <p:cond delay="indefinite"/>
+                      </p:stCondLst>
+                      <p:childTnLst>
+                        <p:par>
+                          <p:cTn id="4" fill="hold">
+                            <p:stCondLst>
+                              <p:cond delay="0"/>
+                            </p:stCondLst>
+                            <p:childTnLst>
+                              <p:par>
+                                <p:cTn id="5" presetID="10" presetClass="entr" presetSubtype="0" fill="hold" grpId="0" nodeType="clickEffect">
+                                  <p:stCondLst>
+                                    <p:cond delay="0"/>
+                                  </p:stCondLst>
+                                  <p:childTnLst>
+                                    <p:set>
+                                      <p:cBhvr>
+                                        <p:cTn id="6" dur="1" fill="hold">
+                                          <p:stCondLst>
+                                            <p:cond delay="0"/>
+                                          </p:stCondLst>
+                                        </p:cTn>
+                                        <p:tgtEl>
+                                          <p:spTgt spid="7"/>
+                                        </p:tgtEl>
+                                        <p:attrNameLst>
+                                          <p:attrName>style.visibility</p:attrName>
+                                        </p:attrNameLst>
+                                      </p:cBhvr>
+                                      <p:to>
+                                        <p:strVal val="visible"/>
+                                      </p:to>
+                                    </p:set>
+                                    <p:animEffect transition="in" filter="fade">
+                                      <p:cBhvr>
+                                        <p:cTn id="7" dur="500"/>
+                                        <p:tgtEl>
+                                          <p:spTgt spid="7"/>
+                                        </p:tgtEl>
+                                      </p:cBhvr>
+                                    </p:animEffect>
+                                  </p:childTnLst>
+                                </p:cTn>
+                              </p:par>
+                            </p:childTnLst>
+                          </p:cTn>
+                        </p:par>
+                      </p:childTnLst>
+                    </p:cTn>
+                  </p:par>
+                </p:childTnLst>
+              </p:cTn>
+              <p:prevCondLst>
+                <p:cond evt="onPrev" delay="0">
+                  <p:tgtEl>
+                    <p:sldTgt/>
+                  </p:tgtEl>
+                </p:cond>
+              </p:prevCondLst>
+              <p:nextCondLst>
+                <p:cond evt="onNext" delay="0">
+                  <p:tgtEl>
+                    <p:sldTgt/>
+                  </p:tgtEl>
+                </p:cond>
+              </p:nextCondLst>
+            </p:seq>
+          </p:childTnLst>
+        </p:cTn>
+      </p:par>
+    </p:tnLst>
+    <p:bldLst>
+      <p:bldP spid="7" grpId="0"/>
+    </p:bldLst>
+  </p:timing>
 </p:sld>
 </file>
 
@@ -17424,6 +17480,69 @@
           <p:cNvPr id="2" name="Title 1">
             <a:extLst>
               <a:ext uri="{FF2B5EF4-FFF2-40B4-BE49-F238E27FC236}">
+                <a16:creationId xmlns:a16="http://schemas.microsoft.com/office/drawing/2014/main" id="{174918DD-3FB4-ECF1-7474-46B34CAE7FD5}"/>
+              </a:ext>
+            </a:extLst>
+          </p:cNvPr>
+          <p:cNvSpPr>
+            <a:spLocks noGrp="1"/>
+          </p:cNvSpPr>
+          <p:nvPr>
+            <p:ph type="ctrTitle"/>
+          </p:nvPr>
+        </p:nvSpPr>
+        <p:spPr>
+          <a:xfrm>
+            <a:off x="758703" y="2427434"/>
+            <a:ext cx="7401885" cy="1661993"/>
+          </a:xfrm>
+        </p:spPr>
+        <p:txBody>
+          <a:bodyPr/>
+          <a:lstStyle/>
+          <a:p>
+            <a:r>
+              <a:rPr lang="en-GB" dirty="0"/>
+              <a:t>Using CoPilot Effectively</a:t>
+            </a:r>
+          </a:p>
+        </p:txBody>
+      </p:sp>
+    </p:spTree>
+    <p:extLst>
+      <p:ext uri="{BB962C8B-B14F-4D97-AF65-F5344CB8AC3E}">
+        <p14:creationId xmlns:p14="http://schemas.microsoft.com/office/powerpoint/2010/main" val="816599170"/>
+      </p:ext>
+    </p:extLst>
+  </p:cSld>
+  <p:clrMapOvr>
+    <a:masterClrMapping/>
+  </p:clrMapOvr>
+</p:sld>
+</file>
+
+<file path=ppt/slides/slide24.xml><?xml version="1.0" encoding="utf-8"?>
+<p:sld xmlns:a="http://schemas.openxmlformats.org/drawingml/2006/main" xmlns:r="http://schemas.openxmlformats.org/officeDocument/2006/relationships" xmlns:p="http://schemas.openxmlformats.org/presentationml/2006/main">
+  <p:cSld>
+    <p:spTree>
+      <p:nvGrpSpPr>
+        <p:cNvPr id="1" name=""/>
+        <p:cNvGrpSpPr/>
+        <p:nvPr/>
+      </p:nvGrpSpPr>
+      <p:grpSpPr>
+        <a:xfrm>
+          <a:off x="0" y="0"/>
+          <a:ext cx="0" cy="0"/>
+          <a:chOff x="0" y="0"/>
+          <a:chExt cx="0" cy="0"/>
+        </a:xfrm>
+      </p:grpSpPr>
+      <p:sp>
+        <p:nvSpPr>
+          <p:cNvPr id="2" name="Title 1">
+            <a:extLst>
+              <a:ext uri="{FF2B5EF4-FFF2-40B4-BE49-F238E27FC236}">
                 <a16:creationId xmlns:a16="http://schemas.microsoft.com/office/drawing/2014/main" id="{10F11F58-1B02-2B5E-16AB-F41892BB3093}"/>
               </a:ext>
             </a:extLst>
@@ -17449,15 +17568,7 @@
           <a:p>
             <a:r>
               <a:rPr lang="en-GB" sz="3200" b="1" u="sng" dirty="0"/>
-              <a:t>Using </a:t>
-            </a:r>
-            <a:r>
-              <a:rPr lang="en-GB" sz="3200" b="1" u="sng" dirty="0" err="1"/>
-              <a:t>CoPilot</a:t>
-            </a:r>
-            <a:r>
-              <a:rPr lang="en-GB" sz="3200" b="1" u="sng" dirty="0"/>
-              <a:t> Effectively</a:t>
+              <a:t>Using CoPilot Effectively</a:t>
             </a:r>
           </a:p>
         </p:txBody>
@@ -17486,9 +17597,9 @@
             <a:fld id="{CC057153-B650-4DEB-B370-79DDCFDCE934}" type="slidenum">
               <a:rPr lang="en-US" dirty="0"/>
               <a:pPr/>
-              <a:t>23</a:t>
+              <a:t>24</a:t>
             </a:fld>
-            <a:endParaRPr lang="en-GB"/>
+            <a:endParaRPr lang="en-GB" dirty="0"/>
           </a:p>
         </p:txBody>
       </p:sp>
@@ -17526,15 +17637,7 @@
             </a:pPr>
             <a:r>
               <a:rPr lang="en-GB" dirty="0"/>
-              <a:t>Functions the same as 365 </a:t>
-            </a:r>
-            <a:r>
-              <a:rPr lang="en-GB" dirty="0" err="1"/>
-              <a:t>CoPilot</a:t>
-            </a:r>
-            <a:r>
-              <a:rPr lang="en-GB" dirty="0"/>
-              <a:t>.</a:t>
+              <a:t>Functions the same as 365 CoPilot.</a:t>
             </a:r>
           </a:p>
           <a:p>
@@ -17584,23 +17687,7 @@
             </a:pPr>
             <a:r>
               <a:rPr lang="en-GB" dirty="0"/>
-              <a:t>GitHub </a:t>
-            </a:r>
-            <a:r>
-              <a:rPr lang="en-GB" dirty="0" err="1"/>
-              <a:t>CoPilot</a:t>
-            </a:r>
-            <a:r>
-              <a:rPr lang="en-GB" dirty="0"/>
-              <a:t> allows for agentic working and planning projects whereas 365 </a:t>
-            </a:r>
-            <a:r>
-              <a:rPr lang="en-GB" dirty="0" err="1"/>
-              <a:t>CoPilot</a:t>
-            </a:r>
-            <a:r>
-              <a:rPr lang="en-GB" dirty="0"/>
-              <a:t> can only answer questions. </a:t>
+              <a:t>GitHub CoPilot allows for agentic working and planning projects whereas 365 CoPilot can only answer questions. </a:t>
             </a:r>
           </a:p>
           <a:p>
@@ -17617,15 +17704,7 @@
             </a:pPr>
             <a:r>
               <a:rPr lang="en-GB" dirty="0"/>
-              <a:t>Widely accessible within </a:t>
-            </a:r>
-            <a:r>
-              <a:rPr lang="en-GB" dirty="0" err="1"/>
-              <a:t>Github</a:t>
-            </a:r>
-            <a:r>
-              <a:rPr lang="en-GB" dirty="0"/>
-              <a:t>. </a:t>
+              <a:t>Widely accessible within GitHub. </a:t>
             </a:r>
           </a:p>
         </p:txBody>
@@ -17759,7 +17838,7 @@
 </p:sld>
 </file>
 
-<file path=ppt/slides/slide24.xml><?xml version="1.0" encoding="utf-8"?>
+<file path=ppt/slides/slide25.xml><?xml version="1.0" encoding="utf-8"?>
 <p:sld xmlns:a="http://schemas.openxmlformats.org/drawingml/2006/main" xmlns:r="http://schemas.openxmlformats.org/officeDocument/2006/relationships" xmlns:p="http://schemas.openxmlformats.org/presentationml/2006/main">
   <p:cSld>
     <p:spTree>
@@ -17800,7 +17879,7 @@
             <a:fld id="{CC057153-B650-4DEB-B370-79DDCFDCE934}" type="slidenum">
               <a:rPr lang="en-US" smtClean="0"/>
               <a:pPr/>
-              <a:t>24</a:t>
+              <a:t>25</a:t>
             </a:fld>
             <a:endParaRPr lang="en-US" dirty="0"/>
           </a:p>
@@ -17836,15 +17915,7 @@
           <a:p>
             <a:r>
               <a:rPr lang="en-GB" sz="3200" b="1" u="sng" dirty="0"/>
-              <a:t>Using </a:t>
-            </a:r>
-            <a:r>
-              <a:rPr lang="en-GB" sz="3200" b="1" u="sng" dirty="0" err="1"/>
-              <a:t>CoPilot</a:t>
-            </a:r>
-            <a:r>
-              <a:rPr lang="en-GB" sz="3200" b="1" u="sng" dirty="0"/>
-              <a:t> Effectively</a:t>
+              <a:t>Using CoPilot Effectively</a:t>
             </a:r>
           </a:p>
         </p:txBody>
@@ -17909,15 +17980,7 @@
             </a:pPr>
             <a:r>
               <a:rPr lang="en-GB" dirty="0"/>
-              <a:t>Ask </a:t>
-            </a:r>
-            <a:r>
-              <a:rPr lang="en-GB" dirty="0" err="1"/>
-              <a:t>CoPilot</a:t>
-            </a:r>
-            <a:r>
-              <a:rPr lang="en-GB" dirty="0"/>
-              <a:t> to explain code you do not understand.</a:t>
+              <a:t>Ask CoPilot to explain code you do not understand.</a:t>
             </a:r>
           </a:p>
         </p:txBody>
@@ -18329,7 +18392,7 @@
 </p:sld>
 </file>
 
-<file path=ppt/slides/slide25.xml><?xml version="1.0" encoding="utf-8"?>
+<file path=ppt/slides/slide26.xml><?xml version="1.0" encoding="utf-8"?>
 <p:sld xmlns:a="http://schemas.openxmlformats.org/drawingml/2006/main" xmlns:r="http://schemas.openxmlformats.org/officeDocument/2006/relationships" xmlns:p="http://schemas.openxmlformats.org/presentationml/2006/main">
   <p:cSld>
     <p:spTree>
@@ -18370,7 +18433,7 @@
             <a:fld id="{CC057153-B650-4DEB-B370-79DDCFDCE934}" type="slidenum">
               <a:rPr lang="en-US" smtClean="0"/>
               <a:pPr/>
-              <a:t>25</a:t>
+              <a:t>26</a:t>
             </a:fld>
             <a:endParaRPr lang="en-US" dirty="0"/>
           </a:p>
@@ -18406,15 +18469,7 @@
           <a:p>
             <a:r>
               <a:rPr lang="en-GB" sz="3200" b="1" u="sng" dirty="0"/>
-              <a:t>Using </a:t>
-            </a:r>
-            <a:r>
-              <a:rPr lang="en-GB" sz="3200" b="1" u="sng" dirty="0" err="1"/>
-              <a:t>CoPilot</a:t>
-            </a:r>
-            <a:r>
-              <a:rPr lang="en-GB" sz="3200" b="1" u="sng" dirty="0"/>
-              <a:t> Effectively</a:t>
+              <a:t>Using CoPilot Effectively</a:t>
             </a:r>
           </a:p>
         </p:txBody>
@@ -18461,7 +18516,7 @@
           <a:lstStyle/>
           <a:p>
             <a:pPr algn="ctr"/>
-            <a:endParaRPr lang="en-GB"/>
+            <a:endParaRPr lang="en-GB" dirty="0"/>
           </a:p>
         </p:txBody>
       </p:sp>
@@ -18496,15 +18551,7 @@
             <a:pPr algn="ctr"/>
             <a:r>
               <a:rPr lang="en-GB" dirty="0"/>
-              <a:t>Standard </a:t>
-            </a:r>
-            <a:r>
-              <a:rPr lang="en-GB" dirty="0" err="1"/>
-              <a:t>CoPilot</a:t>
-            </a:r>
-            <a:r>
-              <a:rPr lang="en-GB" dirty="0"/>
-              <a:t> response to prompts.</a:t>
+              <a:t>Standard CoPilot response to prompts.</a:t>
             </a:r>
           </a:p>
           <a:p>
@@ -18566,7 +18613,7 @@
           <a:lstStyle/>
           <a:p>
             <a:pPr algn="ctr"/>
-            <a:endParaRPr lang="en-GB"/>
+            <a:endParaRPr lang="en-GB" dirty="0"/>
           </a:p>
         </p:txBody>
       </p:sp>
@@ -18615,7 +18662,7 @@
           <a:lstStyle/>
           <a:p>
             <a:pPr algn="ctr"/>
-            <a:endParaRPr lang="en-GB"/>
+            <a:endParaRPr lang="en-GB" dirty="0"/>
           </a:p>
         </p:txBody>
       </p:sp>
@@ -18650,15 +18697,7 @@
             <a:pPr algn="ctr"/>
             <a:r>
               <a:rPr lang="en-GB" dirty="0"/>
-              <a:t>Agentic </a:t>
-            </a:r>
-            <a:r>
-              <a:rPr lang="en-GB" dirty="0" err="1"/>
-              <a:t>CoPilot</a:t>
-            </a:r>
-            <a:r>
-              <a:rPr lang="en-GB" dirty="0"/>
-              <a:t> can take a prompt, plan steps and complete actions to achieve this.</a:t>
+              <a:t>Agentic CoPilot can take a prompt, plan steps and complete actions to achieve this.</a:t>
             </a:r>
           </a:p>
           <a:p>
@@ -18720,7 +18759,7 @@
           <a:lstStyle/>
           <a:p>
             <a:pPr algn="ctr"/>
-            <a:endParaRPr lang="en-GB"/>
+            <a:endParaRPr lang="en-GB" dirty="0"/>
           </a:p>
         </p:txBody>
       </p:sp>
@@ -18966,424 +19005,6 @@
 </p:sld>
 </file>
 
-<file path=ppt/slides/slide26.xml><?xml version="1.0" encoding="utf-8"?>
-<p:sld xmlns:a="http://schemas.openxmlformats.org/drawingml/2006/main" xmlns:r="http://schemas.openxmlformats.org/officeDocument/2006/relationships" xmlns:p="http://schemas.openxmlformats.org/presentationml/2006/main">
-  <p:cSld>
-    <p:spTree>
-      <p:nvGrpSpPr>
-        <p:cNvPr id="1" name=""/>
-        <p:cNvGrpSpPr/>
-        <p:nvPr/>
-      </p:nvGrpSpPr>
-      <p:grpSpPr>
-        <a:xfrm>
-          <a:off x="0" y="0"/>
-          <a:ext cx="0" cy="0"/>
-          <a:chOff x="0" y="0"/>
-          <a:chExt cx="0" cy="0"/>
-        </a:xfrm>
-      </p:grpSpPr>
-      <p:sp>
-        <p:nvSpPr>
-          <p:cNvPr id="5" name="Slide Number Placeholder 4">
-            <a:extLst>
-              <a:ext uri="{FF2B5EF4-FFF2-40B4-BE49-F238E27FC236}">
-                <a16:creationId xmlns:a16="http://schemas.microsoft.com/office/drawing/2014/main" id="{A6521F9B-D9FC-06E8-07A8-52FCF507297F}"/>
-              </a:ext>
-            </a:extLst>
-          </p:cNvPr>
-          <p:cNvSpPr>
-            <a:spLocks noGrp="1"/>
-          </p:cNvSpPr>
-          <p:nvPr>
-            <p:ph type="sldNum" sz="quarter" idx="12"/>
-          </p:nvPr>
-        </p:nvSpPr>
-        <p:spPr/>
-        <p:txBody>
-          <a:bodyPr/>
-          <a:lstStyle/>
-          <a:p>
-            <a:fld id="{CC057153-B650-4DEB-B370-79DDCFDCE934}" type="slidenum">
-              <a:rPr lang="en-US" dirty="0"/>
-              <a:pPr/>
-              <a:t>26</a:t>
-            </a:fld>
-            <a:endParaRPr lang="en-GB"/>
-          </a:p>
-        </p:txBody>
-      </p:sp>
-      <p:sp>
-        <p:nvSpPr>
-          <p:cNvPr id="2" name="Title 1">
-            <a:extLst>
-              <a:ext uri="{FF2B5EF4-FFF2-40B4-BE49-F238E27FC236}">
-                <a16:creationId xmlns:a16="http://schemas.microsoft.com/office/drawing/2014/main" id="{10F11F58-1B02-2B5E-16AB-F41892BB3093}"/>
-              </a:ext>
-            </a:extLst>
-          </p:cNvPr>
-          <p:cNvSpPr>
-            <a:spLocks noGrp="1"/>
-          </p:cNvSpPr>
-          <p:nvPr>
-            <p:ph type="title"/>
-          </p:nvPr>
-        </p:nvSpPr>
-        <p:spPr>
-          <a:xfrm>
-            <a:off x="685800" y="516588"/>
-            <a:ext cx="3436838" cy="498598"/>
-          </a:xfrm>
-        </p:spPr>
-        <p:txBody>
-          <a:bodyPr>
-            <a:normAutofit/>
-          </a:bodyPr>
-          <a:lstStyle/>
-          <a:p>
-            <a:r>
-              <a:rPr lang="en-GB" sz="3200" b="1" u="sng" dirty="0"/>
-              <a:t>Exercise Checkpoint 3 </a:t>
-            </a:r>
-          </a:p>
-        </p:txBody>
-      </p:sp>
-      <p:sp>
-        <p:nvSpPr>
-          <p:cNvPr id="3" name="Subtitle 2">
-            <a:extLst>
-              <a:ext uri="{FF2B5EF4-FFF2-40B4-BE49-F238E27FC236}">
-                <a16:creationId xmlns:a16="http://schemas.microsoft.com/office/drawing/2014/main" id="{A19A6EDB-FD47-0120-E2F7-AE5FAB5706B3}"/>
-              </a:ext>
-            </a:extLst>
-          </p:cNvPr>
-          <p:cNvSpPr>
-            <a:spLocks noGrp="1"/>
-          </p:cNvSpPr>
-          <p:nvPr>
-            <p:ph type="body" sz="quarter" idx="14"/>
-          </p:nvPr>
-        </p:nvSpPr>
-        <p:spPr/>
-        <p:txBody>
-          <a:bodyPr vert="horz" lIns="91440" tIns="45720" rIns="91440" bIns="45720" rtlCol="0" anchor="t">
-            <a:normAutofit fontScale="32500" lnSpcReduction="20000"/>
-          </a:bodyPr>
-          <a:lstStyle/>
-          <a:p>
-            <a:pPr lvl="1"/>
-            <a:br>
-              <a:rPr lang="en-GB" dirty="0"/>
-            </a:br>
-            <a:endParaRPr lang="en-GB" dirty="0"/>
-          </a:p>
-          <a:p>
-            <a:pPr marL="285750" indent="-285750">
-              <a:buChar char="•"/>
-            </a:pPr>
-            <a:endParaRPr lang="en-GB" dirty="0"/>
-          </a:p>
-          <a:p>
-            <a:pPr marL="514350" lvl="1" indent="-285750">
-              <a:buFont typeface="Courier New" panose="020B0604020202020204" pitchFamily="34" charset="0"/>
-              <a:buChar char="o"/>
-            </a:pPr>
-            <a:endParaRPr lang="en-GB" dirty="0"/>
-          </a:p>
-          <a:p>
-            <a:pPr marL="285750" indent="-285750">
-              <a:buFont typeface="Arial" panose="020B0604020202020204" pitchFamily="34" charset="0"/>
-              <a:buChar char="•"/>
-            </a:pPr>
-            <a:endParaRPr lang="en-GB" dirty="0"/>
-          </a:p>
-        </p:txBody>
-      </p:sp>
-      <p:sp>
-        <p:nvSpPr>
-          <p:cNvPr id="8" name="TextBox 7">
-            <a:extLst>
-              <a:ext uri="{FF2B5EF4-FFF2-40B4-BE49-F238E27FC236}">
-                <a16:creationId xmlns:a16="http://schemas.microsoft.com/office/drawing/2014/main" id="{6D1779D3-41A0-4920-B5C8-8AA53282B9B8}"/>
-              </a:ext>
-            </a:extLst>
-          </p:cNvPr>
-          <p:cNvSpPr txBox="1"/>
-          <p:nvPr/>
-        </p:nvSpPr>
-        <p:spPr>
-          <a:xfrm>
-            <a:off x="609600" y="1611755"/>
-            <a:ext cx="5689600" cy="5355312"/>
-          </a:xfrm>
-          <a:prstGeom prst="rect">
-            <a:avLst/>
-          </a:prstGeom>
-          <a:noFill/>
-        </p:spPr>
-        <p:txBody>
-          <a:bodyPr wrap="square" rtlCol="0">
-            <a:spAutoFit/>
-          </a:bodyPr>
-          <a:lstStyle/>
-          <a:p>
-            <a:pPr marL="285750" indent="-285750">
-              <a:buFont typeface="Arial" panose="020B0604020202020204" pitchFamily="34" charset="0"/>
-              <a:buChar char="•"/>
-            </a:pPr>
-            <a:r>
-              <a:rPr lang="en-GB" b="1" dirty="0">
-                <a:solidFill>
-                  <a:schemeClr val="bg1"/>
-                </a:solidFill>
-              </a:rPr>
-              <a:t>In your participant folder in your feature branch, there is a .</a:t>
-            </a:r>
-            <a:r>
-              <a:rPr lang="en-GB" b="1" dirty="0" err="1">
-                <a:solidFill>
-                  <a:schemeClr val="bg1"/>
-                </a:solidFill>
-              </a:rPr>
-              <a:t>py</a:t>
-            </a:r>
-            <a:r>
-              <a:rPr lang="en-GB" b="1" dirty="0">
-                <a:solidFill>
-                  <a:schemeClr val="bg1"/>
-                </a:solidFill>
-              </a:rPr>
-              <a:t> script. Open this and work with </a:t>
-            </a:r>
-            <a:r>
-              <a:rPr lang="en-GB" b="1" dirty="0" err="1">
-                <a:solidFill>
-                  <a:schemeClr val="bg1"/>
-                </a:solidFill>
-              </a:rPr>
-              <a:t>CoPilot</a:t>
-            </a:r>
-            <a:r>
-              <a:rPr lang="en-GB" b="1" dirty="0">
-                <a:solidFill>
-                  <a:schemeClr val="bg1"/>
-                </a:solidFill>
-              </a:rPr>
-              <a:t> to understand and optimise the script.</a:t>
-            </a:r>
-          </a:p>
-          <a:p>
-            <a:pPr lvl="1"/>
-            <a:endParaRPr lang="en-GB" b="1" dirty="0">
-              <a:solidFill>
-                <a:schemeClr val="bg1"/>
-              </a:solidFill>
-            </a:endParaRPr>
-          </a:p>
-          <a:p>
-            <a:pPr marL="800100" lvl="1" indent="-342900">
-              <a:buFont typeface="+mj-lt"/>
-              <a:buAutoNum type="arabicPeriod"/>
-            </a:pPr>
-            <a:endParaRPr lang="en-GB" b="1" dirty="0">
-              <a:solidFill>
-                <a:schemeClr val="bg1"/>
-              </a:solidFill>
-            </a:endParaRPr>
-          </a:p>
-          <a:p>
-            <a:pPr marL="800100" lvl="1" indent="-342900">
-              <a:buFont typeface="+mj-lt"/>
-              <a:buAutoNum type="arabicPeriod"/>
-            </a:pPr>
-            <a:r>
-              <a:rPr lang="en-GB" dirty="0">
-                <a:solidFill>
-                  <a:schemeClr val="bg1"/>
-                </a:solidFill>
-              </a:rPr>
-              <a:t>Open the PY file in your feature branch in </a:t>
-            </a:r>
-            <a:r>
-              <a:rPr lang="en-GB" dirty="0" err="1">
-                <a:solidFill>
-                  <a:schemeClr val="bg1"/>
-                </a:solidFill>
-              </a:rPr>
-              <a:t>Github</a:t>
-            </a:r>
-            <a:r>
-              <a:rPr lang="en-GB" dirty="0">
-                <a:solidFill>
-                  <a:schemeClr val="bg1"/>
-                </a:solidFill>
-              </a:rPr>
-              <a:t>. </a:t>
-            </a:r>
-          </a:p>
-          <a:p>
-            <a:pPr marL="800100" lvl="1" indent="-342900">
-              <a:buFont typeface="+mj-lt"/>
-              <a:buAutoNum type="arabicPeriod"/>
-            </a:pPr>
-            <a:r>
-              <a:rPr lang="en-GB" dirty="0">
-                <a:solidFill>
-                  <a:schemeClr val="bg1"/>
-                </a:solidFill>
-              </a:rPr>
-              <a:t>Use the following prompt within </a:t>
-            </a:r>
-            <a:r>
-              <a:rPr lang="en-GB" dirty="0" err="1">
-                <a:solidFill>
-                  <a:schemeClr val="bg1"/>
-                </a:solidFill>
-              </a:rPr>
-              <a:t>CoPilot</a:t>
-            </a:r>
-            <a:r>
-              <a:rPr lang="en-GB" dirty="0">
-                <a:solidFill>
-                  <a:schemeClr val="bg1"/>
-                </a:solidFill>
-              </a:rPr>
-              <a:t>: </a:t>
-            </a:r>
-            <a:r>
-              <a:rPr lang="en-GB" i="1" dirty="0">
-                <a:solidFill>
-                  <a:srgbClr val="2DAF75"/>
-                </a:solidFill>
-              </a:rPr>
-              <a:t>please explain what this file is doing. </a:t>
-            </a:r>
-            <a:endParaRPr lang="en-GB" dirty="0">
-              <a:solidFill>
-                <a:schemeClr val="bg1"/>
-              </a:solidFill>
-            </a:endParaRPr>
-          </a:p>
-          <a:p>
-            <a:pPr marL="800100" lvl="1" indent="-342900">
-              <a:buFont typeface="+mj-lt"/>
-              <a:buAutoNum type="arabicPeriod"/>
-            </a:pPr>
-            <a:r>
-              <a:rPr lang="en-GB" dirty="0">
-                <a:solidFill>
-                  <a:schemeClr val="bg1"/>
-                </a:solidFill>
-                <a:latin typeface="Mona Sans VF"/>
-              </a:rPr>
-              <a:t>Ask </a:t>
-            </a:r>
-            <a:r>
-              <a:rPr lang="en-GB" dirty="0" err="1">
-                <a:solidFill>
-                  <a:schemeClr val="bg1"/>
-                </a:solidFill>
-                <a:latin typeface="Mona Sans VF"/>
-              </a:rPr>
-              <a:t>CoPilot</a:t>
-            </a:r>
-            <a:r>
-              <a:rPr lang="en-GB" dirty="0">
-                <a:solidFill>
-                  <a:schemeClr val="bg1"/>
-                </a:solidFill>
-                <a:latin typeface="Mona Sans VF"/>
-              </a:rPr>
-              <a:t> to make suggestions on how to improve the file. </a:t>
-            </a:r>
-          </a:p>
-          <a:p>
-            <a:pPr marL="800100" lvl="1" indent="-342900">
-              <a:buFont typeface="+mj-lt"/>
-              <a:buAutoNum type="arabicPeriod"/>
-            </a:pPr>
-            <a:r>
-              <a:rPr lang="en-GB" dirty="0">
-                <a:solidFill>
-                  <a:schemeClr val="bg1"/>
-                </a:solidFill>
-                <a:latin typeface="Mona Sans VF"/>
-              </a:rPr>
-              <a:t>Use the following prompt in Agent Mode to generate a technical document: </a:t>
-            </a:r>
-            <a:r>
-              <a:rPr lang="en-GB" i="1" dirty="0">
-                <a:solidFill>
-                  <a:srgbClr val="2DAF75"/>
-                </a:solidFill>
-                <a:latin typeface="Mona Sans VF"/>
-              </a:rPr>
-              <a:t>create a technical document to explain this file. </a:t>
-            </a:r>
-          </a:p>
-          <a:p>
-            <a:pPr marL="800100" lvl="1" indent="-342900">
-              <a:buFont typeface="+mj-lt"/>
-              <a:buAutoNum type="arabicPeriod"/>
-            </a:pPr>
-            <a:r>
-              <a:rPr lang="en-GB" dirty="0">
-                <a:solidFill>
-                  <a:schemeClr val="bg1"/>
-                </a:solidFill>
-                <a:latin typeface="Mona Sans VF"/>
-              </a:rPr>
-              <a:t>The agent will potentially produce this within its new feature branch. Open a pull request to pull these changes into your feature branch.</a:t>
-            </a:r>
-          </a:p>
-          <a:p>
-            <a:pPr marL="800100" lvl="1" indent="-342900">
-              <a:buFont typeface="+mj-lt"/>
-              <a:buAutoNum type="arabicPeriod"/>
-            </a:pPr>
-            <a:endParaRPr lang="en-GB" dirty="0">
-              <a:solidFill>
-                <a:schemeClr val="bg1"/>
-              </a:solidFill>
-              <a:latin typeface="Mona Sans VF"/>
-            </a:endParaRPr>
-          </a:p>
-          <a:p>
-            <a:pPr marL="800100" lvl="1" indent="-342900">
-              <a:buFont typeface="+mj-lt"/>
-              <a:buAutoNum type="arabicPeriod"/>
-            </a:pPr>
-            <a:endParaRPr lang="en-GB" dirty="0">
-              <a:solidFill>
-                <a:schemeClr val="bg1"/>
-              </a:solidFill>
-              <a:latin typeface="Mona Sans VF"/>
-            </a:endParaRPr>
-          </a:p>
-          <a:p>
-            <a:pPr lvl="1"/>
-            <a:endParaRPr lang="en-GB" dirty="0">
-              <a:solidFill>
-                <a:schemeClr val="bg1"/>
-              </a:solidFill>
-              <a:latin typeface="Mona Sans VF"/>
-            </a:endParaRPr>
-          </a:p>
-        </p:txBody>
-      </p:sp>
-    </p:spTree>
-    <p:extLst>
-      <p:ext uri="{BB962C8B-B14F-4D97-AF65-F5344CB8AC3E}">
-        <p14:creationId xmlns:p14="http://schemas.microsoft.com/office/powerpoint/2010/main" val="3870304185"/>
-      </p:ext>
-    </p:extLst>
-  </p:cSld>
-  <p:clrMapOvr>
-    <a:masterClrMapping/>
-  </p:clrMapOvr>
-</p:sld>
-</file>
-
 <file path=ppt/slides/slide27.xml><?xml version="1.0" encoding="utf-8"?>
 <p:sld xmlns:a="http://schemas.openxmlformats.org/drawingml/2006/main" xmlns:r="http://schemas.openxmlformats.org/officeDocument/2006/relationships" xmlns:p="http://schemas.openxmlformats.org/presentationml/2006/main">
   <p:cSld>
@@ -19403,10 +19024,10 @@
       </p:grpSpPr>
       <p:sp>
         <p:nvSpPr>
-          <p:cNvPr id="2" name="Title 1">
-            <a:extLst>
-              <a:ext uri="{FF2B5EF4-FFF2-40B4-BE49-F238E27FC236}">
-                <a16:creationId xmlns:a16="http://schemas.microsoft.com/office/drawing/2014/main" id="{174918DD-3FB4-ECF1-7474-46B34CAE7FD5}"/>
+          <p:cNvPr id="5" name="Slide Number Placeholder 4">
+            <a:extLst>
+              <a:ext uri="{FF2B5EF4-FFF2-40B4-BE49-F238E27FC236}">
+                <a16:creationId xmlns:a16="http://schemas.microsoft.com/office/drawing/2014/main" id="{A6521F9B-D9FC-06E8-07A8-52FCF507297F}"/>
               </a:ext>
             </a:extLst>
           </p:cNvPr>
@@ -19414,31 +19035,303 @@
             <a:spLocks noGrp="1"/>
           </p:cNvSpPr>
           <p:nvPr>
-            <p:ph type="ctrTitle"/>
+            <p:ph type="sldNum" sz="quarter" idx="12"/>
           </p:nvPr>
         </p:nvSpPr>
-        <p:spPr>
-          <a:xfrm>
-            <a:off x="758703" y="2427434"/>
-            <a:ext cx="7401885" cy="830997"/>
-          </a:xfrm>
-        </p:spPr>
+        <p:spPr/>
         <p:txBody>
           <a:bodyPr/>
           <a:lstStyle/>
           <a:p>
-            <a:r>
-              <a:rPr lang="en-GB" dirty="0" err="1"/>
-              <a:t>Codespaces</a:t>
-            </a:r>
+            <a:fld id="{CC057153-B650-4DEB-B370-79DDCFDCE934}" type="slidenum">
+              <a:rPr lang="en-US" dirty="0"/>
+              <a:pPr/>
+              <a:t>27</a:t>
+            </a:fld>
             <a:endParaRPr lang="en-GB" dirty="0"/>
+          </a:p>
+        </p:txBody>
+      </p:sp>
+      <p:sp>
+        <p:nvSpPr>
+          <p:cNvPr id="2" name="Title 1">
+            <a:extLst>
+              <a:ext uri="{FF2B5EF4-FFF2-40B4-BE49-F238E27FC236}">
+                <a16:creationId xmlns:a16="http://schemas.microsoft.com/office/drawing/2014/main" id="{10F11F58-1B02-2B5E-16AB-F41892BB3093}"/>
+              </a:ext>
+            </a:extLst>
+          </p:cNvPr>
+          <p:cNvSpPr>
+            <a:spLocks noGrp="1"/>
+          </p:cNvSpPr>
+          <p:nvPr>
+            <p:ph type="title"/>
+          </p:nvPr>
+        </p:nvSpPr>
+        <p:spPr>
+          <a:xfrm>
+            <a:off x="685800" y="516588"/>
+            <a:ext cx="3436838" cy="498598"/>
+          </a:xfrm>
+        </p:spPr>
+        <p:txBody>
+          <a:bodyPr>
+            <a:normAutofit/>
+          </a:bodyPr>
+          <a:lstStyle/>
+          <a:p>
+            <a:r>
+              <a:rPr lang="en-GB" sz="3200" b="1" u="sng" dirty="0"/>
+              <a:t>Exercise Checkpoint 3 </a:t>
+            </a:r>
+          </a:p>
+        </p:txBody>
+      </p:sp>
+      <p:sp>
+        <p:nvSpPr>
+          <p:cNvPr id="3" name="Subtitle 2">
+            <a:extLst>
+              <a:ext uri="{FF2B5EF4-FFF2-40B4-BE49-F238E27FC236}">
+                <a16:creationId xmlns:a16="http://schemas.microsoft.com/office/drawing/2014/main" id="{A19A6EDB-FD47-0120-E2F7-AE5FAB5706B3}"/>
+              </a:ext>
+            </a:extLst>
+          </p:cNvPr>
+          <p:cNvSpPr>
+            <a:spLocks noGrp="1"/>
+          </p:cNvSpPr>
+          <p:nvPr>
+            <p:ph type="body" sz="quarter" idx="14"/>
+          </p:nvPr>
+        </p:nvSpPr>
+        <p:spPr/>
+        <p:txBody>
+          <a:bodyPr vert="horz" lIns="91440" tIns="45720" rIns="91440" bIns="45720" rtlCol="0" anchor="t">
+            <a:normAutofit fontScale="32500" lnSpcReduction="20000"/>
+          </a:bodyPr>
+          <a:lstStyle/>
+          <a:p>
+            <a:pPr lvl="1"/>
+            <a:br>
+              <a:rPr lang="en-GB" dirty="0"/>
+            </a:br>
+            <a:endParaRPr lang="en-GB" dirty="0"/>
+          </a:p>
+          <a:p>
+            <a:pPr marL="285750" indent="-285750">
+              <a:buChar char="•"/>
+            </a:pPr>
+            <a:endParaRPr lang="en-GB" dirty="0"/>
+          </a:p>
+          <a:p>
+            <a:pPr marL="514350" lvl="1" indent="-285750">
+              <a:buFont typeface="Courier New" panose="020B0604020202020204" pitchFamily="34" charset="0"/>
+              <a:buChar char="o"/>
+            </a:pPr>
+            <a:endParaRPr lang="en-GB" dirty="0"/>
+          </a:p>
+          <a:p>
+            <a:pPr marL="285750" indent="-285750">
+              <a:buFont typeface="Arial" panose="020B0604020202020204" pitchFamily="34" charset="0"/>
+              <a:buChar char="•"/>
+            </a:pPr>
+            <a:endParaRPr lang="en-GB" dirty="0"/>
+          </a:p>
+        </p:txBody>
+      </p:sp>
+      <p:sp>
+        <p:nvSpPr>
+          <p:cNvPr id="8" name="TextBox 7">
+            <a:extLst>
+              <a:ext uri="{FF2B5EF4-FFF2-40B4-BE49-F238E27FC236}">
+                <a16:creationId xmlns:a16="http://schemas.microsoft.com/office/drawing/2014/main" id="{6D1779D3-41A0-4920-B5C8-8AA53282B9B8}"/>
+              </a:ext>
+            </a:extLst>
+          </p:cNvPr>
+          <p:cNvSpPr txBox="1"/>
+          <p:nvPr/>
+        </p:nvSpPr>
+        <p:spPr>
+          <a:xfrm>
+            <a:off x="609600" y="1611755"/>
+            <a:ext cx="5689600" cy="5355312"/>
+          </a:xfrm>
+          <a:prstGeom prst="rect">
+            <a:avLst/>
+          </a:prstGeom>
+          <a:noFill/>
+        </p:spPr>
+        <p:txBody>
+          <a:bodyPr wrap="square" rtlCol="0">
+            <a:spAutoFit/>
+          </a:bodyPr>
+          <a:lstStyle/>
+          <a:p>
+            <a:pPr marL="285750" indent="-285750">
+              <a:buFont typeface="Arial" panose="020B0604020202020204" pitchFamily="34" charset="0"/>
+              <a:buChar char="•"/>
+            </a:pPr>
+            <a:r>
+              <a:rPr lang="en-GB" b="1" dirty="0">
+                <a:solidFill>
+                  <a:schemeClr val="bg1"/>
+                </a:solidFill>
+              </a:rPr>
+              <a:t>In your participant folder in your feature branch, there is a .py script. Open this and work with CoPilot to understand and optimise the script.</a:t>
+            </a:r>
+          </a:p>
+          <a:p>
+            <a:pPr lvl="1"/>
+            <a:endParaRPr lang="en-GB" b="1" dirty="0">
+              <a:solidFill>
+                <a:schemeClr val="bg1"/>
+              </a:solidFill>
+            </a:endParaRPr>
+          </a:p>
+          <a:p>
+            <a:pPr marL="800100" lvl="1" indent="-342900">
+              <a:buFont typeface="+mj-lt"/>
+              <a:buAutoNum type="arabicPeriod"/>
+            </a:pPr>
+            <a:endParaRPr lang="en-GB" b="1" dirty="0">
+              <a:solidFill>
+                <a:schemeClr val="bg1"/>
+              </a:solidFill>
+            </a:endParaRPr>
+          </a:p>
+          <a:p>
+            <a:pPr marL="800100" lvl="1" indent="-342900">
+              <a:buFont typeface="+mj-lt"/>
+              <a:buAutoNum type="arabicPeriod"/>
+            </a:pPr>
+            <a:r>
+              <a:rPr lang="en-GB" dirty="0">
+                <a:solidFill>
+                  <a:schemeClr val="bg1"/>
+                </a:solidFill>
+              </a:rPr>
+              <a:t>Open the PY file in your feature branch in GitHub. </a:t>
+            </a:r>
+          </a:p>
+          <a:p>
+            <a:pPr marL="800100" lvl="1" indent="-342900">
+              <a:buFont typeface="+mj-lt"/>
+              <a:buAutoNum type="arabicPeriod"/>
+            </a:pPr>
+            <a:r>
+              <a:rPr lang="en-GB" dirty="0">
+                <a:solidFill>
+                  <a:schemeClr val="bg1"/>
+                </a:solidFill>
+              </a:rPr>
+              <a:t>Use the following prompt within CoPilot: </a:t>
+            </a:r>
+            <a:r>
+              <a:rPr lang="en-GB" i="1" dirty="0">
+                <a:solidFill>
+                  <a:srgbClr val="2DAF75"/>
+                </a:solidFill>
+              </a:rPr>
+              <a:t>please explain what this file is doing. </a:t>
+            </a:r>
+            <a:endParaRPr lang="en-GB" dirty="0">
+              <a:solidFill>
+                <a:schemeClr val="bg1"/>
+              </a:solidFill>
+            </a:endParaRPr>
+          </a:p>
+          <a:p>
+            <a:pPr marL="800100" lvl="1" indent="-342900">
+              <a:buFont typeface="+mj-lt"/>
+              <a:buAutoNum type="arabicPeriod"/>
+            </a:pPr>
+            <a:r>
+              <a:rPr lang="en-GB" dirty="0">
+                <a:solidFill>
+                  <a:schemeClr val="bg1"/>
+                </a:solidFill>
+                <a:latin typeface="Mona Sans VF"/>
+              </a:rPr>
+              <a:t>Ask CoPilot to make suggestions on how to improve the file. </a:t>
+            </a:r>
+          </a:p>
+          <a:p>
+            <a:pPr marL="800100" lvl="1" indent="-342900">
+              <a:buFont typeface="+mj-lt"/>
+              <a:buAutoNum type="arabicPeriod"/>
+            </a:pPr>
+            <a:r>
+              <a:rPr lang="en-GB" dirty="0">
+                <a:solidFill>
+                  <a:schemeClr val="bg1"/>
+                </a:solidFill>
+                <a:latin typeface="Mona Sans VF"/>
+              </a:rPr>
+              <a:t>Use the following prompt in Agent Mode to generate a technical document: </a:t>
+            </a:r>
+            <a:r>
+              <a:rPr lang="en-GB" i="1" dirty="0">
+                <a:solidFill>
+                  <a:srgbClr val="2DAF75"/>
+                </a:solidFill>
+                <a:latin typeface="Mona Sans VF"/>
+              </a:rPr>
+              <a:t>create a technical document to explain this file. </a:t>
+            </a:r>
+          </a:p>
+          <a:p>
+            <a:pPr marL="800100" lvl="1" indent="-342900">
+              <a:buFont typeface="+mj-lt"/>
+              <a:buAutoNum type="arabicPeriod"/>
+            </a:pPr>
+            <a:r>
+              <a:rPr lang="en-GB" dirty="0">
+                <a:solidFill>
+                  <a:schemeClr val="bg1"/>
+                </a:solidFill>
+                <a:latin typeface="Mona Sans VF"/>
+              </a:rPr>
+              <a:t>The agent will potentially produce this within its new feature branch. Open a pull request to pull these changes into your feature branch.</a:t>
+            </a:r>
+          </a:p>
+          <a:p>
+            <a:pPr marL="800100" lvl="1" indent="-342900">
+              <a:buFont typeface="+mj-lt"/>
+              <a:buAutoNum type="arabicPeriod"/>
+            </a:pPr>
+            <a:endParaRPr lang="en-GB" dirty="0">
+              <a:solidFill>
+                <a:schemeClr val="bg1"/>
+              </a:solidFill>
+              <a:latin typeface="Mona Sans VF"/>
+            </a:endParaRPr>
+          </a:p>
+          <a:p>
+            <a:pPr marL="800100" lvl="1" indent="-342900">
+              <a:buFont typeface="+mj-lt"/>
+              <a:buAutoNum type="arabicPeriod"/>
+            </a:pPr>
+            <a:endParaRPr lang="en-GB" dirty="0">
+              <a:solidFill>
+                <a:schemeClr val="bg1"/>
+              </a:solidFill>
+              <a:latin typeface="Mona Sans VF"/>
+            </a:endParaRPr>
+          </a:p>
+          <a:p>
+            <a:pPr lvl="1"/>
+            <a:endParaRPr lang="en-GB" dirty="0">
+              <a:solidFill>
+                <a:schemeClr val="bg1"/>
+              </a:solidFill>
+              <a:latin typeface="Mona Sans VF"/>
+            </a:endParaRPr>
           </a:p>
         </p:txBody>
       </p:sp>
     </p:spTree>
     <p:extLst>
       <p:ext uri="{BB962C8B-B14F-4D97-AF65-F5344CB8AC3E}">
-        <p14:creationId xmlns:p14="http://schemas.microsoft.com/office/powerpoint/2010/main" val="4053802336"/>
+        <p14:creationId xmlns:p14="http://schemas.microsoft.com/office/powerpoint/2010/main" val="3870304185"/>
       </p:ext>
     </p:extLst>
   </p:cSld>
@@ -19470,6 +19363,69 @@
           <p:cNvPr id="2" name="Title 1">
             <a:extLst>
               <a:ext uri="{FF2B5EF4-FFF2-40B4-BE49-F238E27FC236}">
+                <a16:creationId xmlns:a16="http://schemas.microsoft.com/office/drawing/2014/main" id="{174918DD-3FB4-ECF1-7474-46B34CAE7FD5}"/>
+              </a:ext>
+            </a:extLst>
+          </p:cNvPr>
+          <p:cNvSpPr>
+            <a:spLocks noGrp="1"/>
+          </p:cNvSpPr>
+          <p:nvPr>
+            <p:ph type="ctrTitle"/>
+          </p:nvPr>
+        </p:nvSpPr>
+        <p:spPr>
+          <a:xfrm>
+            <a:off x="758703" y="2427434"/>
+            <a:ext cx="7401885" cy="830997"/>
+          </a:xfrm>
+        </p:spPr>
+        <p:txBody>
+          <a:bodyPr/>
+          <a:lstStyle/>
+          <a:p>
+            <a:r>
+              <a:rPr lang="en-GB" dirty="0"/>
+              <a:t>Codespaces</a:t>
+            </a:r>
+          </a:p>
+        </p:txBody>
+      </p:sp>
+    </p:spTree>
+    <p:extLst>
+      <p:ext uri="{BB962C8B-B14F-4D97-AF65-F5344CB8AC3E}">
+        <p14:creationId xmlns:p14="http://schemas.microsoft.com/office/powerpoint/2010/main" val="4053802336"/>
+      </p:ext>
+    </p:extLst>
+  </p:cSld>
+  <p:clrMapOvr>
+    <a:masterClrMapping/>
+  </p:clrMapOvr>
+</p:sld>
+</file>
+
+<file path=ppt/slides/slide29.xml><?xml version="1.0" encoding="utf-8"?>
+<p:sld xmlns:a="http://schemas.openxmlformats.org/drawingml/2006/main" xmlns:r="http://schemas.openxmlformats.org/officeDocument/2006/relationships" xmlns:p="http://schemas.openxmlformats.org/presentationml/2006/main">
+  <p:cSld>
+    <p:spTree>
+      <p:nvGrpSpPr>
+        <p:cNvPr id="1" name=""/>
+        <p:cNvGrpSpPr/>
+        <p:nvPr/>
+      </p:nvGrpSpPr>
+      <p:grpSpPr>
+        <a:xfrm>
+          <a:off x="0" y="0"/>
+          <a:ext cx="0" cy="0"/>
+          <a:chOff x="0" y="0"/>
+          <a:chExt cx="0" cy="0"/>
+        </a:xfrm>
+      </p:grpSpPr>
+      <p:sp>
+        <p:nvSpPr>
+          <p:cNvPr id="2" name="Title 1">
+            <a:extLst>
+              <a:ext uri="{FF2B5EF4-FFF2-40B4-BE49-F238E27FC236}">
                 <a16:creationId xmlns:a16="http://schemas.microsoft.com/office/drawing/2014/main" id="{10F11F58-1B02-2B5E-16AB-F41892BB3093}"/>
               </a:ext>
             </a:extLst>
@@ -19494,10 +19450,9 @@
           <a:lstStyle/>
           <a:p>
             <a:r>
-              <a:rPr lang="en-GB" sz="3200" b="1" u="sng" dirty="0" err="1"/>
+              <a:rPr lang="en-GB" sz="3200" b="1" u="sng" dirty="0"/>
               <a:t>Codespaces</a:t>
             </a:r>
-            <a:endParaRPr lang="en-GB" sz="3200" b="1" u="sng" dirty="0"/>
           </a:p>
         </p:txBody>
       </p:sp>
@@ -19525,9 +19480,9 @@
             <a:fld id="{CC057153-B650-4DEB-B370-79DDCFDCE934}" type="slidenum">
               <a:rPr lang="en-US" dirty="0"/>
               <a:pPr/>
-              <a:t>28</a:t>
+              <a:t>29</a:t>
             </a:fld>
-            <a:endParaRPr lang="en-GB"/>
+            <a:endParaRPr lang="en-GB" dirty="0"/>
           </a:p>
         </p:txBody>
       </p:sp>
@@ -19591,23 +19546,7 @@
             </a:pPr>
             <a:r>
               <a:rPr lang="en-GB" dirty="0"/>
-              <a:t>Integrated with </a:t>
-            </a:r>
-            <a:r>
-              <a:rPr lang="en-GB" dirty="0" err="1"/>
-              <a:t>CoPilot</a:t>
-            </a:r>
-            <a:r>
-              <a:rPr lang="en-GB" dirty="0"/>
-              <a:t> and </a:t>
-            </a:r>
-            <a:r>
-              <a:rPr lang="en-GB" dirty="0" err="1"/>
-              <a:t>Github</a:t>
-            </a:r>
-            <a:r>
-              <a:rPr lang="en-GB" dirty="0"/>
-              <a:t>. </a:t>
+              <a:t>Integrated with CoPilot and GitHub. </a:t>
             </a:r>
           </a:p>
           <a:p>
@@ -19805,310 +19744,6 @@
 </p:sld>
 </file>
 
-<file path=ppt/slides/slide29.xml><?xml version="1.0" encoding="utf-8"?>
-<p:sld xmlns:a="http://schemas.openxmlformats.org/drawingml/2006/main" xmlns:r="http://schemas.openxmlformats.org/officeDocument/2006/relationships" xmlns:p="http://schemas.openxmlformats.org/presentationml/2006/main">
-  <p:cSld>
-    <p:spTree>
-      <p:nvGrpSpPr>
-        <p:cNvPr id="1" name=""/>
-        <p:cNvGrpSpPr/>
-        <p:nvPr/>
-      </p:nvGrpSpPr>
-      <p:grpSpPr>
-        <a:xfrm>
-          <a:off x="0" y="0"/>
-          <a:ext cx="0" cy="0"/>
-          <a:chOff x="0" y="0"/>
-          <a:chExt cx="0" cy="0"/>
-        </a:xfrm>
-      </p:grpSpPr>
-      <p:sp>
-        <p:nvSpPr>
-          <p:cNvPr id="2" name="Title 1">
-            <a:extLst>
-              <a:ext uri="{FF2B5EF4-FFF2-40B4-BE49-F238E27FC236}">
-                <a16:creationId xmlns:a16="http://schemas.microsoft.com/office/drawing/2014/main" id="{10F11F58-1B02-2B5E-16AB-F41892BB3093}"/>
-              </a:ext>
-            </a:extLst>
-          </p:cNvPr>
-          <p:cNvSpPr>
-            <a:spLocks noGrp="1"/>
-          </p:cNvSpPr>
-          <p:nvPr>
-            <p:ph type="title"/>
-          </p:nvPr>
-        </p:nvSpPr>
-        <p:spPr>
-          <a:xfrm>
-            <a:off x="520911" y="427020"/>
-            <a:ext cx="8343789" cy="636062"/>
-          </a:xfrm>
-        </p:spPr>
-        <p:txBody>
-          <a:bodyPr>
-            <a:normAutofit/>
-          </a:bodyPr>
-          <a:lstStyle/>
-          <a:p>
-            <a:r>
-              <a:rPr lang="en-GB" sz="3200" b="1" u="sng" dirty="0" err="1"/>
-              <a:t>Codespaces</a:t>
-            </a:r>
-            <a:endParaRPr lang="en-GB" sz="3200" b="1" u="sng" dirty="0"/>
-          </a:p>
-        </p:txBody>
-      </p:sp>
-      <p:sp>
-        <p:nvSpPr>
-          <p:cNvPr id="5" name="Slide Number Placeholder 4">
-            <a:extLst>
-              <a:ext uri="{FF2B5EF4-FFF2-40B4-BE49-F238E27FC236}">
-                <a16:creationId xmlns:a16="http://schemas.microsoft.com/office/drawing/2014/main" id="{A6521F9B-D9FC-06E8-07A8-52FCF507297F}"/>
-              </a:ext>
-            </a:extLst>
-          </p:cNvPr>
-          <p:cNvSpPr>
-            <a:spLocks noGrp="1"/>
-          </p:cNvSpPr>
-          <p:nvPr>
-            <p:ph type="sldNum" sz="quarter" idx="12"/>
-          </p:nvPr>
-        </p:nvSpPr>
-        <p:spPr/>
-        <p:txBody>
-          <a:bodyPr/>
-          <a:lstStyle/>
-          <a:p>
-            <a:fld id="{CC057153-B650-4DEB-B370-79DDCFDCE934}" type="slidenum">
-              <a:rPr lang="en-US" dirty="0"/>
-              <a:pPr/>
-              <a:t>29</a:t>
-            </a:fld>
-            <a:endParaRPr lang="en-GB"/>
-          </a:p>
-        </p:txBody>
-      </p:sp>
-      <p:pic>
-        <p:nvPicPr>
-          <p:cNvPr id="4" name="Picture 3">
-            <a:extLst>
-              <a:ext uri="{FF2B5EF4-FFF2-40B4-BE49-F238E27FC236}">
-                <a16:creationId xmlns:a16="http://schemas.microsoft.com/office/drawing/2014/main" id="{8ECD14C2-A169-4D7D-8E9D-FA85404B57EF}"/>
-              </a:ext>
-            </a:extLst>
-          </p:cNvPr>
-          <p:cNvPicPr>
-            <a:picLocks noChangeAspect="1"/>
-          </p:cNvPicPr>
-          <p:nvPr/>
-        </p:nvPicPr>
-        <p:blipFill>
-          <a:blip r:embed="rId2"/>
-          <a:stretch>
-            <a:fillRect/>
-          </a:stretch>
-        </p:blipFill>
-        <p:spPr>
-          <a:xfrm>
-            <a:off x="453178" y="2165384"/>
-            <a:ext cx="5202556" cy="3208662"/>
-          </a:xfrm>
-          <a:prstGeom prst="rect">
-            <a:avLst/>
-          </a:prstGeom>
-        </p:spPr>
-      </p:pic>
-      <p:cxnSp>
-        <p:nvCxnSpPr>
-          <p:cNvPr id="9" name="Straight Arrow Connector 8">
-            <a:extLst>
-              <a:ext uri="{FF2B5EF4-FFF2-40B4-BE49-F238E27FC236}">
-                <a16:creationId xmlns:a16="http://schemas.microsoft.com/office/drawing/2014/main" id="{B0C7E4C8-55F2-4ACF-B44F-2EEA112757D6}"/>
-              </a:ext>
-            </a:extLst>
-          </p:cNvPr>
-          <p:cNvCxnSpPr/>
-          <p:nvPr/>
-        </p:nvCxnSpPr>
-        <p:spPr>
-          <a:xfrm flipV="1">
-            <a:off x="5926667" y="1879600"/>
-            <a:ext cx="1701800" cy="1066800"/>
-          </a:xfrm>
-          <a:prstGeom prst="straightConnector1">
-            <a:avLst/>
-          </a:prstGeom>
-          <a:ln>
-            <a:tailEnd type="triangle"/>
-          </a:ln>
-        </p:spPr>
-        <p:style>
-          <a:lnRef idx="2">
-            <a:schemeClr val="accent1"/>
-          </a:lnRef>
-          <a:fillRef idx="0">
-            <a:schemeClr val="accent1"/>
-          </a:fillRef>
-          <a:effectRef idx="1">
-            <a:schemeClr val="accent1"/>
-          </a:effectRef>
-          <a:fontRef idx="minor">
-            <a:schemeClr val="tx1"/>
-          </a:fontRef>
-        </p:style>
-      </p:cxnSp>
-      <p:cxnSp>
-        <p:nvCxnSpPr>
-          <p:cNvPr id="10" name="Straight Arrow Connector 9">
-            <a:extLst>
-              <a:ext uri="{FF2B5EF4-FFF2-40B4-BE49-F238E27FC236}">
-                <a16:creationId xmlns:a16="http://schemas.microsoft.com/office/drawing/2014/main" id="{88A722A9-377D-45F8-BC70-F071F2F43069}"/>
-              </a:ext>
-            </a:extLst>
-          </p:cNvPr>
-          <p:cNvCxnSpPr>
-            <a:cxnSpLocks/>
-          </p:cNvCxnSpPr>
-          <p:nvPr/>
-        </p:nvCxnSpPr>
-        <p:spPr>
-          <a:xfrm>
-            <a:off x="6096000" y="4572000"/>
-            <a:ext cx="1625600" cy="905933"/>
-          </a:xfrm>
-          <a:prstGeom prst="straightConnector1">
-            <a:avLst/>
-          </a:prstGeom>
-          <a:ln>
-            <a:tailEnd type="triangle"/>
-          </a:ln>
-        </p:spPr>
-        <p:style>
-          <a:lnRef idx="2">
-            <a:schemeClr val="accent1"/>
-          </a:lnRef>
-          <a:fillRef idx="0">
-            <a:schemeClr val="accent1"/>
-          </a:fillRef>
-          <a:effectRef idx="1">
-            <a:schemeClr val="accent1"/>
-          </a:effectRef>
-          <a:fontRef idx="minor">
-            <a:schemeClr val="tx1"/>
-          </a:fontRef>
-        </p:style>
-      </p:cxnSp>
-      <p:sp>
-        <p:nvSpPr>
-          <p:cNvPr id="12" name="Rectangle: Rounded Corners 11">
-            <a:extLst>
-              <a:ext uri="{FF2B5EF4-FFF2-40B4-BE49-F238E27FC236}">
-                <a16:creationId xmlns:a16="http://schemas.microsoft.com/office/drawing/2014/main" id="{D00615A2-E42F-4486-BD12-B7AA2C220AC2}"/>
-              </a:ext>
-            </a:extLst>
-          </p:cNvPr>
-          <p:cNvSpPr/>
-          <p:nvPr/>
-        </p:nvSpPr>
-        <p:spPr>
-          <a:xfrm>
-            <a:off x="8009467" y="1261533"/>
-            <a:ext cx="2743200" cy="990600"/>
-          </a:xfrm>
-          <a:prstGeom prst="roundRect">
-            <a:avLst/>
-          </a:prstGeom>
-        </p:spPr>
-        <p:style>
-          <a:lnRef idx="2">
-            <a:schemeClr val="accent1">
-              <a:shade val="50000"/>
-            </a:schemeClr>
-          </a:lnRef>
-          <a:fillRef idx="1">
-            <a:schemeClr val="accent1"/>
-          </a:fillRef>
-          <a:effectRef idx="0">
-            <a:schemeClr val="accent1"/>
-          </a:effectRef>
-          <a:fontRef idx="minor">
-            <a:schemeClr val="lt1"/>
-          </a:fontRef>
-        </p:style>
-        <p:txBody>
-          <a:bodyPr rtlCol="0" anchor="ctr"/>
-          <a:lstStyle/>
-          <a:p>
-            <a:pPr algn="ctr"/>
-            <a:r>
-              <a:rPr lang="en-GB" dirty="0"/>
-              <a:t>Will open in separate browser window for users without VS Code.</a:t>
-            </a:r>
-          </a:p>
-        </p:txBody>
-      </p:sp>
-      <p:sp>
-        <p:nvSpPr>
-          <p:cNvPr id="13" name="Rectangle: Rounded Corners 12">
-            <a:extLst>
-              <a:ext uri="{FF2B5EF4-FFF2-40B4-BE49-F238E27FC236}">
-                <a16:creationId xmlns:a16="http://schemas.microsoft.com/office/drawing/2014/main" id="{52224040-E4E4-473A-848A-73DFF61E5A5F}"/>
-              </a:ext>
-            </a:extLst>
-          </p:cNvPr>
-          <p:cNvSpPr/>
-          <p:nvPr/>
-        </p:nvSpPr>
-        <p:spPr>
-          <a:xfrm>
-            <a:off x="8009467" y="5101167"/>
-            <a:ext cx="2743200" cy="990600"/>
-          </a:xfrm>
-          <a:prstGeom prst="roundRect">
-            <a:avLst/>
-          </a:prstGeom>
-        </p:spPr>
-        <p:style>
-          <a:lnRef idx="2">
-            <a:schemeClr val="accent1">
-              <a:shade val="50000"/>
-            </a:schemeClr>
-          </a:lnRef>
-          <a:fillRef idx="1">
-            <a:schemeClr val="accent1"/>
-          </a:fillRef>
-          <a:effectRef idx="0">
-            <a:schemeClr val="accent1"/>
-          </a:effectRef>
-          <a:fontRef idx="minor">
-            <a:schemeClr val="lt1"/>
-          </a:fontRef>
-        </p:style>
-        <p:txBody>
-          <a:bodyPr rtlCol="0" anchor="ctr"/>
-          <a:lstStyle/>
-          <a:p>
-            <a:pPr algn="ctr"/>
-            <a:r>
-              <a:rPr lang="en-GB" dirty="0"/>
-              <a:t>Can be accessed through VS Code locally.</a:t>
-            </a:r>
-          </a:p>
-        </p:txBody>
-      </p:sp>
-    </p:spTree>
-    <p:extLst>
-      <p:ext uri="{BB962C8B-B14F-4D97-AF65-F5344CB8AC3E}">
-        <p14:creationId xmlns:p14="http://schemas.microsoft.com/office/powerpoint/2010/main" val="959260511"/>
-      </p:ext>
-    </p:extLst>
-  </p:cSld>
-  <p:clrMapOvr>
-    <a:masterClrMapping/>
-  </p:clrMapOvr>
-</p:sld>
-</file>
-
 <file path=ppt/slides/slide3.xml><?xml version="1.0" encoding="utf-8"?>
 <p:sld xmlns:a="http://schemas.openxmlformats.org/drawingml/2006/main" xmlns:r="http://schemas.openxmlformats.org/officeDocument/2006/relationships" xmlns:p="http://schemas.openxmlformats.org/presentationml/2006/main">
   <p:cSld>
@@ -20218,10 +19853,9 @@
           <a:lstStyle/>
           <a:p>
             <a:r>
-              <a:rPr lang="en-GB" sz="3200" b="1" u="sng" dirty="0" err="1"/>
+              <a:rPr lang="en-GB" sz="3200" b="1" u="sng" dirty="0"/>
               <a:t>Codespaces</a:t>
             </a:r>
-            <a:endParaRPr lang="en-GB" sz="3200" b="1" u="sng" dirty="0"/>
           </a:p>
         </p:txBody>
       </p:sp>
@@ -20251,16 +19885,16 @@
               <a:pPr/>
               <a:t>30</a:t>
             </a:fld>
-            <a:endParaRPr lang="en-GB"/>
+            <a:endParaRPr lang="en-GB" dirty="0"/>
           </a:p>
         </p:txBody>
       </p:sp>
       <p:pic>
         <p:nvPicPr>
-          <p:cNvPr id="11" name="sde_fit.png" descr="Diagram: code moves from GitHub to the Secure Data Environment; real data never leaves it">
-            <a:extLst>
-              <a:ext uri="{FF2B5EF4-FFF2-40B4-BE49-F238E27FC236}">
-                <a16:creationId xmlns:a16="http://schemas.microsoft.com/office/drawing/2014/main" id="{7CC9D1C3-7383-4B34-B40C-23D046CA4B56}"/>
+          <p:cNvPr id="4" name="Picture 3">
+            <a:extLst>
+              <a:ext uri="{FF2B5EF4-FFF2-40B4-BE49-F238E27FC236}">
+                <a16:creationId xmlns:a16="http://schemas.microsoft.com/office/drawing/2014/main" id="{8ECD14C2-A169-4D7D-8E9D-FA85404B57EF}"/>
               </a:ext>
             </a:extLst>
           </p:cNvPr>
@@ -20277,18 +19911,196 @@
         </p:blipFill>
         <p:spPr>
           <a:xfrm>
-            <a:off x="2855978" y="1653560"/>
-            <a:ext cx="5583291" cy="4187468"/>
+            <a:off x="453178" y="2165384"/>
+            <a:ext cx="5202556" cy="3208662"/>
           </a:xfrm>
           <a:prstGeom prst="rect">
             <a:avLst/>
           </a:prstGeom>
         </p:spPr>
       </p:pic>
+      <p:cxnSp>
+        <p:nvCxnSpPr>
+          <p:cNvPr id="9" name="Straight Arrow Connector 8">
+            <a:extLst>
+              <a:ext uri="{FF2B5EF4-FFF2-40B4-BE49-F238E27FC236}">
+                <a16:creationId xmlns:a16="http://schemas.microsoft.com/office/drawing/2014/main" id="{B0C7E4C8-55F2-4ACF-B44F-2EEA112757D6}"/>
+              </a:ext>
+            </a:extLst>
+          </p:cNvPr>
+          <p:cNvCxnSpPr/>
+          <p:nvPr/>
+        </p:nvCxnSpPr>
+        <p:spPr>
+          <a:xfrm flipV="1">
+            <a:off x="5926667" y="1879600"/>
+            <a:ext cx="1701800" cy="1066800"/>
+          </a:xfrm>
+          <a:prstGeom prst="straightConnector1">
+            <a:avLst/>
+          </a:prstGeom>
+          <a:ln>
+            <a:tailEnd type="triangle"/>
+          </a:ln>
+        </p:spPr>
+        <p:style>
+          <a:lnRef idx="2">
+            <a:schemeClr val="accent1"/>
+          </a:lnRef>
+          <a:fillRef idx="0">
+            <a:schemeClr val="accent1"/>
+          </a:fillRef>
+          <a:effectRef idx="1">
+            <a:schemeClr val="accent1"/>
+          </a:effectRef>
+          <a:fontRef idx="minor">
+            <a:schemeClr val="tx1"/>
+          </a:fontRef>
+        </p:style>
+      </p:cxnSp>
+      <p:cxnSp>
+        <p:nvCxnSpPr>
+          <p:cNvPr id="10" name="Straight Arrow Connector 9">
+            <a:extLst>
+              <a:ext uri="{FF2B5EF4-FFF2-40B4-BE49-F238E27FC236}">
+                <a16:creationId xmlns:a16="http://schemas.microsoft.com/office/drawing/2014/main" id="{88A722A9-377D-45F8-BC70-F071F2F43069}"/>
+              </a:ext>
+            </a:extLst>
+          </p:cNvPr>
+          <p:cNvCxnSpPr>
+            <a:cxnSpLocks/>
+          </p:cNvCxnSpPr>
+          <p:nvPr/>
+        </p:nvCxnSpPr>
+        <p:spPr>
+          <a:xfrm>
+            <a:off x="6096000" y="4572000"/>
+            <a:ext cx="1625600" cy="905933"/>
+          </a:xfrm>
+          <a:prstGeom prst="straightConnector1">
+            <a:avLst/>
+          </a:prstGeom>
+          <a:ln>
+            <a:tailEnd type="triangle"/>
+          </a:ln>
+        </p:spPr>
+        <p:style>
+          <a:lnRef idx="2">
+            <a:schemeClr val="accent1"/>
+          </a:lnRef>
+          <a:fillRef idx="0">
+            <a:schemeClr val="accent1"/>
+          </a:fillRef>
+          <a:effectRef idx="1">
+            <a:schemeClr val="accent1"/>
+          </a:effectRef>
+          <a:fontRef idx="minor">
+            <a:schemeClr val="tx1"/>
+          </a:fontRef>
+        </p:style>
+      </p:cxnSp>
+      <p:sp>
+        <p:nvSpPr>
+          <p:cNvPr id="12" name="Rectangle: Rounded Corners 11">
+            <a:extLst>
+              <a:ext uri="{FF2B5EF4-FFF2-40B4-BE49-F238E27FC236}">
+                <a16:creationId xmlns:a16="http://schemas.microsoft.com/office/drawing/2014/main" id="{D00615A2-E42F-4486-BD12-B7AA2C220AC2}"/>
+              </a:ext>
+            </a:extLst>
+          </p:cNvPr>
+          <p:cNvSpPr/>
+          <p:nvPr/>
+        </p:nvSpPr>
+        <p:spPr>
+          <a:xfrm>
+            <a:off x="8009467" y="1261533"/>
+            <a:ext cx="2743200" cy="990600"/>
+          </a:xfrm>
+          <a:prstGeom prst="roundRect">
+            <a:avLst/>
+          </a:prstGeom>
+        </p:spPr>
+        <p:style>
+          <a:lnRef idx="2">
+            <a:schemeClr val="accent1">
+              <a:shade val="50000"/>
+            </a:schemeClr>
+          </a:lnRef>
+          <a:fillRef idx="1">
+            <a:schemeClr val="accent1"/>
+          </a:fillRef>
+          <a:effectRef idx="0">
+            <a:schemeClr val="accent1"/>
+          </a:effectRef>
+          <a:fontRef idx="minor">
+            <a:schemeClr val="lt1"/>
+          </a:fontRef>
+        </p:style>
+        <p:txBody>
+          <a:bodyPr rtlCol="0" anchor="ctr"/>
+          <a:lstStyle/>
+          <a:p>
+            <a:pPr algn="ctr"/>
+            <a:r>
+              <a:rPr lang="en-GB" dirty="0"/>
+              <a:t>Will open in separate browser window for users without VS Code.</a:t>
+            </a:r>
+          </a:p>
+        </p:txBody>
+      </p:sp>
+      <p:sp>
+        <p:nvSpPr>
+          <p:cNvPr id="13" name="Rectangle: Rounded Corners 12">
+            <a:extLst>
+              <a:ext uri="{FF2B5EF4-FFF2-40B4-BE49-F238E27FC236}">
+                <a16:creationId xmlns:a16="http://schemas.microsoft.com/office/drawing/2014/main" id="{52224040-E4E4-473A-848A-73DFF61E5A5F}"/>
+              </a:ext>
+            </a:extLst>
+          </p:cNvPr>
+          <p:cNvSpPr/>
+          <p:nvPr/>
+        </p:nvSpPr>
+        <p:spPr>
+          <a:xfrm>
+            <a:off x="8009467" y="5101167"/>
+            <a:ext cx="2743200" cy="990600"/>
+          </a:xfrm>
+          <a:prstGeom prst="roundRect">
+            <a:avLst/>
+          </a:prstGeom>
+        </p:spPr>
+        <p:style>
+          <a:lnRef idx="2">
+            <a:schemeClr val="accent1">
+              <a:shade val="50000"/>
+            </a:schemeClr>
+          </a:lnRef>
+          <a:fillRef idx="1">
+            <a:schemeClr val="accent1"/>
+          </a:fillRef>
+          <a:effectRef idx="0">
+            <a:schemeClr val="accent1"/>
+          </a:effectRef>
+          <a:fontRef idx="minor">
+            <a:schemeClr val="lt1"/>
+          </a:fontRef>
+        </p:style>
+        <p:txBody>
+          <a:bodyPr rtlCol="0" anchor="ctr"/>
+          <a:lstStyle/>
+          <a:p>
+            <a:pPr algn="ctr"/>
+            <a:r>
+              <a:rPr lang="en-GB" dirty="0"/>
+              <a:t>Can be accessed through VS Code locally.</a:t>
+            </a:r>
+          </a:p>
+        </p:txBody>
+      </p:sp>
     </p:spTree>
     <p:extLst>
       <p:ext uri="{BB962C8B-B14F-4D97-AF65-F5344CB8AC3E}">
-        <p14:creationId xmlns:p14="http://schemas.microsoft.com/office/powerpoint/2010/main" val="4222023107"/>
+        <p14:creationId xmlns:p14="http://schemas.microsoft.com/office/powerpoint/2010/main" val="959260511"/>
       </p:ext>
     </p:extLst>
   </p:cSld>
@@ -20320,7 +20132,7 @@
           <p:cNvPr id="2" name="Title 1">
             <a:extLst>
               <a:ext uri="{FF2B5EF4-FFF2-40B4-BE49-F238E27FC236}">
-                <a16:creationId xmlns:a16="http://schemas.microsoft.com/office/drawing/2014/main" id="{174918DD-3FB4-ECF1-7474-46B34CAE7FD5}"/>
+                <a16:creationId xmlns:a16="http://schemas.microsoft.com/office/drawing/2014/main" id="{10F11F58-1B02-2B5E-16AB-F41892BB3093}"/>
               </a:ext>
             </a:extLst>
           </p:cNvPr>
@@ -20328,34 +20140,92 @@
             <a:spLocks noGrp="1"/>
           </p:cNvSpPr>
           <p:nvPr>
-            <p:ph type="ctrTitle"/>
+            <p:ph type="title"/>
           </p:nvPr>
         </p:nvSpPr>
         <p:spPr>
           <a:xfrm>
-            <a:off x="758703" y="2427434"/>
-            <a:ext cx="10007063" cy="1661993"/>
-          </a:xfrm>
-        </p:spPr>
+            <a:off x="520911" y="427020"/>
+            <a:ext cx="8343789" cy="636062"/>
+          </a:xfrm>
+        </p:spPr>
+        <p:txBody>
+          <a:bodyPr>
+            <a:normAutofit/>
+          </a:bodyPr>
+          <a:lstStyle/>
+          <a:p>
+            <a:r>
+              <a:rPr lang="en-GB" sz="3200" b="1" u="sng" dirty="0"/>
+              <a:t>Codespaces</a:t>
+            </a:r>
+          </a:p>
+        </p:txBody>
+      </p:sp>
+      <p:sp>
+        <p:nvSpPr>
+          <p:cNvPr id="5" name="Slide Number Placeholder 4">
+            <a:extLst>
+              <a:ext uri="{FF2B5EF4-FFF2-40B4-BE49-F238E27FC236}">
+                <a16:creationId xmlns:a16="http://schemas.microsoft.com/office/drawing/2014/main" id="{A6521F9B-D9FC-06E8-07A8-52FCF507297F}"/>
+              </a:ext>
+            </a:extLst>
+          </p:cNvPr>
+          <p:cNvSpPr>
+            <a:spLocks noGrp="1"/>
+          </p:cNvSpPr>
+          <p:nvPr>
+            <p:ph type="sldNum" sz="quarter" idx="12"/>
+          </p:nvPr>
+        </p:nvSpPr>
+        <p:spPr/>
         <p:txBody>
           <a:bodyPr/>
           <a:lstStyle/>
           <a:p>
-            <a:r>
-              <a:rPr lang="en-GB" dirty="0" err="1"/>
-              <a:t>Codespace</a:t>
-            </a:r>
-            <a:r>
-              <a:rPr lang="en-GB" dirty="0"/>
-              <a:t> Walkthrough</a:t>
-            </a:r>
-          </a:p>
-        </p:txBody>
-      </p:sp>
+            <a:fld id="{CC057153-B650-4DEB-B370-79DDCFDCE934}" type="slidenum">
+              <a:rPr lang="en-US" dirty="0"/>
+              <a:pPr/>
+              <a:t>31</a:t>
+            </a:fld>
+            <a:endParaRPr lang="en-GB" dirty="0"/>
+          </a:p>
+        </p:txBody>
+      </p:sp>
+      <p:pic>
+        <p:nvPicPr>
+          <p:cNvPr id="11" name="sde_fit.png" descr="Diagram: code moves from GitHub to the Secure Data Environment; real data never leaves it">
+            <a:extLst>
+              <a:ext uri="{FF2B5EF4-FFF2-40B4-BE49-F238E27FC236}">
+                <a16:creationId xmlns:a16="http://schemas.microsoft.com/office/drawing/2014/main" id="{7CC9D1C3-7383-4B34-B40C-23D046CA4B56}"/>
+              </a:ext>
+            </a:extLst>
+          </p:cNvPr>
+          <p:cNvPicPr>
+            <a:picLocks noChangeAspect="1"/>
+          </p:cNvPicPr>
+          <p:nvPr/>
+        </p:nvPicPr>
+        <p:blipFill>
+          <a:blip r:embed="rId2"/>
+          <a:stretch>
+            <a:fillRect/>
+          </a:stretch>
+        </p:blipFill>
+        <p:spPr>
+          <a:xfrm>
+            <a:off x="2855978" y="1653560"/>
+            <a:ext cx="5583291" cy="4187468"/>
+          </a:xfrm>
+          <a:prstGeom prst="rect">
+            <a:avLst/>
+          </a:prstGeom>
+        </p:spPr>
+      </p:pic>
     </p:spTree>
     <p:extLst>
       <p:ext uri="{BB962C8B-B14F-4D97-AF65-F5344CB8AC3E}">
-        <p14:creationId xmlns:p14="http://schemas.microsoft.com/office/powerpoint/2010/main" val="1236093073"/>
+        <p14:creationId xmlns:p14="http://schemas.microsoft.com/office/powerpoint/2010/main" val="4222023107"/>
       </p:ext>
     </p:extLst>
   </p:cSld>
@@ -20384,10 +20254,10 @@
       </p:grpSpPr>
       <p:sp>
         <p:nvSpPr>
-          <p:cNvPr id="5" name="Slide Number Placeholder 4">
-            <a:extLst>
-              <a:ext uri="{FF2B5EF4-FFF2-40B4-BE49-F238E27FC236}">
-                <a16:creationId xmlns:a16="http://schemas.microsoft.com/office/drawing/2014/main" id="{A6521F9B-D9FC-06E8-07A8-52FCF507297F}"/>
+          <p:cNvPr id="2" name="Title 1">
+            <a:extLst>
+              <a:ext uri="{FF2B5EF4-FFF2-40B4-BE49-F238E27FC236}">
+                <a16:creationId xmlns:a16="http://schemas.microsoft.com/office/drawing/2014/main" id="{174918DD-3FB4-ECF1-7474-46B34CAE7FD5}"/>
               </a:ext>
             </a:extLst>
           </p:cNvPr>
@@ -20395,436 +20265,30 @@
             <a:spLocks noGrp="1"/>
           </p:cNvSpPr>
           <p:nvPr>
-            <p:ph type="sldNum" sz="quarter" idx="12"/>
+            <p:ph type="ctrTitle"/>
           </p:nvPr>
         </p:nvSpPr>
-        <p:spPr/>
+        <p:spPr>
+          <a:xfrm>
+            <a:off x="758703" y="2427434"/>
+            <a:ext cx="10007063" cy="1661993"/>
+          </a:xfrm>
+        </p:spPr>
         <p:txBody>
           <a:bodyPr/>
           <a:lstStyle/>
           <a:p>
-            <a:fld id="{CC057153-B650-4DEB-B370-79DDCFDCE934}" type="slidenum">
-              <a:rPr lang="en-US" dirty="0"/>
-              <a:pPr/>
-              <a:t>32</a:t>
-            </a:fld>
-            <a:endParaRPr lang="en-GB"/>
-          </a:p>
-        </p:txBody>
-      </p:sp>
-      <p:sp>
-        <p:nvSpPr>
-          <p:cNvPr id="2" name="Title 1">
-            <a:extLst>
-              <a:ext uri="{FF2B5EF4-FFF2-40B4-BE49-F238E27FC236}">
-                <a16:creationId xmlns:a16="http://schemas.microsoft.com/office/drawing/2014/main" id="{10F11F58-1B02-2B5E-16AB-F41892BB3093}"/>
-              </a:ext>
-            </a:extLst>
-          </p:cNvPr>
-          <p:cNvSpPr>
-            <a:spLocks noGrp="1"/>
-          </p:cNvSpPr>
-          <p:nvPr>
-            <p:ph type="title"/>
-          </p:nvPr>
-        </p:nvSpPr>
-        <p:spPr>
-          <a:xfrm>
-            <a:off x="685800" y="516588"/>
-            <a:ext cx="3436838" cy="498598"/>
-          </a:xfrm>
-        </p:spPr>
-        <p:txBody>
-          <a:bodyPr>
-            <a:normAutofit/>
-          </a:bodyPr>
-          <a:lstStyle/>
-          <a:p>
-            <a:r>
-              <a:rPr lang="en-GB" sz="3200" b="1" u="sng" dirty="0"/>
-              <a:t>Exercise Checkpoint 4 </a:t>
-            </a:r>
-          </a:p>
-        </p:txBody>
-      </p:sp>
-      <p:sp>
-        <p:nvSpPr>
-          <p:cNvPr id="3" name="Subtitle 2">
-            <a:extLst>
-              <a:ext uri="{FF2B5EF4-FFF2-40B4-BE49-F238E27FC236}">
-                <a16:creationId xmlns:a16="http://schemas.microsoft.com/office/drawing/2014/main" id="{A19A6EDB-FD47-0120-E2F7-AE5FAB5706B3}"/>
-              </a:ext>
-            </a:extLst>
-          </p:cNvPr>
-          <p:cNvSpPr>
-            <a:spLocks noGrp="1"/>
-          </p:cNvSpPr>
-          <p:nvPr>
-            <p:ph type="body" sz="quarter" idx="14"/>
-          </p:nvPr>
-        </p:nvSpPr>
-        <p:spPr/>
-        <p:txBody>
-          <a:bodyPr vert="horz" lIns="91440" tIns="45720" rIns="91440" bIns="45720" rtlCol="0" anchor="t">
-            <a:normAutofit fontScale="32500" lnSpcReduction="20000"/>
-          </a:bodyPr>
-          <a:lstStyle/>
-          <a:p>
-            <a:pPr lvl="1"/>
-            <a:br>
+            <a:r>
               <a:rPr lang="en-GB" dirty="0"/>
-            </a:br>
-            <a:endParaRPr lang="en-GB" dirty="0"/>
-          </a:p>
-          <a:p>
-            <a:pPr marL="285750" indent="-285750">
-              <a:buChar char="•"/>
-            </a:pPr>
-            <a:endParaRPr lang="en-GB" dirty="0"/>
-          </a:p>
-          <a:p>
-            <a:pPr marL="514350" lvl="1" indent="-285750">
-              <a:buFont typeface="Courier New" panose="020B0604020202020204" pitchFamily="34" charset="0"/>
-              <a:buChar char="o"/>
-            </a:pPr>
-            <a:endParaRPr lang="en-GB" dirty="0"/>
-          </a:p>
-          <a:p>
-            <a:pPr marL="285750" indent="-285750">
-              <a:buFont typeface="Arial" panose="020B0604020202020204" pitchFamily="34" charset="0"/>
-              <a:buChar char="•"/>
-            </a:pPr>
-            <a:endParaRPr lang="en-GB" dirty="0"/>
-          </a:p>
-        </p:txBody>
-      </p:sp>
-      <p:sp>
-        <p:nvSpPr>
-          <p:cNvPr id="8" name="TextBox 7">
-            <a:extLst>
-              <a:ext uri="{FF2B5EF4-FFF2-40B4-BE49-F238E27FC236}">
-                <a16:creationId xmlns:a16="http://schemas.microsoft.com/office/drawing/2014/main" id="{6D1779D3-41A0-4920-B5C8-8AA53282B9B8}"/>
-              </a:ext>
-            </a:extLst>
-          </p:cNvPr>
-          <p:cNvSpPr txBox="1"/>
-          <p:nvPr/>
-        </p:nvSpPr>
-        <p:spPr>
-          <a:xfrm>
-            <a:off x="609600" y="1611755"/>
-            <a:ext cx="5689600" cy="5909310"/>
-          </a:xfrm>
-          <a:prstGeom prst="rect">
-            <a:avLst/>
-          </a:prstGeom>
-          <a:noFill/>
-        </p:spPr>
-        <p:txBody>
-          <a:bodyPr wrap="square" rtlCol="0">
-            <a:spAutoFit/>
-          </a:bodyPr>
-          <a:lstStyle/>
-          <a:p>
-            <a:pPr marL="285750" indent="-285750">
-              <a:buFont typeface="Arial" panose="020B0604020202020204" pitchFamily="34" charset="0"/>
-              <a:buChar char="•"/>
-            </a:pPr>
-            <a:r>
-              <a:rPr lang="en-GB" b="1" dirty="0">
-                <a:solidFill>
-                  <a:schemeClr val="bg1"/>
-                </a:solidFill>
-              </a:rPr>
-              <a:t>Open up a </a:t>
-            </a:r>
-            <a:r>
-              <a:rPr lang="en-GB" b="1" dirty="0" err="1">
-                <a:solidFill>
-                  <a:schemeClr val="bg1"/>
-                </a:solidFill>
-              </a:rPr>
-              <a:t>codespace</a:t>
-            </a:r>
-            <a:r>
-              <a:rPr lang="en-GB" b="1" dirty="0">
-                <a:solidFill>
-                  <a:schemeClr val="bg1"/>
-                </a:solidFill>
-              </a:rPr>
-              <a:t> in your feature branch and use </a:t>
-            </a:r>
-            <a:r>
-              <a:rPr lang="en-GB" b="1" dirty="0" err="1">
-                <a:solidFill>
-                  <a:schemeClr val="bg1"/>
-                </a:solidFill>
-              </a:rPr>
-              <a:t>CoPilot</a:t>
-            </a:r>
-            <a:r>
-              <a:rPr lang="en-GB" b="1" dirty="0">
-                <a:solidFill>
-                  <a:schemeClr val="bg1"/>
-                </a:solidFill>
-              </a:rPr>
-              <a:t> as an agent to help troubleshoot a badly written SQL script. </a:t>
-            </a:r>
-          </a:p>
-          <a:p>
-            <a:pPr marL="285750" indent="-285750">
-              <a:buFont typeface="Arial" panose="020B0604020202020204" pitchFamily="34" charset="0"/>
-              <a:buChar char="•"/>
-            </a:pPr>
-            <a:endParaRPr lang="en-GB" b="1" dirty="0">
-              <a:solidFill>
-                <a:schemeClr val="bg1"/>
-              </a:solidFill>
-            </a:endParaRPr>
-          </a:p>
-          <a:p>
-            <a:pPr marL="800100" lvl="1" indent="-342900">
-              <a:buFont typeface="+mj-lt"/>
-              <a:buAutoNum type="arabicPeriod"/>
-            </a:pPr>
-            <a:r>
-              <a:rPr lang="en-GB" dirty="0">
-                <a:solidFill>
-                  <a:schemeClr val="bg1"/>
-                </a:solidFill>
-              </a:rPr>
-              <a:t>Create a new </a:t>
-            </a:r>
-            <a:r>
-              <a:rPr lang="en-GB" dirty="0" err="1">
-                <a:solidFill>
-                  <a:schemeClr val="bg1"/>
-                </a:solidFill>
-              </a:rPr>
-              <a:t>codespace</a:t>
-            </a:r>
-            <a:r>
-              <a:rPr lang="en-GB" dirty="0">
-                <a:solidFill>
-                  <a:schemeClr val="bg1"/>
-                </a:solidFill>
-              </a:rPr>
-              <a:t> in your feature branch in GitHub. Your </a:t>
-            </a:r>
-            <a:r>
-              <a:rPr lang="en-GB" dirty="0" err="1">
-                <a:solidFill>
-                  <a:schemeClr val="bg1"/>
-                </a:solidFill>
-              </a:rPr>
-              <a:t>codespace</a:t>
-            </a:r>
-            <a:r>
-              <a:rPr lang="en-GB" dirty="0">
-                <a:solidFill>
-                  <a:schemeClr val="bg1"/>
-                </a:solidFill>
-              </a:rPr>
-              <a:t> URL is randomly generated so will not be the same as your neighbour!</a:t>
-            </a:r>
-          </a:p>
-          <a:p>
-            <a:pPr marL="800100" lvl="1" indent="-342900">
-              <a:buFont typeface="+mj-lt"/>
-              <a:buAutoNum type="arabicPeriod"/>
-            </a:pPr>
-            <a:r>
-              <a:rPr lang="en-GB" dirty="0">
-                <a:solidFill>
-                  <a:schemeClr val="bg1"/>
-                </a:solidFill>
-              </a:rPr>
-              <a:t>In your participant folder, there is a .</a:t>
-            </a:r>
-            <a:r>
-              <a:rPr lang="en-GB" dirty="0" err="1">
-                <a:solidFill>
-                  <a:schemeClr val="bg1"/>
-                </a:solidFill>
-              </a:rPr>
-              <a:t>sql</a:t>
-            </a:r>
-            <a:r>
-              <a:rPr lang="en-GB" dirty="0">
-                <a:solidFill>
-                  <a:schemeClr val="bg1"/>
-                </a:solidFill>
-              </a:rPr>
-              <a:t> file. Use </a:t>
-            </a:r>
-            <a:r>
-              <a:rPr lang="en-GB" dirty="0" err="1">
-                <a:solidFill>
-                  <a:schemeClr val="bg1"/>
-                </a:solidFill>
-              </a:rPr>
-              <a:t>CoPilot</a:t>
-            </a:r>
-            <a:r>
-              <a:rPr lang="en-GB" dirty="0">
-                <a:solidFill>
-                  <a:schemeClr val="bg1"/>
-                </a:solidFill>
-              </a:rPr>
-              <a:t> in Ask mode to review the file.</a:t>
-            </a:r>
-          </a:p>
-          <a:p>
-            <a:pPr marL="800100" lvl="1" indent="-342900">
-              <a:buFont typeface="+mj-lt"/>
-              <a:buAutoNum type="arabicPeriod"/>
-            </a:pPr>
-            <a:r>
-              <a:rPr lang="en-GB" dirty="0">
-                <a:solidFill>
-                  <a:schemeClr val="bg1"/>
-                </a:solidFill>
-              </a:rPr>
-              <a:t>Revert </a:t>
-            </a:r>
-            <a:r>
-              <a:rPr lang="en-GB" dirty="0" err="1">
-                <a:solidFill>
-                  <a:schemeClr val="bg1"/>
-                </a:solidFill>
-              </a:rPr>
-              <a:t>CoPilot</a:t>
-            </a:r>
-            <a:r>
-              <a:rPr lang="en-GB" dirty="0">
-                <a:solidFill>
-                  <a:schemeClr val="bg1"/>
-                </a:solidFill>
-              </a:rPr>
-              <a:t> into Agent mode and prompt it to fix the errors in your file. </a:t>
-            </a:r>
-          </a:p>
-          <a:p>
-            <a:pPr marL="800100" lvl="1" indent="-342900">
-              <a:buFont typeface="+mj-lt"/>
-              <a:buAutoNum type="arabicPeriod"/>
-            </a:pPr>
-            <a:r>
-              <a:rPr lang="en-GB" dirty="0">
-                <a:solidFill>
-                  <a:schemeClr val="bg1"/>
-                </a:solidFill>
-              </a:rPr>
-              <a:t>Ask </a:t>
-            </a:r>
-            <a:r>
-              <a:rPr lang="en-GB" dirty="0" err="1">
-                <a:solidFill>
-                  <a:schemeClr val="bg1"/>
-                </a:solidFill>
-              </a:rPr>
-              <a:t>CoPilot</a:t>
-            </a:r>
-            <a:r>
-              <a:rPr lang="en-GB" dirty="0">
-                <a:solidFill>
-                  <a:schemeClr val="bg1"/>
-                </a:solidFill>
-              </a:rPr>
-              <a:t> to generate a document to explain the SQL code. </a:t>
-            </a:r>
-          </a:p>
-          <a:p>
-            <a:pPr marL="800100" lvl="1" indent="-342900">
-              <a:buFont typeface="+mj-lt"/>
-              <a:buAutoNum type="arabicPeriod"/>
-            </a:pPr>
-            <a:r>
-              <a:rPr lang="en-GB" dirty="0">
-                <a:solidFill>
-                  <a:schemeClr val="bg1"/>
-                </a:solidFill>
-              </a:rPr>
-              <a:t>Commit and push your changes out of the </a:t>
-            </a:r>
-            <a:r>
-              <a:rPr lang="en-GB" dirty="0" err="1">
-                <a:solidFill>
-                  <a:schemeClr val="bg1"/>
-                </a:solidFill>
-              </a:rPr>
-              <a:t>codespace</a:t>
-            </a:r>
-            <a:r>
-              <a:rPr lang="en-GB" dirty="0">
-                <a:solidFill>
-                  <a:schemeClr val="bg1"/>
-                </a:solidFill>
-              </a:rPr>
-              <a:t> into GitHub. </a:t>
-            </a:r>
-          </a:p>
-          <a:p>
-            <a:pPr marL="800100" lvl="1" indent="-342900">
-              <a:buFont typeface="+mj-lt"/>
-              <a:buAutoNum type="arabicPeriod"/>
-            </a:pPr>
-            <a:endParaRPr lang="en-GB" dirty="0">
-              <a:solidFill>
-                <a:schemeClr val="bg1"/>
-              </a:solidFill>
-            </a:endParaRPr>
-          </a:p>
-          <a:p>
-            <a:pPr marL="800100" lvl="1" indent="-342900">
-              <a:buFont typeface="+mj-lt"/>
-              <a:buAutoNum type="arabicPeriod"/>
-            </a:pPr>
-            <a:endParaRPr lang="en-GB" b="1" dirty="0">
-              <a:solidFill>
-                <a:schemeClr val="bg1"/>
-              </a:solidFill>
-            </a:endParaRPr>
-          </a:p>
-          <a:p>
-            <a:pPr marL="800100" lvl="1" indent="-342900">
-              <a:buFont typeface="+mj-lt"/>
-              <a:buAutoNum type="arabicPeriod"/>
-            </a:pPr>
-            <a:endParaRPr lang="en-GB" dirty="0">
-              <a:solidFill>
-                <a:schemeClr val="bg1"/>
-              </a:solidFill>
-              <a:latin typeface="Mona Sans VF"/>
-            </a:endParaRPr>
-          </a:p>
-          <a:p>
-            <a:pPr marL="800100" lvl="1" indent="-342900">
-              <a:buFont typeface="+mj-lt"/>
-              <a:buAutoNum type="arabicPeriod"/>
-            </a:pPr>
-            <a:endParaRPr lang="en-GB" dirty="0">
-              <a:solidFill>
-                <a:schemeClr val="bg1"/>
-              </a:solidFill>
-              <a:latin typeface="Mona Sans VF"/>
-            </a:endParaRPr>
-          </a:p>
-          <a:p>
-            <a:pPr lvl="1"/>
-            <a:endParaRPr lang="en-GB" dirty="0">
-              <a:solidFill>
-                <a:schemeClr val="bg1"/>
-              </a:solidFill>
-              <a:latin typeface="Mona Sans VF"/>
-            </a:endParaRPr>
+              <a:t>Codespace Walkthrough</a:t>
+            </a:r>
           </a:p>
         </p:txBody>
       </p:sp>
     </p:spTree>
     <p:extLst>
       <p:ext uri="{BB962C8B-B14F-4D97-AF65-F5344CB8AC3E}">
-        <p14:creationId xmlns:p14="http://schemas.microsoft.com/office/powerpoint/2010/main" val="234507054"/>
+        <p14:creationId xmlns:p14="http://schemas.microsoft.com/office/powerpoint/2010/main" val="1236093073"/>
       </p:ext>
     </p:extLst>
   </p:cSld>
@@ -20853,10 +20317,10 @@
       </p:grpSpPr>
       <p:sp>
         <p:nvSpPr>
-          <p:cNvPr id="2" name="Title 1">
-            <a:extLst>
-              <a:ext uri="{FF2B5EF4-FFF2-40B4-BE49-F238E27FC236}">
-                <a16:creationId xmlns:a16="http://schemas.microsoft.com/office/drawing/2014/main" id="{174918DD-3FB4-ECF1-7474-46B34CAE7FD5}"/>
+          <p:cNvPr id="5" name="Slide Number Placeholder 4">
+            <a:extLst>
+              <a:ext uri="{FF2B5EF4-FFF2-40B4-BE49-F238E27FC236}">
+                <a16:creationId xmlns:a16="http://schemas.microsoft.com/office/drawing/2014/main" id="{A6521F9B-D9FC-06E8-07A8-52FCF507297F}"/>
               </a:ext>
             </a:extLst>
           </p:cNvPr>
@@ -20864,30 +20328,292 @@
             <a:spLocks noGrp="1"/>
           </p:cNvSpPr>
           <p:nvPr>
-            <p:ph type="ctrTitle"/>
+            <p:ph type="sldNum" sz="quarter" idx="12"/>
           </p:nvPr>
         </p:nvSpPr>
-        <p:spPr>
-          <a:xfrm>
-            <a:off x="758703" y="2427434"/>
-            <a:ext cx="10007063" cy="830997"/>
-          </a:xfrm>
-        </p:spPr>
+        <p:spPr/>
         <p:txBody>
           <a:bodyPr/>
           <a:lstStyle/>
           <a:p>
-            <a:r>
+            <a:fld id="{CC057153-B650-4DEB-B370-79DDCFDCE934}" type="slidenum">
+              <a:rPr lang="en-US" dirty="0"/>
+              <a:pPr/>
+              <a:t>33</a:t>
+            </a:fld>
+            <a:endParaRPr lang="en-GB" dirty="0"/>
+          </a:p>
+        </p:txBody>
+      </p:sp>
+      <p:sp>
+        <p:nvSpPr>
+          <p:cNvPr id="2" name="Title 1">
+            <a:extLst>
+              <a:ext uri="{FF2B5EF4-FFF2-40B4-BE49-F238E27FC236}">
+                <a16:creationId xmlns:a16="http://schemas.microsoft.com/office/drawing/2014/main" id="{10F11F58-1B02-2B5E-16AB-F41892BB3093}"/>
+              </a:ext>
+            </a:extLst>
+          </p:cNvPr>
+          <p:cNvSpPr>
+            <a:spLocks noGrp="1"/>
+          </p:cNvSpPr>
+          <p:nvPr>
+            <p:ph type="title"/>
+          </p:nvPr>
+        </p:nvSpPr>
+        <p:spPr>
+          <a:xfrm>
+            <a:off x="685800" y="516588"/>
+            <a:ext cx="3436838" cy="498598"/>
+          </a:xfrm>
+        </p:spPr>
+        <p:txBody>
+          <a:bodyPr>
+            <a:normAutofit/>
+          </a:bodyPr>
+          <a:lstStyle/>
+          <a:p>
+            <a:r>
+              <a:rPr lang="en-GB" sz="3200" b="1" u="sng" dirty="0"/>
+              <a:t>Exercise Checkpoint 4 </a:t>
+            </a:r>
+          </a:p>
+        </p:txBody>
+      </p:sp>
+      <p:sp>
+        <p:nvSpPr>
+          <p:cNvPr id="3" name="Subtitle 2">
+            <a:extLst>
+              <a:ext uri="{FF2B5EF4-FFF2-40B4-BE49-F238E27FC236}">
+                <a16:creationId xmlns:a16="http://schemas.microsoft.com/office/drawing/2014/main" id="{A19A6EDB-FD47-0120-E2F7-AE5FAB5706B3}"/>
+              </a:ext>
+            </a:extLst>
+          </p:cNvPr>
+          <p:cNvSpPr>
+            <a:spLocks noGrp="1"/>
+          </p:cNvSpPr>
+          <p:nvPr>
+            <p:ph type="body" sz="quarter" idx="14"/>
+          </p:nvPr>
+        </p:nvSpPr>
+        <p:spPr/>
+        <p:txBody>
+          <a:bodyPr vert="horz" lIns="91440" tIns="45720" rIns="91440" bIns="45720" rtlCol="0" anchor="t">
+            <a:normAutofit fontScale="32500" lnSpcReduction="20000"/>
+          </a:bodyPr>
+          <a:lstStyle/>
+          <a:p>
+            <a:pPr lvl="1"/>
+            <a:br>
               <a:rPr lang="en-GB" dirty="0"/>
-              <a:t>Other GitHub products</a:t>
-            </a:r>
+            </a:br>
+            <a:endParaRPr lang="en-GB" dirty="0"/>
+          </a:p>
+          <a:p>
+            <a:pPr marL="285750" indent="-285750">
+              <a:buChar char="•"/>
+            </a:pPr>
+            <a:endParaRPr lang="en-GB" dirty="0"/>
+          </a:p>
+          <a:p>
+            <a:pPr marL="514350" lvl="1" indent="-285750">
+              <a:buFont typeface="Courier New" panose="020B0604020202020204" pitchFamily="34" charset="0"/>
+              <a:buChar char="o"/>
+            </a:pPr>
+            <a:endParaRPr lang="en-GB" dirty="0"/>
+          </a:p>
+          <a:p>
+            <a:pPr marL="285750" indent="-285750">
+              <a:buFont typeface="Arial" panose="020B0604020202020204" pitchFamily="34" charset="0"/>
+              <a:buChar char="•"/>
+            </a:pPr>
+            <a:endParaRPr lang="en-GB" dirty="0"/>
+          </a:p>
+        </p:txBody>
+      </p:sp>
+      <p:sp>
+        <p:nvSpPr>
+          <p:cNvPr id="8" name="TextBox 7">
+            <a:extLst>
+              <a:ext uri="{FF2B5EF4-FFF2-40B4-BE49-F238E27FC236}">
+                <a16:creationId xmlns:a16="http://schemas.microsoft.com/office/drawing/2014/main" id="{6D1779D3-41A0-4920-B5C8-8AA53282B9B8}"/>
+              </a:ext>
+            </a:extLst>
+          </p:cNvPr>
+          <p:cNvSpPr txBox="1"/>
+          <p:nvPr/>
+        </p:nvSpPr>
+        <p:spPr>
+          <a:xfrm>
+            <a:off x="609600" y="1611755"/>
+            <a:ext cx="5689600" cy="5909310"/>
+          </a:xfrm>
+          <a:prstGeom prst="rect">
+            <a:avLst/>
+          </a:prstGeom>
+          <a:noFill/>
+        </p:spPr>
+        <p:txBody>
+          <a:bodyPr wrap="square" rtlCol="0">
+            <a:spAutoFit/>
+          </a:bodyPr>
+          <a:lstStyle/>
+          <a:p>
+            <a:pPr marL="285750" indent="-285750">
+              <a:buFont typeface="Arial" panose="020B0604020202020204" pitchFamily="34" charset="0"/>
+              <a:buChar char="•"/>
+            </a:pPr>
+            <a:r>
+              <a:rPr lang="en-GB" b="1" dirty="0">
+                <a:solidFill>
+                  <a:schemeClr val="bg1"/>
+                </a:solidFill>
+              </a:rPr>
+              <a:t>Open up a codespace in your feature branch and use CoPilot as an agent to help troubleshoot a badly written SQL script. </a:t>
+            </a:r>
+          </a:p>
+          <a:p>
+            <a:pPr marL="285750" indent="-285750">
+              <a:buFont typeface="Arial" panose="020B0604020202020204" pitchFamily="34" charset="0"/>
+              <a:buChar char="•"/>
+            </a:pPr>
+            <a:endParaRPr lang="en-GB" b="1" dirty="0">
+              <a:solidFill>
+                <a:schemeClr val="bg1"/>
+              </a:solidFill>
+            </a:endParaRPr>
+          </a:p>
+          <a:p>
+            <a:pPr marL="800100" lvl="1" indent="-342900">
+              <a:buFont typeface="+mj-lt"/>
+              <a:buAutoNum type="arabicPeriod"/>
+            </a:pPr>
+            <a:r>
+              <a:rPr lang="en-GB" dirty="0">
+                <a:solidFill>
+                  <a:schemeClr val="bg1"/>
+                </a:solidFill>
+              </a:rPr>
+              <a:t>Create a new codespace in your feature branch in GitHub. Your codespace URL is randomly generated so will not be the same as your neighbour!</a:t>
+            </a:r>
+          </a:p>
+          <a:p>
+            <a:pPr marL="800100" lvl="1" indent="-342900">
+              <a:buFont typeface="+mj-lt"/>
+              <a:buAutoNum type="arabicPeriod"/>
+            </a:pPr>
+            <a:r>
+              <a:rPr lang="en-GB" dirty="0">
+                <a:solidFill>
+                  <a:schemeClr val="bg1"/>
+                </a:solidFill>
+              </a:rPr>
+              <a:t>In your participant folder, there is a .sql file. Use CoPilot in Ask mode to review the file.</a:t>
+            </a:r>
+          </a:p>
+          <a:p>
+            <a:pPr marL="800100" lvl="1" indent="-342900">
+              <a:buFont typeface="+mj-lt"/>
+              <a:buAutoNum type="arabicPeriod"/>
+            </a:pPr>
+            <a:r>
+              <a:rPr lang="en-GB" dirty="0">
+                <a:solidFill>
+                  <a:schemeClr val="bg1"/>
+                </a:solidFill>
+              </a:rPr>
+              <a:t>Revert CoPilot into Agent mode and prompt it to fix the errors in your file. </a:t>
+            </a:r>
+          </a:p>
+          <a:p>
+            <a:pPr marL="800100" lvl="1" indent="-342900">
+              <a:buFont typeface="+mj-lt"/>
+              <a:buAutoNum type="arabicPeriod"/>
+            </a:pPr>
+            <a:r>
+              <a:rPr lang="en-GB" dirty="0">
+                <a:solidFill>
+                  <a:schemeClr val="bg1"/>
+                </a:solidFill>
+              </a:rPr>
+              <a:t>Ask CoPilot to generate a document to explain the SQL code. </a:t>
+            </a:r>
+          </a:p>
+          <a:p>
+            <a:pPr marL="800100" lvl="1" indent="-342900">
+              <a:buFont typeface="+mj-lt"/>
+              <a:buAutoNum type="arabicPeriod"/>
+            </a:pPr>
+            <a:r>
+              <a:rPr lang="en-GB" dirty="0">
+                <a:solidFill>
+                  <a:schemeClr val="bg1"/>
+                </a:solidFill>
+              </a:rPr>
+              <a:t>Commit and push your changes out of the codespace into GitHub. </a:t>
+            </a:r>
+          </a:p>
+          <a:p>
+            <a:pPr marL="800100" lvl="1" indent="-342900">
+              <a:buFont typeface="+mj-lt"/>
+              <a:buAutoNum type="arabicPeriod"/>
+            </a:pPr>
+            <a:endParaRPr lang="en-GB" dirty="0">
+              <a:solidFill>
+                <a:schemeClr val="bg1"/>
+              </a:solidFill>
+            </a:endParaRPr>
+          </a:p>
+          <a:p>
+            <a:pPr marL="800100" lvl="1" indent="-342900">
+              <a:buFont typeface="+mj-lt"/>
+              <a:buAutoNum type="arabicPeriod"/>
+            </a:pPr>
+            <a:endParaRPr lang="en-GB" b="1" dirty="0">
+              <a:solidFill>
+                <a:schemeClr val="bg1"/>
+              </a:solidFill>
+            </a:endParaRPr>
+          </a:p>
+          <a:p>
+            <a:pPr marL="800100" lvl="1" indent="-342900">
+              <a:buFont typeface="+mj-lt"/>
+              <a:buAutoNum type="arabicPeriod"/>
+            </a:pPr>
+            <a:endParaRPr lang="en-GB" dirty="0">
+              <a:solidFill>
+                <a:schemeClr val="bg1"/>
+              </a:solidFill>
+              <a:latin typeface="Mona Sans VF"/>
+            </a:endParaRPr>
+          </a:p>
+          <a:p>
+            <a:pPr marL="800100" lvl="1" indent="-342900">
+              <a:buFont typeface="+mj-lt"/>
+              <a:buAutoNum type="arabicPeriod"/>
+            </a:pPr>
+            <a:endParaRPr lang="en-GB" dirty="0">
+              <a:solidFill>
+                <a:schemeClr val="bg1"/>
+              </a:solidFill>
+              <a:latin typeface="Mona Sans VF"/>
+            </a:endParaRPr>
+          </a:p>
+          <a:p>
+            <a:pPr lvl="1"/>
+            <a:endParaRPr lang="en-GB" dirty="0">
+              <a:solidFill>
+                <a:schemeClr val="bg1"/>
+              </a:solidFill>
+              <a:latin typeface="Mona Sans VF"/>
+            </a:endParaRPr>
           </a:p>
         </p:txBody>
       </p:sp>
     </p:spTree>
     <p:extLst>
       <p:ext uri="{BB962C8B-B14F-4D97-AF65-F5344CB8AC3E}">
-        <p14:creationId xmlns:p14="http://schemas.microsoft.com/office/powerpoint/2010/main" val="1327175260"/>
+        <p14:creationId xmlns:p14="http://schemas.microsoft.com/office/powerpoint/2010/main" val="234507054"/>
       </p:ext>
     </p:extLst>
   </p:cSld>
@@ -20919,6 +20645,69 @@
           <p:cNvPr id="2" name="Title 1">
             <a:extLst>
               <a:ext uri="{FF2B5EF4-FFF2-40B4-BE49-F238E27FC236}">
+                <a16:creationId xmlns:a16="http://schemas.microsoft.com/office/drawing/2014/main" id="{174918DD-3FB4-ECF1-7474-46B34CAE7FD5}"/>
+              </a:ext>
+            </a:extLst>
+          </p:cNvPr>
+          <p:cNvSpPr>
+            <a:spLocks noGrp="1"/>
+          </p:cNvSpPr>
+          <p:nvPr>
+            <p:ph type="ctrTitle"/>
+          </p:nvPr>
+        </p:nvSpPr>
+        <p:spPr>
+          <a:xfrm>
+            <a:off x="758703" y="2427434"/>
+            <a:ext cx="10007063" cy="830997"/>
+          </a:xfrm>
+        </p:spPr>
+        <p:txBody>
+          <a:bodyPr/>
+          <a:lstStyle/>
+          <a:p>
+            <a:r>
+              <a:rPr lang="en-GB" dirty="0"/>
+              <a:t>Other GitHub products</a:t>
+            </a:r>
+          </a:p>
+        </p:txBody>
+      </p:sp>
+    </p:spTree>
+    <p:extLst>
+      <p:ext uri="{BB962C8B-B14F-4D97-AF65-F5344CB8AC3E}">
+        <p14:creationId xmlns:p14="http://schemas.microsoft.com/office/powerpoint/2010/main" val="1327175260"/>
+      </p:ext>
+    </p:extLst>
+  </p:cSld>
+  <p:clrMapOvr>
+    <a:masterClrMapping/>
+  </p:clrMapOvr>
+</p:sld>
+</file>
+
+<file path=ppt/slides/slide35.xml><?xml version="1.0" encoding="utf-8"?>
+<p:sld xmlns:a="http://schemas.openxmlformats.org/drawingml/2006/main" xmlns:r="http://schemas.openxmlformats.org/officeDocument/2006/relationships" xmlns:p="http://schemas.openxmlformats.org/presentationml/2006/main">
+  <p:cSld>
+    <p:spTree>
+      <p:nvGrpSpPr>
+        <p:cNvPr id="1" name=""/>
+        <p:cNvGrpSpPr/>
+        <p:nvPr/>
+      </p:nvGrpSpPr>
+      <p:grpSpPr>
+        <a:xfrm>
+          <a:off x="0" y="0"/>
+          <a:ext cx="0" cy="0"/>
+          <a:chOff x="0" y="0"/>
+          <a:chExt cx="0" cy="0"/>
+        </a:xfrm>
+      </p:grpSpPr>
+      <p:sp>
+        <p:nvSpPr>
+          <p:cNvPr id="2" name="Title 1">
+            <a:extLst>
+              <a:ext uri="{FF2B5EF4-FFF2-40B4-BE49-F238E27FC236}">
                 <a16:creationId xmlns:a16="http://schemas.microsoft.com/office/drawing/2014/main" id="{10F11F58-1B02-2B5E-16AB-F41892BB3093}"/>
               </a:ext>
             </a:extLst>
@@ -20973,9 +20762,9 @@
             <a:fld id="{CC057153-B650-4DEB-B370-79DDCFDCE934}" type="slidenum">
               <a:rPr lang="en-US" dirty="0"/>
               <a:pPr/>
-              <a:t>34</a:t>
+              <a:t>35</a:t>
             </a:fld>
-            <a:endParaRPr lang="en-GB"/>
+            <a:endParaRPr lang="en-GB" dirty="0"/>
           </a:p>
         </p:txBody>
       </p:sp>
@@ -20994,7 +20783,7 @@
         <p:spPr>
           <a:xfrm>
             <a:off x="444711" y="1314134"/>
-            <a:ext cx="9503622" cy="2031325"/>
+            <a:ext cx="9503622" cy="2862322"/>
           </a:xfrm>
           <a:prstGeom prst="rect">
             <a:avLst/>
@@ -21013,15 +20802,7 @@
             </a:pPr>
             <a:r>
               <a:rPr lang="en-GB" dirty="0"/>
-              <a:t>You should have access now to the full </a:t>
-            </a:r>
-            <a:r>
-              <a:rPr lang="en-GB" dirty="0" err="1"/>
-              <a:t>BIU_GithubTraining</a:t>
-            </a:r>
-            <a:r>
-              <a:rPr lang="en-GB" dirty="0"/>
-              <a:t> repo. </a:t>
+              <a:t>You should have access now to the full BIU_GithubTraining repo. </a:t>
             </a:r>
           </a:p>
           <a:p>
@@ -21069,6 +20850,36 @@
                 <a:hlinkClick r:id="rId3"/>
               </a:rPr>
               <a:t>NHS Wales Solutions Exchange - Browse Solutions</a:t>
+            </a:r>
+            <a:endParaRPr lang="fr-FR" dirty="0"/>
+          </a:p>
+          <a:p>
+            <a:pPr marL="285750" indent="-285750">
+              <a:buFont typeface="Arial" panose="020B0604020202020204" pitchFamily="34" charset="0"/>
+              <a:buChar char="•"/>
+            </a:pPr>
+            <a:endParaRPr lang="fr-FR" dirty="0"/>
+          </a:p>
+          <a:p>
+            <a:pPr marL="285750" indent="-285750">
+              <a:buFont typeface="Arial" panose="020B0604020202020204" pitchFamily="34" charset="0"/>
+              <a:buChar char="•"/>
+            </a:pPr>
+            <a:r>
+              <a:rPr lang="fr-FR" dirty="0"/>
+              <a:t>Free public datasets to continue exploration: </a:t>
+            </a:r>
+            <a:r>
+              <a:rPr lang="en-GB" dirty="0" err="1">
+                <a:hlinkClick r:id="rId4"/>
+              </a:rPr>
+              <a:t>awesomedata</a:t>
+            </a:r>
+            <a:r>
+              <a:rPr lang="en-GB" dirty="0">
+                <a:hlinkClick r:id="rId4"/>
+              </a:rPr>
+              <a:t>/awesome-public-datasets: A topic-centric list of HQ open datasets.</a:t>
             </a:r>
             <a:endParaRPr lang="fr-FR" dirty="0"/>
           </a:p>
@@ -21107,7 +20918,7 @@
           <p:nvPr/>
         </p:nvPicPr>
         <p:blipFill>
-          <a:blip r:embed="rId4">
+          <a:blip r:embed="rId5">
             <a:extLst>
               <a:ext uri="{28A0092B-C50C-407E-A947-70E740481C1C}">
                 <a14:useLocalDpi xmlns:a14="http://schemas.microsoft.com/office/drawing/2010/main" val="0"/>
@@ -21121,8 +20932,8 @@
         </p:blipFill>
         <p:spPr bwMode="auto">
           <a:xfrm>
-            <a:off x="4433521" y="3596511"/>
-            <a:ext cx="2470914" cy="2470914"/>
+            <a:off x="4526655" y="4226635"/>
+            <a:ext cx="2204345" cy="2204345"/>
           </a:xfrm>
           <a:prstGeom prst="rect">
             <a:avLst/>
@@ -21291,7 +21102,7 @@
 </p:sld>
 </file>
 
-<file path=ppt/slides/slide35.xml><?xml version="1.0" encoding="utf-8"?>
+<file path=ppt/slides/slide36.xml><?xml version="1.0" encoding="utf-8"?>
 <p:sld xmlns:a="http://schemas.openxmlformats.org/drawingml/2006/main" xmlns:r="http://schemas.openxmlformats.org/officeDocument/2006/relationships" xmlns:p="http://schemas.openxmlformats.org/presentationml/2006/main">
   <p:cSld>
     <p:spTree>
@@ -21495,7 +21306,7 @@
               <a:pPr/>
               <a:t>4</a:t>
             </a:fld>
-            <a:endParaRPr lang="en-GB"/>
+            <a:endParaRPr lang="en-GB" dirty="0"/>
           </a:p>
         </p:txBody>
       </p:sp>
@@ -21623,15 +21434,7 @@
           <a:p>
             <a:r>
               <a:rPr lang="en-GB" dirty="0"/>
-              <a:t>Git keeps track of changes to a codebase or project. </a:t>
-            </a:r>
-            <a:r>
-              <a:rPr lang="en-GB" dirty="0" err="1"/>
-              <a:t>Github</a:t>
-            </a:r>
-            <a:r>
-              <a:rPr lang="en-GB" dirty="0"/>
-              <a:t> helps teams share and manage these changes. </a:t>
+              <a:t>Git keeps track of changes to a codebase or project. GitHub helps teams share and manage these changes. </a:t>
             </a:r>
           </a:p>
           <a:p>
@@ -21733,23 +21536,7 @@
                   <a:schemeClr val="tx1"/>
                 </a:solidFill>
               </a:rPr>
-              <a:t>Git exists without </a:t>
-            </a:r>
-            <a:r>
-              <a:rPr lang="en-GB" sz="1200" dirty="0" err="1">
-                <a:solidFill>
-                  <a:schemeClr val="tx1"/>
-                </a:solidFill>
-              </a:rPr>
-              <a:t>Github</a:t>
-            </a:r>
-            <a:r>
-              <a:rPr lang="en-GB" sz="1200" dirty="0">
-                <a:solidFill>
-                  <a:schemeClr val="tx1"/>
-                </a:solidFill>
-              </a:rPr>
-              <a:t>. </a:t>
+              <a:t>Git exists without GitHub. </a:t>
             </a:r>
           </a:p>
         </p:txBody>
@@ -21806,23 +21593,7 @@
                   <a:schemeClr val="tx1"/>
                 </a:solidFill>
               </a:rPr>
-              <a:t>Developed by Microsoft, </a:t>
-            </a:r>
-            <a:r>
-              <a:rPr lang="en-GB" sz="1200" dirty="0" err="1">
-                <a:solidFill>
-                  <a:schemeClr val="tx1"/>
-                </a:solidFill>
-              </a:rPr>
-              <a:t>Github</a:t>
-            </a:r>
-            <a:r>
-              <a:rPr lang="en-GB" sz="1200" dirty="0">
-                <a:solidFill>
-                  <a:schemeClr val="tx1"/>
-                </a:solidFill>
-              </a:rPr>
-              <a:t> provides an online space to store repositories and foster collaboration amongst teams. </a:t>
+              <a:t>Developed by Microsoft, GitHub provides an online space to store repositories and foster collaboration amongst teams. </a:t>
             </a:r>
           </a:p>
           <a:p>
@@ -21855,20 +21626,12 @@
           <a:p>
             <a:pPr algn="ctr"/>
             <a:r>
-              <a:rPr lang="en-GB" sz="1200" dirty="0" err="1">
-                <a:solidFill>
-                  <a:schemeClr val="tx1"/>
-                </a:solidFill>
-              </a:rPr>
-              <a:t>Github</a:t>
-            </a:r>
-            <a:r>
               <a:rPr lang="en-GB" sz="1200" dirty="0">
                 <a:solidFill>
                   <a:schemeClr val="tx1"/>
                 </a:solidFill>
               </a:rPr>
-              <a:t> </a:t>
+              <a:t>GitHub </a:t>
             </a:r>
             <a:r>
               <a:rPr lang="en-GB" sz="1200" b="1" dirty="0">
@@ -22158,12 +21921,8 @@
           <a:lstStyle/>
           <a:p>
             <a:r>
-              <a:rPr lang="en-GB" sz="3200" b="1" u="sng" dirty="0" err="1"/>
-              <a:t>Github</a:t>
-            </a:r>
-            <a:r>
               <a:rPr lang="en-GB" sz="3200" b="1" u="sng" dirty="0"/>
-              <a:t> Enterprise Cloud</a:t>
+              <a:t>GitHub Enterprise Cloud</a:t>
             </a:r>
           </a:p>
         </p:txBody>
@@ -22257,7 +22016,7 @@
               <a:pPr/>
               <a:t>5</a:t>
             </a:fld>
-            <a:endParaRPr lang="en-GB"/>
+            <a:endParaRPr lang="en-GB" dirty="0"/>
           </a:p>
         </p:txBody>
       </p:sp>
@@ -22295,15 +22054,7 @@
             </a:pPr>
             <a:r>
               <a:rPr lang="en-GB" b="1" dirty="0"/>
-              <a:t>ABUHB uses </a:t>
-            </a:r>
-            <a:r>
-              <a:rPr lang="en-GB" b="1" dirty="0" err="1"/>
-              <a:t>Github</a:t>
-            </a:r>
-            <a:r>
-              <a:rPr lang="en-GB" b="1" dirty="0"/>
-              <a:t> Enterprise</a:t>
+              <a:t>ABUHB uses GitHub Enterprise</a:t>
             </a:r>
           </a:p>
           <a:p>
@@ -22313,15 +22064,7 @@
             </a:pPr>
             <a:r>
               <a:rPr lang="en-GB" dirty="0"/>
-              <a:t>Our organisation differs from a personal </a:t>
-            </a:r>
-            <a:r>
-              <a:rPr lang="en-GB" dirty="0" err="1"/>
-              <a:t>Github</a:t>
-            </a:r>
-            <a:r>
-              <a:rPr lang="en-GB" dirty="0"/>
-              <a:t> free account. </a:t>
+              <a:t>Our organisation differs from a personal GitHub free account. </a:t>
             </a:r>
           </a:p>
           <a:p>
@@ -22331,23 +22074,7 @@
             </a:pPr>
             <a:r>
               <a:rPr lang="en-GB" dirty="0"/>
-              <a:t>Access is controlled through the organisation and admins set policies for repositories, </a:t>
-            </a:r>
-            <a:r>
-              <a:rPr lang="en-GB" dirty="0" err="1"/>
-              <a:t>codespaces</a:t>
-            </a:r>
-            <a:r>
-              <a:rPr lang="en-GB" dirty="0"/>
-              <a:t>, </a:t>
-            </a:r>
-            <a:r>
-              <a:rPr lang="en-GB" dirty="0" err="1"/>
-              <a:t>CoPilot</a:t>
-            </a:r>
-            <a:r>
-              <a:rPr lang="en-GB" dirty="0"/>
-              <a:t> usage and other features. </a:t>
+              <a:t>Access is controlled through the organisation and admins set policies for repositories, codespaces, CoPilot usage and other features. </a:t>
             </a:r>
           </a:p>
           <a:p>
@@ -22371,15 +22098,7 @@
             </a:pPr>
             <a:r>
               <a:rPr lang="en-GB" b="1" dirty="0"/>
-              <a:t>What </a:t>
-            </a:r>
-            <a:r>
-              <a:rPr lang="en-GB" b="1" dirty="0" err="1"/>
-              <a:t>Github</a:t>
-            </a:r>
-            <a:r>
-              <a:rPr lang="en-GB" b="1" dirty="0"/>
-              <a:t> Enterprise provides </a:t>
+              <a:t>What GitHub Enterprise provides </a:t>
             </a:r>
           </a:p>
           <a:p>
@@ -22694,15 +22413,7 @@
           <a:p>
             <a:r>
               <a:rPr lang="en-GB" sz="3200" b="1" u="sng" dirty="0"/>
-              <a:t>Why </a:t>
-            </a:r>
-            <a:r>
-              <a:rPr lang="en-GB" sz="3200" b="1" u="sng" dirty="0" err="1"/>
-              <a:t>Github</a:t>
-            </a:r>
-            <a:r>
-              <a:rPr lang="en-GB" sz="3200" b="1" u="sng" dirty="0"/>
-              <a:t> fo</a:t>
+              <a:t>Why GitHub fo</a:t>
             </a:r>
             <a:r>
               <a:rPr lang="en-GB" sz="3200" u="sng" dirty="0"/>
@@ -22794,7 +22505,7 @@
               <a:pPr/>
               <a:t>6</a:t>
             </a:fld>
-            <a:endParaRPr lang="en-GB"/>
+            <a:endParaRPr lang="en-GB" dirty="0"/>
           </a:p>
         </p:txBody>
       </p:sp>
@@ -22916,15 +22627,7 @@
             </a:pPr>
             <a:r>
               <a:rPr lang="en-GB" dirty="0"/>
-              <a:t>All code lives in repositories – not emails, </a:t>
-            </a:r>
-            <a:r>
-              <a:rPr lang="en-GB" dirty="0" err="1"/>
-              <a:t>Sharepoint</a:t>
-            </a:r>
-            <a:r>
-              <a:rPr lang="en-GB" dirty="0"/>
-              <a:t> or personal folders</a:t>
+              <a:t>All code lives in repositories – not emails, SharePoint or personal folders</a:t>
             </a:r>
           </a:p>
           <a:p>
@@ -23481,15 +23184,7 @@
           <a:p>
             <a:r>
               <a:rPr lang="en-GB" sz="3200" b="1" u="sng" dirty="0"/>
-              <a:t>Why </a:t>
-            </a:r>
-            <a:r>
-              <a:rPr lang="en-GB" sz="3200" b="1" u="sng" dirty="0" err="1"/>
-              <a:t>Github</a:t>
-            </a:r>
-            <a:r>
-              <a:rPr lang="en-GB" sz="3200" b="1" u="sng" dirty="0"/>
-              <a:t> fo</a:t>
+              <a:t>Why GitHub fo</a:t>
             </a:r>
             <a:r>
               <a:rPr lang="en-GB" sz="3200" u="sng" dirty="0"/>
@@ -23525,7 +23220,7 @@
               <a:pPr/>
               <a:t>7</a:t>
             </a:fld>
-            <a:endParaRPr lang="en-GB"/>
+            <a:endParaRPr lang="en-GB" dirty="0"/>
           </a:p>
         </p:txBody>
       </p:sp>
@@ -24223,12 +23918,8 @@
           <a:lstStyle/>
           <a:p>
             <a:r>
-              <a:rPr lang="en-GB" sz="3200" b="1" u="sng" dirty="0" err="1"/>
-              <a:t>Github</a:t>
-            </a:r>
-            <a:r>
               <a:rPr lang="en-GB" sz="3200" b="1" u="sng" dirty="0"/>
-              <a:t> Usage Best Practices</a:t>
+              <a:t>GitHub Usage Best Practices</a:t>
             </a:r>
           </a:p>
         </p:txBody>
@@ -24315,7 +24006,7 @@
               <a:pPr/>
               <a:t>8</a:t>
             </a:fld>
-            <a:endParaRPr lang="en-GB"/>
+            <a:endParaRPr lang="en-GB" dirty="0"/>
           </a:p>
         </p:txBody>
       </p:sp>
@@ -25059,7 +24750,7 @@
               <a:pPr/>
               <a:t>9</a:t>
             </a:fld>
-            <a:endParaRPr lang="en-GB"/>
+            <a:endParaRPr lang="en-GB" dirty="0"/>
           </a:p>
         </p:txBody>
       </p:sp>
@@ -25961,6 +25652,75 @@
 </file>
 
 <file path=customXml/item2.xml><?xml version="1.0" encoding="utf-8"?>
+<p:properties xmlns:p="http://schemas.microsoft.com/office/2006/metadata/properties" xmlns:xsi="http://www.w3.org/2001/XMLSchema-instance" xmlns:pc="http://schemas.microsoft.com/office/infopath/2007/PartnerControls">
+  <documentManagement>
+    <lcf76f155ced4ddcb4097134ff3c332f xmlns="1483428e-716d-4b33-b115-78d5a8925782">
+      <Terms xmlns="http://schemas.microsoft.com/office/infopath/2007/PartnerControls"/>
+    </lcf76f155ced4ddcb4097134ff3c332f>
+    <TaxCatchAll xmlns="e55bf511-4ba5-4939-82c7-95fd6f39aefd">
+      <Value>188</Value>
+      <Value>16</Value>
+      <Value>687</Value>
+    </TaxCatchAll>
+    <Owner xmlns="1483428e-716d-4b33-b115-78d5a8925782">
+      <UserInfo>
+        <DisplayName/>
+        <AccountId xsi:nil="true"/>
+        <AccountType/>
+      </UserInfo>
+    </Owner>
+    <o614325ba7f549b1a8b8e19b035d94ff xmlns="1483428e-716d-4b33-b115-78d5a8925782">
+      <Terms xmlns="http://schemas.microsoft.com/office/infopath/2007/PartnerControls">
+        <TermInfo xmlns="http://schemas.microsoft.com/office/infopath/2007/PartnerControls">
+          <TermName xmlns="http://schemas.microsoft.com/office/infopath/2007/PartnerControls">Health Board (Corporate)</TermName>
+          <TermId xmlns="http://schemas.microsoft.com/office/infopath/2007/PartnerControls">0c363e41-cf1f-4305-9014-97a1479fc32c</TermId>
+        </TermInfo>
+      </Terms>
+    </o614325ba7f549b1a8b8e19b035d94ff>
+    <ReviewSchedule_x0028_months_x0029_ xmlns="1483428e-716d-4b33-b115-78d5a8925782">3</ReviewSchedule_x0028_months_x0029_>
+    <Published_x0020_Date xmlns="1483428e-716d-4b33-b115-78d5a8925782">2026-05-21T23:00:00+00:00</Published_x0020_Date>
+    <d74cbe23f3244f26857e51a18e649bb1 xmlns="e55bf511-4ba5-4939-82c7-95fd6f39aefd">
+      <Terms xmlns="http://schemas.microsoft.com/office/infopath/2007/PartnerControls"/>
+    </d74cbe23f3244f26857e51a18e649bb1>
+    <g9bb5d66ff7848828f62e2406995fd6a xmlns="1483428e-716d-4b33-b115-78d5a8925782">
+      <Terms xmlns="http://schemas.microsoft.com/office/infopath/2007/PartnerControls">
+        <TermInfo xmlns="http://schemas.microsoft.com/office/infopath/2007/PartnerControls">
+          <TermName xmlns="http://schemas.microsoft.com/office/infopath/2007/PartnerControls">Head of PMO ＆ Digital Engagement</TermName>
+          <TermId xmlns="http://schemas.microsoft.com/office/infopath/2007/PartnerControls">8d983f83-8eb7-4a8e-9058-8ef2b063c7e8</TermId>
+        </TermInfo>
+      </Terms>
+    </g9bb5d66ff7848828f62e2406995fd6a>
+    <k35bb188367f4e7f84aa638d61a157e7 xmlns="1483428e-716d-4b33-b115-78d5a8925782">
+      <Terms xmlns="http://schemas.microsoft.com/office/infopath/2007/PartnerControls"/>
+    </k35bb188367f4e7f84aa638d61a157e7>
+    <UnderReview xmlns="1483428e-716d-4b33-b115-78d5a8925782">false</UnderReview>
+    <h4c8ae8ce7454af68b724828ae932791 xmlns="1483428e-716d-4b33-b115-78d5a8925782">
+      <Terms xmlns="http://schemas.microsoft.com/office/infopath/2007/PartnerControls">
+        <TermInfo xmlns="http://schemas.microsoft.com/office/infopath/2007/PartnerControls">
+          <TermName xmlns="http://schemas.microsoft.com/office/infopath/2007/PartnerControls">Template</TermName>
+          <TermId xmlns="http://schemas.microsoft.com/office/infopath/2007/PartnerControls">72ecb681-7f24-447b-bff2-3c3e16947b2d</TermId>
+        </TermInfo>
+      </Terms>
+    </h4c8ae8ce7454af68b724828ae932791>
+    <Author0 xmlns="1483428e-716d-4b33-b115-78d5a8925782">
+      <UserInfo>
+        <DisplayName/>
+        <AccountId xsi:nil="true"/>
+        <AccountType/>
+      </UserInfo>
+    </Author0>
+    <SharedWithUsers xmlns="bd0481ee-721b-4901-9dea-7fae852e4c18">
+      <UserInfo>
+        <DisplayName/>
+        <AccountId xsi:nil="true"/>
+        <AccountType/>
+      </UserInfo>
+    </SharedWithUsers>
+  </documentManagement>
+</p:properties>
+</file>
+
+<file path=customXml/item3.xml><?xml version="1.0" encoding="utf-8"?>
 <ct:contentTypeSchema xmlns:ct="http://schemas.microsoft.com/office/2006/metadata/contentType" xmlns:ma="http://schemas.microsoft.com/office/2006/metadata/properties/metaAttributes" ct:_="" ma:_="" ma:contentTypeName="Document" ma:contentTypeID="0x010100D3C07746058E2B4780C48ADCCC13CF7E" ma:contentTypeVersion="65" ma:contentTypeDescription="Create a new document." ma:contentTypeScope="" ma:versionID="4ce23191b1d0f2551f14c1b35203a729">
   <xsd:schema xmlns:xsd="http://www.w3.org/2001/XMLSchema" xmlns:xs="http://www.w3.org/2001/XMLSchema" xmlns:p="http://schemas.microsoft.com/office/2006/metadata/properties" xmlns:ns2="1483428e-716d-4b33-b115-78d5a8925782" xmlns:ns3="bd0481ee-721b-4901-9dea-7fae852e4c18" xmlns:ns4="e55bf511-4ba5-4939-82c7-95fd6f39aefd" targetNamespace="http://schemas.microsoft.com/office/2006/metadata/properties" ma:root="true" ma:fieldsID="fc6c6fe6a11276e430e41fcdcb36170d" ns2:_="" ns3:_="" ns4:_="">
     <xsd:import namespace="1483428e-716d-4b33-b115-78d5a8925782"/>
@@ -26312,75 +26072,6 @@
 </ct:contentTypeSchema>
 </file>
 
-<file path=customXml/item3.xml><?xml version="1.0" encoding="utf-8"?>
-<p:properties xmlns:p="http://schemas.microsoft.com/office/2006/metadata/properties" xmlns:xsi="http://www.w3.org/2001/XMLSchema-instance" xmlns:pc="http://schemas.microsoft.com/office/infopath/2007/PartnerControls">
-  <documentManagement>
-    <lcf76f155ced4ddcb4097134ff3c332f xmlns="1483428e-716d-4b33-b115-78d5a8925782">
-      <Terms xmlns="http://schemas.microsoft.com/office/infopath/2007/PartnerControls"/>
-    </lcf76f155ced4ddcb4097134ff3c332f>
-    <TaxCatchAll xmlns="e55bf511-4ba5-4939-82c7-95fd6f39aefd">
-      <Value>188</Value>
-      <Value>16</Value>
-      <Value>687</Value>
-    </TaxCatchAll>
-    <Owner xmlns="1483428e-716d-4b33-b115-78d5a8925782">
-      <UserInfo>
-        <DisplayName/>
-        <AccountId xsi:nil="true"/>
-        <AccountType/>
-      </UserInfo>
-    </Owner>
-    <o614325ba7f549b1a8b8e19b035d94ff xmlns="1483428e-716d-4b33-b115-78d5a8925782">
-      <Terms xmlns="http://schemas.microsoft.com/office/infopath/2007/PartnerControls">
-        <TermInfo xmlns="http://schemas.microsoft.com/office/infopath/2007/PartnerControls">
-          <TermName xmlns="http://schemas.microsoft.com/office/infopath/2007/PartnerControls">Health Board (Corporate)</TermName>
-          <TermId xmlns="http://schemas.microsoft.com/office/infopath/2007/PartnerControls">0c363e41-cf1f-4305-9014-97a1479fc32c</TermId>
-        </TermInfo>
-      </Terms>
-    </o614325ba7f549b1a8b8e19b035d94ff>
-    <ReviewSchedule_x0028_months_x0029_ xmlns="1483428e-716d-4b33-b115-78d5a8925782">3</ReviewSchedule_x0028_months_x0029_>
-    <Published_x0020_Date xmlns="1483428e-716d-4b33-b115-78d5a8925782">2026-05-21T23:00:00+00:00</Published_x0020_Date>
-    <d74cbe23f3244f26857e51a18e649bb1 xmlns="e55bf511-4ba5-4939-82c7-95fd6f39aefd">
-      <Terms xmlns="http://schemas.microsoft.com/office/infopath/2007/PartnerControls"/>
-    </d74cbe23f3244f26857e51a18e649bb1>
-    <g9bb5d66ff7848828f62e2406995fd6a xmlns="1483428e-716d-4b33-b115-78d5a8925782">
-      <Terms xmlns="http://schemas.microsoft.com/office/infopath/2007/PartnerControls">
-        <TermInfo xmlns="http://schemas.microsoft.com/office/infopath/2007/PartnerControls">
-          <TermName xmlns="http://schemas.microsoft.com/office/infopath/2007/PartnerControls">Head of PMO ＆ Digital Engagement</TermName>
-          <TermId xmlns="http://schemas.microsoft.com/office/infopath/2007/PartnerControls">8d983f83-8eb7-4a8e-9058-8ef2b063c7e8</TermId>
-        </TermInfo>
-      </Terms>
-    </g9bb5d66ff7848828f62e2406995fd6a>
-    <k35bb188367f4e7f84aa638d61a157e7 xmlns="1483428e-716d-4b33-b115-78d5a8925782">
-      <Terms xmlns="http://schemas.microsoft.com/office/infopath/2007/PartnerControls"/>
-    </k35bb188367f4e7f84aa638d61a157e7>
-    <UnderReview xmlns="1483428e-716d-4b33-b115-78d5a8925782">false</UnderReview>
-    <h4c8ae8ce7454af68b724828ae932791 xmlns="1483428e-716d-4b33-b115-78d5a8925782">
-      <Terms xmlns="http://schemas.microsoft.com/office/infopath/2007/PartnerControls">
-        <TermInfo xmlns="http://schemas.microsoft.com/office/infopath/2007/PartnerControls">
-          <TermName xmlns="http://schemas.microsoft.com/office/infopath/2007/PartnerControls">Template</TermName>
-          <TermId xmlns="http://schemas.microsoft.com/office/infopath/2007/PartnerControls">72ecb681-7f24-447b-bff2-3c3e16947b2d</TermId>
-        </TermInfo>
-      </Terms>
-    </h4c8ae8ce7454af68b724828ae932791>
-    <Author0 xmlns="1483428e-716d-4b33-b115-78d5a8925782">
-      <UserInfo>
-        <DisplayName/>
-        <AccountId xsi:nil="true"/>
-        <AccountType/>
-      </UserInfo>
-    </Author0>
-    <SharedWithUsers xmlns="bd0481ee-721b-4901-9dea-7fae852e4c18">
-      <UserInfo>
-        <DisplayName/>
-        <AccountId xsi:nil="true"/>
-        <AccountType/>
-      </UserInfo>
-    </SharedWithUsers>
-  </documentManagement>
-</p:properties>
-</file>
-
 <file path=customXml/itemProps1.xml><?xml version="1.0" encoding="utf-8"?>
 <ds:datastoreItem xmlns:ds="http://schemas.openxmlformats.org/officeDocument/2006/customXml" ds:itemID="{7679169C-6CC4-432B-8D8A-84EDE4F2515B}">
   <ds:schemaRefs>
@@ -26390,6 +26081,24 @@
 </file>
 
 <file path=customXml/itemProps2.xml><?xml version="1.0" encoding="utf-8"?>
+<ds:datastoreItem xmlns:ds="http://schemas.openxmlformats.org/officeDocument/2006/customXml" ds:itemID="{B72BFFEF-C0F7-4036-B4E1-D454B3025A9E}">
+  <ds:schemaRefs>
+    <ds:schemaRef ds:uri="http://schemas.microsoft.com/office/2006/documentManagement/types"/>
+    <ds:schemaRef ds:uri="http://purl.org/dc/elements/1.1/"/>
+    <ds:schemaRef ds:uri="1483428e-716d-4b33-b115-78d5a8925782"/>
+    <ds:schemaRef ds:uri="http://www.w3.org/XML/1998/namespace"/>
+    <ds:schemaRef ds:uri="e55bf511-4ba5-4939-82c7-95fd6f39aefd"/>
+    <ds:schemaRef ds:uri="bd0481ee-721b-4901-9dea-7fae852e4c18"/>
+    <ds:schemaRef ds:uri="http://purl.org/dc/dcmitype/"/>
+    <ds:schemaRef ds:uri="http://schemas.openxmlformats.org/package/2006/metadata/core-properties"/>
+    <ds:schemaRef ds:uri="http://schemas.microsoft.com/office/infopath/2007/PartnerControls"/>
+    <ds:schemaRef ds:uri="http://schemas.microsoft.com/office/2006/metadata/properties"/>
+    <ds:schemaRef ds:uri="http://purl.org/dc/terms/"/>
+  </ds:schemaRefs>
+</ds:datastoreItem>
+</file>
+
+<file path=customXml/itemProps3.xml><?xml version="1.0" encoding="utf-8"?>
 <ds:datastoreItem xmlns:ds="http://schemas.openxmlformats.org/officeDocument/2006/customXml" ds:itemID="{712431A6-2122-481C-A8D7-9F7BB75B717D}">
   <ds:schemaRefs>
     <ds:schemaRef ds:uri="http://schemas.microsoft.com/office/2006/metadata/contentType"/>
@@ -26407,22 +26116,4 @@
     <ds:schemaRef ds:uri="http://schemas.microsoft.com/internal/obd"/>
   </ds:schemaRefs>
 </ds:datastoreItem>
-</file>
-
-<file path=customXml/itemProps3.xml><?xml version="1.0" encoding="utf-8"?>
-<ds:datastoreItem xmlns:ds="http://schemas.openxmlformats.org/officeDocument/2006/customXml" ds:itemID="{B72BFFEF-C0F7-4036-B4E1-D454B3025A9E}">
-  <ds:schemaRefs>
-    <ds:schemaRef ds:uri="http://schemas.microsoft.com/office/2006/documentManagement/types"/>
-    <ds:schemaRef ds:uri="http://purl.org/dc/elements/1.1/"/>
-    <ds:schemaRef ds:uri="1483428e-716d-4b33-b115-78d5a8925782"/>
-    <ds:schemaRef ds:uri="http://www.w3.org/XML/1998/namespace"/>
-    <ds:schemaRef ds:uri="e55bf511-4ba5-4939-82c7-95fd6f39aefd"/>
-    <ds:schemaRef ds:uri="bd0481ee-721b-4901-9dea-7fae852e4c18"/>
-    <ds:schemaRef ds:uri="http://purl.org/dc/dcmitype/"/>
-    <ds:schemaRef ds:uri="http://schemas.openxmlformats.org/package/2006/metadata/core-properties"/>
-    <ds:schemaRef ds:uri="http://schemas.microsoft.com/office/infopath/2007/PartnerControls"/>
-    <ds:schemaRef ds:uri="http://schemas.microsoft.com/office/2006/metadata/properties"/>
-    <ds:schemaRef ds:uri="http://purl.org/dc/terms/"/>
-  </ds:schemaRefs>
-</ds:datastoreItem>
 </file>
--- a/Training/Github Training.pptx
+++ b/Training/Github Training.pptx
@@ -232,7 +232,7 @@
           <a:p>
             <a:fld id="{B32262E1-CA21-AE4E-AE29-A941BAF2DC72}" type="datetimeFigureOut">
               <a:rPr lang="en-US" smtClean="0"/>
-              <a:t>10/26/2026</a:t>
+              <a:t>10/27/2026</a:t>
             </a:fld>
             <a:endParaRPr lang="en-US" dirty="0"/>
           </a:p>
@@ -12241,7 +12241,7 @@
         <p:spPr>
           <a:xfrm>
             <a:off x="520911" y="1475001"/>
-            <a:ext cx="5117889" cy="2031325"/>
+            <a:ext cx="5117889" cy="2308324"/>
           </a:xfrm>
           <a:prstGeom prst="rect">
             <a:avLst/>
@@ -12273,7 +12273,15 @@
             </a:r>
             <a:r>
               <a:rPr lang="en-GB" dirty="0"/>
-              <a:t>– where you edit the files</a:t>
+              <a:t>– where you edit the files (i.e.; your local desktop or your cloud </a:t>
+            </a:r>
+            <a:r>
+              <a:rPr lang="en-GB" dirty="0" err="1"/>
+              <a:t>codespace</a:t>
+            </a:r>
+            <a:r>
+              <a:rPr lang="en-GB" dirty="0"/>
+              <a:t>)</a:t>
             </a:r>
           </a:p>
           <a:p>
@@ -14463,7 +14471,7 @@
           <p:spPr>
             <a:xfrm>
               <a:off x="133001" y="4062203"/>
-              <a:ext cx="1001441" cy="1384995"/>
+              <a:ext cx="1001441" cy="1569660"/>
             </a:xfrm>
             <a:prstGeom prst="rect">
               <a:avLst/>
@@ -14479,7 +14487,7 @@
               <a:pPr algn="ctr"/>
               <a:r>
                 <a:rPr lang="en-GB" sz="1200" b="1" dirty="0"/>
-                <a:t>New version overwrites old version. Ready for new developer to pull! </a:t>
+                <a:t>New changes will merge into the original document ready for the next developer! </a:t>
               </a:r>
             </a:p>
           </p:txBody>
@@ -17277,7 +17285,7 @@
             </a:pPr>
             <a:r>
               <a:rPr lang="en-GB" dirty="0"/>
-              <a:t> Create different level of access control so only authorised people can make changes</a:t>
+              <a:t>Create different level of access control so only authorised people can make changes</a:t>
             </a:r>
           </a:p>
           <a:p>
@@ -25643,15 +25651,6 @@
 </file>
 
 <file path=customXml/item1.xml><?xml version="1.0" encoding="utf-8"?>
-<?mso-contentType ?>
-<FormTemplates xmlns="http://schemas.microsoft.com/sharepoint/v3/contenttype/forms">
-  <Display>DocumentLibraryForm</Display>
-  <Edit>DocumentLibraryForm</Edit>
-  <New>DocumentLibraryForm</New>
-</FormTemplates>
-</file>
-
-<file path=customXml/item2.xml><?xml version="1.0" encoding="utf-8"?>
 <p:properties xmlns:p="http://schemas.microsoft.com/office/2006/metadata/properties" xmlns:xsi="http://www.w3.org/2001/XMLSchema-instance" xmlns:pc="http://schemas.microsoft.com/office/infopath/2007/PartnerControls">
   <documentManagement>
     <lcf76f155ced4ddcb4097134ff3c332f xmlns="1483428e-716d-4b33-b115-78d5a8925782">
@@ -25718,6 +25717,15 @@
     </SharedWithUsers>
   </documentManagement>
 </p:properties>
+</file>
+
+<file path=customXml/item2.xml><?xml version="1.0" encoding="utf-8"?>
+<?mso-contentType ?>
+<FormTemplates xmlns="http://schemas.microsoft.com/sharepoint/v3/contenttype/forms">
+  <Display>DocumentLibraryForm</Display>
+  <Edit>DocumentLibraryForm</Edit>
+  <New>DocumentLibraryForm</New>
+</FormTemplates>
 </file>
 
 <file path=customXml/item3.xml><?xml version="1.0" encoding="utf-8"?>
@@ -26073,14 +26081,6 @@
 </file>
 
 <file path=customXml/itemProps1.xml><?xml version="1.0" encoding="utf-8"?>
-<ds:datastoreItem xmlns:ds="http://schemas.openxmlformats.org/officeDocument/2006/customXml" ds:itemID="{7679169C-6CC4-432B-8D8A-84EDE4F2515B}">
-  <ds:schemaRefs>
-    <ds:schemaRef ds:uri="http://schemas.microsoft.com/sharepoint/v3/contenttype/forms"/>
-  </ds:schemaRefs>
-</ds:datastoreItem>
-</file>
-
-<file path=customXml/itemProps2.xml><?xml version="1.0" encoding="utf-8"?>
 <ds:datastoreItem xmlns:ds="http://schemas.openxmlformats.org/officeDocument/2006/customXml" ds:itemID="{B72BFFEF-C0F7-4036-B4E1-D454B3025A9E}">
   <ds:schemaRefs>
     <ds:schemaRef ds:uri="http://schemas.microsoft.com/office/2006/documentManagement/types"/>
@@ -26094,6 +26094,14 @@
     <ds:schemaRef ds:uri="http://schemas.microsoft.com/office/infopath/2007/PartnerControls"/>
     <ds:schemaRef ds:uri="http://schemas.microsoft.com/office/2006/metadata/properties"/>
     <ds:schemaRef ds:uri="http://purl.org/dc/terms/"/>
+  </ds:schemaRefs>
+</ds:datastoreItem>
+</file>
+
+<file path=customXml/itemProps2.xml><?xml version="1.0" encoding="utf-8"?>
+<ds:datastoreItem xmlns:ds="http://schemas.openxmlformats.org/officeDocument/2006/customXml" ds:itemID="{7679169C-6CC4-432B-8D8A-84EDE4F2515B}">
+  <ds:schemaRefs>
+    <ds:schemaRef ds:uri="http://schemas.microsoft.com/sharepoint/v3/contenttype/forms"/>
   </ds:schemaRefs>
 </ds:datastoreItem>
 </file>
